--- a/Course content/Slides/Topic 4 - Classification.pptx
+++ b/Course content/Slides/Topic 4 - Classification.pptx
@@ -5,7 +5,7 @@
     <p:sldMasterId id="2147483648" r:id="rId1"/>
   </p:sldMasterIdLst>
   <p:notesMasterIdLst>
-    <p:notesMasterId r:id="rId26"/>
+    <p:notesMasterId r:id="rId24"/>
   </p:notesMasterIdLst>
   <p:sldIdLst>
     <p:sldId id="278" r:id="rId2"/>
@@ -24,14 +24,12 @@
     <p:sldId id="290" r:id="rId15"/>
     <p:sldId id="291" r:id="rId16"/>
     <p:sldId id="292" r:id="rId17"/>
-    <p:sldId id="293" r:id="rId18"/>
-    <p:sldId id="294" r:id="rId19"/>
-    <p:sldId id="295" r:id="rId20"/>
-    <p:sldId id="296" r:id="rId21"/>
-    <p:sldId id="297" r:id="rId22"/>
-    <p:sldId id="298" r:id="rId23"/>
-    <p:sldId id="299" r:id="rId24"/>
-    <p:sldId id="300" r:id="rId25"/>
+    <p:sldId id="294" r:id="rId18"/>
+    <p:sldId id="295" r:id="rId19"/>
+    <p:sldId id="296" r:id="rId20"/>
+    <p:sldId id="297" r:id="rId21"/>
+    <p:sldId id="298" r:id="rId22"/>
+    <p:sldId id="299" r:id="rId23"/>
   </p:sldIdLst>
   <p:sldSz cx="12192000" cy="6858000"/>
   <p:notesSz cx="6858000" cy="9144000"/>
@@ -231,7 +229,7 @@
           <a:p>
             <a:fld id="{B9B1DC7F-8587-4047-9A5D-1FCB6614CAE0}" type="datetimeFigureOut">
               <a:rPr lang="en-US" smtClean="0"/>
-              <a:t>10/24/2022</a:t>
+              <a:t>10/25/2022</a:t>
             </a:fld>
             <a:endParaRPr lang="en-US"/>
           </a:p>
@@ -645,7 +643,7 @@
           <a:p>
             <a:fld id="{A7DB5662-7327-465C-9A70-AD96B7A8D67A}" type="datetimeFigureOut">
               <a:rPr lang="en-US" smtClean="0"/>
-              <a:t>10/24/2022</a:t>
+              <a:t>10/25/2022</a:t>
             </a:fld>
             <a:endParaRPr lang="en-US"/>
           </a:p>
@@ -843,7 +841,7 @@
           <a:p>
             <a:fld id="{A7DB5662-7327-465C-9A70-AD96B7A8D67A}" type="datetimeFigureOut">
               <a:rPr lang="en-US" smtClean="0"/>
-              <a:t>10/24/2022</a:t>
+              <a:t>10/25/2022</a:t>
             </a:fld>
             <a:endParaRPr lang="en-US"/>
           </a:p>
@@ -1051,7 +1049,7 @@
           <a:p>
             <a:fld id="{A7DB5662-7327-465C-9A70-AD96B7A8D67A}" type="datetimeFigureOut">
               <a:rPr lang="en-US" smtClean="0"/>
-              <a:t>10/24/2022</a:t>
+              <a:t>10/25/2022</a:t>
             </a:fld>
             <a:endParaRPr lang="en-US"/>
           </a:p>
@@ -1249,7 +1247,7 @@
           <a:p>
             <a:fld id="{A7DB5662-7327-465C-9A70-AD96B7A8D67A}" type="datetimeFigureOut">
               <a:rPr lang="en-US" smtClean="0"/>
-              <a:t>10/24/2022</a:t>
+              <a:t>10/25/2022</a:t>
             </a:fld>
             <a:endParaRPr lang="en-US"/>
           </a:p>
@@ -1524,7 +1522,7 @@
           <a:p>
             <a:fld id="{A7DB5662-7327-465C-9A70-AD96B7A8D67A}" type="datetimeFigureOut">
               <a:rPr lang="en-US" smtClean="0"/>
-              <a:t>10/24/2022</a:t>
+              <a:t>10/25/2022</a:t>
             </a:fld>
             <a:endParaRPr lang="en-US"/>
           </a:p>
@@ -1789,7 +1787,7 @@
           <a:p>
             <a:fld id="{A7DB5662-7327-465C-9A70-AD96B7A8D67A}" type="datetimeFigureOut">
               <a:rPr lang="en-US" smtClean="0"/>
-              <a:t>10/24/2022</a:t>
+              <a:t>10/25/2022</a:t>
             </a:fld>
             <a:endParaRPr lang="en-US"/>
           </a:p>
@@ -2201,7 +2199,7 @@
           <a:p>
             <a:fld id="{A7DB5662-7327-465C-9A70-AD96B7A8D67A}" type="datetimeFigureOut">
               <a:rPr lang="en-US" smtClean="0"/>
-              <a:t>10/24/2022</a:t>
+              <a:t>10/25/2022</a:t>
             </a:fld>
             <a:endParaRPr lang="en-US"/>
           </a:p>
@@ -2342,7 +2340,7 @@
           <a:p>
             <a:fld id="{A7DB5662-7327-465C-9A70-AD96B7A8D67A}" type="datetimeFigureOut">
               <a:rPr lang="en-US" smtClean="0"/>
-              <a:t>10/24/2022</a:t>
+              <a:t>10/25/2022</a:t>
             </a:fld>
             <a:endParaRPr lang="en-US"/>
           </a:p>
@@ -2455,7 +2453,7 @@
           <a:p>
             <a:fld id="{A7DB5662-7327-465C-9A70-AD96B7A8D67A}" type="datetimeFigureOut">
               <a:rPr lang="en-US" smtClean="0"/>
-              <a:t>10/24/2022</a:t>
+              <a:t>10/25/2022</a:t>
             </a:fld>
             <a:endParaRPr lang="en-US"/>
           </a:p>
@@ -2766,7 +2764,7 @@
           <a:p>
             <a:fld id="{A7DB5662-7327-465C-9A70-AD96B7A8D67A}" type="datetimeFigureOut">
               <a:rPr lang="en-US" smtClean="0"/>
-              <a:t>10/24/2022</a:t>
+              <a:t>10/25/2022</a:t>
             </a:fld>
             <a:endParaRPr lang="en-US"/>
           </a:p>
@@ -3054,7 +3052,7 @@
           <a:p>
             <a:fld id="{A7DB5662-7327-465C-9A70-AD96B7A8D67A}" type="datetimeFigureOut">
               <a:rPr lang="en-US" smtClean="0"/>
-              <a:t>10/24/2022</a:t>
+              <a:t>10/25/2022</a:t>
             </a:fld>
             <a:endParaRPr lang="en-US"/>
           </a:p>
@@ -3295,7 +3293,7 @@
           <a:p>
             <a:fld id="{A7DB5662-7327-465C-9A70-AD96B7A8D67A}" type="datetimeFigureOut">
               <a:rPr lang="en-US" smtClean="0"/>
-              <a:t>10/24/2022</a:t>
+              <a:t>10/25/2022</a:t>
             </a:fld>
             <a:endParaRPr lang="en-US"/>
           </a:p>
@@ -25330,8 +25328,8 @@
           </a:p>
         </p:txBody>
       </p:sp>
-      <mc:AlternateContent xmlns:mc="http://schemas.openxmlformats.org/markup-compatibility/2006">
-        <mc:Choice xmlns:a14="http://schemas.microsoft.com/office/drawing/2010/main" Requires="a14">
+      <mc:AlternateContent xmlns:mc="http://schemas.openxmlformats.org/markup-compatibility/2006" xmlns:a14="http://schemas.microsoft.com/office/drawing/2010/main">
+        <mc:Choice Requires="a14">
           <p:sp>
             <p:nvSpPr>
               <p:cNvPr id="3" name="Content Placeholder 2">
@@ -25843,7 +25841,7 @@
             </p:txBody>
           </p:sp>
         </mc:Choice>
-        <mc:Fallback>
+        <mc:Fallback xmlns="">
           <p:sp>
             <p:nvSpPr>
               <p:cNvPr id="3" name="Content Placeholder 2">
@@ -27549,542 +27547,6 @@
               <a:rPr lang="en-US" sz="2000" dirty="0">
                 <a:latin typeface="+mj-lt"/>
               </a:rPr>
-              <a:t>Imagine a task consisting in classifying patients into COVID infected or not. The algorithm will perform well if</a:t>
-            </a:r>
-          </a:p>
-          <a:p>
-            <a:pPr lvl="1">
-              <a:lnSpc>
-                <a:spcPct val="100000"/>
-              </a:lnSpc>
-              <a:buFont typeface="Wingdings" panose="05000000000000000000" pitchFamily="2" charset="2"/>
-              <a:buChar char="§"/>
-            </a:pPr>
-            <a:r>
-              <a:rPr lang="en-US" sz="1600" dirty="0">
-                <a:latin typeface="+mj-lt"/>
-              </a:rPr>
-              <a:t>Classifies as infected individuals that do have the disease </a:t>
-            </a:r>
-          </a:p>
-          <a:p>
-            <a:pPr lvl="1">
-              <a:lnSpc>
-                <a:spcPct val="100000"/>
-              </a:lnSpc>
-              <a:buFont typeface="Wingdings" panose="05000000000000000000" pitchFamily="2" charset="2"/>
-              <a:buChar char="§"/>
-            </a:pPr>
-            <a:r>
-              <a:rPr lang="en-US" sz="1600" dirty="0">
-                <a:latin typeface="+mj-lt"/>
-              </a:rPr>
-              <a:t>Classifies as not infected individuals that do not have the disease. </a:t>
-            </a:r>
-          </a:p>
-          <a:p>
-            <a:pPr lvl="1">
-              <a:lnSpc>
-                <a:spcPct val="100000"/>
-              </a:lnSpc>
-              <a:buFont typeface="Wingdings" panose="05000000000000000000" pitchFamily="2" charset="2"/>
-              <a:buChar char="§"/>
-            </a:pPr>
-            <a:r>
-              <a:rPr lang="en-US" sz="1600" dirty="0">
-                <a:latin typeface="+mj-lt"/>
-              </a:rPr>
-              <a:t>Do not classify as infected a person that is totally healthy</a:t>
-            </a:r>
-          </a:p>
-          <a:p>
-            <a:pPr lvl="1">
-              <a:lnSpc>
-                <a:spcPct val="100000"/>
-              </a:lnSpc>
-              <a:buFont typeface="Wingdings" panose="05000000000000000000" pitchFamily="2" charset="2"/>
-              <a:buChar char="§"/>
-            </a:pPr>
-            <a:r>
-              <a:rPr lang="en-US" sz="1600" dirty="0">
-                <a:latin typeface="+mj-lt"/>
-              </a:rPr>
-              <a:t>Do not classify as not infected a person that is actually sick</a:t>
-            </a:r>
-          </a:p>
-          <a:p>
-            <a:pPr>
-              <a:lnSpc>
-                <a:spcPct val="100000"/>
-              </a:lnSpc>
-              <a:buFont typeface="Wingdings" panose="05000000000000000000" pitchFamily="2" charset="2"/>
-              <a:buChar char="§"/>
-            </a:pPr>
-            <a:endParaRPr lang="en-US" sz="2000" dirty="0">
-              <a:latin typeface="+mj-lt"/>
-            </a:endParaRPr>
-          </a:p>
-        </p:txBody>
-      </p:sp>
-    </p:spTree>
-    <p:extLst>
-      <p:ext uri="{BB962C8B-B14F-4D97-AF65-F5344CB8AC3E}">
-        <p14:creationId xmlns:p14="http://schemas.microsoft.com/office/powerpoint/2010/main" val="2711951963"/>
-      </p:ext>
-    </p:extLst>
-  </p:cSld>
-  <p:clrMapOvr>
-    <a:masterClrMapping/>
-  </p:clrMapOvr>
-</p:sld>
-</file>
-
-<file path=ppt/slides/slide18.xml><?xml version="1.0" encoding="utf-8"?>
-<p:sld xmlns:a="http://schemas.openxmlformats.org/drawingml/2006/main" xmlns:r="http://schemas.openxmlformats.org/officeDocument/2006/relationships" xmlns:p="http://schemas.openxmlformats.org/presentationml/2006/main">
-  <p:cSld>
-    <p:spTree>
-      <p:nvGrpSpPr>
-        <p:cNvPr id="1" name=""/>
-        <p:cNvGrpSpPr/>
-        <p:nvPr/>
-      </p:nvGrpSpPr>
-      <p:grpSpPr>
-        <a:xfrm>
-          <a:off x="0" y="0"/>
-          <a:ext cx="0" cy="0"/>
-          <a:chOff x="0" y="0"/>
-          <a:chExt cx="0" cy="0"/>
-        </a:xfrm>
-      </p:grpSpPr>
-      <p:sp>
-        <p:nvSpPr>
-          <p:cNvPr id="2" name="Title 1">
-            <a:extLst>
-              <a:ext uri="{FF2B5EF4-FFF2-40B4-BE49-F238E27FC236}">
-                <a16:creationId xmlns:a16="http://schemas.microsoft.com/office/drawing/2014/main" id="{15C869D5-4E6C-6766-7E06-98B25E955D87}"/>
-              </a:ext>
-            </a:extLst>
-          </p:cNvPr>
-          <p:cNvSpPr>
-            <a:spLocks noGrp="1"/>
-          </p:cNvSpPr>
-          <p:nvPr>
-            <p:ph type="title"/>
-          </p:nvPr>
-        </p:nvSpPr>
-        <p:spPr/>
-        <p:txBody>
-          <a:bodyPr>
-            <a:normAutofit/>
-          </a:bodyPr>
-          <a:lstStyle/>
-          <a:p>
-            <a:r>
-              <a:rPr lang="en-US" sz="4000" dirty="0"/>
-              <a:t>Performance measures</a:t>
-            </a:r>
-          </a:p>
-        </p:txBody>
-      </p:sp>
-      <p:sp>
-        <p:nvSpPr>
-          <p:cNvPr id="4" name="Rectángulo 3">
-            <a:extLst>
-              <a:ext uri="{FF2B5EF4-FFF2-40B4-BE49-F238E27FC236}">
-                <a16:creationId xmlns:a16="http://schemas.microsoft.com/office/drawing/2014/main" id="{27E372AA-1ACE-5D2D-EDED-66DB6F5F4F88}"/>
-              </a:ext>
-            </a:extLst>
-          </p:cNvPr>
-          <p:cNvSpPr/>
-          <p:nvPr/>
-        </p:nvSpPr>
-        <p:spPr>
-          <a:xfrm>
-            <a:off x="0" y="0"/>
-            <a:ext cx="374469" cy="6858000"/>
-          </a:xfrm>
-          <a:prstGeom prst="rect">
-            <a:avLst/>
-          </a:prstGeom>
-        </p:spPr>
-        <p:style>
-          <a:lnRef idx="2">
-            <a:schemeClr val="accent2">
-              <a:shade val="50000"/>
-            </a:schemeClr>
-          </a:lnRef>
-          <a:fillRef idx="1">
-            <a:schemeClr val="accent2"/>
-          </a:fillRef>
-          <a:effectRef idx="0">
-            <a:schemeClr val="accent2"/>
-          </a:effectRef>
-          <a:fontRef idx="minor">
-            <a:schemeClr val="lt1"/>
-          </a:fontRef>
-        </p:style>
-        <p:txBody>
-          <a:bodyPr rtlCol="0" anchor="ctr"/>
-          <a:lstStyle/>
-          <a:p>
-            <a:pPr algn="ctr"/>
-            <a:endParaRPr lang="es-ES"/>
-          </a:p>
-        </p:txBody>
-      </p:sp>
-      <p:sp>
-        <p:nvSpPr>
-          <p:cNvPr id="5" name="Rectangle 143">
-            <a:extLst>
-              <a:ext uri="{FF2B5EF4-FFF2-40B4-BE49-F238E27FC236}">
-                <a16:creationId xmlns:a16="http://schemas.microsoft.com/office/drawing/2014/main" id="{4CAC6C5C-8798-AF6F-C852-967659577BF3}"/>
-              </a:ext>
-            </a:extLst>
-          </p:cNvPr>
-          <p:cNvSpPr>
-            <a:spLocks noChangeArrowheads="1"/>
-          </p:cNvSpPr>
-          <p:nvPr/>
-        </p:nvSpPr>
-        <p:spPr bwMode="auto">
-          <a:xfrm>
-            <a:off x="448342" y="6482412"/>
-            <a:ext cx="5730175" cy="276999"/>
-          </a:xfrm>
-          <a:prstGeom prst="rect">
-            <a:avLst/>
-          </a:prstGeom>
-          <a:noFill/>
-          <a:ln>
-            <a:noFill/>
-          </a:ln>
-          <a:effectLst/>
-          <a:extLst>
-            <a:ext uri="{909E8E84-426E-40DD-AFC4-6F175D3DCCD1}">
-              <a14:hiddenFill xmlns:a14="http://schemas.microsoft.com/office/drawing/2010/main">
-                <a:solidFill>
-                  <a:schemeClr val="accent1"/>
-                </a:solidFill>
-              </a14:hiddenFill>
-            </a:ext>
-            <a:ext uri="{91240B29-F687-4F45-9708-019B960494DF}">
-              <a14:hiddenLine xmlns:a14="http://schemas.microsoft.com/office/drawing/2010/main" w="9525">
-                <a:solidFill>
-                  <a:schemeClr val="tx1"/>
-                </a:solidFill>
-                <a:miter lim="800000"/>
-                <a:headEnd/>
-                <a:tailEnd/>
-              </a14:hiddenLine>
-            </a:ext>
-            <a:ext uri="{AF507438-7753-43E0-B8FC-AC1667EBCBE1}">
-              <a14:hiddenEffects xmlns:a14="http://schemas.microsoft.com/office/drawing/2010/main">
-                <a:effectLst>
-                  <a:outerShdw dist="35921" dir="2700000" algn="ctr" rotWithShape="0">
-                    <a:schemeClr val="bg2"/>
-                  </a:outerShdw>
-                </a:effectLst>
-              </a14:hiddenEffects>
-            </a:ext>
-          </a:extLst>
-        </p:spPr>
-        <p:txBody>
-          <a:bodyPr vert="horz" wrap="square" lIns="91440" tIns="45720" rIns="91440" bIns="45720" numCol="1" anchor="ctr" anchorCtr="0" compatLnSpc="1">
-            <a:prstTxWarp prst="textNoShape">
-              <a:avLst/>
-            </a:prstTxWarp>
-            <a:spAutoFit/>
-          </a:bodyPr>
-          <a:lstStyle/>
-          <a:p>
-            <a:pPr marL="0" marR="0" lvl="0" indent="0" algn="l" defTabSz="914400" rtl="0" eaLnBrk="0" fontAlgn="base" latinLnBrk="0" hangingPunct="0">
-              <a:lnSpc>
-                <a:spcPct val="100000"/>
-              </a:lnSpc>
-              <a:spcBef>
-                <a:spcPct val="0"/>
-              </a:spcBef>
-              <a:spcAft>
-                <a:spcPct val="0"/>
-              </a:spcAft>
-              <a:buClrTx/>
-              <a:buSzTx/>
-              <a:buFontTx/>
-              <a:buNone/>
-              <a:tabLst/>
-            </a:pPr>
-            <a:r>
-              <a:rPr kumimoji="0" lang="en-US" altLang="es-ES" sz="1200" b="0" i="0" u="none" strike="noStrike" cap="none" normalizeH="0" baseline="0" dirty="0">
-                <a:ln>
-                  <a:noFill/>
-                </a:ln>
-                <a:solidFill>
-                  <a:srgbClr val="F4A200"/>
-                </a:solidFill>
-                <a:effectLst/>
-                <a:latin typeface="Arial" panose="020B0604020202020204" pitchFamily="34" charset="0"/>
-                <a:ea typeface="Myriad Pro Light"/>
-                <a:cs typeface="Times New Roman" panose="02020603050405020304" pitchFamily="18" charset="0"/>
-              </a:rPr>
-              <a:t>Master in Quantitative Economic Analysis </a:t>
-            </a:r>
-            <a:r>
-              <a:rPr kumimoji="0" lang="en-US" altLang="es-ES" sz="1200" b="0" i="0" u="none" strike="noStrike" cap="none" normalizeH="0" baseline="0" dirty="0" err="1">
-                <a:ln>
-                  <a:noFill/>
-                </a:ln>
-                <a:solidFill>
-                  <a:srgbClr val="F4A200"/>
-                </a:solidFill>
-                <a:effectLst/>
-                <a:latin typeface="Arial" panose="020B0604020202020204" pitchFamily="34" charset="0"/>
-                <a:ea typeface="Myriad Pro Light"/>
-                <a:cs typeface="Times New Roman" panose="02020603050405020304" pitchFamily="18" charset="0"/>
-              </a:rPr>
-              <a:t>MQuEA</a:t>
-            </a:r>
-            <a:endParaRPr kumimoji="0" lang="es-ES" altLang="es-ES" sz="400" b="0" i="0" u="none" strike="noStrike" cap="none" normalizeH="0" baseline="0" dirty="0">
-              <a:ln>
-                <a:noFill/>
-              </a:ln>
-              <a:solidFill>
-                <a:schemeClr val="tx1"/>
-              </a:solidFill>
-              <a:effectLst/>
-              <a:latin typeface="Arial" panose="020B0604020202020204" pitchFamily="34" charset="0"/>
-            </a:endParaRPr>
-          </a:p>
-        </p:txBody>
-      </p:sp>
-      <p:sp>
-        <p:nvSpPr>
-          <p:cNvPr id="6" name="Rectangle 143">
-            <a:extLst>
-              <a:ext uri="{FF2B5EF4-FFF2-40B4-BE49-F238E27FC236}">
-                <a16:creationId xmlns:a16="http://schemas.microsoft.com/office/drawing/2014/main" id="{09E0FB32-C00A-A390-E094-76FC3EA5C288}"/>
-              </a:ext>
-            </a:extLst>
-          </p:cNvPr>
-          <p:cNvSpPr>
-            <a:spLocks noChangeArrowheads="1"/>
-          </p:cNvSpPr>
-          <p:nvPr/>
-        </p:nvSpPr>
-        <p:spPr bwMode="auto">
-          <a:xfrm>
-            <a:off x="6186394" y="6493050"/>
-            <a:ext cx="5730175" cy="276999"/>
-          </a:xfrm>
-          <a:prstGeom prst="rect">
-            <a:avLst/>
-          </a:prstGeom>
-          <a:noFill/>
-          <a:ln>
-            <a:noFill/>
-          </a:ln>
-          <a:effectLst/>
-          <a:extLst>
-            <a:ext uri="{909E8E84-426E-40DD-AFC4-6F175D3DCCD1}">
-              <a14:hiddenFill xmlns:a14="http://schemas.microsoft.com/office/drawing/2010/main">
-                <a:solidFill>
-                  <a:schemeClr val="accent1"/>
-                </a:solidFill>
-              </a14:hiddenFill>
-            </a:ext>
-            <a:ext uri="{91240B29-F687-4F45-9708-019B960494DF}">
-              <a14:hiddenLine xmlns:a14="http://schemas.microsoft.com/office/drawing/2010/main" w="9525">
-                <a:solidFill>
-                  <a:schemeClr val="tx1"/>
-                </a:solidFill>
-                <a:miter lim="800000"/>
-                <a:headEnd/>
-                <a:tailEnd/>
-              </a14:hiddenLine>
-            </a:ext>
-            <a:ext uri="{AF507438-7753-43E0-B8FC-AC1667EBCBE1}">
-              <a14:hiddenEffects xmlns:a14="http://schemas.microsoft.com/office/drawing/2010/main">
-                <a:effectLst>
-                  <a:outerShdw dist="35921" dir="2700000" algn="ctr" rotWithShape="0">
-                    <a:schemeClr val="bg2"/>
-                  </a:outerShdw>
-                </a:effectLst>
-              </a14:hiddenEffects>
-            </a:ext>
-          </a:extLst>
-        </p:spPr>
-        <p:txBody>
-          <a:bodyPr vert="horz" wrap="square" lIns="91440" tIns="45720" rIns="91440" bIns="45720" numCol="1" anchor="ctr" anchorCtr="0" compatLnSpc="1">
-            <a:prstTxWarp prst="textNoShape">
-              <a:avLst/>
-            </a:prstTxWarp>
-            <a:spAutoFit/>
-          </a:bodyPr>
-          <a:lstStyle/>
-          <a:p>
-            <a:pPr marL="0" marR="0" lvl="0" indent="0" algn="r" defTabSz="914400" rtl="0" eaLnBrk="0" fontAlgn="base" latinLnBrk="0" hangingPunct="0">
-              <a:lnSpc>
-                <a:spcPct val="100000"/>
-              </a:lnSpc>
-              <a:spcBef>
-                <a:spcPct val="0"/>
-              </a:spcBef>
-              <a:spcAft>
-                <a:spcPct val="0"/>
-              </a:spcAft>
-              <a:buClrTx/>
-              <a:buSzTx/>
-              <a:buFontTx/>
-              <a:buNone/>
-              <a:tabLst/>
-            </a:pPr>
-            <a:r>
-              <a:rPr kumimoji="0" lang="en-US" altLang="es-ES" sz="1200" b="0" i="0" u="none" strike="noStrike" cap="none" normalizeH="0" baseline="0" dirty="0">
-                <a:ln>
-                  <a:noFill/>
-                </a:ln>
-                <a:solidFill>
-                  <a:srgbClr val="F4A200"/>
-                </a:solidFill>
-                <a:effectLst/>
-                <a:latin typeface="Arial" panose="020B0604020202020204" pitchFamily="34" charset="0"/>
-                <a:ea typeface="Myriad Pro Light"/>
-                <a:cs typeface="Times New Roman" panose="02020603050405020304" pitchFamily="18" charset="0"/>
-              </a:rPr>
-              <a:t>Universidad </a:t>
-            </a:r>
-            <a:r>
-              <a:rPr kumimoji="0" lang="en-US" altLang="es-ES" sz="1200" b="0" i="0" u="none" strike="noStrike" cap="none" normalizeH="0" baseline="0" dirty="0" err="1">
-                <a:ln>
-                  <a:noFill/>
-                </a:ln>
-                <a:solidFill>
-                  <a:srgbClr val="F4A200"/>
-                </a:solidFill>
-                <a:effectLst/>
-                <a:latin typeface="Arial" panose="020B0604020202020204" pitchFamily="34" charset="0"/>
-                <a:ea typeface="Myriad Pro Light"/>
-                <a:cs typeface="Times New Roman" panose="02020603050405020304" pitchFamily="18" charset="0"/>
-              </a:rPr>
-              <a:t>Aut</a:t>
-            </a:r>
-            <a:r>
-              <a:rPr lang="en-US" altLang="es-ES" sz="1200" dirty="0" err="1">
-                <a:solidFill>
-                  <a:srgbClr val="F4A200"/>
-                </a:solidFill>
-                <a:latin typeface="Arial" panose="020B0604020202020204" pitchFamily="34" charset="0"/>
-                <a:ea typeface="Myriad Pro Light"/>
-                <a:cs typeface="Times New Roman" panose="02020603050405020304" pitchFamily="18" charset="0"/>
-              </a:rPr>
-              <a:t>ó</a:t>
-            </a:r>
-            <a:r>
-              <a:rPr kumimoji="0" lang="en-US" altLang="es-ES" sz="1200" b="0" i="0" u="none" strike="noStrike" cap="none" normalizeH="0" baseline="0" dirty="0" err="1">
-                <a:ln>
-                  <a:noFill/>
-                </a:ln>
-                <a:solidFill>
-                  <a:srgbClr val="F4A200"/>
-                </a:solidFill>
-                <a:effectLst/>
-                <a:latin typeface="Arial" panose="020B0604020202020204" pitchFamily="34" charset="0"/>
-                <a:ea typeface="Myriad Pro Light"/>
-                <a:cs typeface="Times New Roman" panose="02020603050405020304" pitchFamily="18" charset="0"/>
-              </a:rPr>
-              <a:t>noma</a:t>
-            </a:r>
-            <a:r>
-              <a:rPr kumimoji="0" lang="en-US" altLang="es-ES" sz="1200" b="0" i="0" u="none" strike="noStrike" cap="none" normalizeH="0" baseline="0" dirty="0">
-                <a:ln>
-                  <a:noFill/>
-                </a:ln>
-                <a:solidFill>
-                  <a:srgbClr val="F4A200"/>
-                </a:solidFill>
-                <a:effectLst/>
-                <a:latin typeface="Arial" panose="020B0604020202020204" pitchFamily="34" charset="0"/>
-                <a:ea typeface="Myriad Pro Light"/>
-                <a:cs typeface="Times New Roman" panose="02020603050405020304" pitchFamily="18" charset="0"/>
-              </a:rPr>
-              <a:t> de Madrid</a:t>
-            </a:r>
-            <a:endParaRPr kumimoji="0" lang="es-ES" altLang="es-ES" sz="400" b="0" i="0" u="none" strike="noStrike" cap="none" normalizeH="0" baseline="0" dirty="0">
-              <a:ln>
-                <a:noFill/>
-              </a:ln>
-              <a:solidFill>
-                <a:schemeClr val="tx1"/>
-              </a:solidFill>
-              <a:effectLst/>
-              <a:latin typeface="Arial" panose="020B0604020202020204" pitchFamily="34" charset="0"/>
-            </a:endParaRPr>
-          </a:p>
-        </p:txBody>
-      </p:sp>
-      <p:sp>
-        <p:nvSpPr>
-          <p:cNvPr id="3" name="Content Placeholder 2">
-            <a:extLst>
-              <a:ext uri="{FF2B5EF4-FFF2-40B4-BE49-F238E27FC236}">
-                <a16:creationId xmlns:a16="http://schemas.microsoft.com/office/drawing/2014/main" id="{F7EF27C5-01B7-9F60-ECDA-A1F376586FC5}"/>
-              </a:ext>
-            </a:extLst>
-          </p:cNvPr>
-          <p:cNvSpPr>
-            <a:spLocks noGrp="1"/>
-          </p:cNvSpPr>
-          <p:nvPr>
-            <p:ph idx="1"/>
-          </p:nvPr>
-        </p:nvSpPr>
-        <p:spPr/>
-        <p:txBody>
-          <a:bodyPr>
-            <a:normAutofit/>
-          </a:bodyPr>
-          <a:lstStyle/>
-          <a:p>
-            <a:pPr>
-              <a:lnSpc>
-                <a:spcPct val="100000"/>
-              </a:lnSpc>
-              <a:buFont typeface="Wingdings" panose="05000000000000000000" pitchFamily="2" charset="2"/>
-              <a:buChar char="§"/>
-            </a:pPr>
-            <a:r>
-              <a:rPr lang="en-US" sz="2000" dirty="0">
-                <a:latin typeface="+mj-lt"/>
-              </a:rPr>
-              <a:t>To evaluate a regression, one only needs to pay attention to the performance measure (the lower, the better). But assessing performance in a classification is bit more nuance.</a:t>
-            </a:r>
-          </a:p>
-          <a:p>
-            <a:pPr>
-              <a:lnSpc>
-                <a:spcPct val="100000"/>
-              </a:lnSpc>
-              <a:buFont typeface="Wingdings" panose="05000000000000000000" pitchFamily="2" charset="2"/>
-              <a:buChar char="§"/>
-            </a:pPr>
-            <a:r>
-              <a:rPr lang="en-US" sz="2000" dirty="0">
-                <a:latin typeface="+mj-lt"/>
-              </a:rPr>
-              <a:t>Just looking for a better accuracy (% of correct predictions) is not enough…</a:t>
-            </a:r>
-          </a:p>
-          <a:p>
-            <a:pPr>
-              <a:lnSpc>
-                <a:spcPct val="100000"/>
-              </a:lnSpc>
-              <a:buFont typeface="Wingdings" panose="05000000000000000000" pitchFamily="2" charset="2"/>
-              <a:buChar char="§"/>
-            </a:pPr>
-            <a:r>
-              <a:rPr lang="en-US" sz="2000" dirty="0">
-                <a:latin typeface="+mj-lt"/>
-              </a:rPr>
               <a:t>Imagine a task consisting in classifying patients into COVID-19 infected or not. The algorithm will perform well if:</a:t>
             </a:r>
           </a:p>
@@ -28175,7 +27637,7 @@
 </p:sld>
 </file>
 
-<file path=ppt/slides/slide19.xml><?xml version="1.0" encoding="utf-8"?>
+<file path=ppt/slides/slide18.xml><?xml version="1.0" encoding="utf-8"?>
 <p:sld xmlns:a="http://schemas.openxmlformats.org/drawingml/2006/main" xmlns:r="http://schemas.openxmlformats.org/officeDocument/2006/relationships" xmlns:p="http://schemas.openxmlformats.org/presentationml/2006/main">
   <p:cSld>
     <p:spTree>
@@ -29098,850 +28560,7 @@
 </p:sld>
 </file>
 
-<file path=ppt/slides/slide2.xml><?xml version="1.0" encoding="utf-8"?>
-<p:sld xmlns:a="http://schemas.openxmlformats.org/drawingml/2006/main" xmlns:r="http://schemas.openxmlformats.org/officeDocument/2006/relationships" xmlns:p="http://schemas.openxmlformats.org/presentationml/2006/main">
-  <p:cSld>
-    <p:spTree>
-      <p:nvGrpSpPr>
-        <p:cNvPr id="1" name=""/>
-        <p:cNvGrpSpPr/>
-        <p:nvPr/>
-      </p:nvGrpSpPr>
-      <p:grpSpPr>
-        <a:xfrm>
-          <a:off x="0" y="0"/>
-          <a:ext cx="0" cy="0"/>
-          <a:chOff x="0" y="0"/>
-          <a:chExt cx="0" cy="0"/>
-        </a:xfrm>
-      </p:grpSpPr>
-      <p:sp>
-        <p:nvSpPr>
-          <p:cNvPr id="4" name="Rectángulo 3">
-            <a:extLst>
-              <a:ext uri="{FF2B5EF4-FFF2-40B4-BE49-F238E27FC236}">
-                <a16:creationId xmlns:a16="http://schemas.microsoft.com/office/drawing/2014/main" id="{DAB19569-A64F-C399-1542-792E0E4616AC}"/>
-              </a:ext>
-            </a:extLst>
-          </p:cNvPr>
-          <p:cNvSpPr/>
-          <p:nvPr/>
-        </p:nvSpPr>
-        <p:spPr>
-          <a:xfrm>
-            <a:off x="0" y="0"/>
-            <a:ext cx="374469" cy="6858000"/>
-          </a:xfrm>
-          <a:prstGeom prst="rect">
-            <a:avLst/>
-          </a:prstGeom>
-        </p:spPr>
-        <p:style>
-          <a:lnRef idx="2">
-            <a:schemeClr val="accent2">
-              <a:shade val="50000"/>
-            </a:schemeClr>
-          </a:lnRef>
-          <a:fillRef idx="1">
-            <a:schemeClr val="accent2"/>
-          </a:fillRef>
-          <a:effectRef idx="0">
-            <a:schemeClr val="accent2"/>
-          </a:effectRef>
-          <a:fontRef idx="minor">
-            <a:schemeClr val="lt1"/>
-          </a:fontRef>
-        </p:style>
-        <p:txBody>
-          <a:bodyPr rtlCol="0" anchor="ctr"/>
-          <a:lstStyle/>
-          <a:p>
-            <a:pPr algn="ctr"/>
-            <a:endParaRPr lang="es-ES"/>
-          </a:p>
-        </p:txBody>
-      </p:sp>
-      <p:sp>
-        <p:nvSpPr>
-          <p:cNvPr id="152" name="Content Placeholder 2">
-            <a:extLst>
-              <a:ext uri="{FF2B5EF4-FFF2-40B4-BE49-F238E27FC236}">
-                <a16:creationId xmlns:a16="http://schemas.microsoft.com/office/drawing/2014/main" id="{B7719AE7-5D76-3CA6-C03E-F772C1896EF4}"/>
-              </a:ext>
-            </a:extLst>
-          </p:cNvPr>
-          <p:cNvSpPr txBox="1">
-            <a:spLocks/>
-          </p:cNvSpPr>
-          <p:nvPr/>
-        </p:nvSpPr>
-        <p:spPr>
-          <a:xfrm>
-            <a:off x="1494790" y="1875615"/>
-            <a:ext cx="9859010" cy="4351338"/>
-          </a:xfrm>
-          <a:prstGeom prst="rect">
-            <a:avLst/>
-          </a:prstGeom>
-        </p:spPr>
-        <p:txBody>
-          <a:bodyPr vert="horz" lIns="91440" tIns="45720" rIns="91440" bIns="45720" rtlCol="0">
-            <a:normAutofit fontScale="92500" lnSpcReduction="10000"/>
-          </a:bodyPr>
-          <a:lstStyle>
-            <a:lvl1pPr marL="0" indent="0" algn="ctr" defTabSz="914400" rtl="0" eaLnBrk="1" latinLnBrk="0" hangingPunct="1">
-              <a:lnSpc>
-                <a:spcPct val="90000"/>
-              </a:lnSpc>
-              <a:spcBef>
-                <a:spcPts val="1000"/>
-              </a:spcBef>
-              <a:buFont typeface="Arial" panose="020B0604020202020204" pitchFamily="34" charset="0"/>
-              <a:buNone/>
-              <a:defRPr sz="2400" kern="1200">
-                <a:solidFill>
-                  <a:schemeClr val="tx1"/>
-                </a:solidFill>
-                <a:latin typeface="+mn-lt"/>
-                <a:ea typeface="+mn-ea"/>
-                <a:cs typeface="+mn-cs"/>
-              </a:defRPr>
-            </a:lvl1pPr>
-            <a:lvl2pPr marL="457200" indent="0" algn="ctr" defTabSz="914400" rtl="0" eaLnBrk="1" latinLnBrk="0" hangingPunct="1">
-              <a:lnSpc>
-                <a:spcPct val="90000"/>
-              </a:lnSpc>
-              <a:spcBef>
-                <a:spcPts val="500"/>
-              </a:spcBef>
-              <a:buFont typeface="Arial" panose="020B0604020202020204" pitchFamily="34" charset="0"/>
-              <a:buNone/>
-              <a:defRPr sz="2000" kern="1200">
-                <a:solidFill>
-                  <a:schemeClr val="tx1"/>
-                </a:solidFill>
-                <a:latin typeface="+mn-lt"/>
-                <a:ea typeface="+mn-ea"/>
-                <a:cs typeface="+mn-cs"/>
-              </a:defRPr>
-            </a:lvl2pPr>
-            <a:lvl3pPr marL="914400" indent="0" algn="ctr" defTabSz="914400" rtl="0" eaLnBrk="1" latinLnBrk="0" hangingPunct="1">
-              <a:lnSpc>
-                <a:spcPct val="90000"/>
-              </a:lnSpc>
-              <a:spcBef>
-                <a:spcPts val="500"/>
-              </a:spcBef>
-              <a:buFont typeface="Arial" panose="020B0604020202020204" pitchFamily="34" charset="0"/>
-              <a:buNone/>
-              <a:defRPr sz="1800" kern="1200">
-                <a:solidFill>
-                  <a:schemeClr val="tx1"/>
-                </a:solidFill>
-                <a:latin typeface="+mn-lt"/>
-                <a:ea typeface="+mn-ea"/>
-                <a:cs typeface="+mn-cs"/>
-              </a:defRPr>
-            </a:lvl3pPr>
-            <a:lvl4pPr marL="1371600" indent="0" algn="ctr" defTabSz="914400" rtl="0" eaLnBrk="1" latinLnBrk="0" hangingPunct="1">
-              <a:lnSpc>
-                <a:spcPct val="90000"/>
-              </a:lnSpc>
-              <a:spcBef>
-                <a:spcPts val="500"/>
-              </a:spcBef>
-              <a:buFont typeface="Arial" panose="020B0604020202020204" pitchFamily="34" charset="0"/>
-              <a:buNone/>
-              <a:defRPr sz="1600" kern="1200">
-                <a:solidFill>
-                  <a:schemeClr val="tx1"/>
-                </a:solidFill>
-                <a:latin typeface="+mn-lt"/>
-                <a:ea typeface="+mn-ea"/>
-                <a:cs typeface="+mn-cs"/>
-              </a:defRPr>
-            </a:lvl4pPr>
-            <a:lvl5pPr marL="1828800" indent="0" algn="ctr" defTabSz="914400" rtl="0" eaLnBrk="1" latinLnBrk="0" hangingPunct="1">
-              <a:lnSpc>
-                <a:spcPct val="90000"/>
-              </a:lnSpc>
-              <a:spcBef>
-                <a:spcPts val="500"/>
-              </a:spcBef>
-              <a:buFont typeface="Arial" panose="020B0604020202020204" pitchFamily="34" charset="0"/>
-              <a:buNone/>
-              <a:defRPr sz="1600" kern="1200">
-                <a:solidFill>
-                  <a:schemeClr val="tx1"/>
-                </a:solidFill>
-                <a:latin typeface="+mn-lt"/>
-                <a:ea typeface="+mn-ea"/>
-                <a:cs typeface="+mn-cs"/>
-              </a:defRPr>
-            </a:lvl5pPr>
-            <a:lvl6pPr marL="2286000" indent="0" algn="ctr" defTabSz="914400" rtl="0" eaLnBrk="1" latinLnBrk="0" hangingPunct="1">
-              <a:lnSpc>
-                <a:spcPct val="90000"/>
-              </a:lnSpc>
-              <a:spcBef>
-                <a:spcPts val="500"/>
-              </a:spcBef>
-              <a:buFont typeface="Arial" panose="020B0604020202020204" pitchFamily="34" charset="0"/>
-              <a:buNone/>
-              <a:defRPr sz="1600" kern="1200">
-                <a:solidFill>
-                  <a:schemeClr val="tx1"/>
-                </a:solidFill>
-                <a:latin typeface="+mn-lt"/>
-                <a:ea typeface="+mn-ea"/>
-                <a:cs typeface="+mn-cs"/>
-              </a:defRPr>
-            </a:lvl6pPr>
-            <a:lvl7pPr marL="2743200" indent="0" algn="ctr" defTabSz="914400" rtl="0" eaLnBrk="1" latinLnBrk="0" hangingPunct="1">
-              <a:lnSpc>
-                <a:spcPct val="90000"/>
-              </a:lnSpc>
-              <a:spcBef>
-                <a:spcPts val="500"/>
-              </a:spcBef>
-              <a:buFont typeface="Arial" panose="020B0604020202020204" pitchFamily="34" charset="0"/>
-              <a:buNone/>
-              <a:defRPr sz="1600" kern="1200">
-                <a:solidFill>
-                  <a:schemeClr val="tx1"/>
-                </a:solidFill>
-                <a:latin typeface="+mn-lt"/>
-                <a:ea typeface="+mn-ea"/>
-                <a:cs typeface="+mn-cs"/>
-              </a:defRPr>
-            </a:lvl7pPr>
-            <a:lvl8pPr marL="3200400" indent="0" algn="ctr" defTabSz="914400" rtl="0" eaLnBrk="1" latinLnBrk="0" hangingPunct="1">
-              <a:lnSpc>
-                <a:spcPct val="90000"/>
-              </a:lnSpc>
-              <a:spcBef>
-                <a:spcPts val="500"/>
-              </a:spcBef>
-              <a:buFont typeface="Arial" panose="020B0604020202020204" pitchFamily="34" charset="0"/>
-              <a:buNone/>
-              <a:defRPr sz="1600" kern="1200">
-                <a:solidFill>
-                  <a:schemeClr val="tx1"/>
-                </a:solidFill>
-                <a:latin typeface="+mn-lt"/>
-                <a:ea typeface="+mn-ea"/>
-                <a:cs typeface="+mn-cs"/>
-              </a:defRPr>
-            </a:lvl8pPr>
-            <a:lvl9pPr marL="3657600" indent="0" algn="ctr" defTabSz="914400" rtl="0" eaLnBrk="1" latinLnBrk="0" hangingPunct="1">
-              <a:lnSpc>
-                <a:spcPct val="90000"/>
-              </a:lnSpc>
-              <a:spcBef>
-                <a:spcPts val="500"/>
-              </a:spcBef>
-              <a:buFont typeface="Arial" panose="020B0604020202020204" pitchFamily="34" charset="0"/>
-              <a:buNone/>
-              <a:defRPr sz="1600" kern="1200">
-                <a:solidFill>
-                  <a:schemeClr val="tx1"/>
-                </a:solidFill>
-                <a:latin typeface="+mn-lt"/>
-                <a:ea typeface="+mn-ea"/>
-                <a:cs typeface="+mn-cs"/>
-              </a:defRPr>
-            </a:lvl9pPr>
-          </a:lstStyle>
-          <a:p>
-            <a:pPr marL="457200" indent="-457200" algn="l">
-              <a:lnSpc>
-                <a:spcPct val="100000"/>
-              </a:lnSpc>
-              <a:buFont typeface="Wingdings" panose="05000000000000000000" pitchFamily="2" charset="2"/>
-              <a:buChar char="§"/>
-            </a:pPr>
-            <a:r>
-              <a:rPr lang="en-US" sz="2800" dirty="0">
-                <a:latin typeface="+mj-lt"/>
-                <a:cs typeface="Times New Roman" panose="02020603050405020304" pitchFamily="18" charset="0"/>
-              </a:rPr>
-              <a:t>Classifying?</a:t>
-            </a:r>
-          </a:p>
-          <a:p>
-            <a:pPr marL="457200" indent="-457200" algn="l">
-              <a:lnSpc>
-                <a:spcPct val="100000"/>
-              </a:lnSpc>
-              <a:buFont typeface="Wingdings" panose="05000000000000000000" pitchFamily="2" charset="2"/>
-              <a:buChar char="§"/>
-            </a:pPr>
-            <a:r>
-              <a:rPr lang="en-US" sz="2800" dirty="0">
-                <a:latin typeface="+mj-lt"/>
-                <a:cs typeface="Times New Roman" panose="02020603050405020304" pitchFamily="18" charset="0"/>
-              </a:rPr>
-              <a:t>Classifiers</a:t>
-            </a:r>
-          </a:p>
-          <a:p>
-            <a:pPr marL="914400" lvl="1" indent="-457200" algn="l">
-              <a:lnSpc>
-                <a:spcPct val="100000"/>
-              </a:lnSpc>
-              <a:buFont typeface="Wingdings" panose="05000000000000000000" pitchFamily="2" charset="2"/>
-              <a:buChar char="§"/>
-            </a:pPr>
-            <a:r>
-              <a:rPr lang="en-US" sz="2400" dirty="0">
-                <a:latin typeface="+mj-lt"/>
-                <a:cs typeface="Times New Roman" panose="02020603050405020304" pitchFamily="18" charset="0"/>
-              </a:rPr>
-              <a:t>Logistic Regression</a:t>
-            </a:r>
-          </a:p>
-          <a:p>
-            <a:pPr marL="914400" lvl="1" indent="-457200" algn="l">
-              <a:lnSpc>
-                <a:spcPct val="100000"/>
-              </a:lnSpc>
-              <a:buFont typeface="Wingdings" panose="05000000000000000000" pitchFamily="2" charset="2"/>
-              <a:buChar char="§"/>
-            </a:pPr>
-            <a:r>
-              <a:rPr lang="en-US" sz="2400" dirty="0">
-                <a:latin typeface="+mj-lt"/>
-                <a:cs typeface="Times New Roman" panose="02020603050405020304" pitchFamily="18" charset="0"/>
-              </a:rPr>
-              <a:t>Linear discriminant analysis (LDA)</a:t>
-            </a:r>
-          </a:p>
-          <a:p>
-            <a:pPr marL="914400" lvl="1" indent="-457200" algn="l">
-              <a:lnSpc>
-                <a:spcPct val="100000"/>
-              </a:lnSpc>
-              <a:buFont typeface="Wingdings" panose="05000000000000000000" pitchFamily="2" charset="2"/>
-              <a:buChar char="§"/>
-            </a:pPr>
-            <a:r>
-              <a:rPr lang="en-US" sz="2400" dirty="0">
-                <a:latin typeface="+mj-lt"/>
-                <a:cs typeface="Times New Roman" panose="02020603050405020304" pitchFamily="18" charset="0"/>
-              </a:rPr>
-              <a:t>Stochastic Gradient Descent (SGD)</a:t>
-            </a:r>
-          </a:p>
-          <a:p>
-            <a:pPr marL="914400" lvl="1" indent="-457200" algn="l">
-              <a:lnSpc>
-                <a:spcPct val="100000"/>
-              </a:lnSpc>
-              <a:buFont typeface="Wingdings" panose="05000000000000000000" pitchFamily="2" charset="2"/>
-              <a:buChar char="§"/>
-            </a:pPr>
-            <a:r>
-              <a:rPr lang="en-US" sz="2400" dirty="0">
-                <a:latin typeface="+mj-lt"/>
-                <a:cs typeface="Times New Roman" panose="02020603050405020304" pitchFamily="18" charset="0"/>
-              </a:rPr>
-              <a:t>Support Vector Machines (SVM)</a:t>
-            </a:r>
-          </a:p>
-          <a:p>
-            <a:pPr marL="914400" lvl="1" indent="-457200" algn="l">
-              <a:lnSpc>
-                <a:spcPct val="100000"/>
-              </a:lnSpc>
-              <a:buFont typeface="Wingdings" panose="05000000000000000000" pitchFamily="2" charset="2"/>
-              <a:buChar char="§"/>
-            </a:pPr>
-            <a:r>
-              <a:rPr lang="en-US" sz="2400" i="1" dirty="0">
-                <a:latin typeface="+mj-lt"/>
-                <a:cs typeface="Times New Roman" panose="02020603050405020304" pitchFamily="18" charset="0"/>
-              </a:rPr>
-              <a:t>K</a:t>
-            </a:r>
-            <a:r>
-              <a:rPr lang="en-US" sz="2400" dirty="0">
-                <a:latin typeface="+mj-lt"/>
-                <a:cs typeface="Times New Roman" panose="02020603050405020304" pitchFamily="18" charset="0"/>
-              </a:rPr>
-              <a:t>-Nearest Neighbors (KNN)</a:t>
-            </a:r>
-            <a:endParaRPr lang="en-US" sz="2400" i="1" dirty="0">
-              <a:latin typeface="+mj-lt"/>
-              <a:cs typeface="Times New Roman" panose="02020603050405020304" pitchFamily="18" charset="0"/>
-            </a:endParaRPr>
-          </a:p>
-          <a:p>
-            <a:pPr marL="457200" indent="-457200" algn="l">
-              <a:lnSpc>
-                <a:spcPct val="100000"/>
-              </a:lnSpc>
-              <a:buFont typeface="Wingdings" panose="05000000000000000000" pitchFamily="2" charset="2"/>
-              <a:buChar char="§"/>
-            </a:pPr>
-            <a:r>
-              <a:rPr lang="en-US" sz="2800" dirty="0">
-                <a:latin typeface="+mj-lt"/>
-                <a:cs typeface="Times New Roman" panose="02020603050405020304" pitchFamily="18" charset="0"/>
-              </a:rPr>
-              <a:t>Performance measures</a:t>
-            </a:r>
-          </a:p>
-          <a:p>
-            <a:pPr marL="457200" indent="-457200" algn="l">
-              <a:lnSpc>
-                <a:spcPct val="100000"/>
-              </a:lnSpc>
-              <a:buFont typeface="Wingdings" panose="05000000000000000000" pitchFamily="2" charset="2"/>
-              <a:buChar char="§"/>
-            </a:pPr>
-            <a:r>
-              <a:rPr lang="en-US" sz="2800" dirty="0">
-                <a:latin typeface="+mj-lt"/>
-                <a:cs typeface="Times New Roman" panose="02020603050405020304" pitchFamily="18" charset="0"/>
-              </a:rPr>
-              <a:t>Training a binary classifier</a:t>
-            </a:r>
-          </a:p>
-          <a:p>
-            <a:pPr marL="457200" indent="-457200" algn="l">
-              <a:lnSpc>
-                <a:spcPct val="100000"/>
-              </a:lnSpc>
-              <a:buFont typeface="Wingdings" panose="05000000000000000000" pitchFamily="2" charset="2"/>
-              <a:buChar char="§"/>
-            </a:pPr>
-            <a:r>
-              <a:rPr lang="en-US" sz="2800" dirty="0">
-                <a:latin typeface="+mj-lt"/>
-                <a:cs typeface="Times New Roman" panose="02020603050405020304" pitchFamily="18" charset="0"/>
-              </a:rPr>
-              <a:t>Multiclass (multinomial) classification</a:t>
-            </a:r>
-          </a:p>
-        </p:txBody>
-      </p:sp>
-      <p:sp>
-        <p:nvSpPr>
-          <p:cNvPr id="155" name="Rectangle 143">
-            <a:extLst>
-              <a:ext uri="{FF2B5EF4-FFF2-40B4-BE49-F238E27FC236}">
-                <a16:creationId xmlns:a16="http://schemas.microsoft.com/office/drawing/2014/main" id="{7524B8A9-611C-185B-E9C1-20FB914D23F6}"/>
-              </a:ext>
-            </a:extLst>
-          </p:cNvPr>
-          <p:cNvSpPr>
-            <a:spLocks noChangeArrowheads="1"/>
-          </p:cNvSpPr>
-          <p:nvPr/>
-        </p:nvSpPr>
-        <p:spPr bwMode="auto">
-          <a:xfrm>
-            <a:off x="448342" y="6401243"/>
-            <a:ext cx="5730175" cy="307777"/>
-          </a:xfrm>
-          <a:prstGeom prst="rect">
-            <a:avLst/>
-          </a:prstGeom>
-          <a:noFill/>
-          <a:ln>
-            <a:noFill/>
-          </a:ln>
-          <a:effectLst/>
-          <a:extLst>
-            <a:ext uri="{909E8E84-426E-40DD-AFC4-6F175D3DCCD1}">
-              <a14:hiddenFill xmlns:a14="http://schemas.microsoft.com/office/drawing/2010/main">
-                <a:solidFill>
-                  <a:schemeClr val="accent1"/>
-                </a:solidFill>
-              </a14:hiddenFill>
-            </a:ext>
-            <a:ext uri="{91240B29-F687-4F45-9708-019B960494DF}">
-              <a14:hiddenLine xmlns:a14="http://schemas.microsoft.com/office/drawing/2010/main" w="9525">
-                <a:solidFill>
-                  <a:schemeClr val="tx1"/>
-                </a:solidFill>
-                <a:miter lim="800000"/>
-                <a:headEnd/>
-                <a:tailEnd/>
-              </a14:hiddenLine>
-            </a:ext>
-            <a:ext uri="{AF507438-7753-43E0-B8FC-AC1667EBCBE1}">
-              <a14:hiddenEffects xmlns:a14="http://schemas.microsoft.com/office/drawing/2010/main">
-                <a:effectLst>
-                  <a:outerShdw dist="35921" dir="2700000" algn="ctr" rotWithShape="0">
-                    <a:schemeClr val="bg2"/>
-                  </a:outerShdw>
-                </a:effectLst>
-              </a14:hiddenEffects>
-            </a:ext>
-          </a:extLst>
-        </p:spPr>
-        <p:txBody>
-          <a:bodyPr vert="horz" wrap="square" lIns="91440" tIns="45720" rIns="91440" bIns="45720" numCol="1" anchor="ctr" anchorCtr="0" compatLnSpc="1">
-            <a:prstTxWarp prst="textNoShape">
-              <a:avLst/>
-            </a:prstTxWarp>
-            <a:spAutoFit/>
-          </a:bodyPr>
-          <a:lstStyle/>
-          <a:p>
-            <a:pPr marL="0" marR="0" lvl="0" indent="0" algn="l" defTabSz="914400" rtl="0" eaLnBrk="0" fontAlgn="base" latinLnBrk="0" hangingPunct="0">
-              <a:lnSpc>
-                <a:spcPct val="100000"/>
-              </a:lnSpc>
-              <a:spcBef>
-                <a:spcPct val="0"/>
-              </a:spcBef>
-              <a:spcAft>
-                <a:spcPct val="0"/>
-              </a:spcAft>
-              <a:buClrTx/>
-              <a:buSzTx/>
-              <a:buFontTx/>
-              <a:buNone/>
-              <a:tabLst/>
-            </a:pPr>
-            <a:r>
-              <a:rPr kumimoji="0" lang="en-US" altLang="es-ES" sz="1400" b="0" i="0" u="none" strike="noStrike" cap="none" normalizeH="0" baseline="0" dirty="0">
-                <a:ln>
-                  <a:noFill/>
-                </a:ln>
-                <a:solidFill>
-                  <a:srgbClr val="F4A200"/>
-                </a:solidFill>
-                <a:effectLst/>
-                <a:latin typeface="Arial" panose="020B0604020202020204" pitchFamily="34" charset="0"/>
-                <a:ea typeface="Myriad Pro Light"/>
-                <a:cs typeface="Times New Roman" panose="02020603050405020304" pitchFamily="18" charset="0"/>
-              </a:rPr>
-              <a:t>Master in Quantitative Economic Analysis </a:t>
-            </a:r>
-            <a:r>
-              <a:rPr kumimoji="0" lang="en-US" altLang="es-ES" sz="1400" b="0" i="0" u="none" strike="noStrike" cap="none" normalizeH="0" baseline="0" dirty="0" err="1">
-                <a:ln>
-                  <a:noFill/>
-                </a:ln>
-                <a:solidFill>
-                  <a:srgbClr val="F4A200"/>
-                </a:solidFill>
-                <a:effectLst/>
-                <a:latin typeface="Arial" panose="020B0604020202020204" pitchFamily="34" charset="0"/>
-                <a:ea typeface="Myriad Pro Light"/>
-                <a:cs typeface="Times New Roman" panose="02020603050405020304" pitchFamily="18" charset="0"/>
-              </a:rPr>
-              <a:t>MQuEA</a:t>
-            </a:r>
-            <a:endParaRPr kumimoji="0" lang="es-ES" altLang="es-ES" sz="500" b="0" i="0" u="none" strike="noStrike" cap="none" normalizeH="0" baseline="0" dirty="0">
-              <a:ln>
-                <a:noFill/>
-              </a:ln>
-              <a:solidFill>
-                <a:schemeClr val="tx1"/>
-              </a:solidFill>
-              <a:effectLst/>
-              <a:latin typeface="Arial" panose="020B0604020202020204" pitchFamily="34" charset="0"/>
-            </a:endParaRPr>
-          </a:p>
-        </p:txBody>
-      </p:sp>
-      <p:sp>
-        <p:nvSpPr>
-          <p:cNvPr id="156" name="Rectangle 143">
-            <a:extLst>
-              <a:ext uri="{FF2B5EF4-FFF2-40B4-BE49-F238E27FC236}">
-                <a16:creationId xmlns:a16="http://schemas.microsoft.com/office/drawing/2014/main" id="{8AE2F004-1A39-90D0-AE0D-900815603718}"/>
-              </a:ext>
-            </a:extLst>
-          </p:cNvPr>
-          <p:cNvSpPr>
-            <a:spLocks noChangeArrowheads="1"/>
-          </p:cNvSpPr>
-          <p:nvPr/>
-        </p:nvSpPr>
-        <p:spPr bwMode="auto">
-          <a:xfrm>
-            <a:off x="6186394" y="6411881"/>
-            <a:ext cx="5730175" cy="307777"/>
-          </a:xfrm>
-          <a:prstGeom prst="rect">
-            <a:avLst/>
-          </a:prstGeom>
-          <a:noFill/>
-          <a:ln>
-            <a:noFill/>
-          </a:ln>
-          <a:effectLst/>
-          <a:extLst>
-            <a:ext uri="{909E8E84-426E-40DD-AFC4-6F175D3DCCD1}">
-              <a14:hiddenFill xmlns:a14="http://schemas.microsoft.com/office/drawing/2010/main">
-                <a:solidFill>
-                  <a:schemeClr val="accent1"/>
-                </a:solidFill>
-              </a14:hiddenFill>
-            </a:ext>
-            <a:ext uri="{91240B29-F687-4F45-9708-019B960494DF}">
-              <a14:hiddenLine xmlns:a14="http://schemas.microsoft.com/office/drawing/2010/main" w="9525">
-                <a:solidFill>
-                  <a:schemeClr val="tx1"/>
-                </a:solidFill>
-                <a:miter lim="800000"/>
-                <a:headEnd/>
-                <a:tailEnd/>
-              </a14:hiddenLine>
-            </a:ext>
-            <a:ext uri="{AF507438-7753-43E0-B8FC-AC1667EBCBE1}">
-              <a14:hiddenEffects xmlns:a14="http://schemas.microsoft.com/office/drawing/2010/main">
-                <a:effectLst>
-                  <a:outerShdw dist="35921" dir="2700000" algn="ctr" rotWithShape="0">
-                    <a:schemeClr val="bg2"/>
-                  </a:outerShdw>
-                </a:effectLst>
-              </a14:hiddenEffects>
-            </a:ext>
-          </a:extLst>
-        </p:spPr>
-        <p:txBody>
-          <a:bodyPr vert="horz" wrap="square" lIns="91440" tIns="45720" rIns="91440" bIns="45720" numCol="1" anchor="ctr" anchorCtr="0" compatLnSpc="1">
-            <a:prstTxWarp prst="textNoShape">
-              <a:avLst/>
-            </a:prstTxWarp>
-            <a:spAutoFit/>
-          </a:bodyPr>
-          <a:lstStyle/>
-          <a:p>
-            <a:pPr marL="0" marR="0" lvl="0" indent="0" algn="r" defTabSz="914400" rtl="0" eaLnBrk="0" fontAlgn="base" latinLnBrk="0" hangingPunct="0">
-              <a:lnSpc>
-                <a:spcPct val="100000"/>
-              </a:lnSpc>
-              <a:spcBef>
-                <a:spcPct val="0"/>
-              </a:spcBef>
-              <a:spcAft>
-                <a:spcPct val="0"/>
-              </a:spcAft>
-              <a:buClrTx/>
-              <a:buSzTx/>
-              <a:buFontTx/>
-              <a:buNone/>
-              <a:tabLst/>
-            </a:pPr>
-            <a:r>
-              <a:rPr kumimoji="0" lang="en-US" altLang="es-ES" sz="1400" b="0" i="0" u="none" strike="noStrike" cap="none" normalizeH="0" baseline="0" dirty="0">
-                <a:ln>
-                  <a:noFill/>
-                </a:ln>
-                <a:solidFill>
-                  <a:srgbClr val="F4A200"/>
-                </a:solidFill>
-                <a:effectLst/>
-                <a:latin typeface="Arial" panose="020B0604020202020204" pitchFamily="34" charset="0"/>
-                <a:ea typeface="Myriad Pro Light"/>
-                <a:cs typeface="Times New Roman" panose="02020603050405020304" pitchFamily="18" charset="0"/>
-              </a:rPr>
-              <a:t>Universidad </a:t>
-            </a:r>
-            <a:r>
-              <a:rPr kumimoji="0" lang="en-US" altLang="es-ES" sz="1400" b="0" i="0" u="none" strike="noStrike" cap="none" normalizeH="0" baseline="0" dirty="0" err="1">
-                <a:ln>
-                  <a:noFill/>
-                </a:ln>
-                <a:solidFill>
-                  <a:srgbClr val="F4A200"/>
-                </a:solidFill>
-                <a:effectLst/>
-                <a:latin typeface="Arial" panose="020B0604020202020204" pitchFamily="34" charset="0"/>
-                <a:ea typeface="Myriad Pro Light"/>
-                <a:cs typeface="Times New Roman" panose="02020603050405020304" pitchFamily="18" charset="0"/>
-              </a:rPr>
-              <a:t>Aut</a:t>
-            </a:r>
-            <a:r>
-              <a:rPr lang="en-US" altLang="es-ES" sz="1400" dirty="0" err="1">
-                <a:solidFill>
-                  <a:srgbClr val="F4A200"/>
-                </a:solidFill>
-                <a:latin typeface="Arial" panose="020B0604020202020204" pitchFamily="34" charset="0"/>
-                <a:ea typeface="Myriad Pro Light"/>
-                <a:cs typeface="Times New Roman" panose="02020603050405020304" pitchFamily="18" charset="0"/>
-              </a:rPr>
-              <a:t>ó</a:t>
-            </a:r>
-            <a:r>
-              <a:rPr kumimoji="0" lang="en-US" altLang="es-ES" sz="1400" b="0" i="0" u="none" strike="noStrike" cap="none" normalizeH="0" baseline="0" dirty="0" err="1">
-                <a:ln>
-                  <a:noFill/>
-                </a:ln>
-                <a:solidFill>
-                  <a:srgbClr val="F4A200"/>
-                </a:solidFill>
-                <a:effectLst/>
-                <a:latin typeface="Arial" panose="020B0604020202020204" pitchFamily="34" charset="0"/>
-                <a:ea typeface="Myriad Pro Light"/>
-                <a:cs typeface="Times New Roman" panose="02020603050405020304" pitchFamily="18" charset="0"/>
-              </a:rPr>
-              <a:t>noma</a:t>
-            </a:r>
-            <a:r>
-              <a:rPr kumimoji="0" lang="en-US" altLang="es-ES" sz="1400" b="0" i="0" u="none" strike="noStrike" cap="none" normalizeH="0" baseline="0" dirty="0">
-                <a:ln>
-                  <a:noFill/>
-                </a:ln>
-                <a:solidFill>
-                  <a:srgbClr val="F4A200"/>
-                </a:solidFill>
-                <a:effectLst/>
-                <a:latin typeface="Arial" panose="020B0604020202020204" pitchFamily="34" charset="0"/>
-                <a:ea typeface="Myriad Pro Light"/>
-                <a:cs typeface="Times New Roman" panose="02020603050405020304" pitchFamily="18" charset="0"/>
-              </a:rPr>
-              <a:t> de Madrid</a:t>
-            </a:r>
-            <a:endParaRPr kumimoji="0" lang="es-ES" altLang="es-ES" sz="500" b="0" i="0" u="none" strike="noStrike" cap="none" normalizeH="0" baseline="0" dirty="0">
-              <a:ln>
-                <a:noFill/>
-              </a:ln>
-              <a:solidFill>
-                <a:schemeClr val="tx1"/>
-              </a:solidFill>
-              <a:effectLst/>
-              <a:latin typeface="Arial" panose="020B0604020202020204" pitchFamily="34" charset="0"/>
-            </a:endParaRPr>
-          </a:p>
-        </p:txBody>
-      </p:sp>
-      <p:sp>
-        <p:nvSpPr>
-          <p:cNvPr id="2" name="Title 1">
-            <a:extLst>
-              <a:ext uri="{FF2B5EF4-FFF2-40B4-BE49-F238E27FC236}">
-                <a16:creationId xmlns:a16="http://schemas.microsoft.com/office/drawing/2014/main" id="{6F9A13AB-C9B4-5D9D-DE92-0AD86D5BF818}"/>
-              </a:ext>
-            </a:extLst>
-          </p:cNvPr>
-          <p:cNvSpPr txBox="1">
-            <a:spLocks/>
-          </p:cNvSpPr>
-          <p:nvPr/>
-        </p:nvSpPr>
-        <p:spPr>
-          <a:xfrm>
-            <a:off x="990600" y="517525"/>
-            <a:ext cx="10515600" cy="1325563"/>
-          </a:xfrm>
-          <a:prstGeom prst="rect">
-            <a:avLst/>
-          </a:prstGeom>
-        </p:spPr>
-        <p:txBody>
-          <a:bodyPr vert="horz" lIns="91440" tIns="45720" rIns="91440" bIns="45720" rtlCol="0" anchor="ctr">
-            <a:normAutofit/>
-          </a:bodyPr>
-          <a:lstStyle>
-            <a:lvl1pPr algn="ctr" defTabSz="914400" rtl="0" eaLnBrk="1" latinLnBrk="0" hangingPunct="1">
-              <a:lnSpc>
-                <a:spcPct val="90000"/>
-              </a:lnSpc>
-              <a:spcBef>
-                <a:spcPct val="0"/>
-              </a:spcBef>
-              <a:buNone/>
-              <a:defRPr sz="6000" kern="1200">
-                <a:solidFill>
-                  <a:schemeClr val="tx1"/>
-                </a:solidFill>
-                <a:latin typeface="+mj-lt"/>
-                <a:ea typeface="+mj-ea"/>
-                <a:cs typeface="+mj-cs"/>
-              </a:defRPr>
-            </a:lvl1pPr>
-          </a:lstStyle>
-          <a:p>
-            <a:pPr algn="l"/>
-            <a:r>
-              <a:rPr lang="en-US" sz="4000" dirty="0"/>
-              <a:t>Outline</a:t>
-            </a:r>
-          </a:p>
-        </p:txBody>
-      </p:sp>
-      <p:sp>
-        <p:nvSpPr>
-          <p:cNvPr id="5" name="Arrow: Left 4">
-            <a:extLst>
-              <a:ext uri="{FF2B5EF4-FFF2-40B4-BE49-F238E27FC236}">
-                <a16:creationId xmlns:a16="http://schemas.microsoft.com/office/drawing/2014/main" id="{FD38933F-31C8-2AB5-6517-D9F2A467F431}"/>
-              </a:ext>
-            </a:extLst>
-          </p:cNvPr>
-          <p:cNvSpPr/>
-          <p:nvPr/>
-        </p:nvSpPr>
-        <p:spPr>
-          <a:xfrm rot="20710547">
-            <a:off x="6412261" y="2943630"/>
-            <a:ext cx="1913570" cy="1038099"/>
-          </a:xfrm>
-          <a:prstGeom prst="leftArrow">
-            <a:avLst/>
-          </a:prstGeom>
-          <a:solidFill>
-            <a:srgbClr val="FFFF00"/>
-          </a:solidFill>
-          <a:ln>
-            <a:noFill/>
-          </a:ln>
-        </p:spPr>
-        <p:style>
-          <a:lnRef idx="2">
-            <a:schemeClr val="accent1">
-              <a:shade val="50000"/>
-            </a:schemeClr>
-          </a:lnRef>
-          <a:fillRef idx="1">
-            <a:schemeClr val="accent1"/>
-          </a:fillRef>
-          <a:effectRef idx="0">
-            <a:schemeClr val="accent1"/>
-          </a:effectRef>
-          <a:fontRef idx="minor">
-            <a:schemeClr val="lt1"/>
-          </a:fontRef>
-        </p:style>
-        <p:txBody>
-          <a:bodyPr rtlCol="0" anchor="ctr"/>
-          <a:lstStyle/>
-          <a:p>
-            <a:pPr algn="ctr"/>
-            <a:r>
-              <a:rPr lang="en-US" dirty="0">
-                <a:solidFill>
-                  <a:srgbClr val="FF0000"/>
-                </a:solidFill>
-              </a:rPr>
-              <a:t>This is actually an optimization method!</a:t>
-            </a:r>
-          </a:p>
-        </p:txBody>
-      </p:sp>
-    </p:spTree>
-    <p:extLst>
-      <p:ext uri="{BB962C8B-B14F-4D97-AF65-F5344CB8AC3E}">
-        <p14:creationId xmlns:p14="http://schemas.microsoft.com/office/powerpoint/2010/main" val="3676436470"/>
-      </p:ext>
-    </p:extLst>
-  </p:cSld>
-  <p:clrMapOvr>
-    <a:masterClrMapping/>
-  </p:clrMapOvr>
-</p:sld>
-</file>
-
-<file path=ppt/slides/slide20.xml><?xml version="1.0" encoding="utf-8"?>
+<file path=ppt/slides/slide19.xml><?xml version="1.0" encoding="utf-8"?>
 <p:sld xmlns:a="http://schemas.openxmlformats.org/drawingml/2006/main" xmlns:r="http://schemas.openxmlformats.org/officeDocument/2006/relationships" xmlns:p="http://schemas.openxmlformats.org/presentationml/2006/main">
   <p:cSld>
     <p:spTree>
@@ -30499,7 +29118,7 @@
                   <a:rPr lang="en-US" sz="2000" dirty="0">
                     <a:latin typeface="+mj-lt"/>
                   </a:rPr>
-                  <a:t>Since a harmonic mean gives more weight to low values, the classifier will only get a </a:t>
+                  <a:t>The classifier will only get a </a:t>
                 </a:r>
                 <a:r>
                   <a:rPr lang="en-US" sz="2000" b="1" dirty="0">
@@ -30809,7 +29428,850 @@
 </p:sld>
 </file>
 
-<file path=ppt/slides/slide21.xml><?xml version="1.0" encoding="utf-8"?>
+<file path=ppt/slides/slide2.xml><?xml version="1.0" encoding="utf-8"?>
+<p:sld xmlns:a="http://schemas.openxmlformats.org/drawingml/2006/main" xmlns:r="http://schemas.openxmlformats.org/officeDocument/2006/relationships" xmlns:p="http://schemas.openxmlformats.org/presentationml/2006/main">
+  <p:cSld>
+    <p:spTree>
+      <p:nvGrpSpPr>
+        <p:cNvPr id="1" name=""/>
+        <p:cNvGrpSpPr/>
+        <p:nvPr/>
+      </p:nvGrpSpPr>
+      <p:grpSpPr>
+        <a:xfrm>
+          <a:off x="0" y="0"/>
+          <a:ext cx="0" cy="0"/>
+          <a:chOff x="0" y="0"/>
+          <a:chExt cx="0" cy="0"/>
+        </a:xfrm>
+      </p:grpSpPr>
+      <p:sp>
+        <p:nvSpPr>
+          <p:cNvPr id="4" name="Rectángulo 3">
+            <a:extLst>
+              <a:ext uri="{FF2B5EF4-FFF2-40B4-BE49-F238E27FC236}">
+                <a16:creationId xmlns:a16="http://schemas.microsoft.com/office/drawing/2014/main" id="{DAB19569-A64F-C399-1542-792E0E4616AC}"/>
+              </a:ext>
+            </a:extLst>
+          </p:cNvPr>
+          <p:cNvSpPr/>
+          <p:nvPr/>
+        </p:nvSpPr>
+        <p:spPr>
+          <a:xfrm>
+            <a:off x="0" y="0"/>
+            <a:ext cx="374469" cy="6858000"/>
+          </a:xfrm>
+          <a:prstGeom prst="rect">
+            <a:avLst/>
+          </a:prstGeom>
+        </p:spPr>
+        <p:style>
+          <a:lnRef idx="2">
+            <a:schemeClr val="accent2">
+              <a:shade val="50000"/>
+            </a:schemeClr>
+          </a:lnRef>
+          <a:fillRef idx="1">
+            <a:schemeClr val="accent2"/>
+          </a:fillRef>
+          <a:effectRef idx="0">
+            <a:schemeClr val="accent2"/>
+          </a:effectRef>
+          <a:fontRef idx="minor">
+            <a:schemeClr val="lt1"/>
+          </a:fontRef>
+        </p:style>
+        <p:txBody>
+          <a:bodyPr rtlCol="0" anchor="ctr"/>
+          <a:lstStyle/>
+          <a:p>
+            <a:pPr algn="ctr"/>
+            <a:endParaRPr lang="es-ES"/>
+          </a:p>
+        </p:txBody>
+      </p:sp>
+      <p:sp>
+        <p:nvSpPr>
+          <p:cNvPr id="152" name="Content Placeholder 2">
+            <a:extLst>
+              <a:ext uri="{FF2B5EF4-FFF2-40B4-BE49-F238E27FC236}">
+                <a16:creationId xmlns:a16="http://schemas.microsoft.com/office/drawing/2014/main" id="{B7719AE7-5D76-3CA6-C03E-F772C1896EF4}"/>
+              </a:ext>
+            </a:extLst>
+          </p:cNvPr>
+          <p:cNvSpPr txBox="1">
+            <a:spLocks/>
+          </p:cNvSpPr>
+          <p:nvPr/>
+        </p:nvSpPr>
+        <p:spPr>
+          <a:xfrm>
+            <a:off x="1494790" y="1875615"/>
+            <a:ext cx="9859010" cy="4351338"/>
+          </a:xfrm>
+          <a:prstGeom prst="rect">
+            <a:avLst/>
+          </a:prstGeom>
+        </p:spPr>
+        <p:txBody>
+          <a:bodyPr vert="horz" lIns="91440" tIns="45720" rIns="91440" bIns="45720" rtlCol="0">
+            <a:normAutofit fontScale="92500" lnSpcReduction="10000"/>
+          </a:bodyPr>
+          <a:lstStyle>
+            <a:lvl1pPr marL="0" indent="0" algn="ctr" defTabSz="914400" rtl="0" eaLnBrk="1" latinLnBrk="0" hangingPunct="1">
+              <a:lnSpc>
+                <a:spcPct val="90000"/>
+              </a:lnSpc>
+              <a:spcBef>
+                <a:spcPts val="1000"/>
+              </a:spcBef>
+              <a:buFont typeface="Arial" panose="020B0604020202020204" pitchFamily="34" charset="0"/>
+              <a:buNone/>
+              <a:defRPr sz="2400" kern="1200">
+                <a:solidFill>
+                  <a:schemeClr val="tx1"/>
+                </a:solidFill>
+                <a:latin typeface="+mn-lt"/>
+                <a:ea typeface="+mn-ea"/>
+                <a:cs typeface="+mn-cs"/>
+              </a:defRPr>
+            </a:lvl1pPr>
+            <a:lvl2pPr marL="457200" indent="0" algn="ctr" defTabSz="914400" rtl="0" eaLnBrk="1" latinLnBrk="0" hangingPunct="1">
+              <a:lnSpc>
+                <a:spcPct val="90000"/>
+              </a:lnSpc>
+              <a:spcBef>
+                <a:spcPts val="500"/>
+              </a:spcBef>
+              <a:buFont typeface="Arial" panose="020B0604020202020204" pitchFamily="34" charset="0"/>
+              <a:buNone/>
+              <a:defRPr sz="2000" kern="1200">
+                <a:solidFill>
+                  <a:schemeClr val="tx1"/>
+                </a:solidFill>
+                <a:latin typeface="+mn-lt"/>
+                <a:ea typeface="+mn-ea"/>
+                <a:cs typeface="+mn-cs"/>
+              </a:defRPr>
+            </a:lvl2pPr>
+            <a:lvl3pPr marL="914400" indent="0" algn="ctr" defTabSz="914400" rtl="0" eaLnBrk="1" latinLnBrk="0" hangingPunct="1">
+              <a:lnSpc>
+                <a:spcPct val="90000"/>
+              </a:lnSpc>
+              <a:spcBef>
+                <a:spcPts val="500"/>
+              </a:spcBef>
+              <a:buFont typeface="Arial" panose="020B0604020202020204" pitchFamily="34" charset="0"/>
+              <a:buNone/>
+              <a:defRPr sz="1800" kern="1200">
+                <a:solidFill>
+                  <a:schemeClr val="tx1"/>
+                </a:solidFill>
+                <a:latin typeface="+mn-lt"/>
+                <a:ea typeface="+mn-ea"/>
+                <a:cs typeface="+mn-cs"/>
+              </a:defRPr>
+            </a:lvl3pPr>
+            <a:lvl4pPr marL="1371600" indent="0" algn="ctr" defTabSz="914400" rtl="0" eaLnBrk="1" latinLnBrk="0" hangingPunct="1">
+              <a:lnSpc>
+                <a:spcPct val="90000"/>
+              </a:lnSpc>
+              <a:spcBef>
+                <a:spcPts val="500"/>
+              </a:spcBef>
+              <a:buFont typeface="Arial" panose="020B0604020202020204" pitchFamily="34" charset="0"/>
+              <a:buNone/>
+              <a:defRPr sz="1600" kern="1200">
+                <a:solidFill>
+                  <a:schemeClr val="tx1"/>
+                </a:solidFill>
+                <a:latin typeface="+mn-lt"/>
+                <a:ea typeface="+mn-ea"/>
+                <a:cs typeface="+mn-cs"/>
+              </a:defRPr>
+            </a:lvl4pPr>
+            <a:lvl5pPr marL="1828800" indent="0" algn="ctr" defTabSz="914400" rtl="0" eaLnBrk="1" latinLnBrk="0" hangingPunct="1">
+              <a:lnSpc>
+                <a:spcPct val="90000"/>
+              </a:lnSpc>
+              <a:spcBef>
+                <a:spcPts val="500"/>
+              </a:spcBef>
+              <a:buFont typeface="Arial" panose="020B0604020202020204" pitchFamily="34" charset="0"/>
+              <a:buNone/>
+              <a:defRPr sz="1600" kern="1200">
+                <a:solidFill>
+                  <a:schemeClr val="tx1"/>
+                </a:solidFill>
+                <a:latin typeface="+mn-lt"/>
+                <a:ea typeface="+mn-ea"/>
+                <a:cs typeface="+mn-cs"/>
+              </a:defRPr>
+            </a:lvl5pPr>
+            <a:lvl6pPr marL="2286000" indent="0" algn="ctr" defTabSz="914400" rtl="0" eaLnBrk="1" latinLnBrk="0" hangingPunct="1">
+              <a:lnSpc>
+                <a:spcPct val="90000"/>
+              </a:lnSpc>
+              <a:spcBef>
+                <a:spcPts val="500"/>
+              </a:spcBef>
+              <a:buFont typeface="Arial" panose="020B0604020202020204" pitchFamily="34" charset="0"/>
+              <a:buNone/>
+              <a:defRPr sz="1600" kern="1200">
+                <a:solidFill>
+                  <a:schemeClr val="tx1"/>
+                </a:solidFill>
+                <a:latin typeface="+mn-lt"/>
+                <a:ea typeface="+mn-ea"/>
+                <a:cs typeface="+mn-cs"/>
+              </a:defRPr>
+            </a:lvl6pPr>
+            <a:lvl7pPr marL="2743200" indent="0" algn="ctr" defTabSz="914400" rtl="0" eaLnBrk="1" latinLnBrk="0" hangingPunct="1">
+              <a:lnSpc>
+                <a:spcPct val="90000"/>
+              </a:lnSpc>
+              <a:spcBef>
+                <a:spcPts val="500"/>
+              </a:spcBef>
+              <a:buFont typeface="Arial" panose="020B0604020202020204" pitchFamily="34" charset="0"/>
+              <a:buNone/>
+              <a:defRPr sz="1600" kern="1200">
+                <a:solidFill>
+                  <a:schemeClr val="tx1"/>
+                </a:solidFill>
+                <a:latin typeface="+mn-lt"/>
+                <a:ea typeface="+mn-ea"/>
+                <a:cs typeface="+mn-cs"/>
+              </a:defRPr>
+            </a:lvl7pPr>
+            <a:lvl8pPr marL="3200400" indent="0" algn="ctr" defTabSz="914400" rtl="0" eaLnBrk="1" latinLnBrk="0" hangingPunct="1">
+              <a:lnSpc>
+                <a:spcPct val="90000"/>
+              </a:lnSpc>
+              <a:spcBef>
+                <a:spcPts val="500"/>
+              </a:spcBef>
+              <a:buFont typeface="Arial" panose="020B0604020202020204" pitchFamily="34" charset="0"/>
+              <a:buNone/>
+              <a:defRPr sz="1600" kern="1200">
+                <a:solidFill>
+                  <a:schemeClr val="tx1"/>
+                </a:solidFill>
+                <a:latin typeface="+mn-lt"/>
+                <a:ea typeface="+mn-ea"/>
+                <a:cs typeface="+mn-cs"/>
+              </a:defRPr>
+            </a:lvl8pPr>
+            <a:lvl9pPr marL="3657600" indent="0" algn="ctr" defTabSz="914400" rtl="0" eaLnBrk="1" latinLnBrk="0" hangingPunct="1">
+              <a:lnSpc>
+                <a:spcPct val="90000"/>
+              </a:lnSpc>
+              <a:spcBef>
+                <a:spcPts val="500"/>
+              </a:spcBef>
+              <a:buFont typeface="Arial" panose="020B0604020202020204" pitchFamily="34" charset="0"/>
+              <a:buNone/>
+              <a:defRPr sz="1600" kern="1200">
+                <a:solidFill>
+                  <a:schemeClr val="tx1"/>
+                </a:solidFill>
+                <a:latin typeface="+mn-lt"/>
+                <a:ea typeface="+mn-ea"/>
+                <a:cs typeface="+mn-cs"/>
+              </a:defRPr>
+            </a:lvl9pPr>
+          </a:lstStyle>
+          <a:p>
+            <a:pPr marL="457200" indent="-457200" algn="l">
+              <a:lnSpc>
+                <a:spcPct val="100000"/>
+              </a:lnSpc>
+              <a:buFont typeface="Wingdings" panose="05000000000000000000" pitchFamily="2" charset="2"/>
+              <a:buChar char="§"/>
+            </a:pPr>
+            <a:r>
+              <a:rPr lang="en-US" sz="2800" dirty="0">
+                <a:latin typeface="+mj-lt"/>
+                <a:cs typeface="Times New Roman" panose="02020603050405020304" pitchFamily="18" charset="0"/>
+              </a:rPr>
+              <a:t>Classifying?</a:t>
+            </a:r>
+          </a:p>
+          <a:p>
+            <a:pPr marL="457200" indent="-457200" algn="l">
+              <a:lnSpc>
+                <a:spcPct val="100000"/>
+              </a:lnSpc>
+              <a:buFont typeface="Wingdings" panose="05000000000000000000" pitchFamily="2" charset="2"/>
+              <a:buChar char="§"/>
+            </a:pPr>
+            <a:r>
+              <a:rPr lang="en-US" sz="2800" dirty="0">
+                <a:latin typeface="+mj-lt"/>
+                <a:cs typeface="Times New Roman" panose="02020603050405020304" pitchFamily="18" charset="0"/>
+              </a:rPr>
+              <a:t>Classifiers</a:t>
+            </a:r>
+          </a:p>
+          <a:p>
+            <a:pPr marL="914400" lvl="1" indent="-457200" algn="l">
+              <a:lnSpc>
+                <a:spcPct val="100000"/>
+              </a:lnSpc>
+              <a:buFont typeface="Wingdings" panose="05000000000000000000" pitchFamily="2" charset="2"/>
+              <a:buChar char="§"/>
+            </a:pPr>
+            <a:r>
+              <a:rPr lang="en-US" sz="2400" dirty="0">
+                <a:latin typeface="+mj-lt"/>
+                <a:cs typeface="Times New Roman" panose="02020603050405020304" pitchFamily="18" charset="0"/>
+              </a:rPr>
+              <a:t>Logistic Regression</a:t>
+            </a:r>
+          </a:p>
+          <a:p>
+            <a:pPr marL="914400" lvl="1" indent="-457200" algn="l">
+              <a:lnSpc>
+                <a:spcPct val="100000"/>
+              </a:lnSpc>
+              <a:buFont typeface="Wingdings" panose="05000000000000000000" pitchFamily="2" charset="2"/>
+              <a:buChar char="§"/>
+            </a:pPr>
+            <a:r>
+              <a:rPr lang="en-US" sz="2400" dirty="0">
+                <a:latin typeface="+mj-lt"/>
+                <a:cs typeface="Times New Roman" panose="02020603050405020304" pitchFamily="18" charset="0"/>
+              </a:rPr>
+              <a:t>Linear discriminant analysis (LDA)</a:t>
+            </a:r>
+          </a:p>
+          <a:p>
+            <a:pPr marL="914400" lvl="1" indent="-457200" algn="l">
+              <a:lnSpc>
+                <a:spcPct val="100000"/>
+              </a:lnSpc>
+              <a:buFont typeface="Wingdings" panose="05000000000000000000" pitchFamily="2" charset="2"/>
+              <a:buChar char="§"/>
+            </a:pPr>
+            <a:r>
+              <a:rPr lang="en-US" sz="2400" dirty="0">
+                <a:latin typeface="+mj-lt"/>
+                <a:cs typeface="Times New Roman" panose="02020603050405020304" pitchFamily="18" charset="0"/>
+              </a:rPr>
+              <a:t>Stochastic Gradient Descent (SGD)</a:t>
+            </a:r>
+          </a:p>
+          <a:p>
+            <a:pPr marL="914400" lvl="1" indent="-457200" algn="l">
+              <a:lnSpc>
+                <a:spcPct val="100000"/>
+              </a:lnSpc>
+              <a:buFont typeface="Wingdings" panose="05000000000000000000" pitchFamily="2" charset="2"/>
+              <a:buChar char="§"/>
+            </a:pPr>
+            <a:r>
+              <a:rPr lang="en-US" sz="2400" dirty="0">
+                <a:latin typeface="+mj-lt"/>
+                <a:cs typeface="Times New Roman" panose="02020603050405020304" pitchFamily="18" charset="0"/>
+              </a:rPr>
+              <a:t>Support Vector Machines (SVM)</a:t>
+            </a:r>
+          </a:p>
+          <a:p>
+            <a:pPr marL="914400" lvl="1" indent="-457200" algn="l">
+              <a:lnSpc>
+                <a:spcPct val="100000"/>
+              </a:lnSpc>
+              <a:buFont typeface="Wingdings" panose="05000000000000000000" pitchFamily="2" charset="2"/>
+              <a:buChar char="§"/>
+            </a:pPr>
+            <a:r>
+              <a:rPr lang="en-US" sz="2400" i="1" dirty="0">
+                <a:latin typeface="+mj-lt"/>
+                <a:cs typeface="Times New Roman" panose="02020603050405020304" pitchFamily="18" charset="0"/>
+              </a:rPr>
+              <a:t>K</a:t>
+            </a:r>
+            <a:r>
+              <a:rPr lang="en-US" sz="2400" dirty="0">
+                <a:latin typeface="+mj-lt"/>
+                <a:cs typeface="Times New Roman" panose="02020603050405020304" pitchFamily="18" charset="0"/>
+              </a:rPr>
+              <a:t>-Nearest Neighbors (KNN)</a:t>
+            </a:r>
+            <a:endParaRPr lang="en-US" sz="2400" i="1" dirty="0">
+              <a:latin typeface="+mj-lt"/>
+              <a:cs typeface="Times New Roman" panose="02020603050405020304" pitchFamily="18" charset="0"/>
+            </a:endParaRPr>
+          </a:p>
+          <a:p>
+            <a:pPr marL="457200" indent="-457200" algn="l">
+              <a:lnSpc>
+                <a:spcPct val="100000"/>
+              </a:lnSpc>
+              <a:buFont typeface="Wingdings" panose="05000000000000000000" pitchFamily="2" charset="2"/>
+              <a:buChar char="§"/>
+            </a:pPr>
+            <a:r>
+              <a:rPr lang="en-US" sz="2800" dirty="0">
+                <a:latin typeface="+mj-lt"/>
+                <a:cs typeface="Times New Roman" panose="02020603050405020304" pitchFamily="18" charset="0"/>
+              </a:rPr>
+              <a:t>Performance measures</a:t>
+            </a:r>
+          </a:p>
+          <a:p>
+            <a:pPr marL="457200" indent="-457200" algn="l">
+              <a:lnSpc>
+                <a:spcPct val="100000"/>
+              </a:lnSpc>
+              <a:buFont typeface="Wingdings" panose="05000000000000000000" pitchFamily="2" charset="2"/>
+              <a:buChar char="§"/>
+            </a:pPr>
+            <a:r>
+              <a:rPr lang="en-US" sz="2800" dirty="0">
+                <a:latin typeface="+mj-lt"/>
+                <a:cs typeface="Times New Roman" panose="02020603050405020304" pitchFamily="18" charset="0"/>
+              </a:rPr>
+              <a:t>Training a binary classifier</a:t>
+            </a:r>
+          </a:p>
+          <a:p>
+            <a:pPr marL="457200" indent="-457200" algn="l">
+              <a:lnSpc>
+                <a:spcPct val="100000"/>
+              </a:lnSpc>
+              <a:buFont typeface="Wingdings" panose="05000000000000000000" pitchFamily="2" charset="2"/>
+              <a:buChar char="§"/>
+            </a:pPr>
+            <a:r>
+              <a:rPr lang="en-US" sz="2800" dirty="0">
+                <a:latin typeface="+mj-lt"/>
+                <a:cs typeface="Times New Roman" panose="02020603050405020304" pitchFamily="18" charset="0"/>
+              </a:rPr>
+              <a:t>Multiclass (multinomial) classification</a:t>
+            </a:r>
+          </a:p>
+        </p:txBody>
+      </p:sp>
+      <p:sp>
+        <p:nvSpPr>
+          <p:cNvPr id="155" name="Rectangle 143">
+            <a:extLst>
+              <a:ext uri="{FF2B5EF4-FFF2-40B4-BE49-F238E27FC236}">
+                <a16:creationId xmlns:a16="http://schemas.microsoft.com/office/drawing/2014/main" id="{7524B8A9-611C-185B-E9C1-20FB914D23F6}"/>
+              </a:ext>
+            </a:extLst>
+          </p:cNvPr>
+          <p:cNvSpPr>
+            <a:spLocks noChangeArrowheads="1"/>
+          </p:cNvSpPr>
+          <p:nvPr/>
+        </p:nvSpPr>
+        <p:spPr bwMode="auto">
+          <a:xfrm>
+            <a:off x="448342" y="6401243"/>
+            <a:ext cx="5730175" cy="307777"/>
+          </a:xfrm>
+          <a:prstGeom prst="rect">
+            <a:avLst/>
+          </a:prstGeom>
+          <a:noFill/>
+          <a:ln>
+            <a:noFill/>
+          </a:ln>
+          <a:effectLst/>
+          <a:extLst>
+            <a:ext uri="{909E8E84-426E-40DD-AFC4-6F175D3DCCD1}">
+              <a14:hiddenFill xmlns:a14="http://schemas.microsoft.com/office/drawing/2010/main">
+                <a:solidFill>
+                  <a:schemeClr val="accent1"/>
+                </a:solidFill>
+              </a14:hiddenFill>
+            </a:ext>
+            <a:ext uri="{91240B29-F687-4F45-9708-019B960494DF}">
+              <a14:hiddenLine xmlns:a14="http://schemas.microsoft.com/office/drawing/2010/main" w="9525">
+                <a:solidFill>
+                  <a:schemeClr val="tx1"/>
+                </a:solidFill>
+                <a:miter lim="800000"/>
+                <a:headEnd/>
+                <a:tailEnd/>
+              </a14:hiddenLine>
+            </a:ext>
+            <a:ext uri="{AF507438-7753-43E0-B8FC-AC1667EBCBE1}">
+              <a14:hiddenEffects xmlns:a14="http://schemas.microsoft.com/office/drawing/2010/main">
+                <a:effectLst>
+                  <a:outerShdw dist="35921" dir="2700000" algn="ctr" rotWithShape="0">
+                    <a:schemeClr val="bg2"/>
+                  </a:outerShdw>
+                </a:effectLst>
+              </a14:hiddenEffects>
+            </a:ext>
+          </a:extLst>
+        </p:spPr>
+        <p:txBody>
+          <a:bodyPr vert="horz" wrap="square" lIns="91440" tIns="45720" rIns="91440" bIns="45720" numCol="1" anchor="ctr" anchorCtr="0" compatLnSpc="1">
+            <a:prstTxWarp prst="textNoShape">
+              <a:avLst/>
+            </a:prstTxWarp>
+            <a:spAutoFit/>
+          </a:bodyPr>
+          <a:lstStyle/>
+          <a:p>
+            <a:pPr marL="0" marR="0" lvl="0" indent="0" algn="l" defTabSz="914400" rtl="0" eaLnBrk="0" fontAlgn="base" latinLnBrk="0" hangingPunct="0">
+              <a:lnSpc>
+                <a:spcPct val="100000"/>
+              </a:lnSpc>
+              <a:spcBef>
+                <a:spcPct val="0"/>
+              </a:spcBef>
+              <a:spcAft>
+                <a:spcPct val="0"/>
+              </a:spcAft>
+              <a:buClrTx/>
+              <a:buSzTx/>
+              <a:buFontTx/>
+              <a:buNone/>
+              <a:tabLst/>
+            </a:pPr>
+            <a:r>
+              <a:rPr kumimoji="0" lang="en-US" altLang="es-ES" sz="1400" b="0" i="0" u="none" strike="noStrike" cap="none" normalizeH="0" baseline="0" dirty="0">
+                <a:ln>
+                  <a:noFill/>
+                </a:ln>
+                <a:solidFill>
+                  <a:srgbClr val="F4A200"/>
+                </a:solidFill>
+                <a:effectLst/>
+                <a:latin typeface="Arial" panose="020B0604020202020204" pitchFamily="34" charset="0"/>
+                <a:ea typeface="Myriad Pro Light"/>
+                <a:cs typeface="Times New Roman" panose="02020603050405020304" pitchFamily="18" charset="0"/>
+              </a:rPr>
+              <a:t>Master in Quantitative Economic Analysis </a:t>
+            </a:r>
+            <a:r>
+              <a:rPr kumimoji="0" lang="en-US" altLang="es-ES" sz="1400" b="0" i="0" u="none" strike="noStrike" cap="none" normalizeH="0" baseline="0" dirty="0" err="1">
+                <a:ln>
+                  <a:noFill/>
+                </a:ln>
+                <a:solidFill>
+                  <a:srgbClr val="F4A200"/>
+                </a:solidFill>
+                <a:effectLst/>
+                <a:latin typeface="Arial" panose="020B0604020202020204" pitchFamily="34" charset="0"/>
+                <a:ea typeface="Myriad Pro Light"/>
+                <a:cs typeface="Times New Roman" panose="02020603050405020304" pitchFamily="18" charset="0"/>
+              </a:rPr>
+              <a:t>MQuEA</a:t>
+            </a:r>
+            <a:endParaRPr kumimoji="0" lang="es-ES" altLang="es-ES" sz="500" b="0" i="0" u="none" strike="noStrike" cap="none" normalizeH="0" baseline="0" dirty="0">
+              <a:ln>
+                <a:noFill/>
+              </a:ln>
+              <a:solidFill>
+                <a:schemeClr val="tx1"/>
+              </a:solidFill>
+              <a:effectLst/>
+              <a:latin typeface="Arial" panose="020B0604020202020204" pitchFamily="34" charset="0"/>
+            </a:endParaRPr>
+          </a:p>
+        </p:txBody>
+      </p:sp>
+      <p:sp>
+        <p:nvSpPr>
+          <p:cNvPr id="156" name="Rectangle 143">
+            <a:extLst>
+              <a:ext uri="{FF2B5EF4-FFF2-40B4-BE49-F238E27FC236}">
+                <a16:creationId xmlns:a16="http://schemas.microsoft.com/office/drawing/2014/main" id="{8AE2F004-1A39-90D0-AE0D-900815603718}"/>
+              </a:ext>
+            </a:extLst>
+          </p:cNvPr>
+          <p:cNvSpPr>
+            <a:spLocks noChangeArrowheads="1"/>
+          </p:cNvSpPr>
+          <p:nvPr/>
+        </p:nvSpPr>
+        <p:spPr bwMode="auto">
+          <a:xfrm>
+            <a:off x="6186394" y="6411881"/>
+            <a:ext cx="5730175" cy="307777"/>
+          </a:xfrm>
+          <a:prstGeom prst="rect">
+            <a:avLst/>
+          </a:prstGeom>
+          <a:noFill/>
+          <a:ln>
+            <a:noFill/>
+          </a:ln>
+          <a:effectLst/>
+          <a:extLst>
+            <a:ext uri="{909E8E84-426E-40DD-AFC4-6F175D3DCCD1}">
+              <a14:hiddenFill xmlns:a14="http://schemas.microsoft.com/office/drawing/2010/main">
+                <a:solidFill>
+                  <a:schemeClr val="accent1"/>
+                </a:solidFill>
+              </a14:hiddenFill>
+            </a:ext>
+            <a:ext uri="{91240B29-F687-4F45-9708-019B960494DF}">
+              <a14:hiddenLine xmlns:a14="http://schemas.microsoft.com/office/drawing/2010/main" w="9525">
+                <a:solidFill>
+                  <a:schemeClr val="tx1"/>
+                </a:solidFill>
+                <a:miter lim="800000"/>
+                <a:headEnd/>
+                <a:tailEnd/>
+              </a14:hiddenLine>
+            </a:ext>
+            <a:ext uri="{AF507438-7753-43E0-B8FC-AC1667EBCBE1}">
+              <a14:hiddenEffects xmlns:a14="http://schemas.microsoft.com/office/drawing/2010/main">
+                <a:effectLst>
+                  <a:outerShdw dist="35921" dir="2700000" algn="ctr" rotWithShape="0">
+                    <a:schemeClr val="bg2"/>
+                  </a:outerShdw>
+                </a:effectLst>
+              </a14:hiddenEffects>
+            </a:ext>
+          </a:extLst>
+        </p:spPr>
+        <p:txBody>
+          <a:bodyPr vert="horz" wrap="square" lIns="91440" tIns="45720" rIns="91440" bIns="45720" numCol="1" anchor="ctr" anchorCtr="0" compatLnSpc="1">
+            <a:prstTxWarp prst="textNoShape">
+              <a:avLst/>
+            </a:prstTxWarp>
+            <a:spAutoFit/>
+          </a:bodyPr>
+          <a:lstStyle/>
+          <a:p>
+            <a:pPr marL="0" marR="0" lvl="0" indent="0" algn="r" defTabSz="914400" rtl="0" eaLnBrk="0" fontAlgn="base" latinLnBrk="0" hangingPunct="0">
+              <a:lnSpc>
+                <a:spcPct val="100000"/>
+              </a:lnSpc>
+              <a:spcBef>
+                <a:spcPct val="0"/>
+              </a:spcBef>
+              <a:spcAft>
+                <a:spcPct val="0"/>
+              </a:spcAft>
+              <a:buClrTx/>
+              <a:buSzTx/>
+              <a:buFontTx/>
+              <a:buNone/>
+              <a:tabLst/>
+            </a:pPr>
+            <a:r>
+              <a:rPr kumimoji="0" lang="en-US" altLang="es-ES" sz="1400" b="0" i="0" u="none" strike="noStrike" cap="none" normalizeH="0" baseline="0" dirty="0">
+                <a:ln>
+                  <a:noFill/>
+                </a:ln>
+                <a:solidFill>
+                  <a:srgbClr val="F4A200"/>
+                </a:solidFill>
+                <a:effectLst/>
+                <a:latin typeface="Arial" panose="020B0604020202020204" pitchFamily="34" charset="0"/>
+                <a:ea typeface="Myriad Pro Light"/>
+                <a:cs typeface="Times New Roman" panose="02020603050405020304" pitchFamily="18" charset="0"/>
+              </a:rPr>
+              <a:t>Universidad </a:t>
+            </a:r>
+            <a:r>
+              <a:rPr kumimoji="0" lang="en-US" altLang="es-ES" sz="1400" b="0" i="0" u="none" strike="noStrike" cap="none" normalizeH="0" baseline="0" dirty="0" err="1">
+                <a:ln>
+                  <a:noFill/>
+                </a:ln>
+                <a:solidFill>
+                  <a:srgbClr val="F4A200"/>
+                </a:solidFill>
+                <a:effectLst/>
+                <a:latin typeface="Arial" panose="020B0604020202020204" pitchFamily="34" charset="0"/>
+                <a:ea typeface="Myriad Pro Light"/>
+                <a:cs typeface="Times New Roman" panose="02020603050405020304" pitchFamily="18" charset="0"/>
+              </a:rPr>
+              <a:t>Aut</a:t>
+            </a:r>
+            <a:r>
+              <a:rPr lang="en-US" altLang="es-ES" sz="1400" dirty="0" err="1">
+                <a:solidFill>
+                  <a:srgbClr val="F4A200"/>
+                </a:solidFill>
+                <a:latin typeface="Arial" panose="020B0604020202020204" pitchFamily="34" charset="0"/>
+                <a:ea typeface="Myriad Pro Light"/>
+                <a:cs typeface="Times New Roman" panose="02020603050405020304" pitchFamily="18" charset="0"/>
+              </a:rPr>
+              <a:t>ó</a:t>
+            </a:r>
+            <a:r>
+              <a:rPr kumimoji="0" lang="en-US" altLang="es-ES" sz="1400" b="0" i="0" u="none" strike="noStrike" cap="none" normalizeH="0" baseline="0" dirty="0" err="1">
+                <a:ln>
+                  <a:noFill/>
+                </a:ln>
+                <a:solidFill>
+                  <a:srgbClr val="F4A200"/>
+                </a:solidFill>
+                <a:effectLst/>
+                <a:latin typeface="Arial" panose="020B0604020202020204" pitchFamily="34" charset="0"/>
+                <a:ea typeface="Myriad Pro Light"/>
+                <a:cs typeface="Times New Roman" panose="02020603050405020304" pitchFamily="18" charset="0"/>
+              </a:rPr>
+              <a:t>noma</a:t>
+            </a:r>
+            <a:r>
+              <a:rPr kumimoji="0" lang="en-US" altLang="es-ES" sz="1400" b="0" i="0" u="none" strike="noStrike" cap="none" normalizeH="0" baseline="0" dirty="0">
+                <a:ln>
+                  <a:noFill/>
+                </a:ln>
+                <a:solidFill>
+                  <a:srgbClr val="F4A200"/>
+                </a:solidFill>
+                <a:effectLst/>
+                <a:latin typeface="Arial" panose="020B0604020202020204" pitchFamily="34" charset="0"/>
+                <a:ea typeface="Myriad Pro Light"/>
+                <a:cs typeface="Times New Roman" panose="02020603050405020304" pitchFamily="18" charset="0"/>
+              </a:rPr>
+              <a:t> de Madrid</a:t>
+            </a:r>
+            <a:endParaRPr kumimoji="0" lang="es-ES" altLang="es-ES" sz="500" b="0" i="0" u="none" strike="noStrike" cap="none" normalizeH="0" baseline="0" dirty="0">
+              <a:ln>
+                <a:noFill/>
+              </a:ln>
+              <a:solidFill>
+                <a:schemeClr val="tx1"/>
+              </a:solidFill>
+              <a:effectLst/>
+              <a:latin typeface="Arial" panose="020B0604020202020204" pitchFamily="34" charset="0"/>
+            </a:endParaRPr>
+          </a:p>
+        </p:txBody>
+      </p:sp>
+      <p:sp>
+        <p:nvSpPr>
+          <p:cNvPr id="2" name="Title 1">
+            <a:extLst>
+              <a:ext uri="{FF2B5EF4-FFF2-40B4-BE49-F238E27FC236}">
+                <a16:creationId xmlns:a16="http://schemas.microsoft.com/office/drawing/2014/main" id="{6F9A13AB-C9B4-5D9D-DE92-0AD86D5BF818}"/>
+              </a:ext>
+            </a:extLst>
+          </p:cNvPr>
+          <p:cNvSpPr txBox="1">
+            <a:spLocks/>
+          </p:cNvSpPr>
+          <p:nvPr/>
+        </p:nvSpPr>
+        <p:spPr>
+          <a:xfrm>
+            <a:off x="990600" y="517525"/>
+            <a:ext cx="10515600" cy="1325563"/>
+          </a:xfrm>
+          <a:prstGeom prst="rect">
+            <a:avLst/>
+          </a:prstGeom>
+        </p:spPr>
+        <p:txBody>
+          <a:bodyPr vert="horz" lIns="91440" tIns="45720" rIns="91440" bIns="45720" rtlCol="0" anchor="ctr">
+            <a:normAutofit/>
+          </a:bodyPr>
+          <a:lstStyle>
+            <a:lvl1pPr algn="ctr" defTabSz="914400" rtl="0" eaLnBrk="1" latinLnBrk="0" hangingPunct="1">
+              <a:lnSpc>
+                <a:spcPct val="90000"/>
+              </a:lnSpc>
+              <a:spcBef>
+                <a:spcPct val="0"/>
+              </a:spcBef>
+              <a:buNone/>
+              <a:defRPr sz="6000" kern="1200">
+                <a:solidFill>
+                  <a:schemeClr val="tx1"/>
+                </a:solidFill>
+                <a:latin typeface="+mj-lt"/>
+                <a:ea typeface="+mj-ea"/>
+                <a:cs typeface="+mj-cs"/>
+              </a:defRPr>
+            </a:lvl1pPr>
+          </a:lstStyle>
+          <a:p>
+            <a:pPr algn="l"/>
+            <a:r>
+              <a:rPr lang="en-US" sz="4000" dirty="0"/>
+              <a:t>Outline</a:t>
+            </a:r>
+          </a:p>
+        </p:txBody>
+      </p:sp>
+      <p:sp>
+        <p:nvSpPr>
+          <p:cNvPr id="5" name="Arrow: Left 4">
+            <a:extLst>
+              <a:ext uri="{FF2B5EF4-FFF2-40B4-BE49-F238E27FC236}">
+                <a16:creationId xmlns:a16="http://schemas.microsoft.com/office/drawing/2014/main" id="{FD38933F-31C8-2AB5-6517-D9F2A467F431}"/>
+              </a:ext>
+            </a:extLst>
+          </p:cNvPr>
+          <p:cNvSpPr/>
+          <p:nvPr/>
+        </p:nvSpPr>
+        <p:spPr>
+          <a:xfrm rot="20710547">
+            <a:off x="6412261" y="2943630"/>
+            <a:ext cx="1913570" cy="1038099"/>
+          </a:xfrm>
+          <a:prstGeom prst="leftArrow">
+            <a:avLst/>
+          </a:prstGeom>
+          <a:solidFill>
+            <a:srgbClr val="FFFF00"/>
+          </a:solidFill>
+          <a:ln>
+            <a:noFill/>
+          </a:ln>
+        </p:spPr>
+        <p:style>
+          <a:lnRef idx="2">
+            <a:schemeClr val="accent1">
+              <a:shade val="50000"/>
+            </a:schemeClr>
+          </a:lnRef>
+          <a:fillRef idx="1">
+            <a:schemeClr val="accent1"/>
+          </a:fillRef>
+          <a:effectRef idx="0">
+            <a:schemeClr val="accent1"/>
+          </a:effectRef>
+          <a:fontRef idx="minor">
+            <a:schemeClr val="lt1"/>
+          </a:fontRef>
+        </p:style>
+        <p:txBody>
+          <a:bodyPr rtlCol="0" anchor="ctr"/>
+          <a:lstStyle/>
+          <a:p>
+            <a:pPr algn="ctr"/>
+            <a:r>
+              <a:rPr lang="en-US" dirty="0">
+                <a:solidFill>
+                  <a:srgbClr val="FF0000"/>
+                </a:solidFill>
+              </a:rPr>
+              <a:t>This is actually an optimization method!</a:t>
+            </a:r>
+          </a:p>
+        </p:txBody>
+      </p:sp>
+    </p:spTree>
+    <p:extLst>
+      <p:ext uri="{BB962C8B-B14F-4D97-AF65-F5344CB8AC3E}">
+        <p14:creationId xmlns:p14="http://schemas.microsoft.com/office/powerpoint/2010/main" val="3676436470"/>
+      </p:ext>
+    </p:extLst>
+  </p:cSld>
+  <p:clrMapOvr>
+    <a:masterClrMapping/>
+  </p:clrMapOvr>
+</p:sld>
+</file>
+
+<file path=ppt/slides/slide20.xml><?xml version="1.0" encoding="utf-8"?>
 <p:sld xmlns:a="http://schemas.openxmlformats.org/drawingml/2006/main" xmlns:r="http://schemas.openxmlformats.org/officeDocument/2006/relationships" xmlns:p="http://schemas.openxmlformats.org/presentationml/2006/main">
   <p:cSld>
     <p:spTree>
@@ -31281,6 +30743,291 @@
           </a:prstGeom>
         </p:spPr>
       </p:pic>
+      <p:sp>
+        <p:nvSpPr>
+          <p:cNvPr id="7" name="TextBox 6">
+            <a:extLst>
+              <a:ext uri="{FF2B5EF4-FFF2-40B4-BE49-F238E27FC236}">
+                <a16:creationId xmlns:a16="http://schemas.microsoft.com/office/drawing/2014/main" id="{37720FBC-73EA-B6D0-4103-EA431CC846B4}"/>
+              </a:ext>
+            </a:extLst>
+          </p:cNvPr>
+          <p:cNvSpPr txBox="1"/>
+          <p:nvPr/>
+        </p:nvSpPr>
+        <p:spPr>
+          <a:xfrm>
+            <a:off x="9227382" y="3710710"/>
+            <a:ext cx="2493989" cy="738664"/>
+          </a:xfrm>
+          <a:prstGeom prst="rect">
+            <a:avLst/>
+          </a:prstGeom>
+          <a:noFill/>
+        </p:spPr>
+        <p:txBody>
+          <a:bodyPr wrap="square" rtlCol="0">
+            <a:spAutoFit/>
+          </a:bodyPr>
+          <a:lstStyle/>
+          <a:p>
+            <a:pPr algn="ctr"/>
+            <a:r>
+              <a:rPr lang="es-ES" sz="1400" dirty="0">
+                <a:solidFill>
+                  <a:srgbClr val="FF0000"/>
+                </a:solidFill>
+              </a:rPr>
+              <a:t>*</a:t>
+            </a:r>
+            <a:r>
+              <a:rPr lang="es-ES" sz="1400" dirty="0" err="1">
+                <a:solidFill>
+                  <a:srgbClr val="FF0000"/>
+                </a:solidFill>
+              </a:rPr>
+              <a:t>Images</a:t>
+            </a:r>
+            <a:r>
+              <a:rPr lang="es-ES" sz="1400" dirty="0">
+                <a:solidFill>
+                  <a:srgbClr val="FF0000"/>
+                </a:solidFill>
+              </a:rPr>
+              <a:t> </a:t>
+            </a:r>
+            <a:r>
+              <a:rPr lang="es-ES" sz="1400" dirty="0" err="1">
+                <a:solidFill>
+                  <a:srgbClr val="FF0000"/>
+                </a:solidFill>
+              </a:rPr>
+              <a:t>ordered</a:t>
+            </a:r>
+            <a:r>
+              <a:rPr lang="es-ES" sz="1400" dirty="0">
+                <a:solidFill>
+                  <a:srgbClr val="FF0000"/>
+                </a:solidFill>
+              </a:rPr>
+              <a:t> </a:t>
+            </a:r>
+            <a:r>
+              <a:rPr lang="es-ES" sz="1400" dirty="0" err="1">
+                <a:solidFill>
+                  <a:srgbClr val="FF0000"/>
+                </a:solidFill>
+              </a:rPr>
+              <a:t>according</a:t>
+            </a:r>
+            <a:r>
+              <a:rPr lang="es-ES" sz="1400" dirty="0">
+                <a:solidFill>
+                  <a:srgbClr val="FF0000"/>
+                </a:solidFill>
+              </a:rPr>
+              <a:t> </a:t>
+            </a:r>
+            <a:r>
+              <a:rPr lang="es-ES" sz="1400" dirty="0" err="1">
+                <a:solidFill>
+                  <a:srgbClr val="FF0000"/>
+                </a:solidFill>
+              </a:rPr>
+              <a:t>to</a:t>
+            </a:r>
+            <a:r>
+              <a:rPr lang="es-ES" sz="1400" dirty="0">
+                <a:solidFill>
+                  <a:srgbClr val="FF0000"/>
+                </a:solidFill>
+              </a:rPr>
+              <a:t> </a:t>
+            </a:r>
+            <a:r>
+              <a:rPr lang="es-ES" sz="1400" dirty="0" err="1">
+                <a:solidFill>
+                  <a:srgbClr val="FF0000"/>
+                </a:solidFill>
+              </a:rPr>
+              <a:t>their</a:t>
+            </a:r>
+            <a:r>
+              <a:rPr lang="es-ES" sz="1400" dirty="0">
+                <a:solidFill>
+                  <a:srgbClr val="FF0000"/>
+                </a:solidFill>
+              </a:rPr>
+              <a:t> (</a:t>
+            </a:r>
+            <a:r>
+              <a:rPr lang="es-ES" sz="1400" dirty="0" err="1">
+                <a:solidFill>
+                  <a:srgbClr val="FF0000"/>
+                </a:solidFill>
+              </a:rPr>
+              <a:t>increasing</a:t>
+            </a:r>
+            <a:r>
+              <a:rPr lang="es-ES" sz="1400" dirty="0">
+                <a:solidFill>
+                  <a:srgbClr val="FF0000"/>
+                </a:solidFill>
+              </a:rPr>
+              <a:t>) </a:t>
+            </a:r>
+            <a:r>
+              <a:rPr lang="es-ES" sz="1400" dirty="0" err="1">
+                <a:solidFill>
+                  <a:srgbClr val="FF0000"/>
+                </a:solidFill>
+              </a:rPr>
+              <a:t>probability</a:t>
+            </a:r>
+            <a:r>
+              <a:rPr lang="es-ES" sz="1400" dirty="0">
+                <a:solidFill>
+                  <a:srgbClr val="FF0000"/>
+                </a:solidFill>
+              </a:rPr>
+              <a:t> </a:t>
+            </a:r>
+            <a:r>
+              <a:rPr lang="es-ES" sz="1400" dirty="0" err="1">
+                <a:solidFill>
+                  <a:srgbClr val="FF0000"/>
+                </a:solidFill>
+              </a:rPr>
+              <a:t>of</a:t>
+            </a:r>
+            <a:r>
+              <a:rPr lang="es-ES" sz="1400" dirty="0">
+                <a:solidFill>
+                  <a:srgbClr val="FF0000"/>
+                </a:solidFill>
+              </a:rPr>
+              <a:t> “</a:t>
+            </a:r>
+            <a:r>
+              <a:rPr lang="es-ES" sz="1400" dirty="0" err="1">
+                <a:solidFill>
+                  <a:srgbClr val="FF0000"/>
+                </a:solidFill>
+              </a:rPr>
+              <a:t>being</a:t>
+            </a:r>
+            <a:r>
+              <a:rPr lang="es-ES" sz="1400" dirty="0">
+                <a:solidFill>
+                  <a:srgbClr val="FF0000"/>
+                </a:solidFill>
+              </a:rPr>
+              <a:t> a 5”</a:t>
+            </a:r>
+            <a:endParaRPr lang="en-US" sz="1400" dirty="0">
+              <a:solidFill>
+                <a:srgbClr val="FF0000"/>
+              </a:solidFill>
+            </a:endParaRPr>
+          </a:p>
+        </p:txBody>
+      </p:sp>
+      <p:sp>
+        <p:nvSpPr>
+          <p:cNvPr id="9" name="TextBox 8">
+            <a:extLst>
+              <a:ext uri="{FF2B5EF4-FFF2-40B4-BE49-F238E27FC236}">
+                <a16:creationId xmlns:a16="http://schemas.microsoft.com/office/drawing/2014/main" id="{E1954FAC-9C26-4E01-5260-4D6A0B3FD4A4}"/>
+              </a:ext>
+            </a:extLst>
+          </p:cNvPr>
+          <p:cNvSpPr txBox="1"/>
+          <p:nvPr/>
+        </p:nvSpPr>
+        <p:spPr>
+          <a:xfrm>
+            <a:off x="2866937" y="3873654"/>
+            <a:ext cx="1068217" cy="276999"/>
+          </a:xfrm>
+          <a:prstGeom prst="rect">
+            <a:avLst/>
+          </a:prstGeom>
+          <a:noFill/>
+        </p:spPr>
+        <p:txBody>
+          <a:bodyPr wrap="square" rtlCol="0">
+            <a:spAutoFit/>
+          </a:bodyPr>
+          <a:lstStyle/>
+          <a:p>
+            <a:pPr algn="ctr"/>
+            <a:r>
+              <a:rPr lang="es-ES" sz="1200" dirty="0">
+                <a:solidFill>
+                  <a:srgbClr val="FF0000"/>
+                </a:solidFill>
+              </a:rPr>
+              <a:t>TP</a:t>
+            </a:r>
+            <a:r>
+              <a:rPr lang="en-US" sz="1200" dirty="0">
+                <a:solidFill>
+                  <a:srgbClr val="FF0000"/>
+                </a:solidFill>
+              </a:rPr>
+              <a:t>/(TP+FP)</a:t>
+            </a:r>
+          </a:p>
+        </p:txBody>
+      </p:sp>
+      <p:sp>
+        <p:nvSpPr>
+          <p:cNvPr id="10" name="TextBox 9">
+            <a:extLst>
+              <a:ext uri="{FF2B5EF4-FFF2-40B4-BE49-F238E27FC236}">
+                <a16:creationId xmlns:a16="http://schemas.microsoft.com/office/drawing/2014/main" id="{A29FFB1B-A0A9-B55C-B155-77C01FCDD992}"/>
+              </a:ext>
+            </a:extLst>
+          </p:cNvPr>
+          <p:cNvSpPr txBox="1"/>
+          <p:nvPr/>
+        </p:nvSpPr>
+        <p:spPr>
+          <a:xfrm>
+            <a:off x="2882488" y="4050428"/>
+            <a:ext cx="1068217" cy="276999"/>
+          </a:xfrm>
+          <a:prstGeom prst="rect">
+            <a:avLst/>
+          </a:prstGeom>
+          <a:noFill/>
+        </p:spPr>
+        <p:txBody>
+          <a:bodyPr wrap="square" rtlCol="0">
+            <a:spAutoFit/>
+          </a:bodyPr>
+          <a:lstStyle/>
+          <a:p>
+            <a:pPr algn="ctr"/>
+            <a:r>
+              <a:rPr lang="es-ES" sz="1200" dirty="0">
+                <a:solidFill>
+                  <a:srgbClr val="FF0000"/>
+                </a:solidFill>
+              </a:rPr>
+              <a:t>TP</a:t>
+            </a:r>
+            <a:r>
+              <a:rPr lang="en-US" sz="1200" dirty="0">
+                <a:solidFill>
+                  <a:srgbClr val="FF0000"/>
+                </a:solidFill>
+              </a:rPr>
+              <a:t>/(TP+FN)</a:t>
+            </a:r>
+          </a:p>
+        </p:txBody>
+      </p:sp>
     </p:spTree>
     <p:extLst>
       <p:ext uri="{BB962C8B-B14F-4D97-AF65-F5344CB8AC3E}">
@@ -31294,7 +31041,7 @@
 </p:sld>
 </file>
 
-<file path=ppt/slides/slide22.xml><?xml version="1.0" encoding="utf-8"?>
+<file path=ppt/slides/slide21.xml><?xml version="1.0" encoding="utf-8"?>
 <p:sld xmlns:a="http://schemas.openxmlformats.org/drawingml/2006/main" xmlns:r="http://schemas.openxmlformats.org/officeDocument/2006/relationships" xmlns:p="http://schemas.openxmlformats.org/presentationml/2006/main">
   <p:cSld>
     <p:spTree>
@@ -31800,7 +31547,7 @@
 </p:sld>
 </file>
 
-<file path=ppt/slides/slide23.xml><?xml version="1.0" encoding="utf-8"?>
+<file path=ppt/slides/slide22.xml><?xml version="1.0" encoding="utf-8"?>
 <p:sld xmlns:a="http://schemas.openxmlformats.org/drawingml/2006/main" xmlns:r="http://schemas.openxmlformats.org/officeDocument/2006/relationships" xmlns:p="http://schemas.openxmlformats.org/presentationml/2006/main">
   <p:cSld>
     <p:spTree>
@@ -32252,7 +31999,7 @@
               <a:rPr lang="en-US" sz="2000" dirty="0">
                 <a:latin typeface="+mj-lt"/>
               </a:rPr>
-              <a:t>(FPR), or, which the same, </a:t>
+              <a:t>(FPR), or, which is the same, </a:t>
             </a:r>
             <a:r>
               <a:rPr lang="en-US" sz="2000" i="1" dirty="0">
@@ -32264,13 +32011,43 @@
               <a:rPr lang="en-US" sz="2000" dirty="0">
                 <a:latin typeface="+mj-lt"/>
               </a:rPr>
-              <a:t> (Recall) versus </a:t>
+              <a:t> (</a:t>
             </a:r>
             <a:r>
               <a:rPr lang="en-US" sz="2000" i="1" dirty="0">
                 <a:latin typeface="+mj-lt"/>
               </a:rPr>
-              <a:t>1 - Specificity</a:t>
+              <a:t>true positive rate</a:t>
+            </a:r>
+            <a:r>
+              <a:rPr lang="en-US" sz="2000" dirty="0">
+                <a:latin typeface="+mj-lt"/>
+              </a:rPr>
+              <a:t>) versus </a:t>
+            </a:r>
+            <a:r>
+              <a:rPr lang="en-US" sz="2000" i="1" dirty="0">
+                <a:latin typeface="+mj-lt"/>
+              </a:rPr>
+              <a:t>1 – Specificity </a:t>
+            </a:r>
+            <a:r>
+              <a:rPr lang="en-US" sz="2000" dirty="0">
+                <a:latin typeface="+mj-lt"/>
+              </a:rPr>
+              <a:t>(</a:t>
+            </a:r>
+            <a:r>
+              <a:rPr lang="en-US" sz="2000" i="1" dirty="0">
+                <a:latin typeface="+mj-lt"/>
+              </a:rPr>
+              <a:t>true negative rate</a:t>
+            </a:r>
+            <a:r>
+              <a:rPr lang="en-US" sz="2000" dirty="0">
+                <a:latin typeface="+mj-lt"/>
+              </a:rPr>
+              <a:t>)</a:t>
             </a:r>
           </a:p>
           <a:p>
@@ -32333,7 +32110,7 @@
         </p:blipFill>
         <p:spPr>
           <a:xfrm>
-            <a:off x="1471468" y="3156299"/>
+            <a:off x="1471468" y="3202345"/>
             <a:ext cx="3840488" cy="3155601"/>
           </a:xfrm>
           <a:prstGeom prst="rect">
@@ -32402,442 +32179,6 @@
     <p:extLst>
       <p:ext uri="{BB962C8B-B14F-4D97-AF65-F5344CB8AC3E}">
         <p14:creationId xmlns:p14="http://schemas.microsoft.com/office/powerpoint/2010/main" val="4119110571"/>
-      </p:ext>
-    </p:extLst>
-  </p:cSld>
-  <p:clrMapOvr>
-    <a:masterClrMapping/>
-  </p:clrMapOvr>
-</p:sld>
-</file>
-
-<file path=ppt/slides/slide24.xml><?xml version="1.0" encoding="utf-8"?>
-<p:sld xmlns:a="http://schemas.openxmlformats.org/drawingml/2006/main" xmlns:r="http://schemas.openxmlformats.org/officeDocument/2006/relationships" xmlns:p="http://schemas.openxmlformats.org/presentationml/2006/main">
-  <p:cSld>
-    <p:spTree>
-      <p:nvGrpSpPr>
-        <p:cNvPr id="1" name=""/>
-        <p:cNvGrpSpPr/>
-        <p:nvPr/>
-      </p:nvGrpSpPr>
-      <p:grpSpPr>
-        <a:xfrm>
-          <a:off x="0" y="0"/>
-          <a:ext cx="0" cy="0"/>
-          <a:chOff x="0" y="0"/>
-          <a:chExt cx="0" cy="0"/>
-        </a:xfrm>
-      </p:grpSpPr>
-      <p:sp>
-        <p:nvSpPr>
-          <p:cNvPr id="2" name="Title 1">
-            <a:extLst>
-              <a:ext uri="{FF2B5EF4-FFF2-40B4-BE49-F238E27FC236}">
-                <a16:creationId xmlns:a16="http://schemas.microsoft.com/office/drawing/2014/main" id="{15C869D5-4E6C-6766-7E06-98B25E955D87}"/>
-              </a:ext>
-            </a:extLst>
-          </p:cNvPr>
-          <p:cNvSpPr>
-            <a:spLocks noGrp="1"/>
-          </p:cNvSpPr>
-          <p:nvPr>
-            <p:ph type="title"/>
-          </p:nvPr>
-        </p:nvSpPr>
-        <p:spPr/>
-        <p:txBody>
-          <a:bodyPr>
-            <a:normAutofit/>
-          </a:bodyPr>
-          <a:lstStyle/>
-          <a:p>
-            <a:r>
-              <a:rPr lang="en-US" sz="4000" dirty="0"/>
-              <a:t>Performance measures</a:t>
-            </a:r>
-          </a:p>
-        </p:txBody>
-      </p:sp>
-      <p:sp>
-        <p:nvSpPr>
-          <p:cNvPr id="4" name="Rectángulo 3">
-            <a:extLst>
-              <a:ext uri="{FF2B5EF4-FFF2-40B4-BE49-F238E27FC236}">
-                <a16:creationId xmlns:a16="http://schemas.microsoft.com/office/drawing/2014/main" id="{27E372AA-1ACE-5D2D-EDED-66DB6F5F4F88}"/>
-              </a:ext>
-            </a:extLst>
-          </p:cNvPr>
-          <p:cNvSpPr/>
-          <p:nvPr/>
-        </p:nvSpPr>
-        <p:spPr>
-          <a:xfrm>
-            <a:off x="0" y="0"/>
-            <a:ext cx="374469" cy="6858000"/>
-          </a:xfrm>
-          <a:prstGeom prst="rect">
-            <a:avLst/>
-          </a:prstGeom>
-        </p:spPr>
-        <p:style>
-          <a:lnRef idx="2">
-            <a:schemeClr val="accent2">
-              <a:shade val="50000"/>
-            </a:schemeClr>
-          </a:lnRef>
-          <a:fillRef idx="1">
-            <a:schemeClr val="accent2"/>
-          </a:fillRef>
-          <a:effectRef idx="0">
-            <a:schemeClr val="accent2"/>
-          </a:effectRef>
-          <a:fontRef idx="minor">
-            <a:schemeClr val="lt1"/>
-          </a:fontRef>
-        </p:style>
-        <p:txBody>
-          <a:bodyPr rtlCol="0" anchor="ctr"/>
-          <a:lstStyle/>
-          <a:p>
-            <a:pPr algn="ctr"/>
-            <a:endParaRPr lang="es-ES"/>
-          </a:p>
-        </p:txBody>
-      </p:sp>
-      <p:sp>
-        <p:nvSpPr>
-          <p:cNvPr id="5" name="Rectangle 143">
-            <a:extLst>
-              <a:ext uri="{FF2B5EF4-FFF2-40B4-BE49-F238E27FC236}">
-                <a16:creationId xmlns:a16="http://schemas.microsoft.com/office/drawing/2014/main" id="{4CAC6C5C-8798-AF6F-C852-967659577BF3}"/>
-              </a:ext>
-            </a:extLst>
-          </p:cNvPr>
-          <p:cNvSpPr>
-            <a:spLocks noChangeArrowheads="1"/>
-          </p:cNvSpPr>
-          <p:nvPr/>
-        </p:nvSpPr>
-        <p:spPr bwMode="auto">
-          <a:xfrm>
-            <a:off x="448342" y="6482412"/>
-            <a:ext cx="5730175" cy="276999"/>
-          </a:xfrm>
-          <a:prstGeom prst="rect">
-            <a:avLst/>
-          </a:prstGeom>
-          <a:noFill/>
-          <a:ln>
-            <a:noFill/>
-          </a:ln>
-          <a:effectLst/>
-          <a:extLst>
-            <a:ext uri="{909E8E84-426E-40DD-AFC4-6F175D3DCCD1}">
-              <a14:hiddenFill xmlns:a14="http://schemas.microsoft.com/office/drawing/2010/main">
-                <a:solidFill>
-                  <a:schemeClr val="accent1"/>
-                </a:solidFill>
-              </a14:hiddenFill>
-            </a:ext>
-            <a:ext uri="{91240B29-F687-4F45-9708-019B960494DF}">
-              <a14:hiddenLine xmlns:a14="http://schemas.microsoft.com/office/drawing/2010/main" w="9525">
-                <a:solidFill>
-                  <a:schemeClr val="tx1"/>
-                </a:solidFill>
-                <a:miter lim="800000"/>
-                <a:headEnd/>
-                <a:tailEnd/>
-              </a14:hiddenLine>
-            </a:ext>
-            <a:ext uri="{AF507438-7753-43E0-B8FC-AC1667EBCBE1}">
-              <a14:hiddenEffects xmlns:a14="http://schemas.microsoft.com/office/drawing/2010/main">
-                <a:effectLst>
-                  <a:outerShdw dist="35921" dir="2700000" algn="ctr" rotWithShape="0">
-                    <a:schemeClr val="bg2"/>
-                  </a:outerShdw>
-                </a:effectLst>
-              </a14:hiddenEffects>
-            </a:ext>
-          </a:extLst>
-        </p:spPr>
-        <p:txBody>
-          <a:bodyPr vert="horz" wrap="square" lIns="91440" tIns="45720" rIns="91440" bIns="45720" numCol="1" anchor="ctr" anchorCtr="0" compatLnSpc="1">
-            <a:prstTxWarp prst="textNoShape">
-              <a:avLst/>
-            </a:prstTxWarp>
-            <a:spAutoFit/>
-          </a:bodyPr>
-          <a:lstStyle/>
-          <a:p>
-            <a:pPr marL="0" marR="0" lvl="0" indent="0" algn="l" defTabSz="914400" rtl="0" eaLnBrk="0" fontAlgn="base" latinLnBrk="0" hangingPunct="0">
-              <a:lnSpc>
-                <a:spcPct val="100000"/>
-              </a:lnSpc>
-              <a:spcBef>
-                <a:spcPct val="0"/>
-              </a:spcBef>
-              <a:spcAft>
-                <a:spcPct val="0"/>
-              </a:spcAft>
-              <a:buClrTx/>
-              <a:buSzTx/>
-              <a:buFontTx/>
-              <a:buNone/>
-              <a:tabLst/>
-            </a:pPr>
-            <a:r>
-              <a:rPr kumimoji="0" lang="en-US" altLang="es-ES" sz="1200" b="0" i="0" u="none" strike="noStrike" cap="none" normalizeH="0" baseline="0" dirty="0">
-                <a:ln>
-                  <a:noFill/>
-                </a:ln>
-                <a:solidFill>
-                  <a:srgbClr val="F4A200"/>
-                </a:solidFill>
-                <a:effectLst/>
-                <a:latin typeface="Arial" panose="020B0604020202020204" pitchFamily="34" charset="0"/>
-                <a:ea typeface="Myriad Pro Light"/>
-                <a:cs typeface="Times New Roman" panose="02020603050405020304" pitchFamily="18" charset="0"/>
-              </a:rPr>
-              <a:t>Master in Quantitative Economic Analysis </a:t>
-            </a:r>
-            <a:r>
-              <a:rPr kumimoji="0" lang="en-US" altLang="es-ES" sz="1200" b="0" i="0" u="none" strike="noStrike" cap="none" normalizeH="0" baseline="0" dirty="0" err="1">
-                <a:ln>
-                  <a:noFill/>
-                </a:ln>
-                <a:solidFill>
-                  <a:srgbClr val="F4A200"/>
-                </a:solidFill>
-                <a:effectLst/>
-                <a:latin typeface="Arial" panose="020B0604020202020204" pitchFamily="34" charset="0"/>
-                <a:ea typeface="Myriad Pro Light"/>
-                <a:cs typeface="Times New Roman" panose="02020603050405020304" pitchFamily="18" charset="0"/>
-              </a:rPr>
-              <a:t>MQuEA</a:t>
-            </a:r>
-            <a:endParaRPr kumimoji="0" lang="es-ES" altLang="es-ES" sz="400" b="0" i="0" u="none" strike="noStrike" cap="none" normalizeH="0" baseline="0" dirty="0">
-              <a:ln>
-                <a:noFill/>
-              </a:ln>
-              <a:solidFill>
-                <a:schemeClr val="tx1"/>
-              </a:solidFill>
-              <a:effectLst/>
-              <a:latin typeface="Arial" panose="020B0604020202020204" pitchFamily="34" charset="0"/>
-            </a:endParaRPr>
-          </a:p>
-        </p:txBody>
-      </p:sp>
-      <p:sp>
-        <p:nvSpPr>
-          <p:cNvPr id="6" name="Rectangle 143">
-            <a:extLst>
-              <a:ext uri="{FF2B5EF4-FFF2-40B4-BE49-F238E27FC236}">
-                <a16:creationId xmlns:a16="http://schemas.microsoft.com/office/drawing/2014/main" id="{09E0FB32-C00A-A390-E094-76FC3EA5C288}"/>
-              </a:ext>
-            </a:extLst>
-          </p:cNvPr>
-          <p:cNvSpPr>
-            <a:spLocks noChangeArrowheads="1"/>
-          </p:cNvSpPr>
-          <p:nvPr/>
-        </p:nvSpPr>
-        <p:spPr bwMode="auto">
-          <a:xfrm>
-            <a:off x="6186394" y="6493050"/>
-            <a:ext cx="5730175" cy="276999"/>
-          </a:xfrm>
-          <a:prstGeom prst="rect">
-            <a:avLst/>
-          </a:prstGeom>
-          <a:noFill/>
-          <a:ln>
-            <a:noFill/>
-          </a:ln>
-          <a:effectLst/>
-          <a:extLst>
-            <a:ext uri="{909E8E84-426E-40DD-AFC4-6F175D3DCCD1}">
-              <a14:hiddenFill xmlns:a14="http://schemas.microsoft.com/office/drawing/2010/main">
-                <a:solidFill>
-                  <a:schemeClr val="accent1"/>
-                </a:solidFill>
-              </a14:hiddenFill>
-            </a:ext>
-            <a:ext uri="{91240B29-F687-4F45-9708-019B960494DF}">
-              <a14:hiddenLine xmlns:a14="http://schemas.microsoft.com/office/drawing/2010/main" w="9525">
-                <a:solidFill>
-                  <a:schemeClr val="tx1"/>
-                </a:solidFill>
-                <a:miter lim="800000"/>
-                <a:headEnd/>
-                <a:tailEnd/>
-              </a14:hiddenLine>
-            </a:ext>
-            <a:ext uri="{AF507438-7753-43E0-B8FC-AC1667EBCBE1}">
-              <a14:hiddenEffects xmlns:a14="http://schemas.microsoft.com/office/drawing/2010/main">
-                <a:effectLst>
-                  <a:outerShdw dist="35921" dir="2700000" algn="ctr" rotWithShape="0">
-                    <a:schemeClr val="bg2"/>
-                  </a:outerShdw>
-                </a:effectLst>
-              </a14:hiddenEffects>
-            </a:ext>
-          </a:extLst>
-        </p:spPr>
-        <p:txBody>
-          <a:bodyPr vert="horz" wrap="square" lIns="91440" tIns="45720" rIns="91440" bIns="45720" numCol="1" anchor="ctr" anchorCtr="0" compatLnSpc="1">
-            <a:prstTxWarp prst="textNoShape">
-              <a:avLst/>
-            </a:prstTxWarp>
-            <a:spAutoFit/>
-          </a:bodyPr>
-          <a:lstStyle/>
-          <a:p>
-            <a:pPr marL="0" marR="0" lvl="0" indent="0" algn="r" defTabSz="914400" rtl="0" eaLnBrk="0" fontAlgn="base" latinLnBrk="0" hangingPunct="0">
-              <a:lnSpc>
-                <a:spcPct val="100000"/>
-              </a:lnSpc>
-              <a:spcBef>
-                <a:spcPct val="0"/>
-              </a:spcBef>
-              <a:spcAft>
-                <a:spcPct val="0"/>
-              </a:spcAft>
-              <a:buClrTx/>
-              <a:buSzTx/>
-              <a:buFontTx/>
-              <a:buNone/>
-              <a:tabLst/>
-            </a:pPr>
-            <a:r>
-              <a:rPr kumimoji="0" lang="en-US" altLang="es-ES" sz="1200" b="0" i="0" u="none" strike="noStrike" cap="none" normalizeH="0" baseline="0" dirty="0">
-                <a:ln>
-                  <a:noFill/>
-                </a:ln>
-                <a:solidFill>
-                  <a:srgbClr val="F4A200"/>
-                </a:solidFill>
-                <a:effectLst/>
-                <a:latin typeface="Arial" panose="020B0604020202020204" pitchFamily="34" charset="0"/>
-                <a:ea typeface="Myriad Pro Light"/>
-                <a:cs typeface="Times New Roman" panose="02020603050405020304" pitchFamily="18" charset="0"/>
-              </a:rPr>
-              <a:t>Universidad </a:t>
-            </a:r>
-            <a:r>
-              <a:rPr kumimoji="0" lang="en-US" altLang="es-ES" sz="1200" b="0" i="0" u="none" strike="noStrike" cap="none" normalizeH="0" baseline="0" dirty="0" err="1">
-                <a:ln>
-                  <a:noFill/>
-                </a:ln>
-                <a:solidFill>
-                  <a:srgbClr val="F4A200"/>
-                </a:solidFill>
-                <a:effectLst/>
-                <a:latin typeface="Arial" panose="020B0604020202020204" pitchFamily="34" charset="0"/>
-                <a:ea typeface="Myriad Pro Light"/>
-                <a:cs typeface="Times New Roman" panose="02020603050405020304" pitchFamily="18" charset="0"/>
-              </a:rPr>
-              <a:t>Aut</a:t>
-            </a:r>
-            <a:r>
-              <a:rPr lang="en-US" altLang="es-ES" sz="1200" dirty="0" err="1">
-                <a:solidFill>
-                  <a:srgbClr val="F4A200"/>
-                </a:solidFill>
-                <a:latin typeface="Arial" panose="020B0604020202020204" pitchFamily="34" charset="0"/>
-                <a:ea typeface="Myriad Pro Light"/>
-                <a:cs typeface="Times New Roman" panose="02020603050405020304" pitchFamily="18" charset="0"/>
-              </a:rPr>
-              <a:t>ó</a:t>
-            </a:r>
-            <a:r>
-              <a:rPr kumimoji="0" lang="en-US" altLang="es-ES" sz="1200" b="0" i="0" u="none" strike="noStrike" cap="none" normalizeH="0" baseline="0" dirty="0" err="1">
-                <a:ln>
-                  <a:noFill/>
-                </a:ln>
-                <a:solidFill>
-                  <a:srgbClr val="F4A200"/>
-                </a:solidFill>
-                <a:effectLst/>
-                <a:latin typeface="Arial" panose="020B0604020202020204" pitchFamily="34" charset="0"/>
-                <a:ea typeface="Myriad Pro Light"/>
-                <a:cs typeface="Times New Roman" panose="02020603050405020304" pitchFamily="18" charset="0"/>
-              </a:rPr>
-              <a:t>noma</a:t>
-            </a:r>
-            <a:r>
-              <a:rPr kumimoji="0" lang="en-US" altLang="es-ES" sz="1200" b="0" i="0" u="none" strike="noStrike" cap="none" normalizeH="0" baseline="0" dirty="0">
-                <a:ln>
-                  <a:noFill/>
-                </a:ln>
-                <a:solidFill>
-                  <a:srgbClr val="F4A200"/>
-                </a:solidFill>
-                <a:effectLst/>
-                <a:latin typeface="Arial" panose="020B0604020202020204" pitchFamily="34" charset="0"/>
-                <a:ea typeface="Myriad Pro Light"/>
-                <a:cs typeface="Times New Roman" panose="02020603050405020304" pitchFamily="18" charset="0"/>
-              </a:rPr>
-              <a:t> de Madrid</a:t>
-            </a:r>
-            <a:endParaRPr kumimoji="0" lang="es-ES" altLang="es-ES" sz="400" b="0" i="0" u="none" strike="noStrike" cap="none" normalizeH="0" baseline="0" dirty="0">
-              <a:ln>
-                <a:noFill/>
-              </a:ln>
-              <a:solidFill>
-                <a:schemeClr val="tx1"/>
-              </a:solidFill>
-              <a:effectLst/>
-              <a:latin typeface="Arial" panose="020B0604020202020204" pitchFamily="34" charset="0"/>
-            </a:endParaRPr>
-          </a:p>
-        </p:txBody>
-      </p:sp>
-      <p:sp>
-        <p:nvSpPr>
-          <p:cNvPr id="3" name="Content Placeholder 2">
-            <a:extLst>
-              <a:ext uri="{FF2B5EF4-FFF2-40B4-BE49-F238E27FC236}">
-                <a16:creationId xmlns:a16="http://schemas.microsoft.com/office/drawing/2014/main" id="{F7EF27C5-01B7-9F60-ECDA-A1F376586FC5}"/>
-              </a:ext>
-            </a:extLst>
-          </p:cNvPr>
-          <p:cNvSpPr>
-            <a:spLocks noGrp="1"/>
-          </p:cNvSpPr>
-          <p:nvPr>
-            <p:ph idx="1"/>
-          </p:nvPr>
-        </p:nvSpPr>
-        <p:spPr/>
-        <p:txBody>
-          <a:bodyPr anchor="ctr">
-            <a:normAutofit/>
-          </a:bodyPr>
-          <a:lstStyle/>
-          <a:p>
-            <a:pPr marL="0" indent="0" algn="ctr">
-              <a:lnSpc>
-                <a:spcPct val="100000"/>
-              </a:lnSpc>
-              <a:buNone/>
-            </a:pPr>
-            <a:r>
-              <a:rPr lang="en-US" sz="3200" dirty="0">
-                <a:latin typeface="+mj-lt"/>
-              </a:rPr>
-              <a:t>Let’s jump into the notebook to see all of this in practice and estimating a couple of classifiers</a:t>
-            </a:r>
-            <a:endParaRPr lang="en-US" sz="3200" b="1" i="1" dirty="0">
-              <a:latin typeface="+mj-lt"/>
-            </a:endParaRPr>
-          </a:p>
-        </p:txBody>
-      </p:sp>
-    </p:spTree>
-    <p:extLst>
-      <p:ext uri="{BB962C8B-B14F-4D97-AF65-F5344CB8AC3E}">
-        <p14:creationId xmlns:p14="http://schemas.microsoft.com/office/powerpoint/2010/main" val="2805654642"/>
       </p:ext>
     </p:extLst>
   </p:cSld>
@@ -36082,8 +35423,8 @@
           </a:graphicData>
         </a:graphic>
       </p:graphicFrame>
-      <mc:AlternateContent xmlns:mc="http://schemas.openxmlformats.org/markup-compatibility/2006">
-        <mc:Choice xmlns:a14="http://schemas.microsoft.com/office/drawing/2010/main" Requires="a14">
+      <mc:AlternateContent xmlns:mc="http://schemas.openxmlformats.org/markup-compatibility/2006" xmlns:a14="http://schemas.microsoft.com/office/drawing/2010/main">
+        <mc:Choice Requires="a14">
           <p:sp>
             <p:nvSpPr>
               <p:cNvPr id="8" name="TextBox 7">
@@ -36273,7 +35614,7 @@
             </p:txBody>
           </p:sp>
         </mc:Choice>
-        <mc:Fallback>
+        <mc:Fallback xmlns="">
           <p:sp>
             <p:nvSpPr>
               <p:cNvPr id="8" name="TextBox 7">
@@ -36378,8 +35719,8 @@
           </a:p>
         </p:txBody>
       </p:sp>
-      <mc:AlternateContent xmlns:mc="http://schemas.openxmlformats.org/markup-compatibility/2006">
-        <mc:Choice xmlns:a14="http://schemas.microsoft.com/office/drawing/2010/main" Requires="a14">
+      <mc:AlternateContent xmlns:mc="http://schemas.openxmlformats.org/markup-compatibility/2006" xmlns:a14="http://schemas.microsoft.com/office/drawing/2010/main">
+        <mc:Choice Requires="a14">
           <p:sp>
             <p:nvSpPr>
               <p:cNvPr id="3" name="Content Placeholder 2">
@@ -36600,7 +35941,7 @@
             </p:txBody>
           </p:sp>
         </mc:Choice>
-        <mc:Fallback>
+        <mc:Fallback xmlns="">
           <p:sp>
             <p:nvSpPr>
               <p:cNvPr id="3" name="Content Placeholder 2">

--- a/Course content/Slides/Topic 4 - Classification.pptx
+++ b/Course content/Slides/Topic 4 - Classification.pptx
@@ -5,7 +5,7 @@
     <p:sldMasterId id="2147483648" r:id="rId1"/>
   </p:sldMasterIdLst>
   <p:notesMasterIdLst>
-    <p:notesMasterId r:id="rId24"/>
+    <p:notesMasterId r:id="rId21"/>
   </p:notesMasterIdLst>
   <p:sldIdLst>
     <p:sldId id="278" r:id="rId2"/>
@@ -18,18 +18,15 @@
     <p:sldId id="286" r:id="rId9"/>
     <p:sldId id="288" r:id="rId10"/>
     <p:sldId id="289" r:id="rId11"/>
-    <p:sldId id="283" r:id="rId12"/>
-    <p:sldId id="287" r:id="rId13"/>
-    <p:sldId id="284" r:id="rId14"/>
-    <p:sldId id="290" r:id="rId15"/>
-    <p:sldId id="291" r:id="rId16"/>
-    <p:sldId id="292" r:id="rId17"/>
-    <p:sldId id="294" r:id="rId18"/>
-    <p:sldId id="295" r:id="rId19"/>
-    <p:sldId id="296" r:id="rId20"/>
-    <p:sldId id="297" r:id="rId21"/>
-    <p:sldId id="298" r:id="rId22"/>
-    <p:sldId id="299" r:id="rId23"/>
+    <p:sldId id="290" r:id="rId12"/>
+    <p:sldId id="291" r:id="rId13"/>
+    <p:sldId id="292" r:id="rId14"/>
+    <p:sldId id="294" r:id="rId15"/>
+    <p:sldId id="295" r:id="rId16"/>
+    <p:sldId id="296" r:id="rId17"/>
+    <p:sldId id="297" r:id="rId18"/>
+    <p:sldId id="298" r:id="rId19"/>
+    <p:sldId id="299" r:id="rId20"/>
   </p:sldIdLst>
   <p:sldSz cx="12192000" cy="6858000"/>
   <p:notesSz cx="6858000" cy="9144000"/>
@@ -147,6 +144,274 @@
 </p:presentation>
 </file>
 
+<file path=ppt/revisionInfo.xml><?xml version="1.0" encoding="utf-8"?>
+<p1510:revInfo xmlns:a="http://schemas.openxmlformats.org/drawingml/2006/main" xmlns:r="http://schemas.openxmlformats.org/officeDocument/2006/relationships" xmlns:p1510="http://schemas.microsoft.com/office/powerpoint/2015/10/main">
+  <p1510:revLst>
+    <p1510:client id="{3C9ABCAB-493E-4D17-839E-F2056CFBE8FD}" v="19" dt="2023-10-30T17:04:11.925"/>
+  </p1510:revLst>
+</p1510:revInfo>
+</file>
+
+<file path=ppt/changesInfos/changesInfo1.xml><?xml version="1.0" encoding="utf-8"?>
+<pc:chgInfo xmlns:a="http://schemas.openxmlformats.org/drawingml/2006/main" xmlns:r="http://schemas.openxmlformats.org/officeDocument/2006/relationships" xmlns:ac="http://schemas.microsoft.com/office/drawing/2013/main/command" xmlns:pc="http://schemas.microsoft.com/office/powerpoint/2013/main/command">
+  <pc:docChgLst>
+    <pc:chgData name="Javier Bas Vicente" userId="96bf8a96-3310-496c-8c7e-8a087f977faa" providerId="ADAL" clId="{3C9ABCAB-493E-4D17-839E-F2056CFBE8FD}"/>
+    <pc:docChg chg="undo custSel delSld modSld">
+      <pc:chgData name="Javier Bas Vicente" userId="96bf8a96-3310-496c-8c7e-8a087f977faa" providerId="ADAL" clId="{3C9ABCAB-493E-4D17-839E-F2056CFBE8FD}" dt="2023-10-30T17:04:11.925" v="711" actId="313"/>
+      <pc:docMkLst>
+        <pc:docMk/>
+      </pc:docMkLst>
+      <pc:sldChg chg="modSp mod">
+        <pc:chgData name="Javier Bas Vicente" userId="96bf8a96-3310-496c-8c7e-8a087f977faa" providerId="ADAL" clId="{3C9ABCAB-493E-4D17-839E-F2056CFBE8FD}" dt="2023-10-30T15:41:20.178" v="31" actId="6549"/>
+        <pc:sldMkLst>
+          <pc:docMk/>
+          <pc:sldMk cId="3761768786" sldId="258"/>
+        </pc:sldMkLst>
+        <pc:spChg chg="mod">
+          <ac:chgData name="Javier Bas Vicente" userId="96bf8a96-3310-496c-8c7e-8a087f977faa" providerId="ADAL" clId="{3C9ABCAB-493E-4D17-839E-F2056CFBE8FD}" dt="2023-10-30T15:41:20.178" v="31" actId="6549"/>
+          <ac:spMkLst>
+            <pc:docMk/>
+            <pc:sldMk cId="3761768786" sldId="258"/>
+            <ac:spMk id="3" creationId="{068F0C39-44FF-99B2-7103-C6D38F774B5B}"/>
+          </ac:spMkLst>
+        </pc:spChg>
+      </pc:sldChg>
+      <pc:sldChg chg="modSp mod">
+        <pc:chgData name="Javier Bas Vicente" userId="96bf8a96-3310-496c-8c7e-8a087f977faa" providerId="ADAL" clId="{3C9ABCAB-493E-4D17-839E-F2056CFBE8FD}" dt="2023-10-30T15:38:13.495" v="29" actId="1038"/>
+        <pc:sldMkLst>
+          <pc:docMk/>
+          <pc:sldMk cId="3676436470" sldId="279"/>
+        </pc:sldMkLst>
+        <pc:spChg chg="mod">
+          <ac:chgData name="Javier Bas Vicente" userId="96bf8a96-3310-496c-8c7e-8a087f977faa" providerId="ADAL" clId="{3C9ABCAB-493E-4D17-839E-F2056CFBE8FD}" dt="2023-10-30T15:38:13.495" v="29" actId="1038"/>
+          <ac:spMkLst>
+            <pc:docMk/>
+            <pc:sldMk cId="3676436470" sldId="279"/>
+            <ac:spMk id="5" creationId="{FD38933F-31C8-2AB5-6517-D9F2A467F431}"/>
+          </ac:spMkLst>
+        </pc:spChg>
+      </pc:sldChg>
+      <pc:sldChg chg="modSp mod">
+        <pc:chgData name="Javier Bas Vicente" userId="96bf8a96-3310-496c-8c7e-8a087f977faa" providerId="ADAL" clId="{3C9ABCAB-493E-4D17-839E-F2056CFBE8FD}" dt="2023-10-30T15:42:12.502" v="56" actId="20577"/>
+        <pc:sldMkLst>
+          <pc:docMk/>
+          <pc:sldMk cId="564201163" sldId="280"/>
+        </pc:sldMkLst>
+        <pc:spChg chg="mod">
+          <ac:chgData name="Javier Bas Vicente" userId="96bf8a96-3310-496c-8c7e-8a087f977faa" providerId="ADAL" clId="{3C9ABCAB-493E-4D17-839E-F2056CFBE8FD}" dt="2023-10-30T15:42:12.502" v="56" actId="20577"/>
+          <ac:spMkLst>
+            <pc:docMk/>
+            <pc:sldMk cId="564201163" sldId="280"/>
+            <ac:spMk id="3" creationId="{068F0C39-44FF-99B2-7103-C6D38F774B5B}"/>
+          </ac:spMkLst>
+        </pc:spChg>
+      </pc:sldChg>
+      <pc:sldChg chg="modSp mod">
+        <pc:chgData name="Javier Bas Vicente" userId="96bf8a96-3310-496c-8c7e-8a087f977faa" providerId="ADAL" clId="{3C9ABCAB-493E-4D17-839E-F2056CFBE8FD}" dt="2023-10-30T15:53:17.943" v="65" actId="20577"/>
+        <pc:sldMkLst>
+          <pc:docMk/>
+          <pc:sldMk cId="2379344142" sldId="281"/>
+        </pc:sldMkLst>
+        <pc:spChg chg="mod">
+          <ac:chgData name="Javier Bas Vicente" userId="96bf8a96-3310-496c-8c7e-8a087f977faa" providerId="ADAL" clId="{3C9ABCAB-493E-4D17-839E-F2056CFBE8FD}" dt="2023-10-30T15:53:17.943" v="65" actId="20577"/>
+          <ac:spMkLst>
+            <pc:docMk/>
+            <pc:sldMk cId="2379344142" sldId="281"/>
+            <ac:spMk id="3" creationId="{F7EF27C5-01B7-9F60-ECDA-A1F376586FC5}"/>
+          </ac:spMkLst>
+        </pc:spChg>
+      </pc:sldChg>
+      <pc:sldChg chg="del">
+        <pc:chgData name="Javier Bas Vicente" userId="96bf8a96-3310-496c-8c7e-8a087f977faa" providerId="ADAL" clId="{3C9ABCAB-493E-4D17-839E-F2056CFBE8FD}" dt="2023-10-30T16:59:16.443" v="673" actId="47"/>
+        <pc:sldMkLst>
+          <pc:docMk/>
+          <pc:sldMk cId="1395369500" sldId="283"/>
+        </pc:sldMkLst>
+      </pc:sldChg>
+      <pc:sldChg chg="modSp del mod">
+        <pc:chgData name="Javier Bas Vicente" userId="96bf8a96-3310-496c-8c7e-8a087f977faa" providerId="ADAL" clId="{3C9ABCAB-493E-4D17-839E-F2056CFBE8FD}" dt="2023-10-30T16:59:20.507" v="675" actId="47"/>
+        <pc:sldMkLst>
+          <pc:docMk/>
+          <pc:sldMk cId="713773263" sldId="284"/>
+        </pc:sldMkLst>
+        <pc:spChg chg="mod">
+          <ac:chgData name="Javier Bas Vicente" userId="96bf8a96-3310-496c-8c7e-8a087f977faa" providerId="ADAL" clId="{3C9ABCAB-493E-4D17-839E-F2056CFBE8FD}" dt="2023-10-30T16:55:25.691" v="672" actId="20577"/>
+          <ac:spMkLst>
+            <pc:docMk/>
+            <pc:sldMk cId="713773263" sldId="284"/>
+            <ac:spMk id="3" creationId="{F7EF27C5-01B7-9F60-ECDA-A1F376586FC5}"/>
+          </ac:spMkLst>
+        </pc:spChg>
+      </pc:sldChg>
+      <pc:sldChg chg="modSp mod">
+        <pc:chgData name="Javier Bas Vicente" userId="96bf8a96-3310-496c-8c7e-8a087f977faa" providerId="ADAL" clId="{3C9ABCAB-493E-4D17-839E-F2056CFBE8FD}" dt="2023-10-30T15:56:52.525" v="67" actId="6549"/>
+        <pc:sldMkLst>
+          <pc:docMk/>
+          <pc:sldMk cId="1275591341" sldId="286"/>
+        </pc:sldMkLst>
+        <pc:spChg chg="mod">
+          <ac:chgData name="Javier Bas Vicente" userId="96bf8a96-3310-496c-8c7e-8a087f977faa" providerId="ADAL" clId="{3C9ABCAB-493E-4D17-839E-F2056CFBE8FD}" dt="2023-10-30T15:56:52.525" v="67" actId="6549"/>
+          <ac:spMkLst>
+            <pc:docMk/>
+            <pc:sldMk cId="1275591341" sldId="286"/>
+            <ac:spMk id="3" creationId="{F7EF27C5-01B7-9F60-ECDA-A1F376586FC5}"/>
+          </ac:spMkLst>
+        </pc:spChg>
+      </pc:sldChg>
+      <pc:sldChg chg="modSp del mod">
+        <pc:chgData name="Javier Bas Vicente" userId="96bf8a96-3310-496c-8c7e-8a087f977faa" providerId="ADAL" clId="{3C9ABCAB-493E-4D17-839E-F2056CFBE8FD}" dt="2023-10-30T16:59:18.601" v="674" actId="47"/>
+        <pc:sldMkLst>
+          <pc:docMk/>
+          <pc:sldMk cId="2000089067" sldId="287"/>
+        </pc:sldMkLst>
+        <pc:spChg chg="mod">
+          <ac:chgData name="Javier Bas Vicente" userId="96bf8a96-3310-496c-8c7e-8a087f977faa" providerId="ADAL" clId="{3C9ABCAB-493E-4D17-839E-F2056CFBE8FD}" dt="2023-10-30T16:54:41.718" v="668" actId="20577"/>
+          <ac:spMkLst>
+            <pc:docMk/>
+            <pc:sldMk cId="2000089067" sldId="287"/>
+            <ac:spMk id="3" creationId="{F7EF27C5-01B7-9F60-ECDA-A1F376586FC5}"/>
+          </ac:spMkLst>
+        </pc:spChg>
+        <pc:spChg chg="mod">
+          <ac:chgData name="Javier Bas Vicente" userId="96bf8a96-3310-496c-8c7e-8a087f977faa" providerId="ADAL" clId="{3C9ABCAB-493E-4D17-839E-F2056CFBE8FD}" dt="2023-10-30T16:54:50.698" v="669" actId="6549"/>
+          <ac:spMkLst>
+            <pc:docMk/>
+            <pc:sldMk cId="2000089067" sldId="287"/>
+            <ac:spMk id="7" creationId="{84FF8E63-E2AF-7BCA-C7BA-B28A8BD0A0C0}"/>
+          </ac:spMkLst>
+        </pc:spChg>
+      </pc:sldChg>
+      <pc:sldChg chg="addSp delSp modSp mod">
+        <pc:chgData name="Javier Bas Vicente" userId="96bf8a96-3310-496c-8c7e-8a087f977faa" providerId="ADAL" clId="{3C9ABCAB-493E-4D17-839E-F2056CFBE8FD}" dt="2023-10-30T16:53:22.966" v="663" actId="14100"/>
+        <pc:sldMkLst>
+          <pc:docMk/>
+          <pc:sldMk cId="2946059860" sldId="288"/>
+        </pc:sldMkLst>
+        <pc:spChg chg="mod">
+          <ac:chgData name="Javier Bas Vicente" userId="96bf8a96-3310-496c-8c7e-8a087f977faa" providerId="ADAL" clId="{3C9ABCAB-493E-4D17-839E-F2056CFBE8FD}" dt="2023-10-30T16:47:54.163" v="84" actId="6549"/>
+          <ac:spMkLst>
+            <pc:docMk/>
+            <pc:sldMk cId="2946059860" sldId="288"/>
+            <ac:spMk id="3" creationId="{F7EF27C5-01B7-9F60-ECDA-A1F376586FC5}"/>
+          </ac:spMkLst>
+        </pc:spChg>
+        <pc:spChg chg="add mod">
+          <ac:chgData name="Javier Bas Vicente" userId="96bf8a96-3310-496c-8c7e-8a087f977faa" providerId="ADAL" clId="{3C9ABCAB-493E-4D17-839E-F2056CFBE8FD}" dt="2023-10-30T16:52:51.961" v="615" actId="1037"/>
+          <ac:spMkLst>
+            <pc:docMk/>
+            <pc:sldMk cId="2946059860" sldId="288"/>
+            <ac:spMk id="7" creationId="{22B2EC76-678F-F957-F964-E20A68DD6FF9}"/>
+          </ac:spMkLst>
+        </pc:spChg>
+        <pc:spChg chg="mod">
+          <ac:chgData name="Javier Bas Vicente" userId="96bf8a96-3310-496c-8c7e-8a087f977faa" providerId="ADAL" clId="{3C9ABCAB-493E-4D17-839E-F2056CFBE8FD}" dt="2023-10-30T16:50:10.832" v="433" actId="1037"/>
+          <ac:spMkLst>
+            <pc:docMk/>
+            <pc:sldMk cId="2946059860" sldId="288"/>
+            <ac:spMk id="12" creationId="{B4DA19C9-C5DC-5E6E-F21C-D9FC76E063EE}"/>
+          </ac:spMkLst>
+        </pc:spChg>
+        <pc:spChg chg="mod">
+          <ac:chgData name="Javier Bas Vicente" userId="96bf8a96-3310-496c-8c7e-8a087f977faa" providerId="ADAL" clId="{3C9ABCAB-493E-4D17-839E-F2056CFBE8FD}" dt="2023-10-30T16:52:51.961" v="615" actId="1037"/>
+          <ac:spMkLst>
+            <pc:docMk/>
+            <pc:sldMk cId="2946059860" sldId="288"/>
+            <ac:spMk id="13" creationId="{3567DF27-2684-0050-C0DD-AAF72EAA15D8}"/>
+          </ac:spMkLst>
+        </pc:spChg>
+        <pc:spChg chg="del">
+          <ac:chgData name="Javier Bas Vicente" userId="96bf8a96-3310-496c-8c7e-8a087f977faa" providerId="ADAL" clId="{3C9ABCAB-493E-4D17-839E-F2056CFBE8FD}" dt="2023-10-30T16:46:53.122" v="77" actId="478"/>
+          <ac:spMkLst>
+            <pc:docMk/>
+            <pc:sldMk cId="2946059860" sldId="288"/>
+            <ac:spMk id="15" creationId="{B9E1F2FF-9D12-49E7-8ED5-D57A1329526B}"/>
+          </ac:spMkLst>
+        </pc:spChg>
+        <pc:spChg chg="mod">
+          <ac:chgData name="Javier Bas Vicente" userId="96bf8a96-3310-496c-8c7e-8a087f977faa" providerId="ADAL" clId="{3C9ABCAB-493E-4D17-839E-F2056CFBE8FD}" dt="2023-10-30T16:53:15.323" v="661" actId="1035"/>
+          <ac:spMkLst>
+            <pc:docMk/>
+            <pc:sldMk cId="2946059860" sldId="288"/>
+            <ac:spMk id="16" creationId="{167984DF-5D1C-E385-D180-E5B1AD8867FB}"/>
+          </ac:spMkLst>
+        </pc:spChg>
+        <pc:spChg chg="mod">
+          <ac:chgData name="Javier Bas Vicente" userId="96bf8a96-3310-496c-8c7e-8a087f977faa" providerId="ADAL" clId="{3C9ABCAB-493E-4D17-839E-F2056CFBE8FD}" dt="2023-10-30T16:53:08.778" v="638" actId="1038"/>
+          <ac:spMkLst>
+            <pc:docMk/>
+            <pc:sldMk cId="2946059860" sldId="288"/>
+            <ac:spMk id="20" creationId="{77723D12-E298-5276-D69B-3E8C18F03501}"/>
+          </ac:spMkLst>
+        </pc:spChg>
+        <pc:spChg chg="mod">
+          <ac:chgData name="Javier Bas Vicente" userId="96bf8a96-3310-496c-8c7e-8a087f977faa" providerId="ADAL" clId="{3C9ABCAB-493E-4D17-839E-F2056CFBE8FD}" dt="2023-10-30T16:53:08.778" v="638" actId="1038"/>
+          <ac:spMkLst>
+            <pc:docMk/>
+            <pc:sldMk cId="2946059860" sldId="288"/>
+            <ac:spMk id="21" creationId="{E810AA24-FBC5-9ECC-6E41-A52F7C872F31}"/>
+          </ac:spMkLst>
+        </pc:spChg>
+        <pc:spChg chg="mod">
+          <ac:chgData name="Javier Bas Vicente" userId="96bf8a96-3310-496c-8c7e-8a087f977faa" providerId="ADAL" clId="{3C9ABCAB-493E-4D17-839E-F2056CFBE8FD}" dt="2023-10-30T16:53:08.778" v="638" actId="1038"/>
+          <ac:spMkLst>
+            <pc:docMk/>
+            <pc:sldMk cId="2946059860" sldId="288"/>
+            <ac:spMk id="22" creationId="{E6B287B8-B69F-6039-592D-0C990309A52C}"/>
+          </ac:spMkLst>
+        </pc:spChg>
+        <pc:picChg chg="mod">
+          <ac:chgData name="Javier Bas Vicente" userId="96bf8a96-3310-496c-8c7e-8a087f977faa" providerId="ADAL" clId="{3C9ABCAB-493E-4D17-839E-F2056CFBE8FD}" dt="2023-10-30T16:50:06.967" v="420" actId="1037"/>
+          <ac:picMkLst>
+            <pc:docMk/>
+            <pc:sldMk cId="2946059860" sldId="288"/>
+            <ac:picMk id="8" creationId="{1DA296CE-107F-EBC7-F9F9-596CE8402C39}"/>
+          </ac:picMkLst>
+        </pc:picChg>
+        <pc:picChg chg="mod">
+          <ac:chgData name="Javier Bas Vicente" userId="96bf8a96-3310-496c-8c7e-8a087f977faa" providerId="ADAL" clId="{3C9ABCAB-493E-4D17-839E-F2056CFBE8FD}" dt="2023-10-30T16:52:51.961" v="615" actId="1037"/>
+          <ac:picMkLst>
+            <pc:docMk/>
+            <pc:sldMk cId="2946059860" sldId="288"/>
+            <ac:picMk id="11" creationId="{D6474E9B-2814-21BD-E486-F59921F3FDF6}"/>
+          </ac:picMkLst>
+        </pc:picChg>
+        <pc:cxnChg chg="mod">
+          <ac:chgData name="Javier Bas Vicente" userId="96bf8a96-3310-496c-8c7e-8a087f977faa" providerId="ADAL" clId="{3C9ABCAB-493E-4D17-839E-F2056CFBE8FD}" dt="2023-10-30T16:53:22.966" v="663" actId="14100"/>
+          <ac:cxnSpMkLst>
+            <pc:docMk/>
+            <pc:sldMk cId="2946059860" sldId="288"/>
+            <ac:cxnSpMk id="14" creationId="{22E80EF3-D563-F8AB-4632-9DA2DEC0C1A8}"/>
+          </ac:cxnSpMkLst>
+        </pc:cxnChg>
+      </pc:sldChg>
+      <pc:sldChg chg="addSp delSp modSp mod">
+        <pc:chgData name="Javier Bas Vicente" userId="96bf8a96-3310-496c-8c7e-8a087f977faa" providerId="ADAL" clId="{3C9ABCAB-493E-4D17-839E-F2056CFBE8FD}" dt="2023-10-30T17:04:11.925" v="711" actId="313"/>
+        <pc:sldMkLst>
+          <pc:docMk/>
+          <pc:sldMk cId="1434330880" sldId="290"/>
+        </pc:sldMkLst>
+        <pc:spChg chg="mod">
+          <ac:chgData name="Javier Bas Vicente" userId="96bf8a96-3310-496c-8c7e-8a087f977faa" providerId="ADAL" clId="{3C9ABCAB-493E-4D17-839E-F2056CFBE8FD}" dt="2023-10-30T17:04:11.925" v="711" actId="313"/>
+          <ac:spMkLst>
+            <pc:docMk/>
+            <pc:sldMk cId="1434330880" sldId="290"/>
+            <ac:spMk id="3" creationId="{F7EF27C5-01B7-9F60-ECDA-A1F376586FC5}"/>
+          </ac:spMkLst>
+        </pc:spChg>
+        <pc:spChg chg="add del mod">
+          <ac:chgData name="Javier Bas Vicente" userId="96bf8a96-3310-496c-8c7e-8a087f977faa" providerId="ADAL" clId="{3C9ABCAB-493E-4D17-839E-F2056CFBE8FD}" dt="2023-10-30T17:03:53.962" v="710" actId="1038"/>
+          <ac:spMkLst>
+            <pc:docMk/>
+            <pc:sldMk cId="1434330880" sldId="290"/>
+            <ac:spMk id="7" creationId="{61259946-3012-9066-31E4-C63BA9D94F28}"/>
+          </ac:spMkLst>
+        </pc:spChg>
+      </pc:sldChg>
+    </pc:docChg>
+  </pc:docChgLst>
+</pc:chgInfo>
+</file>
+
 <file path=ppt/notesMasters/notesMaster1.xml><?xml version="1.0" encoding="utf-8"?>
 <p:notesMaster xmlns:a="http://schemas.openxmlformats.org/drawingml/2006/main" xmlns:r="http://schemas.openxmlformats.org/officeDocument/2006/relationships" xmlns:p="http://schemas.openxmlformats.org/presentationml/2006/main">
   <p:cSld>
@@ -229,7 +494,7 @@
           <a:p>
             <a:fld id="{B9B1DC7F-8587-4047-9A5D-1FCB6614CAE0}" type="datetimeFigureOut">
               <a:rPr lang="en-US" smtClean="0"/>
-              <a:t>10/25/2022</a:t>
+              <a:t>10/30/2023</a:t>
             </a:fld>
             <a:endParaRPr lang="en-US"/>
           </a:p>
@@ -643,7 +908,7 @@
           <a:p>
             <a:fld id="{A7DB5662-7327-465C-9A70-AD96B7A8D67A}" type="datetimeFigureOut">
               <a:rPr lang="en-US" smtClean="0"/>
-              <a:t>10/25/2022</a:t>
+              <a:t>10/30/2023</a:t>
             </a:fld>
             <a:endParaRPr lang="en-US"/>
           </a:p>
@@ -841,7 +1106,7 @@
           <a:p>
             <a:fld id="{A7DB5662-7327-465C-9A70-AD96B7A8D67A}" type="datetimeFigureOut">
               <a:rPr lang="en-US" smtClean="0"/>
-              <a:t>10/25/2022</a:t>
+              <a:t>10/30/2023</a:t>
             </a:fld>
             <a:endParaRPr lang="en-US"/>
           </a:p>
@@ -1049,7 +1314,7 @@
           <a:p>
             <a:fld id="{A7DB5662-7327-465C-9A70-AD96B7A8D67A}" type="datetimeFigureOut">
               <a:rPr lang="en-US" smtClean="0"/>
-              <a:t>10/25/2022</a:t>
+              <a:t>10/30/2023</a:t>
             </a:fld>
             <a:endParaRPr lang="en-US"/>
           </a:p>
@@ -1247,7 +1512,7 @@
           <a:p>
             <a:fld id="{A7DB5662-7327-465C-9A70-AD96B7A8D67A}" type="datetimeFigureOut">
               <a:rPr lang="en-US" smtClean="0"/>
-              <a:t>10/25/2022</a:t>
+              <a:t>10/30/2023</a:t>
             </a:fld>
             <a:endParaRPr lang="en-US"/>
           </a:p>
@@ -1522,7 +1787,7 @@
           <a:p>
             <a:fld id="{A7DB5662-7327-465C-9A70-AD96B7A8D67A}" type="datetimeFigureOut">
               <a:rPr lang="en-US" smtClean="0"/>
-              <a:t>10/25/2022</a:t>
+              <a:t>10/30/2023</a:t>
             </a:fld>
             <a:endParaRPr lang="en-US"/>
           </a:p>
@@ -1787,7 +2052,7 @@
           <a:p>
             <a:fld id="{A7DB5662-7327-465C-9A70-AD96B7A8D67A}" type="datetimeFigureOut">
               <a:rPr lang="en-US" smtClean="0"/>
-              <a:t>10/25/2022</a:t>
+              <a:t>10/30/2023</a:t>
             </a:fld>
             <a:endParaRPr lang="en-US"/>
           </a:p>
@@ -2199,7 +2464,7 @@
           <a:p>
             <a:fld id="{A7DB5662-7327-465C-9A70-AD96B7A8D67A}" type="datetimeFigureOut">
               <a:rPr lang="en-US" smtClean="0"/>
-              <a:t>10/25/2022</a:t>
+              <a:t>10/30/2023</a:t>
             </a:fld>
             <a:endParaRPr lang="en-US"/>
           </a:p>
@@ -2340,7 +2605,7 @@
           <a:p>
             <a:fld id="{A7DB5662-7327-465C-9A70-AD96B7A8D67A}" type="datetimeFigureOut">
               <a:rPr lang="en-US" smtClean="0"/>
-              <a:t>10/25/2022</a:t>
+              <a:t>10/30/2023</a:t>
             </a:fld>
             <a:endParaRPr lang="en-US"/>
           </a:p>
@@ -2453,7 +2718,7 @@
           <a:p>
             <a:fld id="{A7DB5662-7327-465C-9A70-AD96B7A8D67A}" type="datetimeFigureOut">
               <a:rPr lang="en-US" smtClean="0"/>
-              <a:t>10/25/2022</a:t>
+              <a:t>10/30/2023</a:t>
             </a:fld>
             <a:endParaRPr lang="en-US"/>
           </a:p>
@@ -2764,7 +3029,7 @@
           <a:p>
             <a:fld id="{A7DB5662-7327-465C-9A70-AD96B7A8D67A}" type="datetimeFigureOut">
               <a:rPr lang="en-US" smtClean="0"/>
-              <a:t>10/25/2022</a:t>
+              <a:t>10/30/2023</a:t>
             </a:fld>
             <a:endParaRPr lang="en-US"/>
           </a:p>
@@ -3052,7 +3317,7 @@
           <a:p>
             <a:fld id="{A7DB5662-7327-465C-9A70-AD96B7A8D67A}" type="datetimeFigureOut">
               <a:rPr lang="en-US" smtClean="0"/>
-              <a:t>10/25/2022</a:t>
+              <a:t>10/30/2023</a:t>
             </a:fld>
             <a:endParaRPr lang="en-US"/>
           </a:p>
@@ -3293,7 +3558,7 @@
           <a:p>
             <a:fld id="{A7DB5662-7327-465C-9A70-AD96B7A8D67A}" type="datetimeFigureOut">
               <a:rPr lang="en-US" smtClean="0"/>
-              <a:t>10/25/2022</a:t>
+              <a:t>10/30/2023</a:t>
             </a:fld>
             <a:endParaRPr lang="en-US"/>
           </a:p>
@@ -22284,2648 +22549,6 @@
           <a:p>
             <a:r>
               <a:rPr lang="en-US" sz="4000" dirty="0"/>
-              <a:t>Classifiers – Stochastic Gradient Descent (SGD)</a:t>
-            </a:r>
-          </a:p>
-        </p:txBody>
-      </p:sp>
-      <p:sp>
-        <p:nvSpPr>
-          <p:cNvPr id="4" name="Rectángulo 3">
-            <a:extLst>
-              <a:ext uri="{FF2B5EF4-FFF2-40B4-BE49-F238E27FC236}">
-                <a16:creationId xmlns:a16="http://schemas.microsoft.com/office/drawing/2014/main" id="{27E372AA-1ACE-5D2D-EDED-66DB6F5F4F88}"/>
-              </a:ext>
-            </a:extLst>
-          </p:cNvPr>
-          <p:cNvSpPr/>
-          <p:nvPr/>
-        </p:nvSpPr>
-        <p:spPr>
-          <a:xfrm>
-            <a:off x="0" y="0"/>
-            <a:ext cx="374469" cy="6858000"/>
-          </a:xfrm>
-          <a:prstGeom prst="rect">
-            <a:avLst/>
-          </a:prstGeom>
-        </p:spPr>
-        <p:style>
-          <a:lnRef idx="2">
-            <a:schemeClr val="accent2">
-              <a:shade val="50000"/>
-            </a:schemeClr>
-          </a:lnRef>
-          <a:fillRef idx="1">
-            <a:schemeClr val="accent2"/>
-          </a:fillRef>
-          <a:effectRef idx="0">
-            <a:schemeClr val="accent2"/>
-          </a:effectRef>
-          <a:fontRef idx="minor">
-            <a:schemeClr val="lt1"/>
-          </a:fontRef>
-        </p:style>
-        <p:txBody>
-          <a:bodyPr rtlCol="0" anchor="ctr"/>
-          <a:lstStyle/>
-          <a:p>
-            <a:pPr algn="ctr"/>
-            <a:endParaRPr lang="es-ES"/>
-          </a:p>
-        </p:txBody>
-      </p:sp>
-      <p:sp>
-        <p:nvSpPr>
-          <p:cNvPr id="5" name="Rectangle 143">
-            <a:extLst>
-              <a:ext uri="{FF2B5EF4-FFF2-40B4-BE49-F238E27FC236}">
-                <a16:creationId xmlns:a16="http://schemas.microsoft.com/office/drawing/2014/main" id="{4CAC6C5C-8798-AF6F-C852-967659577BF3}"/>
-              </a:ext>
-            </a:extLst>
-          </p:cNvPr>
-          <p:cNvSpPr>
-            <a:spLocks noChangeArrowheads="1"/>
-          </p:cNvSpPr>
-          <p:nvPr/>
-        </p:nvSpPr>
-        <p:spPr bwMode="auto">
-          <a:xfrm>
-            <a:off x="448342" y="6401243"/>
-            <a:ext cx="5730175" cy="307777"/>
-          </a:xfrm>
-          <a:prstGeom prst="rect">
-            <a:avLst/>
-          </a:prstGeom>
-          <a:noFill/>
-          <a:ln>
-            <a:noFill/>
-          </a:ln>
-          <a:effectLst/>
-          <a:extLst>
-            <a:ext uri="{909E8E84-426E-40DD-AFC4-6F175D3DCCD1}">
-              <a14:hiddenFill xmlns:a14="http://schemas.microsoft.com/office/drawing/2010/main">
-                <a:solidFill>
-                  <a:schemeClr val="accent1"/>
-                </a:solidFill>
-              </a14:hiddenFill>
-            </a:ext>
-            <a:ext uri="{91240B29-F687-4F45-9708-019B960494DF}">
-              <a14:hiddenLine xmlns:a14="http://schemas.microsoft.com/office/drawing/2010/main" w="9525">
-                <a:solidFill>
-                  <a:schemeClr val="tx1"/>
-                </a:solidFill>
-                <a:miter lim="800000"/>
-                <a:headEnd/>
-                <a:tailEnd/>
-              </a14:hiddenLine>
-            </a:ext>
-            <a:ext uri="{AF507438-7753-43E0-B8FC-AC1667EBCBE1}">
-              <a14:hiddenEffects xmlns:a14="http://schemas.microsoft.com/office/drawing/2010/main">
-                <a:effectLst>
-                  <a:outerShdw dist="35921" dir="2700000" algn="ctr" rotWithShape="0">
-                    <a:schemeClr val="bg2"/>
-                  </a:outerShdw>
-                </a:effectLst>
-              </a14:hiddenEffects>
-            </a:ext>
-          </a:extLst>
-        </p:spPr>
-        <p:txBody>
-          <a:bodyPr vert="horz" wrap="square" lIns="91440" tIns="45720" rIns="91440" bIns="45720" numCol="1" anchor="ctr" anchorCtr="0" compatLnSpc="1">
-            <a:prstTxWarp prst="textNoShape">
-              <a:avLst/>
-            </a:prstTxWarp>
-            <a:spAutoFit/>
-          </a:bodyPr>
-          <a:lstStyle/>
-          <a:p>
-            <a:pPr marL="0" marR="0" lvl="0" indent="0" algn="l" defTabSz="914400" rtl="0" eaLnBrk="0" fontAlgn="base" latinLnBrk="0" hangingPunct="0">
-              <a:lnSpc>
-                <a:spcPct val="100000"/>
-              </a:lnSpc>
-              <a:spcBef>
-                <a:spcPct val="0"/>
-              </a:spcBef>
-              <a:spcAft>
-                <a:spcPct val="0"/>
-              </a:spcAft>
-              <a:buClrTx/>
-              <a:buSzTx/>
-              <a:buFontTx/>
-              <a:buNone/>
-              <a:tabLst/>
-            </a:pPr>
-            <a:r>
-              <a:rPr kumimoji="0" lang="en-US" altLang="es-ES" sz="1400" b="0" i="0" u="none" strike="noStrike" cap="none" normalizeH="0" baseline="0" dirty="0">
-                <a:ln>
-                  <a:noFill/>
-                </a:ln>
-                <a:solidFill>
-                  <a:srgbClr val="F4A200"/>
-                </a:solidFill>
-                <a:effectLst/>
-                <a:latin typeface="Arial" panose="020B0604020202020204" pitchFamily="34" charset="0"/>
-                <a:ea typeface="Myriad Pro Light"/>
-                <a:cs typeface="Times New Roman" panose="02020603050405020304" pitchFamily="18" charset="0"/>
-              </a:rPr>
-              <a:t>Master in Quantitative Economic Analysis </a:t>
-            </a:r>
-            <a:r>
-              <a:rPr kumimoji="0" lang="en-US" altLang="es-ES" sz="1400" b="0" i="0" u="none" strike="noStrike" cap="none" normalizeH="0" baseline="0" dirty="0" err="1">
-                <a:ln>
-                  <a:noFill/>
-                </a:ln>
-                <a:solidFill>
-                  <a:srgbClr val="F4A200"/>
-                </a:solidFill>
-                <a:effectLst/>
-                <a:latin typeface="Arial" panose="020B0604020202020204" pitchFamily="34" charset="0"/>
-                <a:ea typeface="Myriad Pro Light"/>
-                <a:cs typeface="Times New Roman" panose="02020603050405020304" pitchFamily="18" charset="0"/>
-              </a:rPr>
-              <a:t>MQuEA</a:t>
-            </a:r>
-            <a:endParaRPr kumimoji="0" lang="es-ES" altLang="es-ES" sz="500" b="0" i="0" u="none" strike="noStrike" cap="none" normalizeH="0" baseline="0" dirty="0">
-              <a:ln>
-                <a:noFill/>
-              </a:ln>
-              <a:solidFill>
-                <a:schemeClr val="tx1"/>
-              </a:solidFill>
-              <a:effectLst/>
-              <a:latin typeface="Arial" panose="020B0604020202020204" pitchFamily="34" charset="0"/>
-            </a:endParaRPr>
-          </a:p>
-        </p:txBody>
-      </p:sp>
-      <p:sp>
-        <p:nvSpPr>
-          <p:cNvPr id="6" name="Rectangle 143">
-            <a:extLst>
-              <a:ext uri="{FF2B5EF4-FFF2-40B4-BE49-F238E27FC236}">
-                <a16:creationId xmlns:a16="http://schemas.microsoft.com/office/drawing/2014/main" id="{09E0FB32-C00A-A390-E094-76FC3EA5C288}"/>
-              </a:ext>
-            </a:extLst>
-          </p:cNvPr>
-          <p:cNvSpPr>
-            <a:spLocks noChangeArrowheads="1"/>
-          </p:cNvSpPr>
-          <p:nvPr/>
-        </p:nvSpPr>
-        <p:spPr bwMode="auto">
-          <a:xfrm>
-            <a:off x="6186394" y="6411881"/>
-            <a:ext cx="5730175" cy="307777"/>
-          </a:xfrm>
-          <a:prstGeom prst="rect">
-            <a:avLst/>
-          </a:prstGeom>
-          <a:noFill/>
-          <a:ln>
-            <a:noFill/>
-          </a:ln>
-          <a:effectLst/>
-          <a:extLst>
-            <a:ext uri="{909E8E84-426E-40DD-AFC4-6F175D3DCCD1}">
-              <a14:hiddenFill xmlns:a14="http://schemas.microsoft.com/office/drawing/2010/main">
-                <a:solidFill>
-                  <a:schemeClr val="accent1"/>
-                </a:solidFill>
-              </a14:hiddenFill>
-            </a:ext>
-            <a:ext uri="{91240B29-F687-4F45-9708-019B960494DF}">
-              <a14:hiddenLine xmlns:a14="http://schemas.microsoft.com/office/drawing/2010/main" w="9525">
-                <a:solidFill>
-                  <a:schemeClr val="tx1"/>
-                </a:solidFill>
-                <a:miter lim="800000"/>
-                <a:headEnd/>
-                <a:tailEnd/>
-              </a14:hiddenLine>
-            </a:ext>
-            <a:ext uri="{AF507438-7753-43E0-B8FC-AC1667EBCBE1}">
-              <a14:hiddenEffects xmlns:a14="http://schemas.microsoft.com/office/drawing/2010/main">
-                <a:effectLst>
-                  <a:outerShdw dist="35921" dir="2700000" algn="ctr" rotWithShape="0">
-                    <a:schemeClr val="bg2"/>
-                  </a:outerShdw>
-                </a:effectLst>
-              </a14:hiddenEffects>
-            </a:ext>
-          </a:extLst>
-        </p:spPr>
-        <p:txBody>
-          <a:bodyPr vert="horz" wrap="square" lIns="91440" tIns="45720" rIns="91440" bIns="45720" numCol="1" anchor="ctr" anchorCtr="0" compatLnSpc="1">
-            <a:prstTxWarp prst="textNoShape">
-              <a:avLst/>
-            </a:prstTxWarp>
-            <a:spAutoFit/>
-          </a:bodyPr>
-          <a:lstStyle/>
-          <a:p>
-            <a:pPr marL="0" marR="0" lvl="0" indent="0" algn="r" defTabSz="914400" rtl="0" eaLnBrk="0" fontAlgn="base" latinLnBrk="0" hangingPunct="0">
-              <a:lnSpc>
-                <a:spcPct val="100000"/>
-              </a:lnSpc>
-              <a:spcBef>
-                <a:spcPct val="0"/>
-              </a:spcBef>
-              <a:spcAft>
-                <a:spcPct val="0"/>
-              </a:spcAft>
-              <a:buClrTx/>
-              <a:buSzTx/>
-              <a:buFontTx/>
-              <a:buNone/>
-              <a:tabLst/>
-            </a:pPr>
-            <a:r>
-              <a:rPr kumimoji="0" lang="en-US" altLang="es-ES" sz="1400" b="0" i="0" u="none" strike="noStrike" cap="none" normalizeH="0" baseline="0" dirty="0">
-                <a:ln>
-                  <a:noFill/>
-                </a:ln>
-                <a:solidFill>
-                  <a:srgbClr val="F4A200"/>
-                </a:solidFill>
-                <a:effectLst/>
-                <a:latin typeface="Arial" panose="020B0604020202020204" pitchFamily="34" charset="0"/>
-                <a:ea typeface="Myriad Pro Light"/>
-                <a:cs typeface="Times New Roman" panose="02020603050405020304" pitchFamily="18" charset="0"/>
-              </a:rPr>
-              <a:t>Universidad </a:t>
-            </a:r>
-            <a:r>
-              <a:rPr kumimoji="0" lang="en-US" altLang="es-ES" sz="1400" b="0" i="0" u="none" strike="noStrike" cap="none" normalizeH="0" baseline="0" dirty="0" err="1">
-                <a:ln>
-                  <a:noFill/>
-                </a:ln>
-                <a:solidFill>
-                  <a:srgbClr val="F4A200"/>
-                </a:solidFill>
-                <a:effectLst/>
-                <a:latin typeface="Arial" panose="020B0604020202020204" pitchFamily="34" charset="0"/>
-                <a:ea typeface="Myriad Pro Light"/>
-                <a:cs typeface="Times New Roman" panose="02020603050405020304" pitchFamily="18" charset="0"/>
-              </a:rPr>
-              <a:t>Aut</a:t>
-            </a:r>
-            <a:r>
-              <a:rPr lang="en-US" altLang="es-ES" sz="1400" dirty="0" err="1">
-                <a:solidFill>
-                  <a:srgbClr val="F4A200"/>
-                </a:solidFill>
-                <a:latin typeface="Arial" panose="020B0604020202020204" pitchFamily="34" charset="0"/>
-                <a:ea typeface="Myriad Pro Light"/>
-                <a:cs typeface="Times New Roman" panose="02020603050405020304" pitchFamily="18" charset="0"/>
-              </a:rPr>
-              <a:t>ó</a:t>
-            </a:r>
-            <a:r>
-              <a:rPr kumimoji="0" lang="en-US" altLang="es-ES" sz="1400" b="0" i="0" u="none" strike="noStrike" cap="none" normalizeH="0" baseline="0" dirty="0" err="1">
-                <a:ln>
-                  <a:noFill/>
-                </a:ln>
-                <a:solidFill>
-                  <a:srgbClr val="F4A200"/>
-                </a:solidFill>
-                <a:effectLst/>
-                <a:latin typeface="Arial" panose="020B0604020202020204" pitchFamily="34" charset="0"/>
-                <a:ea typeface="Myriad Pro Light"/>
-                <a:cs typeface="Times New Roman" panose="02020603050405020304" pitchFamily="18" charset="0"/>
-              </a:rPr>
-              <a:t>noma</a:t>
-            </a:r>
-            <a:r>
-              <a:rPr kumimoji="0" lang="en-US" altLang="es-ES" sz="1400" b="0" i="0" u="none" strike="noStrike" cap="none" normalizeH="0" baseline="0" dirty="0">
-                <a:ln>
-                  <a:noFill/>
-                </a:ln>
-                <a:solidFill>
-                  <a:srgbClr val="F4A200"/>
-                </a:solidFill>
-                <a:effectLst/>
-                <a:latin typeface="Arial" panose="020B0604020202020204" pitchFamily="34" charset="0"/>
-                <a:ea typeface="Myriad Pro Light"/>
-                <a:cs typeface="Times New Roman" panose="02020603050405020304" pitchFamily="18" charset="0"/>
-              </a:rPr>
-              <a:t> de Madrid</a:t>
-            </a:r>
-            <a:endParaRPr kumimoji="0" lang="es-ES" altLang="es-ES" sz="500" b="0" i="0" u="none" strike="noStrike" cap="none" normalizeH="0" baseline="0" dirty="0">
-              <a:ln>
-                <a:noFill/>
-              </a:ln>
-              <a:solidFill>
-                <a:schemeClr val="tx1"/>
-              </a:solidFill>
-              <a:effectLst/>
-              <a:latin typeface="Arial" panose="020B0604020202020204" pitchFamily="34" charset="0"/>
-            </a:endParaRPr>
-          </a:p>
-        </p:txBody>
-      </p:sp>
-      <p:sp>
-        <p:nvSpPr>
-          <p:cNvPr id="3" name="Content Placeholder 2">
-            <a:extLst>
-              <a:ext uri="{FF2B5EF4-FFF2-40B4-BE49-F238E27FC236}">
-                <a16:creationId xmlns:a16="http://schemas.microsoft.com/office/drawing/2014/main" id="{F7EF27C5-01B7-9F60-ECDA-A1F376586FC5}"/>
-              </a:ext>
-            </a:extLst>
-          </p:cNvPr>
-          <p:cNvSpPr>
-            <a:spLocks noGrp="1"/>
-          </p:cNvSpPr>
-          <p:nvPr>
-            <p:ph idx="1"/>
-          </p:nvPr>
-        </p:nvSpPr>
-        <p:spPr/>
-        <p:txBody>
-          <a:bodyPr>
-            <a:normAutofit/>
-          </a:bodyPr>
-          <a:lstStyle/>
-          <a:p>
-            <a:pPr>
-              <a:lnSpc>
-                <a:spcPct val="100000"/>
-              </a:lnSpc>
-              <a:buFont typeface="Wingdings" panose="05000000000000000000" pitchFamily="2" charset="2"/>
-              <a:buChar char="§"/>
-            </a:pPr>
-            <a:r>
-              <a:rPr lang="en-US" sz="2400" dirty="0">
-                <a:latin typeface="+mj-lt"/>
-              </a:rPr>
-              <a:t>Gradient descent is a method to find the minimum of a function (loss function in our case). In each iteration, the algorithm descents the slope of the function in a “little step”</a:t>
-            </a:r>
-          </a:p>
-          <a:p>
-            <a:pPr lvl="1">
-              <a:lnSpc>
-                <a:spcPct val="100000"/>
-              </a:lnSpc>
-              <a:buFont typeface="Wingdings" panose="05000000000000000000" pitchFamily="2" charset="2"/>
-              <a:buChar char="§"/>
-            </a:pPr>
-            <a:r>
-              <a:rPr lang="en-US" sz="2000" dirty="0">
-                <a:latin typeface="+mj-lt"/>
-              </a:rPr>
-              <a:t>Get the slope of the “mountain” in all directions (gradient)</a:t>
-            </a:r>
-          </a:p>
-          <a:p>
-            <a:pPr lvl="1">
-              <a:lnSpc>
-                <a:spcPct val="100000"/>
-              </a:lnSpc>
-              <a:buFont typeface="Wingdings" panose="05000000000000000000" pitchFamily="2" charset="2"/>
-              <a:buChar char="§"/>
-            </a:pPr>
-            <a:r>
-              <a:rPr lang="en-US" sz="2000" dirty="0">
-                <a:latin typeface="+mj-lt"/>
-              </a:rPr>
-              <a:t>Go in the opposite direction to go “downhill”</a:t>
-            </a:r>
-          </a:p>
-          <a:p>
-            <a:pPr lvl="1">
-              <a:lnSpc>
-                <a:spcPct val="100000"/>
-              </a:lnSpc>
-              <a:buFont typeface="Wingdings" panose="05000000000000000000" pitchFamily="2" charset="2"/>
-              <a:buChar char="§"/>
-            </a:pPr>
-            <a:r>
-              <a:rPr lang="en-US" sz="2000" dirty="0">
-                <a:latin typeface="+mj-lt"/>
-              </a:rPr>
-              <a:t>Adapt the “size” of your step</a:t>
-            </a:r>
-          </a:p>
-          <a:p>
-            <a:pPr lvl="1">
-              <a:lnSpc>
-                <a:spcPct val="100000"/>
-              </a:lnSpc>
-              <a:buFont typeface="Wingdings" panose="05000000000000000000" pitchFamily="2" charset="2"/>
-              <a:buChar char="§"/>
-            </a:pPr>
-            <a:endParaRPr lang="en-US" sz="2000" dirty="0">
-              <a:latin typeface="+mj-lt"/>
-            </a:endParaRPr>
-          </a:p>
-        </p:txBody>
-      </p:sp>
-      <p:pic>
-        <p:nvPicPr>
-          <p:cNvPr id="9" name="Picture 8" descr="Chart&#10;&#10;Description automatically generated">
-            <a:extLst>
-              <a:ext uri="{FF2B5EF4-FFF2-40B4-BE49-F238E27FC236}">
-                <a16:creationId xmlns:a16="http://schemas.microsoft.com/office/drawing/2014/main" id="{1182A780-F7A7-C8B9-D6A8-481D332768C2}"/>
-              </a:ext>
-            </a:extLst>
-          </p:cNvPr>
-          <p:cNvPicPr>
-            <a:picLocks noChangeAspect="1"/>
-          </p:cNvPicPr>
-          <p:nvPr/>
-        </p:nvPicPr>
-        <p:blipFill>
-          <a:blip r:embed="rId2">
-            <a:extLst>
-              <a:ext uri="{28A0092B-C50C-407E-A947-70E740481C1C}">
-                <a14:useLocalDpi xmlns:a14="http://schemas.microsoft.com/office/drawing/2010/main" val="0"/>
-              </a:ext>
-            </a:extLst>
-          </a:blip>
-          <a:stretch>
-            <a:fillRect/>
-          </a:stretch>
-        </p:blipFill>
-        <p:spPr>
-          <a:xfrm>
-            <a:off x="984666" y="4452022"/>
-            <a:ext cx="2596902" cy="1436952"/>
-          </a:xfrm>
-          <a:prstGeom prst="rect">
-            <a:avLst/>
-          </a:prstGeom>
-        </p:spPr>
-      </p:pic>
-      <p:pic>
-        <p:nvPicPr>
-          <p:cNvPr id="11" name="Picture 10" descr="A picture containing necklet, accessory&#10;&#10;Description automatically generated">
-            <a:extLst>
-              <a:ext uri="{FF2B5EF4-FFF2-40B4-BE49-F238E27FC236}">
-                <a16:creationId xmlns:a16="http://schemas.microsoft.com/office/drawing/2014/main" id="{FD72EB04-FD28-21B4-0AF4-C7DF7EF206BF}"/>
-              </a:ext>
-            </a:extLst>
-          </p:cNvPr>
-          <p:cNvPicPr>
-            <a:picLocks noChangeAspect="1"/>
-          </p:cNvPicPr>
-          <p:nvPr/>
-        </p:nvPicPr>
-        <p:blipFill>
-          <a:blip r:embed="rId3">
-            <a:extLst>
-              <a:ext uri="{28A0092B-C50C-407E-A947-70E740481C1C}">
-                <a14:useLocalDpi xmlns:a14="http://schemas.microsoft.com/office/drawing/2010/main" val="0"/>
-              </a:ext>
-            </a:extLst>
-          </a:blip>
-          <a:stretch>
-            <a:fillRect/>
-          </a:stretch>
-        </p:blipFill>
-        <p:spPr>
-          <a:xfrm>
-            <a:off x="3627468" y="4488608"/>
-            <a:ext cx="2596902" cy="1333076"/>
-          </a:xfrm>
-          <a:prstGeom prst="rect">
-            <a:avLst/>
-          </a:prstGeom>
-        </p:spPr>
-      </p:pic>
-      <p:pic>
-        <p:nvPicPr>
-          <p:cNvPr id="13" name="Picture 12" descr="A picture containing chart&#10;&#10;Description automatically generated">
-            <a:extLst>
-              <a:ext uri="{FF2B5EF4-FFF2-40B4-BE49-F238E27FC236}">
-                <a16:creationId xmlns:a16="http://schemas.microsoft.com/office/drawing/2014/main" id="{28CD1F95-DB3E-4DBE-48D6-9F1828BCD734}"/>
-              </a:ext>
-            </a:extLst>
-          </p:cNvPr>
-          <p:cNvPicPr>
-            <a:picLocks noChangeAspect="1"/>
-          </p:cNvPicPr>
-          <p:nvPr/>
-        </p:nvPicPr>
-        <p:blipFill>
-          <a:blip r:embed="rId4">
-            <a:extLst>
-              <a:ext uri="{28A0092B-C50C-407E-A947-70E740481C1C}">
-                <a14:useLocalDpi xmlns:a14="http://schemas.microsoft.com/office/drawing/2010/main" val="0"/>
-              </a:ext>
-            </a:extLst>
-          </a:blip>
-          <a:stretch>
-            <a:fillRect/>
-          </a:stretch>
-        </p:blipFill>
-        <p:spPr>
-          <a:xfrm>
-            <a:off x="6270270" y="4488608"/>
-            <a:ext cx="2596902" cy="1333076"/>
-          </a:xfrm>
-          <a:prstGeom prst="rect">
-            <a:avLst/>
-          </a:prstGeom>
-        </p:spPr>
-      </p:pic>
-      <p:pic>
-        <p:nvPicPr>
-          <p:cNvPr id="15" name="Picture 14" descr="Diagram&#10;&#10;Description automatically generated">
-            <a:extLst>
-              <a:ext uri="{FF2B5EF4-FFF2-40B4-BE49-F238E27FC236}">
-                <a16:creationId xmlns:a16="http://schemas.microsoft.com/office/drawing/2014/main" id="{47031614-904C-C862-7B56-C169DF16887F}"/>
-              </a:ext>
-            </a:extLst>
-          </p:cNvPr>
-          <p:cNvPicPr>
-            <a:picLocks noChangeAspect="1"/>
-          </p:cNvPicPr>
-          <p:nvPr/>
-        </p:nvPicPr>
-        <p:blipFill>
-          <a:blip r:embed="rId5">
-            <a:extLst>
-              <a:ext uri="{28A0092B-C50C-407E-A947-70E740481C1C}">
-                <a14:useLocalDpi xmlns:a14="http://schemas.microsoft.com/office/drawing/2010/main" val="0"/>
-              </a:ext>
-            </a:extLst>
-          </a:blip>
-          <a:stretch>
-            <a:fillRect/>
-          </a:stretch>
-        </p:blipFill>
-        <p:spPr>
-          <a:xfrm>
-            <a:off x="8913072" y="4488594"/>
-            <a:ext cx="2596902" cy="1341732"/>
-          </a:xfrm>
-          <a:prstGeom prst="rect">
-            <a:avLst/>
-          </a:prstGeom>
-        </p:spPr>
-      </p:pic>
-    </p:spTree>
-    <p:extLst>
-      <p:ext uri="{BB962C8B-B14F-4D97-AF65-F5344CB8AC3E}">
-        <p14:creationId xmlns:p14="http://schemas.microsoft.com/office/powerpoint/2010/main" val="1395369500"/>
-      </p:ext>
-    </p:extLst>
-  </p:cSld>
-  <p:clrMapOvr>
-    <a:masterClrMapping/>
-  </p:clrMapOvr>
-</p:sld>
-</file>
-
-<file path=ppt/slides/slide12.xml><?xml version="1.0" encoding="utf-8"?>
-<p:sld xmlns:a="http://schemas.openxmlformats.org/drawingml/2006/main" xmlns:r="http://schemas.openxmlformats.org/officeDocument/2006/relationships" xmlns:p="http://schemas.openxmlformats.org/presentationml/2006/main">
-  <p:cSld>
-    <p:spTree>
-      <p:nvGrpSpPr>
-        <p:cNvPr id="1" name=""/>
-        <p:cNvGrpSpPr/>
-        <p:nvPr/>
-      </p:nvGrpSpPr>
-      <p:grpSpPr>
-        <a:xfrm>
-          <a:off x="0" y="0"/>
-          <a:ext cx="0" cy="0"/>
-          <a:chOff x="0" y="0"/>
-          <a:chExt cx="0" cy="0"/>
-        </a:xfrm>
-      </p:grpSpPr>
-      <p:sp>
-        <p:nvSpPr>
-          <p:cNvPr id="2" name="Title 1">
-            <a:extLst>
-              <a:ext uri="{FF2B5EF4-FFF2-40B4-BE49-F238E27FC236}">
-                <a16:creationId xmlns:a16="http://schemas.microsoft.com/office/drawing/2014/main" id="{15C869D5-4E6C-6766-7E06-98B25E955D87}"/>
-              </a:ext>
-            </a:extLst>
-          </p:cNvPr>
-          <p:cNvSpPr>
-            <a:spLocks noGrp="1"/>
-          </p:cNvSpPr>
-          <p:nvPr>
-            <p:ph type="title"/>
-          </p:nvPr>
-        </p:nvSpPr>
-        <p:spPr/>
-        <p:txBody>
-          <a:bodyPr>
-            <a:normAutofit/>
-          </a:bodyPr>
-          <a:lstStyle/>
-          <a:p>
-            <a:r>
-              <a:rPr lang="en-US" sz="4000" dirty="0"/>
-              <a:t>Classifiers – Stochastic Gradient Descent (SGD)</a:t>
-            </a:r>
-          </a:p>
-        </p:txBody>
-      </p:sp>
-      <p:sp>
-        <p:nvSpPr>
-          <p:cNvPr id="4" name="Rectángulo 3">
-            <a:extLst>
-              <a:ext uri="{FF2B5EF4-FFF2-40B4-BE49-F238E27FC236}">
-                <a16:creationId xmlns:a16="http://schemas.microsoft.com/office/drawing/2014/main" id="{27E372AA-1ACE-5D2D-EDED-66DB6F5F4F88}"/>
-              </a:ext>
-            </a:extLst>
-          </p:cNvPr>
-          <p:cNvSpPr/>
-          <p:nvPr/>
-        </p:nvSpPr>
-        <p:spPr>
-          <a:xfrm>
-            <a:off x="0" y="0"/>
-            <a:ext cx="374469" cy="6858000"/>
-          </a:xfrm>
-          <a:prstGeom prst="rect">
-            <a:avLst/>
-          </a:prstGeom>
-        </p:spPr>
-        <p:style>
-          <a:lnRef idx="2">
-            <a:schemeClr val="accent2">
-              <a:shade val="50000"/>
-            </a:schemeClr>
-          </a:lnRef>
-          <a:fillRef idx="1">
-            <a:schemeClr val="accent2"/>
-          </a:fillRef>
-          <a:effectRef idx="0">
-            <a:schemeClr val="accent2"/>
-          </a:effectRef>
-          <a:fontRef idx="minor">
-            <a:schemeClr val="lt1"/>
-          </a:fontRef>
-        </p:style>
-        <p:txBody>
-          <a:bodyPr rtlCol="0" anchor="ctr"/>
-          <a:lstStyle/>
-          <a:p>
-            <a:pPr algn="ctr"/>
-            <a:endParaRPr lang="es-ES"/>
-          </a:p>
-        </p:txBody>
-      </p:sp>
-      <p:sp>
-        <p:nvSpPr>
-          <p:cNvPr id="5" name="Rectangle 143">
-            <a:extLst>
-              <a:ext uri="{FF2B5EF4-FFF2-40B4-BE49-F238E27FC236}">
-                <a16:creationId xmlns:a16="http://schemas.microsoft.com/office/drawing/2014/main" id="{4CAC6C5C-8798-AF6F-C852-967659577BF3}"/>
-              </a:ext>
-            </a:extLst>
-          </p:cNvPr>
-          <p:cNvSpPr>
-            <a:spLocks noChangeArrowheads="1"/>
-          </p:cNvSpPr>
-          <p:nvPr/>
-        </p:nvSpPr>
-        <p:spPr bwMode="auto">
-          <a:xfrm>
-            <a:off x="448342" y="6401243"/>
-            <a:ext cx="5730175" cy="307777"/>
-          </a:xfrm>
-          <a:prstGeom prst="rect">
-            <a:avLst/>
-          </a:prstGeom>
-          <a:noFill/>
-          <a:ln>
-            <a:noFill/>
-          </a:ln>
-          <a:effectLst/>
-          <a:extLst>
-            <a:ext uri="{909E8E84-426E-40DD-AFC4-6F175D3DCCD1}">
-              <a14:hiddenFill xmlns:a14="http://schemas.microsoft.com/office/drawing/2010/main">
-                <a:solidFill>
-                  <a:schemeClr val="accent1"/>
-                </a:solidFill>
-              </a14:hiddenFill>
-            </a:ext>
-            <a:ext uri="{91240B29-F687-4F45-9708-019B960494DF}">
-              <a14:hiddenLine xmlns:a14="http://schemas.microsoft.com/office/drawing/2010/main" w="9525">
-                <a:solidFill>
-                  <a:schemeClr val="tx1"/>
-                </a:solidFill>
-                <a:miter lim="800000"/>
-                <a:headEnd/>
-                <a:tailEnd/>
-              </a14:hiddenLine>
-            </a:ext>
-            <a:ext uri="{AF507438-7753-43E0-B8FC-AC1667EBCBE1}">
-              <a14:hiddenEffects xmlns:a14="http://schemas.microsoft.com/office/drawing/2010/main">
-                <a:effectLst>
-                  <a:outerShdw dist="35921" dir="2700000" algn="ctr" rotWithShape="0">
-                    <a:schemeClr val="bg2"/>
-                  </a:outerShdw>
-                </a:effectLst>
-              </a14:hiddenEffects>
-            </a:ext>
-          </a:extLst>
-        </p:spPr>
-        <p:txBody>
-          <a:bodyPr vert="horz" wrap="square" lIns="91440" tIns="45720" rIns="91440" bIns="45720" numCol="1" anchor="ctr" anchorCtr="0" compatLnSpc="1">
-            <a:prstTxWarp prst="textNoShape">
-              <a:avLst/>
-            </a:prstTxWarp>
-            <a:spAutoFit/>
-          </a:bodyPr>
-          <a:lstStyle/>
-          <a:p>
-            <a:pPr marL="0" marR="0" lvl="0" indent="0" algn="l" defTabSz="914400" rtl="0" eaLnBrk="0" fontAlgn="base" latinLnBrk="0" hangingPunct="0">
-              <a:lnSpc>
-                <a:spcPct val="100000"/>
-              </a:lnSpc>
-              <a:spcBef>
-                <a:spcPct val="0"/>
-              </a:spcBef>
-              <a:spcAft>
-                <a:spcPct val="0"/>
-              </a:spcAft>
-              <a:buClrTx/>
-              <a:buSzTx/>
-              <a:buFontTx/>
-              <a:buNone/>
-              <a:tabLst/>
-            </a:pPr>
-            <a:r>
-              <a:rPr kumimoji="0" lang="en-US" altLang="es-ES" sz="1400" b="0" i="0" u="none" strike="noStrike" cap="none" normalizeH="0" baseline="0" dirty="0">
-                <a:ln>
-                  <a:noFill/>
-                </a:ln>
-                <a:solidFill>
-                  <a:srgbClr val="F4A200"/>
-                </a:solidFill>
-                <a:effectLst/>
-                <a:latin typeface="Arial" panose="020B0604020202020204" pitchFamily="34" charset="0"/>
-                <a:ea typeface="Myriad Pro Light"/>
-                <a:cs typeface="Times New Roman" panose="02020603050405020304" pitchFamily="18" charset="0"/>
-              </a:rPr>
-              <a:t>Master in Quantitative Economic Analysis </a:t>
-            </a:r>
-            <a:r>
-              <a:rPr kumimoji="0" lang="en-US" altLang="es-ES" sz="1400" b="0" i="0" u="none" strike="noStrike" cap="none" normalizeH="0" baseline="0" dirty="0" err="1">
-                <a:ln>
-                  <a:noFill/>
-                </a:ln>
-                <a:solidFill>
-                  <a:srgbClr val="F4A200"/>
-                </a:solidFill>
-                <a:effectLst/>
-                <a:latin typeface="Arial" panose="020B0604020202020204" pitchFamily="34" charset="0"/>
-                <a:ea typeface="Myriad Pro Light"/>
-                <a:cs typeface="Times New Roman" panose="02020603050405020304" pitchFamily="18" charset="0"/>
-              </a:rPr>
-              <a:t>MQuEA</a:t>
-            </a:r>
-            <a:endParaRPr kumimoji="0" lang="es-ES" altLang="es-ES" sz="500" b="0" i="0" u="none" strike="noStrike" cap="none" normalizeH="0" baseline="0" dirty="0">
-              <a:ln>
-                <a:noFill/>
-              </a:ln>
-              <a:solidFill>
-                <a:schemeClr val="tx1"/>
-              </a:solidFill>
-              <a:effectLst/>
-              <a:latin typeface="Arial" panose="020B0604020202020204" pitchFamily="34" charset="0"/>
-            </a:endParaRPr>
-          </a:p>
-        </p:txBody>
-      </p:sp>
-      <p:sp>
-        <p:nvSpPr>
-          <p:cNvPr id="6" name="Rectangle 143">
-            <a:extLst>
-              <a:ext uri="{FF2B5EF4-FFF2-40B4-BE49-F238E27FC236}">
-                <a16:creationId xmlns:a16="http://schemas.microsoft.com/office/drawing/2014/main" id="{09E0FB32-C00A-A390-E094-76FC3EA5C288}"/>
-              </a:ext>
-            </a:extLst>
-          </p:cNvPr>
-          <p:cNvSpPr>
-            <a:spLocks noChangeArrowheads="1"/>
-          </p:cNvSpPr>
-          <p:nvPr/>
-        </p:nvSpPr>
-        <p:spPr bwMode="auto">
-          <a:xfrm>
-            <a:off x="6186394" y="6411881"/>
-            <a:ext cx="5730175" cy="307777"/>
-          </a:xfrm>
-          <a:prstGeom prst="rect">
-            <a:avLst/>
-          </a:prstGeom>
-          <a:noFill/>
-          <a:ln>
-            <a:noFill/>
-          </a:ln>
-          <a:effectLst/>
-          <a:extLst>
-            <a:ext uri="{909E8E84-426E-40DD-AFC4-6F175D3DCCD1}">
-              <a14:hiddenFill xmlns:a14="http://schemas.microsoft.com/office/drawing/2010/main">
-                <a:solidFill>
-                  <a:schemeClr val="accent1"/>
-                </a:solidFill>
-              </a14:hiddenFill>
-            </a:ext>
-            <a:ext uri="{91240B29-F687-4F45-9708-019B960494DF}">
-              <a14:hiddenLine xmlns:a14="http://schemas.microsoft.com/office/drawing/2010/main" w="9525">
-                <a:solidFill>
-                  <a:schemeClr val="tx1"/>
-                </a:solidFill>
-                <a:miter lim="800000"/>
-                <a:headEnd/>
-                <a:tailEnd/>
-              </a14:hiddenLine>
-            </a:ext>
-            <a:ext uri="{AF507438-7753-43E0-B8FC-AC1667EBCBE1}">
-              <a14:hiddenEffects xmlns:a14="http://schemas.microsoft.com/office/drawing/2010/main">
-                <a:effectLst>
-                  <a:outerShdw dist="35921" dir="2700000" algn="ctr" rotWithShape="0">
-                    <a:schemeClr val="bg2"/>
-                  </a:outerShdw>
-                </a:effectLst>
-              </a14:hiddenEffects>
-            </a:ext>
-          </a:extLst>
-        </p:spPr>
-        <p:txBody>
-          <a:bodyPr vert="horz" wrap="square" lIns="91440" tIns="45720" rIns="91440" bIns="45720" numCol="1" anchor="ctr" anchorCtr="0" compatLnSpc="1">
-            <a:prstTxWarp prst="textNoShape">
-              <a:avLst/>
-            </a:prstTxWarp>
-            <a:spAutoFit/>
-          </a:bodyPr>
-          <a:lstStyle/>
-          <a:p>
-            <a:pPr marL="0" marR="0" lvl="0" indent="0" algn="r" defTabSz="914400" rtl="0" eaLnBrk="0" fontAlgn="base" latinLnBrk="0" hangingPunct="0">
-              <a:lnSpc>
-                <a:spcPct val="100000"/>
-              </a:lnSpc>
-              <a:spcBef>
-                <a:spcPct val="0"/>
-              </a:spcBef>
-              <a:spcAft>
-                <a:spcPct val="0"/>
-              </a:spcAft>
-              <a:buClrTx/>
-              <a:buSzTx/>
-              <a:buFontTx/>
-              <a:buNone/>
-              <a:tabLst/>
-            </a:pPr>
-            <a:r>
-              <a:rPr kumimoji="0" lang="en-US" altLang="es-ES" sz="1400" b="0" i="0" u="none" strike="noStrike" cap="none" normalizeH="0" baseline="0" dirty="0">
-                <a:ln>
-                  <a:noFill/>
-                </a:ln>
-                <a:solidFill>
-                  <a:srgbClr val="F4A200"/>
-                </a:solidFill>
-                <a:effectLst/>
-                <a:latin typeface="Arial" panose="020B0604020202020204" pitchFamily="34" charset="0"/>
-                <a:ea typeface="Myriad Pro Light"/>
-                <a:cs typeface="Times New Roman" panose="02020603050405020304" pitchFamily="18" charset="0"/>
-              </a:rPr>
-              <a:t>Universidad </a:t>
-            </a:r>
-            <a:r>
-              <a:rPr kumimoji="0" lang="en-US" altLang="es-ES" sz="1400" b="0" i="0" u="none" strike="noStrike" cap="none" normalizeH="0" baseline="0" dirty="0" err="1">
-                <a:ln>
-                  <a:noFill/>
-                </a:ln>
-                <a:solidFill>
-                  <a:srgbClr val="F4A200"/>
-                </a:solidFill>
-                <a:effectLst/>
-                <a:latin typeface="Arial" panose="020B0604020202020204" pitchFamily="34" charset="0"/>
-                <a:ea typeface="Myriad Pro Light"/>
-                <a:cs typeface="Times New Roman" panose="02020603050405020304" pitchFamily="18" charset="0"/>
-              </a:rPr>
-              <a:t>Aut</a:t>
-            </a:r>
-            <a:r>
-              <a:rPr lang="en-US" altLang="es-ES" sz="1400" dirty="0" err="1">
-                <a:solidFill>
-                  <a:srgbClr val="F4A200"/>
-                </a:solidFill>
-                <a:latin typeface="Arial" panose="020B0604020202020204" pitchFamily="34" charset="0"/>
-                <a:ea typeface="Myriad Pro Light"/>
-                <a:cs typeface="Times New Roman" panose="02020603050405020304" pitchFamily="18" charset="0"/>
-              </a:rPr>
-              <a:t>ó</a:t>
-            </a:r>
-            <a:r>
-              <a:rPr kumimoji="0" lang="en-US" altLang="es-ES" sz="1400" b="0" i="0" u="none" strike="noStrike" cap="none" normalizeH="0" baseline="0" dirty="0" err="1">
-                <a:ln>
-                  <a:noFill/>
-                </a:ln>
-                <a:solidFill>
-                  <a:srgbClr val="F4A200"/>
-                </a:solidFill>
-                <a:effectLst/>
-                <a:latin typeface="Arial" panose="020B0604020202020204" pitchFamily="34" charset="0"/>
-                <a:ea typeface="Myriad Pro Light"/>
-                <a:cs typeface="Times New Roman" panose="02020603050405020304" pitchFamily="18" charset="0"/>
-              </a:rPr>
-              <a:t>noma</a:t>
-            </a:r>
-            <a:r>
-              <a:rPr kumimoji="0" lang="en-US" altLang="es-ES" sz="1400" b="0" i="0" u="none" strike="noStrike" cap="none" normalizeH="0" baseline="0" dirty="0">
-                <a:ln>
-                  <a:noFill/>
-                </a:ln>
-                <a:solidFill>
-                  <a:srgbClr val="F4A200"/>
-                </a:solidFill>
-                <a:effectLst/>
-                <a:latin typeface="Arial" panose="020B0604020202020204" pitchFamily="34" charset="0"/>
-                <a:ea typeface="Myriad Pro Light"/>
-                <a:cs typeface="Times New Roman" panose="02020603050405020304" pitchFamily="18" charset="0"/>
-              </a:rPr>
-              <a:t> de Madrid</a:t>
-            </a:r>
-            <a:endParaRPr kumimoji="0" lang="es-ES" altLang="es-ES" sz="500" b="0" i="0" u="none" strike="noStrike" cap="none" normalizeH="0" baseline="0" dirty="0">
-              <a:ln>
-                <a:noFill/>
-              </a:ln>
-              <a:solidFill>
-                <a:schemeClr val="tx1"/>
-              </a:solidFill>
-              <a:effectLst/>
-              <a:latin typeface="Arial" panose="020B0604020202020204" pitchFamily="34" charset="0"/>
-            </a:endParaRPr>
-          </a:p>
-        </p:txBody>
-      </p:sp>
-      <mc:AlternateContent xmlns:mc="http://schemas.openxmlformats.org/markup-compatibility/2006" xmlns:a14="http://schemas.microsoft.com/office/drawing/2010/main">
-        <mc:Choice Requires="a14">
-          <p:sp>
-            <p:nvSpPr>
-              <p:cNvPr id="3" name="Content Placeholder 2">
-                <a:extLst>
-                  <a:ext uri="{FF2B5EF4-FFF2-40B4-BE49-F238E27FC236}">
-                    <a16:creationId xmlns:a16="http://schemas.microsoft.com/office/drawing/2014/main" id="{F7EF27C5-01B7-9F60-ECDA-A1F376586FC5}"/>
-                  </a:ext>
-                </a:extLst>
-              </p:cNvPr>
-              <p:cNvSpPr>
-                <a:spLocks noGrp="1"/>
-              </p:cNvSpPr>
-              <p:nvPr>
-                <p:ph idx="1"/>
-              </p:nvPr>
-            </p:nvSpPr>
-            <p:spPr/>
-            <p:txBody>
-              <a:bodyPr>
-                <a:normAutofit fontScale="70000" lnSpcReduction="20000"/>
-              </a:bodyPr>
-              <a:lstStyle/>
-              <a:p>
-                <a:pPr>
-                  <a:lnSpc>
-                    <a:spcPct val="120000"/>
-                  </a:lnSpc>
-                  <a:buFont typeface="Wingdings" panose="05000000000000000000" pitchFamily="2" charset="2"/>
-                  <a:buChar char="§"/>
-                </a:pPr>
-                <a:r>
-                  <a:rPr lang="en-US" sz="2200" dirty="0">
-                    <a:latin typeface="+mj-lt"/>
-                  </a:rPr>
-                  <a:t>Find the slope of the objective function with respect to each feature </a:t>
-                </a:r>
-                <a:r>
-                  <a:rPr lang="en-US" sz="2200" b="1" dirty="0">
-                    <a:latin typeface="+mj-lt"/>
-                  </a:rPr>
-                  <a:t>(gradient)</a:t>
-                </a:r>
-              </a:p>
-              <a:p>
-                <a:pPr marL="0" indent="0">
-                  <a:lnSpc>
-                    <a:spcPct val="120000"/>
-                  </a:lnSpc>
-                  <a:buNone/>
-                </a:pPr>
-                <a14:m>
-                  <m:oMathPara xmlns:m="http://schemas.openxmlformats.org/officeDocument/2006/math">
-                    <m:oMathParaPr>
-                      <m:jc m:val="centerGroup"/>
-                    </m:oMathParaPr>
-                    <m:oMath xmlns:m="http://schemas.openxmlformats.org/officeDocument/2006/math">
-                      <m:sSub>
-                        <m:sSubPr>
-                          <m:ctrlPr>
-                            <a:rPr lang="en-US" sz="1800" i="1" smtClean="0">
-                              <a:effectLst/>
-                              <a:latin typeface="Cambria Math" panose="02040503050406030204" pitchFamily="18" charset="0"/>
-                              <a:ea typeface="Calibri" panose="020F0502020204030204" pitchFamily="34" charset="0"/>
-                              <a:cs typeface="Times New Roman" panose="02020603050405020304" pitchFamily="18" charset="0"/>
-                            </a:rPr>
-                          </m:ctrlPr>
-                        </m:sSubPr>
-                        <m:e>
-                          <m:r>
-                            <a:rPr lang="es-ES" sz="1800" i="1">
-                              <a:effectLst/>
-                              <a:latin typeface="Cambria Math" panose="02040503050406030204" pitchFamily="18" charset="0"/>
-                              <a:ea typeface="Calibri" panose="020F0502020204030204" pitchFamily="34" charset="0"/>
-                              <a:cs typeface="Times New Roman" panose="02020603050405020304" pitchFamily="18" charset="0"/>
-                            </a:rPr>
-                            <m:t>𝛻</m:t>
-                          </m:r>
-                        </m:e>
-                        <m:sub>
-                          <m:r>
-                            <a:rPr lang="es-ES" sz="1800" b="1" i="1">
-                              <a:effectLst/>
-                              <a:latin typeface="Cambria Math" panose="02040503050406030204" pitchFamily="18" charset="0"/>
-                              <a:ea typeface="Calibri" panose="020F0502020204030204" pitchFamily="34" charset="0"/>
-                              <a:cs typeface="Times New Roman" panose="02020603050405020304" pitchFamily="18" charset="0"/>
-                            </a:rPr>
-                            <m:t>𝛉</m:t>
-                          </m:r>
-                        </m:sub>
-                      </m:sSub>
-                      <m:r>
-                        <a:rPr lang="en-US" sz="1800" i="1">
-                          <a:effectLst/>
-                          <a:latin typeface="Cambria Math" panose="02040503050406030204" pitchFamily="18" charset="0"/>
-                          <a:ea typeface="Calibri" panose="020F0502020204030204" pitchFamily="34" charset="0"/>
-                          <a:cs typeface="Times New Roman" panose="02020603050405020304" pitchFamily="18" charset="0"/>
-                        </a:rPr>
-                        <m:t>𝑀𝑆𝐸</m:t>
-                      </m:r>
-                      <m:r>
-                        <a:rPr lang="en-US" sz="1800" i="1">
-                          <a:effectLst/>
-                          <a:latin typeface="Cambria Math" panose="02040503050406030204" pitchFamily="18" charset="0"/>
-                          <a:ea typeface="Calibri" panose="020F0502020204030204" pitchFamily="34" charset="0"/>
-                          <a:cs typeface="Times New Roman" panose="02020603050405020304" pitchFamily="18" charset="0"/>
-                        </a:rPr>
-                        <m:t>(</m:t>
-                      </m:r>
-                      <m:r>
-                        <a:rPr lang="es-ES" sz="1800" b="1" i="1">
-                          <a:effectLst/>
-                          <a:latin typeface="Cambria Math" panose="02040503050406030204" pitchFamily="18" charset="0"/>
-                          <a:ea typeface="Calibri" panose="020F0502020204030204" pitchFamily="34" charset="0"/>
-                          <a:cs typeface="Times New Roman" panose="02020603050405020304" pitchFamily="18" charset="0"/>
-                        </a:rPr>
-                        <m:t>𝛉</m:t>
-                      </m:r>
-                      <m:r>
-                        <a:rPr lang="en-US" sz="1800" i="1">
-                          <a:effectLst/>
-                          <a:latin typeface="Cambria Math" panose="02040503050406030204" pitchFamily="18" charset="0"/>
-                          <a:ea typeface="Calibri" panose="020F0502020204030204" pitchFamily="34" charset="0"/>
-                          <a:cs typeface="Times New Roman" panose="02020603050405020304" pitchFamily="18" charset="0"/>
-                        </a:rPr>
-                        <m:t>)=</m:t>
-                      </m:r>
-                      <m:d>
-                        <m:dPr>
-                          <m:ctrlPr>
-                            <a:rPr lang="en-US" sz="1800" i="1">
-                              <a:effectLst/>
-                              <a:latin typeface="Cambria Math" panose="02040503050406030204" pitchFamily="18" charset="0"/>
-                              <a:ea typeface="Calibri" panose="020F0502020204030204" pitchFamily="34" charset="0"/>
-                              <a:cs typeface="Times New Roman" panose="02020603050405020304" pitchFamily="18" charset="0"/>
-                            </a:rPr>
-                          </m:ctrlPr>
-                        </m:dPr>
-                        <m:e>
-                          <m:eqArr>
-                            <m:eqArrPr>
-                              <m:ctrlPr>
-                                <a:rPr lang="en-US" sz="1800" i="1">
-                                  <a:effectLst/>
-                                  <a:latin typeface="Cambria Math" panose="02040503050406030204" pitchFamily="18" charset="0"/>
-                                  <a:ea typeface="Calibri" panose="020F0502020204030204" pitchFamily="34" charset="0"/>
-                                  <a:cs typeface="Times New Roman" panose="02020603050405020304" pitchFamily="18" charset="0"/>
-                                </a:rPr>
-                              </m:ctrlPr>
-                            </m:eqArrPr>
-                            <m:e>
-                              <m:f>
-                                <m:fPr>
-                                  <m:ctrlPr>
-                                    <a:rPr lang="en-US" sz="1800" i="1">
-                                      <a:effectLst/>
-                                      <a:latin typeface="Cambria Math" panose="02040503050406030204" pitchFamily="18" charset="0"/>
-                                      <a:ea typeface="Calibri" panose="020F0502020204030204" pitchFamily="34" charset="0"/>
-                                      <a:cs typeface="Times New Roman" panose="02020603050405020304" pitchFamily="18" charset="0"/>
-                                    </a:rPr>
-                                  </m:ctrlPr>
-                                </m:fPr>
-                                <m:num>
-                                  <m:r>
-                                    <a:rPr lang="es-ES" sz="1800" i="1">
-                                      <a:effectLst/>
-                                      <a:latin typeface="Cambria Math" panose="02040503050406030204" pitchFamily="18" charset="0"/>
-                                      <a:ea typeface="Calibri" panose="020F0502020204030204" pitchFamily="34" charset="0"/>
-                                      <a:cs typeface="Times New Roman" panose="02020603050405020304" pitchFamily="18" charset="0"/>
-                                    </a:rPr>
-                                    <m:t>𝜕</m:t>
-                                  </m:r>
-                                </m:num>
-                                <m:den>
-                                  <m:r>
-                                    <a:rPr lang="es-ES" sz="1800" i="1">
-                                      <a:effectLst/>
-                                      <a:latin typeface="Cambria Math" panose="02040503050406030204" pitchFamily="18" charset="0"/>
-                                      <a:ea typeface="Calibri" panose="020F0502020204030204" pitchFamily="34" charset="0"/>
-                                      <a:cs typeface="Times New Roman" panose="02020603050405020304" pitchFamily="18" charset="0"/>
-                                    </a:rPr>
-                                    <m:t>𝜕</m:t>
-                                  </m:r>
-                                  <m:sSub>
-                                    <m:sSubPr>
-                                      <m:ctrlPr>
-                                        <a:rPr lang="en-US" sz="1800" i="1">
-                                          <a:effectLst/>
-                                          <a:latin typeface="Cambria Math" panose="02040503050406030204" pitchFamily="18" charset="0"/>
-                                          <a:ea typeface="Calibri" panose="020F0502020204030204" pitchFamily="34" charset="0"/>
-                                          <a:cs typeface="Times New Roman" panose="02020603050405020304" pitchFamily="18" charset="0"/>
-                                        </a:rPr>
-                                      </m:ctrlPr>
-                                    </m:sSubPr>
-                                    <m:e>
-                                      <m:r>
-                                        <a:rPr lang="es-ES" sz="1800" i="1">
-                                          <a:effectLst/>
-                                          <a:latin typeface="Cambria Math" panose="02040503050406030204" pitchFamily="18" charset="0"/>
-                                          <a:ea typeface="Calibri" panose="020F0502020204030204" pitchFamily="34" charset="0"/>
-                                          <a:cs typeface="Times New Roman" panose="02020603050405020304" pitchFamily="18" charset="0"/>
-                                        </a:rPr>
-                                        <m:t>𝜃</m:t>
-                                      </m:r>
-                                    </m:e>
-                                    <m:sub>
-                                      <m:r>
-                                        <a:rPr lang="en-US" sz="1800" i="1">
-                                          <a:effectLst/>
-                                          <a:latin typeface="Cambria Math" panose="02040503050406030204" pitchFamily="18" charset="0"/>
-                                          <a:ea typeface="Calibri" panose="020F0502020204030204" pitchFamily="34" charset="0"/>
-                                          <a:cs typeface="Times New Roman" panose="02020603050405020304" pitchFamily="18" charset="0"/>
-                                        </a:rPr>
-                                        <m:t>0</m:t>
-                                      </m:r>
-                                    </m:sub>
-                                  </m:sSub>
-                                </m:den>
-                              </m:f>
-                              <m:r>
-                                <a:rPr lang="en-US" sz="1800" i="1">
-                                  <a:effectLst/>
-                                  <a:latin typeface="Cambria Math" panose="02040503050406030204" pitchFamily="18" charset="0"/>
-                                  <a:ea typeface="Calibri" panose="020F0502020204030204" pitchFamily="34" charset="0"/>
-                                  <a:cs typeface="Times New Roman" panose="02020603050405020304" pitchFamily="18" charset="0"/>
-                                </a:rPr>
-                                <m:t>𝑀𝑆𝐸</m:t>
-                              </m:r>
-                              <m:r>
-                                <a:rPr lang="en-US" sz="1800" i="1">
-                                  <a:effectLst/>
-                                  <a:latin typeface="Cambria Math" panose="02040503050406030204" pitchFamily="18" charset="0"/>
-                                  <a:ea typeface="Calibri" panose="020F0502020204030204" pitchFamily="34" charset="0"/>
-                                  <a:cs typeface="Times New Roman" panose="02020603050405020304" pitchFamily="18" charset="0"/>
-                                </a:rPr>
-                                <m:t>(</m:t>
-                              </m:r>
-                              <m:r>
-                                <a:rPr lang="es-ES" sz="1800" b="1" i="1">
-                                  <a:effectLst/>
-                                  <a:latin typeface="Cambria Math" panose="02040503050406030204" pitchFamily="18" charset="0"/>
-                                  <a:ea typeface="Calibri" panose="020F0502020204030204" pitchFamily="34" charset="0"/>
-                                  <a:cs typeface="Times New Roman" panose="02020603050405020304" pitchFamily="18" charset="0"/>
-                                </a:rPr>
-                                <m:t>𝛉</m:t>
-                              </m:r>
-                              <m:r>
-                                <a:rPr lang="en-US" sz="1800" i="1">
-                                  <a:effectLst/>
-                                  <a:latin typeface="Cambria Math" panose="02040503050406030204" pitchFamily="18" charset="0"/>
-                                  <a:ea typeface="Calibri" panose="020F0502020204030204" pitchFamily="34" charset="0"/>
-                                  <a:cs typeface="Times New Roman" panose="02020603050405020304" pitchFamily="18" charset="0"/>
-                                </a:rPr>
-                                <m:t>)</m:t>
-                              </m:r>
-                            </m:e>
-                            <m:e>
-                              <m:f>
-                                <m:fPr>
-                                  <m:ctrlPr>
-                                    <a:rPr lang="en-US" sz="1800" i="1">
-                                      <a:effectLst/>
-                                      <a:latin typeface="Cambria Math" panose="02040503050406030204" pitchFamily="18" charset="0"/>
-                                      <a:ea typeface="Calibri" panose="020F0502020204030204" pitchFamily="34" charset="0"/>
-                                      <a:cs typeface="Times New Roman" panose="02020603050405020304" pitchFamily="18" charset="0"/>
-                                    </a:rPr>
-                                  </m:ctrlPr>
-                                </m:fPr>
-                                <m:num>
-                                  <m:r>
-                                    <a:rPr lang="es-ES" sz="1800" i="1">
-                                      <a:effectLst/>
-                                      <a:latin typeface="Cambria Math" panose="02040503050406030204" pitchFamily="18" charset="0"/>
-                                      <a:ea typeface="Calibri" panose="020F0502020204030204" pitchFamily="34" charset="0"/>
-                                      <a:cs typeface="Times New Roman" panose="02020603050405020304" pitchFamily="18" charset="0"/>
-                                    </a:rPr>
-                                    <m:t>𝜕</m:t>
-                                  </m:r>
-                                </m:num>
-                                <m:den>
-                                  <m:r>
-                                    <a:rPr lang="es-ES" sz="1800" i="1">
-                                      <a:effectLst/>
-                                      <a:latin typeface="Cambria Math" panose="02040503050406030204" pitchFamily="18" charset="0"/>
-                                      <a:ea typeface="Calibri" panose="020F0502020204030204" pitchFamily="34" charset="0"/>
-                                      <a:cs typeface="Times New Roman" panose="02020603050405020304" pitchFamily="18" charset="0"/>
-                                    </a:rPr>
-                                    <m:t>𝜕</m:t>
-                                  </m:r>
-                                  <m:sSub>
-                                    <m:sSubPr>
-                                      <m:ctrlPr>
-                                        <a:rPr lang="en-US" sz="1800" i="1">
-                                          <a:effectLst/>
-                                          <a:latin typeface="Cambria Math" panose="02040503050406030204" pitchFamily="18" charset="0"/>
-                                          <a:ea typeface="Calibri" panose="020F0502020204030204" pitchFamily="34" charset="0"/>
-                                          <a:cs typeface="Times New Roman" panose="02020603050405020304" pitchFamily="18" charset="0"/>
-                                        </a:rPr>
-                                      </m:ctrlPr>
-                                    </m:sSubPr>
-                                    <m:e>
-                                      <m:r>
-                                        <a:rPr lang="es-ES" sz="1800" i="1">
-                                          <a:effectLst/>
-                                          <a:latin typeface="Cambria Math" panose="02040503050406030204" pitchFamily="18" charset="0"/>
-                                          <a:ea typeface="Calibri" panose="020F0502020204030204" pitchFamily="34" charset="0"/>
-                                          <a:cs typeface="Times New Roman" panose="02020603050405020304" pitchFamily="18" charset="0"/>
-                                        </a:rPr>
-                                        <m:t>𝜃</m:t>
-                                      </m:r>
-                                    </m:e>
-                                    <m:sub>
-                                      <m:r>
-                                        <a:rPr lang="en-US" sz="1800" i="1">
-                                          <a:effectLst/>
-                                          <a:latin typeface="Cambria Math" panose="02040503050406030204" pitchFamily="18" charset="0"/>
-                                          <a:ea typeface="Calibri" panose="020F0502020204030204" pitchFamily="34" charset="0"/>
-                                          <a:cs typeface="Times New Roman" panose="02020603050405020304" pitchFamily="18" charset="0"/>
-                                        </a:rPr>
-                                        <m:t>1</m:t>
-                                      </m:r>
-                                    </m:sub>
-                                  </m:sSub>
-                                </m:den>
-                              </m:f>
-                              <m:r>
-                                <a:rPr lang="en-US" sz="1800" i="1">
-                                  <a:effectLst/>
-                                  <a:latin typeface="Cambria Math" panose="02040503050406030204" pitchFamily="18" charset="0"/>
-                                  <a:ea typeface="Calibri" panose="020F0502020204030204" pitchFamily="34" charset="0"/>
-                                  <a:cs typeface="Times New Roman" panose="02020603050405020304" pitchFamily="18" charset="0"/>
-                                </a:rPr>
-                                <m:t>𝑀𝑆𝐸</m:t>
-                              </m:r>
-                              <m:r>
-                                <a:rPr lang="en-US" sz="1800" i="1">
-                                  <a:effectLst/>
-                                  <a:latin typeface="Cambria Math" panose="02040503050406030204" pitchFamily="18" charset="0"/>
-                                  <a:ea typeface="Calibri" panose="020F0502020204030204" pitchFamily="34" charset="0"/>
-                                  <a:cs typeface="Times New Roman" panose="02020603050405020304" pitchFamily="18" charset="0"/>
-                                </a:rPr>
-                                <m:t>(</m:t>
-                              </m:r>
-                              <m:r>
-                                <a:rPr lang="es-ES" sz="1800" b="1" i="1">
-                                  <a:effectLst/>
-                                  <a:latin typeface="Cambria Math" panose="02040503050406030204" pitchFamily="18" charset="0"/>
-                                  <a:ea typeface="Calibri" panose="020F0502020204030204" pitchFamily="34" charset="0"/>
-                                  <a:cs typeface="Times New Roman" panose="02020603050405020304" pitchFamily="18" charset="0"/>
-                                </a:rPr>
-                                <m:t>𝛉</m:t>
-                              </m:r>
-                              <m:r>
-                                <a:rPr lang="en-US" sz="1800" i="1">
-                                  <a:effectLst/>
-                                  <a:latin typeface="Cambria Math" panose="02040503050406030204" pitchFamily="18" charset="0"/>
-                                  <a:ea typeface="Calibri" panose="020F0502020204030204" pitchFamily="34" charset="0"/>
-                                  <a:cs typeface="Times New Roman" panose="02020603050405020304" pitchFamily="18" charset="0"/>
-                                </a:rPr>
-                                <m:t>)</m:t>
-                              </m:r>
-                            </m:e>
-                            <m:e>
-                              <m:r>
-                                <a:rPr lang="en-US" sz="1800" i="1">
-                                  <a:effectLst/>
-                                  <a:latin typeface="Cambria Math" panose="02040503050406030204" pitchFamily="18" charset="0"/>
-                                  <a:ea typeface="Calibri" panose="020F0502020204030204" pitchFamily="34" charset="0"/>
-                                  <a:cs typeface="Times New Roman" panose="02020603050405020304" pitchFamily="18" charset="0"/>
-                                </a:rPr>
-                                <m:t>⋮</m:t>
-                              </m:r>
-                            </m:e>
-                            <m:e>
-                              <m:f>
-                                <m:fPr>
-                                  <m:ctrlPr>
-                                    <a:rPr lang="en-US" sz="1800" i="1">
-                                      <a:effectLst/>
-                                      <a:latin typeface="Cambria Math" panose="02040503050406030204" pitchFamily="18" charset="0"/>
-                                      <a:ea typeface="Calibri" panose="020F0502020204030204" pitchFamily="34" charset="0"/>
-                                      <a:cs typeface="Times New Roman" panose="02020603050405020304" pitchFamily="18" charset="0"/>
-                                    </a:rPr>
-                                  </m:ctrlPr>
-                                </m:fPr>
-                                <m:num>
-                                  <m:r>
-                                    <a:rPr lang="es-ES" sz="1800" i="1">
-                                      <a:effectLst/>
-                                      <a:latin typeface="Cambria Math" panose="02040503050406030204" pitchFamily="18" charset="0"/>
-                                      <a:ea typeface="Calibri" panose="020F0502020204030204" pitchFamily="34" charset="0"/>
-                                      <a:cs typeface="Times New Roman" panose="02020603050405020304" pitchFamily="18" charset="0"/>
-                                    </a:rPr>
-                                    <m:t>𝜕</m:t>
-                                  </m:r>
-                                </m:num>
-                                <m:den>
-                                  <m:r>
-                                    <a:rPr lang="es-ES" sz="1800" i="1">
-                                      <a:effectLst/>
-                                      <a:latin typeface="Cambria Math" panose="02040503050406030204" pitchFamily="18" charset="0"/>
-                                      <a:ea typeface="Calibri" panose="020F0502020204030204" pitchFamily="34" charset="0"/>
-                                      <a:cs typeface="Times New Roman" panose="02020603050405020304" pitchFamily="18" charset="0"/>
-                                    </a:rPr>
-                                    <m:t>𝜕</m:t>
-                                  </m:r>
-                                  <m:sSub>
-                                    <m:sSubPr>
-                                      <m:ctrlPr>
-                                        <a:rPr lang="en-US" sz="1800" i="1">
-                                          <a:effectLst/>
-                                          <a:latin typeface="Cambria Math" panose="02040503050406030204" pitchFamily="18" charset="0"/>
-                                          <a:ea typeface="Calibri" panose="020F0502020204030204" pitchFamily="34" charset="0"/>
-                                          <a:cs typeface="Times New Roman" panose="02020603050405020304" pitchFamily="18" charset="0"/>
-                                        </a:rPr>
-                                      </m:ctrlPr>
-                                    </m:sSubPr>
-                                    <m:e>
-                                      <m:r>
-                                        <a:rPr lang="es-ES" sz="1800" i="1">
-                                          <a:effectLst/>
-                                          <a:latin typeface="Cambria Math" panose="02040503050406030204" pitchFamily="18" charset="0"/>
-                                          <a:ea typeface="Calibri" panose="020F0502020204030204" pitchFamily="34" charset="0"/>
-                                          <a:cs typeface="Times New Roman" panose="02020603050405020304" pitchFamily="18" charset="0"/>
-                                        </a:rPr>
-                                        <m:t>𝜃</m:t>
-                                      </m:r>
-                                    </m:e>
-                                    <m:sub>
-                                      <m:r>
-                                        <a:rPr lang="es-ES" sz="1800" i="1">
-                                          <a:effectLst/>
-                                          <a:latin typeface="Cambria Math" panose="02040503050406030204" pitchFamily="18" charset="0"/>
-                                          <a:ea typeface="Calibri" panose="020F0502020204030204" pitchFamily="34" charset="0"/>
-                                          <a:cs typeface="Times New Roman" panose="02020603050405020304" pitchFamily="18" charset="0"/>
-                                        </a:rPr>
-                                        <m:t>𝑛</m:t>
-                                      </m:r>
-                                    </m:sub>
-                                  </m:sSub>
-                                </m:den>
-                              </m:f>
-                              <m:r>
-                                <a:rPr lang="en-US" sz="1800" i="1">
-                                  <a:effectLst/>
-                                  <a:latin typeface="Cambria Math" panose="02040503050406030204" pitchFamily="18" charset="0"/>
-                                  <a:ea typeface="Calibri" panose="020F0502020204030204" pitchFamily="34" charset="0"/>
-                                  <a:cs typeface="Times New Roman" panose="02020603050405020304" pitchFamily="18" charset="0"/>
-                                </a:rPr>
-                                <m:t>𝑀𝑆𝐸</m:t>
-                              </m:r>
-                              <m:r>
-                                <a:rPr lang="en-US" sz="1800" i="1">
-                                  <a:effectLst/>
-                                  <a:latin typeface="Cambria Math" panose="02040503050406030204" pitchFamily="18" charset="0"/>
-                                  <a:ea typeface="Calibri" panose="020F0502020204030204" pitchFamily="34" charset="0"/>
-                                  <a:cs typeface="Times New Roman" panose="02020603050405020304" pitchFamily="18" charset="0"/>
-                                </a:rPr>
-                                <m:t>(</m:t>
-                              </m:r>
-                              <m:r>
-                                <a:rPr lang="es-ES" sz="1800" b="1" i="1">
-                                  <a:effectLst/>
-                                  <a:latin typeface="Cambria Math" panose="02040503050406030204" pitchFamily="18" charset="0"/>
-                                  <a:ea typeface="Calibri" panose="020F0502020204030204" pitchFamily="34" charset="0"/>
-                                  <a:cs typeface="Times New Roman" panose="02020603050405020304" pitchFamily="18" charset="0"/>
-                                </a:rPr>
-                                <m:t>𝛉</m:t>
-                              </m:r>
-                              <m:r>
-                                <a:rPr lang="en-US" sz="1800" i="1">
-                                  <a:effectLst/>
-                                  <a:latin typeface="Cambria Math" panose="02040503050406030204" pitchFamily="18" charset="0"/>
-                                  <a:ea typeface="Calibri" panose="020F0502020204030204" pitchFamily="34" charset="0"/>
-                                  <a:cs typeface="Times New Roman" panose="02020603050405020304" pitchFamily="18" charset="0"/>
-                                </a:rPr>
-                                <m:t>)</m:t>
-                              </m:r>
-                            </m:e>
-                          </m:eqArr>
-                        </m:e>
-                      </m:d>
-                      <m:r>
-                        <a:rPr lang="en-US" sz="1800" i="1">
-                          <a:effectLst/>
-                          <a:latin typeface="Cambria Math" panose="02040503050406030204" pitchFamily="18" charset="0"/>
-                          <a:ea typeface="Calibri" panose="020F0502020204030204" pitchFamily="34" charset="0"/>
-                          <a:cs typeface="Times New Roman" panose="02020603050405020304" pitchFamily="18" charset="0"/>
-                        </a:rPr>
-                        <m:t>=</m:t>
-                      </m:r>
-                      <m:f>
-                        <m:fPr>
-                          <m:ctrlPr>
-                            <a:rPr lang="en-US" sz="1800" i="1">
-                              <a:effectLst/>
-                              <a:latin typeface="Cambria Math" panose="02040503050406030204" pitchFamily="18" charset="0"/>
-                              <a:ea typeface="Calibri" panose="020F0502020204030204" pitchFamily="34" charset="0"/>
-                              <a:cs typeface="Times New Roman" panose="02020603050405020304" pitchFamily="18" charset="0"/>
-                            </a:rPr>
-                          </m:ctrlPr>
-                        </m:fPr>
-                        <m:num>
-                          <m:r>
-                            <a:rPr lang="en-US" sz="1800" i="1">
-                              <a:effectLst/>
-                              <a:latin typeface="Cambria Math" panose="02040503050406030204" pitchFamily="18" charset="0"/>
-                              <a:ea typeface="Calibri" panose="020F0502020204030204" pitchFamily="34" charset="0"/>
-                              <a:cs typeface="Times New Roman" panose="02020603050405020304" pitchFamily="18" charset="0"/>
-                            </a:rPr>
-                            <m:t>2</m:t>
-                          </m:r>
-                        </m:num>
-                        <m:den>
-                          <m:r>
-                            <a:rPr lang="es-ES" sz="1800" i="1">
-                              <a:effectLst/>
-                              <a:latin typeface="Cambria Math" panose="02040503050406030204" pitchFamily="18" charset="0"/>
-                              <a:ea typeface="Calibri" panose="020F0502020204030204" pitchFamily="34" charset="0"/>
-                              <a:cs typeface="Times New Roman" panose="02020603050405020304" pitchFamily="18" charset="0"/>
-                            </a:rPr>
-                            <m:t>𝑚</m:t>
-                          </m:r>
-                        </m:den>
-                      </m:f>
-                      <m:sSup>
-                        <m:sSupPr>
-                          <m:ctrlPr>
-                            <a:rPr lang="en-US" sz="1800" i="1">
-                              <a:effectLst/>
-                              <a:latin typeface="Cambria Math" panose="02040503050406030204" pitchFamily="18" charset="0"/>
-                              <a:ea typeface="Calibri" panose="020F0502020204030204" pitchFamily="34" charset="0"/>
-                              <a:cs typeface="Times New Roman" panose="02020603050405020304" pitchFamily="18" charset="0"/>
-                            </a:rPr>
-                          </m:ctrlPr>
-                        </m:sSupPr>
-                        <m:e>
-                          <m:r>
-                            <a:rPr lang="es-ES" sz="1800" b="1" i="1">
-                              <a:effectLst/>
-                              <a:latin typeface="Cambria Math" panose="02040503050406030204" pitchFamily="18" charset="0"/>
-                              <a:ea typeface="Calibri" panose="020F0502020204030204" pitchFamily="34" charset="0"/>
-                              <a:cs typeface="Times New Roman" panose="02020603050405020304" pitchFamily="18" charset="0"/>
-                            </a:rPr>
-                            <m:t>𝐗</m:t>
-                          </m:r>
-                        </m:e>
-                        <m:sup>
-                          <m:r>
-                            <a:rPr lang="en-US" sz="1800" i="1">
-                              <a:effectLst/>
-                              <a:latin typeface="Cambria Math" panose="02040503050406030204" pitchFamily="18" charset="0"/>
-                              <a:ea typeface="Calibri" panose="020F0502020204030204" pitchFamily="34" charset="0"/>
-                              <a:cs typeface="Times New Roman" panose="02020603050405020304" pitchFamily="18" charset="0"/>
-                            </a:rPr>
-                            <m:t>⊺</m:t>
-                          </m:r>
-                        </m:sup>
-                      </m:sSup>
-                      <m:r>
-                        <a:rPr lang="en-US" sz="1800" i="1">
-                          <a:effectLst/>
-                          <a:latin typeface="Cambria Math" panose="02040503050406030204" pitchFamily="18" charset="0"/>
-                          <a:ea typeface="Calibri" panose="020F0502020204030204" pitchFamily="34" charset="0"/>
-                          <a:cs typeface="Times New Roman" panose="02020603050405020304" pitchFamily="18" charset="0"/>
-                        </a:rPr>
-                        <m:t>(</m:t>
-                      </m:r>
-                      <m:r>
-                        <a:rPr lang="es-ES" sz="1800" b="1" i="1">
-                          <a:effectLst/>
-                          <a:latin typeface="Cambria Math" panose="02040503050406030204" pitchFamily="18" charset="0"/>
-                          <a:ea typeface="Calibri" panose="020F0502020204030204" pitchFamily="34" charset="0"/>
-                          <a:cs typeface="Times New Roman" panose="02020603050405020304" pitchFamily="18" charset="0"/>
-                        </a:rPr>
-                        <m:t>𝐗</m:t>
-                      </m:r>
-                      <m:r>
-                        <a:rPr lang="es-ES" sz="1800" b="1" i="1">
-                          <a:effectLst/>
-                          <a:latin typeface="Cambria Math" panose="02040503050406030204" pitchFamily="18" charset="0"/>
-                          <a:ea typeface="Calibri" panose="020F0502020204030204" pitchFamily="34" charset="0"/>
-                          <a:cs typeface="Times New Roman" panose="02020603050405020304" pitchFamily="18" charset="0"/>
-                        </a:rPr>
-                        <m:t>𝛉</m:t>
-                      </m:r>
-                      <m:r>
-                        <a:rPr lang="en-US" sz="1800" i="1">
-                          <a:effectLst/>
-                          <a:latin typeface="Cambria Math" panose="02040503050406030204" pitchFamily="18" charset="0"/>
-                          <a:ea typeface="Calibri" panose="020F0502020204030204" pitchFamily="34" charset="0"/>
-                          <a:cs typeface="Times New Roman" panose="02020603050405020304" pitchFamily="18" charset="0"/>
-                        </a:rPr>
-                        <m:t>−</m:t>
-                      </m:r>
-                      <m:r>
-                        <a:rPr lang="es-ES" sz="1800" b="1" i="1">
-                          <a:effectLst/>
-                          <a:latin typeface="Cambria Math" panose="02040503050406030204" pitchFamily="18" charset="0"/>
-                          <a:ea typeface="Calibri" panose="020F0502020204030204" pitchFamily="34" charset="0"/>
-                          <a:cs typeface="Times New Roman" panose="02020603050405020304" pitchFamily="18" charset="0"/>
-                        </a:rPr>
-                        <m:t>𝐲</m:t>
-                      </m:r>
-                      <m:r>
-                        <a:rPr lang="en-US" sz="1800" i="1">
-                          <a:effectLst/>
-                          <a:latin typeface="Cambria Math" panose="02040503050406030204" pitchFamily="18" charset="0"/>
-                          <a:ea typeface="Calibri" panose="020F0502020204030204" pitchFamily="34" charset="0"/>
-                          <a:cs typeface="Times New Roman" panose="02020603050405020304" pitchFamily="18" charset="0"/>
-                        </a:rPr>
-                        <m:t>)</m:t>
-                      </m:r>
-                    </m:oMath>
-                  </m:oMathPara>
-                </a14:m>
-                <a:endParaRPr lang="en-US" sz="1800" dirty="0">
-                  <a:effectLst/>
-                  <a:latin typeface="Calibri" panose="020F0502020204030204" pitchFamily="34" charset="0"/>
-                  <a:ea typeface="Calibri" panose="020F0502020204030204" pitchFamily="34" charset="0"/>
-                  <a:cs typeface="Times New Roman" panose="02020603050405020304" pitchFamily="18" charset="0"/>
-                </a:endParaRPr>
-              </a:p>
-              <a:p>
-                <a:pPr>
-                  <a:lnSpc>
-                    <a:spcPct val="100000"/>
-                  </a:lnSpc>
-                  <a:buFont typeface="Wingdings" panose="05000000000000000000" pitchFamily="2" charset="2"/>
-                  <a:buChar char="§"/>
-                </a:pPr>
-                <a:r>
-                  <a:rPr lang="en-US" sz="2200" dirty="0">
-                    <a:latin typeface="+mj-lt"/>
-                  </a:rPr>
-                  <a:t>Pick a random initial value for the parameters</a:t>
-                </a:r>
-              </a:p>
-              <a:p>
-                <a:pPr>
-                  <a:lnSpc>
-                    <a:spcPct val="100000"/>
-                  </a:lnSpc>
-                  <a:buFont typeface="Wingdings" panose="05000000000000000000" pitchFamily="2" charset="2"/>
-                  <a:buChar char="§"/>
-                </a:pPr>
-                <a:r>
-                  <a:rPr lang="en-US" sz="2200" dirty="0">
-                    <a:latin typeface="+mj-lt"/>
-                  </a:rPr>
-                  <a:t>Update the gradient function by plugging in the parameter values</a:t>
-                </a:r>
-              </a:p>
-              <a:p>
-                <a:pPr>
-                  <a:lnSpc>
-                    <a:spcPct val="100000"/>
-                  </a:lnSpc>
-                  <a:buFont typeface="Wingdings" panose="05000000000000000000" pitchFamily="2" charset="2"/>
-                  <a:buChar char="§"/>
-                </a:pPr>
-                <a:r>
-                  <a:rPr lang="en-US" sz="2200" dirty="0">
-                    <a:latin typeface="+mj-lt"/>
-                  </a:rPr>
-                  <a:t>Calculate the step sizes for each feature as : </a:t>
-                </a:r>
-                <a:r>
-                  <a:rPr lang="en-US" sz="2200" b="1" dirty="0">
-                    <a:latin typeface="+mj-lt"/>
-                  </a:rPr>
-                  <a:t>step size = gradient * learning rate</a:t>
-                </a:r>
-                <a:endParaRPr lang="en-US" sz="2200" dirty="0">
-                  <a:latin typeface="+mj-lt"/>
-                </a:endParaRPr>
-              </a:p>
-              <a:p>
-                <a:pPr>
-                  <a:lnSpc>
-                    <a:spcPct val="170000"/>
-                  </a:lnSpc>
-                  <a:buFont typeface="Wingdings" panose="05000000000000000000" pitchFamily="2" charset="2"/>
-                  <a:buChar char="§"/>
-                </a:pPr>
-                <a:r>
-                  <a:rPr lang="en-US" sz="2200" dirty="0">
-                    <a:latin typeface="+mj-lt"/>
-                  </a:rPr>
-                  <a:t>Calculate the new parameters as </a:t>
-                </a:r>
-                <a:r>
-                  <a:rPr lang="en-US" sz="2200" b="1" dirty="0">
-                    <a:latin typeface="+mj-lt"/>
-                  </a:rPr>
-                  <a:t>old parameters - step size</a:t>
-                </a:r>
-              </a:p>
-              <a:p>
-                <a:pPr marL="0" indent="0">
-                  <a:lnSpc>
-                    <a:spcPct val="170000"/>
-                  </a:lnSpc>
-                  <a:buNone/>
-                </a:pPr>
-                <a14:m>
-                  <m:oMathPara xmlns:m="http://schemas.openxmlformats.org/officeDocument/2006/math">
-                    <m:oMathParaPr>
-                      <m:jc m:val="centerGroup"/>
-                    </m:oMathParaPr>
-                    <m:oMath xmlns:m="http://schemas.openxmlformats.org/officeDocument/2006/math">
-                      <m:sSup>
-                        <m:sSupPr>
-                          <m:ctrlPr>
-                            <a:rPr lang="en-US" sz="2200" i="1" smtClean="0">
-                              <a:latin typeface="Cambria Math" panose="02040503050406030204" pitchFamily="18" charset="0"/>
-                            </a:rPr>
-                          </m:ctrlPr>
-                        </m:sSupPr>
-                        <m:e>
-                          <m:r>
-                            <a:rPr lang="en-US" sz="2200" b="0" i="1" smtClean="0">
-                              <a:latin typeface="Cambria Math" panose="02040503050406030204" pitchFamily="18" charset="0"/>
-                              <a:ea typeface="Cambria Math" panose="02040503050406030204" pitchFamily="18" charset="0"/>
-                            </a:rPr>
-                            <m:t>𝜃</m:t>
-                          </m:r>
-                        </m:e>
-                        <m:sup>
-                          <m:r>
-                            <a:rPr lang="en-US" sz="2200" b="0" i="1" smtClean="0">
-                              <a:latin typeface="Cambria Math" panose="02040503050406030204" pitchFamily="18" charset="0"/>
-                            </a:rPr>
-                            <m:t>(</m:t>
-                          </m:r>
-                          <m:r>
-                            <a:rPr lang="en-US" sz="2200" b="0" i="1" smtClean="0">
-                              <a:latin typeface="Cambria Math" panose="02040503050406030204" pitchFamily="18" charset="0"/>
-                            </a:rPr>
-                            <m:t>𝑛𝑒𝑥𝑡</m:t>
-                          </m:r>
-                          <m:r>
-                            <a:rPr lang="en-US" sz="2200" b="0" i="1" smtClean="0">
-                              <a:latin typeface="Cambria Math" panose="02040503050406030204" pitchFamily="18" charset="0"/>
-                            </a:rPr>
-                            <m:t> </m:t>
-                          </m:r>
-                          <m:r>
-                            <a:rPr lang="en-US" sz="2200" b="0" i="1" smtClean="0">
-                              <a:latin typeface="Cambria Math" panose="02040503050406030204" pitchFamily="18" charset="0"/>
-                            </a:rPr>
-                            <m:t>𝑠𝑡𝑒𝑝</m:t>
-                          </m:r>
-                          <m:r>
-                            <a:rPr lang="en-US" sz="2200" b="0" i="1" smtClean="0">
-                              <a:latin typeface="Cambria Math" panose="02040503050406030204" pitchFamily="18" charset="0"/>
-                            </a:rPr>
-                            <m:t>)</m:t>
-                          </m:r>
-                        </m:sup>
-                      </m:sSup>
-                      <m:r>
-                        <a:rPr lang="en-US" sz="2200" b="0" i="1" smtClean="0">
-                          <a:latin typeface="Cambria Math" panose="02040503050406030204" pitchFamily="18" charset="0"/>
-                        </a:rPr>
-                        <m:t>=</m:t>
-                      </m:r>
-                      <m:r>
-                        <a:rPr lang="en-US" sz="2200" b="0" i="1" smtClean="0">
-                          <a:latin typeface="Cambria Math" panose="02040503050406030204" pitchFamily="18" charset="0"/>
-                          <a:ea typeface="Cambria Math" panose="02040503050406030204" pitchFamily="18" charset="0"/>
-                        </a:rPr>
-                        <m:t>𝜃</m:t>
-                      </m:r>
-                      <m:r>
-                        <a:rPr lang="en-US" sz="2200" b="0" i="1" smtClean="0">
-                          <a:latin typeface="Cambria Math" panose="02040503050406030204" pitchFamily="18" charset="0"/>
-                          <a:ea typeface="Cambria Math" panose="02040503050406030204" pitchFamily="18" charset="0"/>
-                        </a:rPr>
-                        <m:t>−</m:t>
-                      </m:r>
-                      <m:r>
-                        <a:rPr lang="el-GR" sz="2200" b="0" i="1" smtClean="0">
-                          <a:latin typeface="Cambria Math" panose="02040503050406030204" pitchFamily="18" charset="0"/>
-                          <a:ea typeface="Cambria Math" panose="02040503050406030204" pitchFamily="18" charset="0"/>
-                        </a:rPr>
-                        <m:t>𝜂</m:t>
-                      </m:r>
-                      <m:sSub>
-                        <m:sSubPr>
-                          <m:ctrlPr>
-                            <a:rPr lang="el-GR" sz="2200" i="1" smtClean="0">
-                              <a:latin typeface="Cambria Math" panose="02040503050406030204" pitchFamily="18" charset="0"/>
-                              <a:ea typeface="Cambria Math" panose="02040503050406030204" pitchFamily="18" charset="0"/>
-                            </a:rPr>
-                          </m:ctrlPr>
-                        </m:sSubPr>
-                        <m:e>
-                          <m:r>
-                            <m:rPr>
-                              <m:nor/>
-                            </m:rPr>
-                            <a:rPr lang="en-US" sz="2200" dirty="0">
-                              <a:sym typeface="Symbol" panose="05050102010706020507" pitchFamily="18" charset="2"/>
-                            </a:rPr>
-                            <m:t></m:t>
-                          </m:r>
-                        </m:e>
-                        <m:sub>
-                          <m:r>
-                            <a:rPr lang="el-GR" sz="2200" b="0" i="1" smtClean="0">
-                              <a:latin typeface="Cambria Math" panose="02040503050406030204" pitchFamily="18" charset="0"/>
-                              <a:ea typeface="Cambria Math" panose="02040503050406030204" pitchFamily="18" charset="0"/>
-                            </a:rPr>
-                            <m:t>𝜃</m:t>
-                          </m:r>
-                        </m:sub>
-                      </m:sSub>
-                      <m:r>
-                        <a:rPr lang="en-US" sz="2200" b="0" i="1" smtClean="0">
-                          <a:latin typeface="Cambria Math" panose="02040503050406030204" pitchFamily="18" charset="0"/>
-                          <a:ea typeface="Cambria Math" panose="02040503050406030204" pitchFamily="18" charset="0"/>
-                        </a:rPr>
-                        <m:t>𝑀𝑆𝐸</m:t>
-                      </m:r>
-                      <m:r>
-                        <a:rPr lang="en-US" sz="2200" b="0" i="1" smtClean="0">
-                          <a:latin typeface="Cambria Math" panose="02040503050406030204" pitchFamily="18" charset="0"/>
-                          <a:ea typeface="Cambria Math" panose="02040503050406030204" pitchFamily="18" charset="0"/>
-                        </a:rPr>
-                        <m:t>(</m:t>
-                      </m:r>
-                      <m:r>
-                        <a:rPr lang="en-US" sz="2200" b="0" i="1" smtClean="0">
-                          <a:latin typeface="Cambria Math" panose="02040503050406030204" pitchFamily="18" charset="0"/>
-                          <a:ea typeface="Cambria Math" panose="02040503050406030204" pitchFamily="18" charset="0"/>
-                        </a:rPr>
-                        <m:t>𝜃</m:t>
-                      </m:r>
-                      <m:r>
-                        <a:rPr lang="en-US" sz="2200" b="0" i="1" smtClean="0">
-                          <a:latin typeface="Cambria Math" panose="02040503050406030204" pitchFamily="18" charset="0"/>
-                          <a:ea typeface="Cambria Math" panose="02040503050406030204" pitchFamily="18" charset="0"/>
-                        </a:rPr>
-                        <m:t>)</m:t>
-                      </m:r>
-                    </m:oMath>
-                  </m:oMathPara>
-                </a14:m>
-                <a:endParaRPr lang="en-US" sz="2200" dirty="0">
-                  <a:latin typeface="+mj-lt"/>
-                </a:endParaRPr>
-              </a:p>
-              <a:p>
-                <a:pPr>
-                  <a:lnSpc>
-                    <a:spcPct val="100000"/>
-                  </a:lnSpc>
-                  <a:buFont typeface="Wingdings" panose="05000000000000000000" pitchFamily="2" charset="2"/>
-                  <a:buChar char="§"/>
-                </a:pPr>
-                <a:r>
-                  <a:rPr lang="en-US" sz="2200" dirty="0">
-                    <a:latin typeface="+mj-lt"/>
-                  </a:rPr>
-                  <a:t>Repeat until gradient is almost 0</a:t>
-                </a:r>
-              </a:p>
-              <a:p>
-                <a:pPr>
-                  <a:lnSpc>
-                    <a:spcPct val="100000"/>
-                  </a:lnSpc>
-                  <a:buFont typeface="Wingdings" panose="05000000000000000000" pitchFamily="2" charset="2"/>
-                  <a:buChar char="§"/>
-                </a:pPr>
-                <a:endParaRPr lang="en-US" sz="1600" dirty="0">
-                  <a:latin typeface="+mj-lt"/>
-                </a:endParaRPr>
-              </a:p>
-            </p:txBody>
-          </p:sp>
-        </mc:Choice>
-        <mc:Fallback xmlns="">
-          <p:sp>
-            <p:nvSpPr>
-              <p:cNvPr id="3" name="Content Placeholder 2">
-                <a:extLst>
-                  <a:ext uri="{FF2B5EF4-FFF2-40B4-BE49-F238E27FC236}">
-                    <a16:creationId xmlns:a16="http://schemas.microsoft.com/office/drawing/2014/main" id="{F7EF27C5-01B7-9F60-ECDA-A1F376586FC5}"/>
-                  </a:ext>
-                </a:extLst>
-              </p:cNvPr>
-              <p:cNvSpPr>
-                <a:spLocks noGrp="1" noRot="1" noChangeAspect="1" noMove="1" noResize="1" noEditPoints="1" noAdjustHandles="1" noChangeArrowheads="1" noChangeShapeType="1" noTextEdit="1"/>
-              </p:cNvSpPr>
-              <p:nvPr>
-                <p:ph idx="1"/>
-              </p:nvPr>
-            </p:nvSpPr>
-            <p:spPr>
-              <a:blipFill>
-                <a:blip r:embed="rId2"/>
-                <a:stretch>
-                  <a:fillRect l="-174" t="-280"/>
-                </a:stretch>
-              </a:blipFill>
-            </p:spPr>
-            <p:txBody>
-              <a:bodyPr/>
-              <a:lstStyle/>
-              <a:p>
-                <a:r>
-                  <a:rPr lang="en-US">
-                    <a:noFill/>
-                  </a:rPr>
-                  <a:t> </a:t>
-                </a:r>
-              </a:p>
-            </p:txBody>
-          </p:sp>
-        </mc:Fallback>
-      </mc:AlternateContent>
-      <p:sp>
-        <p:nvSpPr>
-          <p:cNvPr id="7" name="TextBox 6">
-            <a:extLst>
-              <a:ext uri="{FF2B5EF4-FFF2-40B4-BE49-F238E27FC236}">
-                <a16:creationId xmlns:a16="http://schemas.microsoft.com/office/drawing/2014/main" id="{84FF8E63-E2AF-7BCA-C7BA-B28A8BD0A0C0}"/>
-              </a:ext>
-            </a:extLst>
-          </p:cNvPr>
-          <p:cNvSpPr txBox="1"/>
-          <p:nvPr/>
-        </p:nvSpPr>
-        <p:spPr>
-          <a:xfrm rot="20637315">
-            <a:off x="7375107" y="3745554"/>
-            <a:ext cx="1980103" cy="1161633"/>
-          </a:xfrm>
-          <a:prstGeom prst="leftArrow">
-            <a:avLst/>
-          </a:prstGeom>
-          <a:solidFill>
-            <a:srgbClr val="FFFF00"/>
-          </a:solidFill>
-        </p:spPr>
-        <p:txBody>
-          <a:bodyPr wrap="square" rtlCol="0" anchor="ctr">
-            <a:spAutoFit/>
-          </a:bodyPr>
-          <a:lstStyle/>
-          <a:p>
-            <a:pPr algn="ctr"/>
-            <a:r>
-              <a:rPr lang="en-US" sz="1600" dirty="0">
-                <a:solidFill>
-                  <a:srgbClr val="FF0000"/>
-                </a:solidFill>
-              </a:rPr>
-              <a:t>This is a hyperparameter!!</a:t>
-            </a:r>
-          </a:p>
-        </p:txBody>
-      </p:sp>
-      <p:sp>
-        <p:nvSpPr>
-          <p:cNvPr id="8" name="Oval 7">
-            <a:extLst>
-              <a:ext uri="{FF2B5EF4-FFF2-40B4-BE49-F238E27FC236}">
-                <a16:creationId xmlns:a16="http://schemas.microsoft.com/office/drawing/2014/main" id="{1648567C-0200-9893-01CB-77C249F83BCE}"/>
-              </a:ext>
-            </a:extLst>
-          </p:cNvPr>
-          <p:cNvSpPr/>
-          <p:nvPr/>
-        </p:nvSpPr>
-        <p:spPr>
-          <a:xfrm>
-            <a:off x="5982935" y="4468628"/>
-            <a:ext cx="1533263" cy="460379"/>
-          </a:xfrm>
-          <a:prstGeom prst="ellipse">
-            <a:avLst/>
-          </a:prstGeom>
-          <a:noFill/>
-          <a:ln>
-            <a:solidFill>
-              <a:srgbClr val="FF0000"/>
-            </a:solidFill>
-          </a:ln>
-        </p:spPr>
-        <p:style>
-          <a:lnRef idx="2">
-            <a:schemeClr val="accent1">
-              <a:shade val="50000"/>
-            </a:schemeClr>
-          </a:lnRef>
-          <a:fillRef idx="1">
-            <a:schemeClr val="accent1"/>
-          </a:fillRef>
-          <a:effectRef idx="0">
-            <a:schemeClr val="accent1"/>
-          </a:effectRef>
-          <a:fontRef idx="minor">
-            <a:schemeClr val="lt1"/>
-          </a:fontRef>
-        </p:style>
-        <p:txBody>
-          <a:bodyPr rtlCol="0" anchor="ctr"/>
-          <a:lstStyle/>
-          <a:p>
-            <a:pPr algn="ctr"/>
-            <a:endParaRPr lang="en-US"/>
-          </a:p>
-        </p:txBody>
-      </p:sp>
-    </p:spTree>
-    <p:extLst>
-      <p:ext uri="{BB962C8B-B14F-4D97-AF65-F5344CB8AC3E}">
-        <p14:creationId xmlns:p14="http://schemas.microsoft.com/office/powerpoint/2010/main" val="2000089067"/>
-      </p:ext>
-    </p:extLst>
-  </p:cSld>
-  <p:clrMapOvr>
-    <a:masterClrMapping/>
-  </p:clrMapOvr>
-</p:sld>
-</file>
-
-<file path=ppt/slides/slide13.xml><?xml version="1.0" encoding="utf-8"?>
-<p:sld xmlns:a="http://schemas.openxmlformats.org/drawingml/2006/main" xmlns:r="http://schemas.openxmlformats.org/officeDocument/2006/relationships" xmlns:p="http://schemas.openxmlformats.org/presentationml/2006/main">
-  <p:cSld>
-    <p:spTree>
-      <p:nvGrpSpPr>
-        <p:cNvPr id="1" name=""/>
-        <p:cNvGrpSpPr/>
-        <p:nvPr/>
-      </p:nvGrpSpPr>
-      <p:grpSpPr>
-        <a:xfrm>
-          <a:off x="0" y="0"/>
-          <a:ext cx="0" cy="0"/>
-          <a:chOff x="0" y="0"/>
-          <a:chExt cx="0" cy="0"/>
-        </a:xfrm>
-      </p:grpSpPr>
-      <p:sp>
-        <p:nvSpPr>
-          <p:cNvPr id="2" name="Title 1">
-            <a:extLst>
-              <a:ext uri="{FF2B5EF4-FFF2-40B4-BE49-F238E27FC236}">
-                <a16:creationId xmlns:a16="http://schemas.microsoft.com/office/drawing/2014/main" id="{15C869D5-4E6C-6766-7E06-98B25E955D87}"/>
-              </a:ext>
-            </a:extLst>
-          </p:cNvPr>
-          <p:cNvSpPr>
-            <a:spLocks noGrp="1"/>
-          </p:cNvSpPr>
-          <p:nvPr>
-            <p:ph type="title"/>
-          </p:nvPr>
-        </p:nvSpPr>
-        <p:spPr/>
-        <p:txBody>
-          <a:bodyPr>
-            <a:normAutofit/>
-          </a:bodyPr>
-          <a:lstStyle/>
-          <a:p>
-            <a:r>
-              <a:rPr lang="en-US" sz="4000" dirty="0"/>
-              <a:t>Classifiers – Stochastic Gradient Descent (SGD)</a:t>
-            </a:r>
-          </a:p>
-        </p:txBody>
-      </p:sp>
-      <p:sp>
-        <p:nvSpPr>
-          <p:cNvPr id="4" name="Rectángulo 3">
-            <a:extLst>
-              <a:ext uri="{FF2B5EF4-FFF2-40B4-BE49-F238E27FC236}">
-                <a16:creationId xmlns:a16="http://schemas.microsoft.com/office/drawing/2014/main" id="{27E372AA-1ACE-5D2D-EDED-66DB6F5F4F88}"/>
-              </a:ext>
-            </a:extLst>
-          </p:cNvPr>
-          <p:cNvSpPr/>
-          <p:nvPr/>
-        </p:nvSpPr>
-        <p:spPr>
-          <a:xfrm>
-            <a:off x="0" y="0"/>
-            <a:ext cx="374469" cy="6858000"/>
-          </a:xfrm>
-          <a:prstGeom prst="rect">
-            <a:avLst/>
-          </a:prstGeom>
-        </p:spPr>
-        <p:style>
-          <a:lnRef idx="2">
-            <a:schemeClr val="accent2">
-              <a:shade val="50000"/>
-            </a:schemeClr>
-          </a:lnRef>
-          <a:fillRef idx="1">
-            <a:schemeClr val="accent2"/>
-          </a:fillRef>
-          <a:effectRef idx="0">
-            <a:schemeClr val="accent2"/>
-          </a:effectRef>
-          <a:fontRef idx="minor">
-            <a:schemeClr val="lt1"/>
-          </a:fontRef>
-        </p:style>
-        <p:txBody>
-          <a:bodyPr rtlCol="0" anchor="ctr"/>
-          <a:lstStyle/>
-          <a:p>
-            <a:pPr algn="ctr"/>
-            <a:endParaRPr lang="es-ES"/>
-          </a:p>
-        </p:txBody>
-      </p:sp>
-      <p:sp>
-        <p:nvSpPr>
-          <p:cNvPr id="5" name="Rectangle 143">
-            <a:extLst>
-              <a:ext uri="{FF2B5EF4-FFF2-40B4-BE49-F238E27FC236}">
-                <a16:creationId xmlns:a16="http://schemas.microsoft.com/office/drawing/2014/main" id="{4CAC6C5C-8798-AF6F-C852-967659577BF3}"/>
-              </a:ext>
-            </a:extLst>
-          </p:cNvPr>
-          <p:cNvSpPr>
-            <a:spLocks noChangeArrowheads="1"/>
-          </p:cNvSpPr>
-          <p:nvPr/>
-        </p:nvSpPr>
-        <p:spPr bwMode="auto">
-          <a:xfrm>
-            <a:off x="448342" y="6401243"/>
-            <a:ext cx="5730175" cy="307777"/>
-          </a:xfrm>
-          <a:prstGeom prst="rect">
-            <a:avLst/>
-          </a:prstGeom>
-          <a:noFill/>
-          <a:ln>
-            <a:noFill/>
-          </a:ln>
-          <a:effectLst/>
-          <a:extLst>
-            <a:ext uri="{909E8E84-426E-40DD-AFC4-6F175D3DCCD1}">
-              <a14:hiddenFill xmlns:a14="http://schemas.microsoft.com/office/drawing/2010/main">
-                <a:solidFill>
-                  <a:schemeClr val="accent1"/>
-                </a:solidFill>
-              </a14:hiddenFill>
-            </a:ext>
-            <a:ext uri="{91240B29-F687-4F45-9708-019B960494DF}">
-              <a14:hiddenLine xmlns:a14="http://schemas.microsoft.com/office/drawing/2010/main" w="9525">
-                <a:solidFill>
-                  <a:schemeClr val="tx1"/>
-                </a:solidFill>
-                <a:miter lim="800000"/>
-                <a:headEnd/>
-                <a:tailEnd/>
-              </a14:hiddenLine>
-            </a:ext>
-            <a:ext uri="{AF507438-7753-43E0-B8FC-AC1667EBCBE1}">
-              <a14:hiddenEffects xmlns:a14="http://schemas.microsoft.com/office/drawing/2010/main">
-                <a:effectLst>
-                  <a:outerShdw dist="35921" dir="2700000" algn="ctr" rotWithShape="0">
-                    <a:schemeClr val="bg2"/>
-                  </a:outerShdw>
-                </a:effectLst>
-              </a14:hiddenEffects>
-            </a:ext>
-          </a:extLst>
-        </p:spPr>
-        <p:txBody>
-          <a:bodyPr vert="horz" wrap="square" lIns="91440" tIns="45720" rIns="91440" bIns="45720" numCol="1" anchor="ctr" anchorCtr="0" compatLnSpc="1">
-            <a:prstTxWarp prst="textNoShape">
-              <a:avLst/>
-            </a:prstTxWarp>
-            <a:spAutoFit/>
-          </a:bodyPr>
-          <a:lstStyle/>
-          <a:p>
-            <a:pPr marL="0" marR="0" lvl="0" indent="0" algn="l" defTabSz="914400" rtl="0" eaLnBrk="0" fontAlgn="base" latinLnBrk="0" hangingPunct="0">
-              <a:lnSpc>
-                <a:spcPct val="100000"/>
-              </a:lnSpc>
-              <a:spcBef>
-                <a:spcPct val="0"/>
-              </a:spcBef>
-              <a:spcAft>
-                <a:spcPct val="0"/>
-              </a:spcAft>
-              <a:buClrTx/>
-              <a:buSzTx/>
-              <a:buFontTx/>
-              <a:buNone/>
-              <a:tabLst/>
-            </a:pPr>
-            <a:r>
-              <a:rPr kumimoji="0" lang="en-US" altLang="es-ES" sz="1400" b="0" i="0" u="none" strike="noStrike" cap="none" normalizeH="0" baseline="0" dirty="0">
-                <a:ln>
-                  <a:noFill/>
-                </a:ln>
-                <a:solidFill>
-                  <a:srgbClr val="F4A200"/>
-                </a:solidFill>
-                <a:effectLst/>
-                <a:latin typeface="Arial" panose="020B0604020202020204" pitchFamily="34" charset="0"/>
-                <a:ea typeface="Myriad Pro Light"/>
-                <a:cs typeface="Times New Roman" panose="02020603050405020304" pitchFamily="18" charset="0"/>
-              </a:rPr>
-              <a:t>Master in Quantitative Economic Analysis </a:t>
-            </a:r>
-            <a:r>
-              <a:rPr kumimoji="0" lang="en-US" altLang="es-ES" sz="1400" b="0" i="0" u="none" strike="noStrike" cap="none" normalizeH="0" baseline="0" dirty="0" err="1">
-                <a:ln>
-                  <a:noFill/>
-                </a:ln>
-                <a:solidFill>
-                  <a:srgbClr val="F4A200"/>
-                </a:solidFill>
-                <a:effectLst/>
-                <a:latin typeface="Arial" panose="020B0604020202020204" pitchFamily="34" charset="0"/>
-                <a:ea typeface="Myriad Pro Light"/>
-                <a:cs typeface="Times New Roman" panose="02020603050405020304" pitchFamily="18" charset="0"/>
-              </a:rPr>
-              <a:t>MQuEA</a:t>
-            </a:r>
-            <a:endParaRPr kumimoji="0" lang="es-ES" altLang="es-ES" sz="500" b="0" i="0" u="none" strike="noStrike" cap="none" normalizeH="0" baseline="0" dirty="0">
-              <a:ln>
-                <a:noFill/>
-              </a:ln>
-              <a:solidFill>
-                <a:schemeClr val="tx1"/>
-              </a:solidFill>
-              <a:effectLst/>
-              <a:latin typeface="Arial" panose="020B0604020202020204" pitchFamily="34" charset="0"/>
-            </a:endParaRPr>
-          </a:p>
-        </p:txBody>
-      </p:sp>
-      <p:sp>
-        <p:nvSpPr>
-          <p:cNvPr id="6" name="Rectangle 143">
-            <a:extLst>
-              <a:ext uri="{FF2B5EF4-FFF2-40B4-BE49-F238E27FC236}">
-                <a16:creationId xmlns:a16="http://schemas.microsoft.com/office/drawing/2014/main" id="{09E0FB32-C00A-A390-E094-76FC3EA5C288}"/>
-              </a:ext>
-            </a:extLst>
-          </p:cNvPr>
-          <p:cNvSpPr>
-            <a:spLocks noChangeArrowheads="1"/>
-          </p:cNvSpPr>
-          <p:nvPr/>
-        </p:nvSpPr>
-        <p:spPr bwMode="auto">
-          <a:xfrm>
-            <a:off x="6186394" y="6411881"/>
-            <a:ext cx="5730175" cy="307777"/>
-          </a:xfrm>
-          <a:prstGeom prst="rect">
-            <a:avLst/>
-          </a:prstGeom>
-          <a:noFill/>
-          <a:ln>
-            <a:noFill/>
-          </a:ln>
-          <a:effectLst/>
-          <a:extLst>
-            <a:ext uri="{909E8E84-426E-40DD-AFC4-6F175D3DCCD1}">
-              <a14:hiddenFill xmlns:a14="http://schemas.microsoft.com/office/drawing/2010/main">
-                <a:solidFill>
-                  <a:schemeClr val="accent1"/>
-                </a:solidFill>
-              </a14:hiddenFill>
-            </a:ext>
-            <a:ext uri="{91240B29-F687-4F45-9708-019B960494DF}">
-              <a14:hiddenLine xmlns:a14="http://schemas.microsoft.com/office/drawing/2010/main" w="9525">
-                <a:solidFill>
-                  <a:schemeClr val="tx1"/>
-                </a:solidFill>
-                <a:miter lim="800000"/>
-                <a:headEnd/>
-                <a:tailEnd/>
-              </a14:hiddenLine>
-            </a:ext>
-            <a:ext uri="{AF507438-7753-43E0-B8FC-AC1667EBCBE1}">
-              <a14:hiddenEffects xmlns:a14="http://schemas.microsoft.com/office/drawing/2010/main">
-                <a:effectLst>
-                  <a:outerShdw dist="35921" dir="2700000" algn="ctr" rotWithShape="0">
-                    <a:schemeClr val="bg2"/>
-                  </a:outerShdw>
-                </a:effectLst>
-              </a14:hiddenEffects>
-            </a:ext>
-          </a:extLst>
-        </p:spPr>
-        <p:txBody>
-          <a:bodyPr vert="horz" wrap="square" lIns="91440" tIns="45720" rIns="91440" bIns="45720" numCol="1" anchor="ctr" anchorCtr="0" compatLnSpc="1">
-            <a:prstTxWarp prst="textNoShape">
-              <a:avLst/>
-            </a:prstTxWarp>
-            <a:spAutoFit/>
-          </a:bodyPr>
-          <a:lstStyle/>
-          <a:p>
-            <a:pPr marL="0" marR="0" lvl="0" indent="0" algn="r" defTabSz="914400" rtl="0" eaLnBrk="0" fontAlgn="base" latinLnBrk="0" hangingPunct="0">
-              <a:lnSpc>
-                <a:spcPct val="100000"/>
-              </a:lnSpc>
-              <a:spcBef>
-                <a:spcPct val="0"/>
-              </a:spcBef>
-              <a:spcAft>
-                <a:spcPct val="0"/>
-              </a:spcAft>
-              <a:buClrTx/>
-              <a:buSzTx/>
-              <a:buFontTx/>
-              <a:buNone/>
-              <a:tabLst/>
-            </a:pPr>
-            <a:r>
-              <a:rPr kumimoji="0" lang="en-US" altLang="es-ES" sz="1400" b="0" i="0" u="none" strike="noStrike" cap="none" normalizeH="0" baseline="0" dirty="0">
-                <a:ln>
-                  <a:noFill/>
-                </a:ln>
-                <a:solidFill>
-                  <a:srgbClr val="F4A200"/>
-                </a:solidFill>
-                <a:effectLst/>
-                <a:latin typeface="Arial" panose="020B0604020202020204" pitchFamily="34" charset="0"/>
-                <a:ea typeface="Myriad Pro Light"/>
-                <a:cs typeface="Times New Roman" panose="02020603050405020304" pitchFamily="18" charset="0"/>
-              </a:rPr>
-              <a:t>Universidad </a:t>
-            </a:r>
-            <a:r>
-              <a:rPr kumimoji="0" lang="en-US" altLang="es-ES" sz="1400" b="0" i="0" u="none" strike="noStrike" cap="none" normalizeH="0" baseline="0" dirty="0" err="1">
-                <a:ln>
-                  <a:noFill/>
-                </a:ln>
-                <a:solidFill>
-                  <a:srgbClr val="F4A200"/>
-                </a:solidFill>
-                <a:effectLst/>
-                <a:latin typeface="Arial" panose="020B0604020202020204" pitchFamily="34" charset="0"/>
-                <a:ea typeface="Myriad Pro Light"/>
-                <a:cs typeface="Times New Roman" panose="02020603050405020304" pitchFamily="18" charset="0"/>
-              </a:rPr>
-              <a:t>Aut</a:t>
-            </a:r>
-            <a:r>
-              <a:rPr lang="en-US" altLang="es-ES" sz="1400" dirty="0" err="1">
-                <a:solidFill>
-                  <a:srgbClr val="F4A200"/>
-                </a:solidFill>
-                <a:latin typeface="Arial" panose="020B0604020202020204" pitchFamily="34" charset="0"/>
-                <a:ea typeface="Myriad Pro Light"/>
-                <a:cs typeface="Times New Roman" panose="02020603050405020304" pitchFamily="18" charset="0"/>
-              </a:rPr>
-              <a:t>ó</a:t>
-            </a:r>
-            <a:r>
-              <a:rPr kumimoji="0" lang="en-US" altLang="es-ES" sz="1400" b="0" i="0" u="none" strike="noStrike" cap="none" normalizeH="0" baseline="0" dirty="0" err="1">
-                <a:ln>
-                  <a:noFill/>
-                </a:ln>
-                <a:solidFill>
-                  <a:srgbClr val="F4A200"/>
-                </a:solidFill>
-                <a:effectLst/>
-                <a:latin typeface="Arial" panose="020B0604020202020204" pitchFamily="34" charset="0"/>
-                <a:ea typeface="Myriad Pro Light"/>
-                <a:cs typeface="Times New Roman" panose="02020603050405020304" pitchFamily="18" charset="0"/>
-              </a:rPr>
-              <a:t>noma</a:t>
-            </a:r>
-            <a:r>
-              <a:rPr kumimoji="0" lang="en-US" altLang="es-ES" sz="1400" b="0" i="0" u="none" strike="noStrike" cap="none" normalizeH="0" baseline="0" dirty="0">
-                <a:ln>
-                  <a:noFill/>
-                </a:ln>
-                <a:solidFill>
-                  <a:srgbClr val="F4A200"/>
-                </a:solidFill>
-                <a:effectLst/>
-                <a:latin typeface="Arial" panose="020B0604020202020204" pitchFamily="34" charset="0"/>
-                <a:ea typeface="Myriad Pro Light"/>
-                <a:cs typeface="Times New Roman" panose="02020603050405020304" pitchFamily="18" charset="0"/>
-              </a:rPr>
-              <a:t> de Madrid</a:t>
-            </a:r>
-            <a:endParaRPr kumimoji="0" lang="es-ES" altLang="es-ES" sz="500" b="0" i="0" u="none" strike="noStrike" cap="none" normalizeH="0" baseline="0" dirty="0">
-              <a:ln>
-                <a:noFill/>
-              </a:ln>
-              <a:solidFill>
-                <a:schemeClr val="tx1"/>
-              </a:solidFill>
-              <a:effectLst/>
-              <a:latin typeface="Arial" panose="020B0604020202020204" pitchFamily="34" charset="0"/>
-            </a:endParaRPr>
-          </a:p>
-        </p:txBody>
-      </p:sp>
-      <p:sp>
-        <p:nvSpPr>
-          <p:cNvPr id="3" name="Content Placeholder 2">
-            <a:extLst>
-              <a:ext uri="{FF2B5EF4-FFF2-40B4-BE49-F238E27FC236}">
-                <a16:creationId xmlns:a16="http://schemas.microsoft.com/office/drawing/2014/main" id="{F7EF27C5-01B7-9F60-ECDA-A1F376586FC5}"/>
-              </a:ext>
-            </a:extLst>
-          </p:cNvPr>
-          <p:cNvSpPr>
-            <a:spLocks noGrp="1"/>
-          </p:cNvSpPr>
-          <p:nvPr>
-            <p:ph idx="1"/>
-          </p:nvPr>
-        </p:nvSpPr>
-        <p:spPr/>
-        <p:txBody>
-          <a:bodyPr>
-            <a:normAutofit/>
-          </a:bodyPr>
-          <a:lstStyle/>
-          <a:p>
-            <a:pPr>
-              <a:lnSpc>
-                <a:spcPct val="100000"/>
-              </a:lnSpc>
-              <a:buFont typeface="Wingdings" panose="05000000000000000000" pitchFamily="2" charset="2"/>
-              <a:buChar char="§"/>
-            </a:pPr>
-            <a:r>
-              <a:rPr lang="en-US" sz="2000" dirty="0">
-                <a:latin typeface="+mj-lt"/>
-              </a:rPr>
-              <a:t>This process involves a large number of calculations. For example: 10,000 observations x 10 features x 1,000 iterations (a usual number) = 100,000,000 computations for an estimation</a:t>
-            </a:r>
-          </a:p>
-          <a:p>
-            <a:pPr>
-              <a:lnSpc>
-                <a:spcPct val="100000"/>
-              </a:lnSpc>
-              <a:buFont typeface="Wingdings" panose="05000000000000000000" pitchFamily="2" charset="2"/>
-              <a:buChar char="§"/>
-            </a:pPr>
-            <a:r>
-              <a:rPr lang="en-US" sz="2000" b="1" dirty="0">
-                <a:latin typeface="+mj-lt"/>
-              </a:rPr>
-              <a:t>Stochastic (random) Gradient Descent </a:t>
-            </a:r>
-            <a:r>
-              <a:rPr lang="en-US" sz="2000" dirty="0">
-                <a:latin typeface="+mj-lt"/>
-              </a:rPr>
-              <a:t>applies the same algorithm to one only observation picked up randomly (a predefined number of times)</a:t>
-            </a:r>
-          </a:p>
-          <a:p>
-            <a:pPr lvl="1">
-              <a:lnSpc>
-                <a:spcPct val="100000"/>
-              </a:lnSpc>
-              <a:buFont typeface="Wingdings" panose="05000000000000000000" pitchFamily="2" charset="2"/>
-              <a:buChar char="§"/>
-            </a:pPr>
-            <a:r>
-              <a:rPr lang="en-US" sz="2000" dirty="0">
-                <a:latin typeface="+mj-lt"/>
-              </a:rPr>
-              <a:t>It can not get to the local minimum, but works very well when the loss function is irregular</a:t>
-            </a:r>
-          </a:p>
-          <a:p>
-            <a:pPr lvl="1">
-              <a:lnSpc>
-                <a:spcPct val="100000"/>
-              </a:lnSpc>
-              <a:buFont typeface="Wingdings" panose="05000000000000000000" pitchFamily="2" charset="2"/>
-              <a:buChar char="§"/>
-            </a:pPr>
-            <a:r>
-              <a:rPr lang="en-US" sz="2000" dirty="0">
-                <a:latin typeface="+mj-lt"/>
-              </a:rPr>
-              <a:t>Solution is to use a learning rate schedule</a:t>
-            </a:r>
-          </a:p>
-          <a:p>
-            <a:pPr>
-              <a:lnSpc>
-                <a:spcPct val="100000"/>
-              </a:lnSpc>
-              <a:buFont typeface="Wingdings" panose="05000000000000000000" pitchFamily="2" charset="2"/>
-              <a:buChar char="§"/>
-            </a:pPr>
-            <a:r>
-              <a:rPr lang="en-US" sz="2000" b="1" dirty="0">
-                <a:latin typeface="+mj-lt"/>
-              </a:rPr>
-              <a:t>Mini-batch Gradient Descent</a:t>
-            </a:r>
-            <a:r>
-              <a:rPr lang="en-US" sz="2000" dirty="0">
-                <a:latin typeface="+mj-lt"/>
-              </a:rPr>
-              <a:t> offers a compromise between GD and SGD by splitting the data into smaller batches.</a:t>
-            </a:r>
-          </a:p>
-          <a:p>
-            <a:pPr>
-              <a:lnSpc>
-                <a:spcPct val="100000"/>
-              </a:lnSpc>
-              <a:buFont typeface="Wingdings" panose="05000000000000000000" pitchFamily="2" charset="2"/>
-              <a:buChar char="§"/>
-            </a:pPr>
-            <a:r>
-              <a:rPr lang="en-US" sz="2000" dirty="0">
-                <a:latin typeface="+mj-lt"/>
-              </a:rPr>
-              <a:t>The point is that a </a:t>
-            </a:r>
-            <a:r>
-              <a:rPr lang="en-US" sz="2000" b="1" dirty="0" err="1">
-                <a:latin typeface="+mj-lt"/>
-              </a:rPr>
-              <a:t>SGDClassifier</a:t>
-            </a:r>
-            <a:r>
-              <a:rPr lang="en-US" sz="2000" dirty="0">
-                <a:latin typeface="+mj-lt"/>
-              </a:rPr>
-              <a:t> is </a:t>
-            </a:r>
-            <a:r>
-              <a:rPr lang="en-US" sz="2000" b="1" dirty="0">
-                <a:latin typeface="+mj-lt"/>
-              </a:rPr>
-              <a:t>equivalent </a:t>
-            </a:r>
-            <a:r>
-              <a:rPr lang="en-US" sz="2000" dirty="0">
-                <a:latin typeface="+mj-lt"/>
-              </a:rPr>
-              <a:t>to a </a:t>
-            </a:r>
-            <a:r>
-              <a:rPr lang="en-US" sz="2000" b="1" dirty="0">
-                <a:latin typeface="+mj-lt"/>
-              </a:rPr>
-              <a:t>linear SVM </a:t>
-            </a:r>
-            <a:r>
-              <a:rPr lang="en-US" sz="2000" dirty="0">
-                <a:latin typeface="+mj-lt"/>
-              </a:rPr>
-              <a:t>(Here is the scikit-learn documentation about SGD: </a:t>
-            </a:r>
-            <a:r>
-              <a:rPr lang="en-US" sz="2000" dirty="0">
-                <a:latin typeface="+mj-lt"/>
-                <a:hlinkClick r:id="rId2"/>
-              </a:rPr>
-              <a:t>https://scikit-learn.org/stable/modules/sgd.html</a:t>
-            </a:r>
-            <a:r>
-              <a:rPr lang="en-US" sz="2000" dirty="0">
-                <a:latin typeface="+mj-lt"/>
-              </a:rPr>
-              <a:t>)</a:t>
-            </a:r>
-          </a:p>
-          <a:p>
-            <a:pPr>
-              <a:lnSpc>
-                <a:spcPct val="100000"/>
-              </a:lnSpc>
-              <a:buFont typeface="Wingdings" panose="05000000000000000000" pitchFamily="2" charset="2"/>
-              <a:buChar char="§"/>
-            </a:pPr>
-            <a:endParaRPr lang="en-US" sz="1800" dirty="0">
-              <a:latin typeface="+mj-lt"/>
-            </a:endParaRPr>
-          </a:p>
-          <a:p>
-            <a:pPr>
-              <a:lnSpc>
-                <a:spcPct val="100000"/>
-              </a:lnSpc>
-              <a:buFont typeface="Wingdings" panose="05000000000000000000" pitchFamily="2" charset="2"/>
-              <a:buChar char="§"/>
-            </a:pPr>
-            <a:endParaRPr lang="en-US" sz="1600" dirty="0">
-              <a:latin typeface="+mj-lt"/>
-            </a:endParaRPr>
-          </a:p>
-        </p:txBody>
-      </p:sp>
-    </p:spTree>
-    <p:extLst>
-      <p:ext uri="{BB962C8B-B14F-4D97-AF65-F5344CB8AC3E}">
-        <p14:creationId xmlns:p14="http://schemas.microsoft.com/office/powerpoint/2010/main" val="713773263"/>
-      </p:ext>
-    </p:extLst>
-  </p:cSld>
-  <p:clrMapOvr>
-    <a:masterClrMapping/>
-  </p:clrMapOvr>
-</p:sld>
-</file>
-
-<file path=ppt/slides/slide14.xml><?xml version="1.0" encoding="utf-8"?>
-<p:sld xmlns:a="http://schemas.openxmlformats.org/drawingml/2006/main" xmlns:r="http://schemas.openxmlformats.org/officeDocument/2006/relationships" xmlns:p="http://schemas.openxmlformats.org/presentationml/2006/main">
-  <p:cSld>
-    <p:spTree>
-      <p:nvGrpSpPr>
-        <p:cNvPr id="1" name=""/>
-        <p:cNvGrpSpPr/>
-        <p:nvPr/>
-      </p:nvGrpSpPr>
-      <p:grpSpPr>
-        <a:xfrm>
-          <a:off x="0" y="0"/>
-          <a:ext cx="0" cy="0"/>
-          <a:chOff x="0" y="0"/>
-          <a:chExt cx="0" cy="0"/>
-        </a:xfrm>
-      </p:grpSpPr>
-      <p:sp>
-        <p:nvSpPr>
-          <p:cNvPr id="2" name="Title 1">
-            <a:extLst>
-              <a:ext uri="{FF2B5EF4-FFF2-40B4-BE49-F238E27FC236}">
-                <a16:creationId xmlns:a16="http://schemas.microsoft.com/office/drawing/2014/main" id="{15C869D5-4E6C-6766-7E06-98B25E955D87}"/>
-              </a:ext>
-            </a:extLst>
-          </p:cNvPr>
-          <p:cNvSpPr>
-            <a:spLocks noGrp="1"/>
-          </p:cNvSpPr>
-          <p:nvPr>
-            <p:ph type="title"/>
-          </p:nvPr>
-        </p:nvSpPr>
-        <p:spPr/>
-        <p:txBody>
-          <a:bodyPr>
-            <a:normAutofit/>
-          </a:bodyPr>
-          <a:lstStyle/>
-          <a:p>
-            <a:r>
-              <a:rPr lang="en-US" sz="4000" dirty="0"/>
               <a:t>Classifiers – </a:t>
             </a:r>
             <a:r>
@@ -25300,7 +22923,7 @@
         </p:nvSpPr>
         <p:spPr>
           <a:xfrm rot="212624">
-            <a:off x="7898738" y="3517243"/>
+            <a:off x="8048638" y="3517243"/>
             <a:ext cx="2899068" cy="1207890"/>
           </a:xfrm>
           <a:prstGeom prst="leftArrow">
@@ -25328,8 +22951,8 @@
           </a:p>
         </p:txBody>
       </p:sp>
-      <mc:AlternateContent xmlns:mc="http://schemas.openxmlformats.org/markup-compatibility/2006" xmlns:a14="http://schemas.microsoft.com/office/drawing/2010/main">
-        <mc:Choice Requires="a14">
+      <mc:AlternateContent xmlns:mc="http://schemas.openxmlformats.org/markup-compatibility/2006">
+        <mc:Choice xmlns:a14="http://schemas.microsoft.com/office/drawing/2010/main" Requires="a14">
           <p:sp>
             <p:nvSpPr>
               <p:cNvPr id="3" name="Content Placeholder 2">
@@ -25399,25 +23022,25 @@
                   <a:rPr lang="en-US" sz="2000" i="1" dirty="0">
                     <a:latin typeface="+mj-lt"/>
                   </a:rPr>
-                  <a:t>, k</a:t>
+                  <a:t>, </a:t>
+                </a:r>
+                <a:r>
+                  <a:rPr lang="en-US" sz="2000" i="1">
+                    <a:latin typeface="+mj-lt"/>
+                  </a:rPr>
+                  <a:t>k</a:t>
+                </a:r>
+                <a:r>
+                  <a:rPr lang="en-US" sz="2000">
+                    <a:latin typeface="+mj-lt"/>
+                  </a:rPr>
+                  <a:t>-Nearest Neighbors </a:t>
                 </a:r>
                 <a:r>
                   <a:rPr lang="en-US" sz="2000" dirty="0">
                     <a:latin typeface="+mj-lt"/>
                   </a:rPr>
-                  <a:t>-Nearest </a:t>
-                </a:r>
-                <a:r>
-                  <a:rPr lang="en-US" sz="2000" dirty="0" err="1">
-                    <a:latin typeface="+mj-lt"/>
-                  </a:rPr>
-                  <a:t>Neigbohrs</a:t>
-                </a:r>
-                <a:r>
-                  <a:rPr lang="en-US" sz="2000" dirty="0">
-                    <a:latin typeface="+mj-lt"/>
-                  </a:rPr>
-                  <a:t> identifies </a:t>
+                  <a:t>identifies </a:t>
                 </a:r>
                 <a:r>
                   <a:rPr lang="en-US" sz="2000" i="1" dirty="0">
@@ -25429,7 +23052,19 @@
                   <a:rPr lang="en-US" sz="2000" dirty="0">
                     <a:latin typeface="+mj-lt"/>
                   </a:rPr>
-                  <a:t>(number defined by us) observations in the training data that are closest to </a:t>
+                  <a:t>(</a:t>
+                </a:r>
+                <a:r>
+                  <a:rPr lang="en-US" sz="2000" b="1" dirty="0">
+                    <a:latin typeface="+mj-lt"/>
+                  </a:rPr>
+                  <a:t>hyperparameter</a:t>
+                </a:r>
+                <a:r>
+                  <a:rPr lang="en-US" sz="2000" dirty="0">
+                    <a:latin typeface="+mj-lt"/>
+                  </a:rPr>
+                  <a:t>) observations in the training data that are closest to </a:t>
                 </a:r>
                 <a14:m>
                   <m:oMath xmlns:m="http://schemas.openxmlformats.org/officeDocument/2006/math">
@@ -25841,7 +23476,7 @@
             </p:txBody>
           </p:sp>
         </mc:Choice>
-        <mc:Fallback xmlns="">
+        <mc:Fallback>
           <p:sp>
             <p:nvSpPr>
               <p:cNvPr id="3" name="Content Placeholder 2">
@@ -25894,7 +23529,7 @@
 </p:sld>
 </file>
 
-<file path=ppt/slides/slide15.xml><?xml version="1.0" encoding="utf-8"?>
+<file path=ppt/slides/slide12.xml><?xml version="1.0" encoding="utf-8"?>
 <p:sld xmlns:a="http://schemas.openxmlformats.org/drawingml/2006/main" xmlns:r="http://schemas.openxmlformats.org/officeDocument/2006/relationships" xmlns:p="http://schemas.openxmlformats.org/presentationml/2006/main">
   <p:cSld>
     <p:spTree>
@@ -26412,7 +24047,7 @@
 </p:sld>
 </file>
 
-<file path=ppt/slides/slide16.xml><?xml version="1.0" encoding="utf-8"?>
+<file path=ppt/slides/slide13.xml><?xml version="1.0" encoding="utf-8"?>
 <p:sld xmlns:a="http://schemas.openxmlformats.org/drawingml/2006/main" xmlns:r="http://schemas.openxmlformats.org/officeDocument/2006/relationships" xmlns:p="http://schemas.openxmlformats.org/presentationml/2006/main">
   <p:cSld>
     <p:spTree>
@@ -27101,7 +24736,7 @@
 </p:sld>
 </file>
 
-<file path=ppt/slides/slide17.xml><?xml version="1.0" encoding="utf-8"?>
+<file path=ppt/slides/slide14.xml><?xml version="1.0" encoding="utf-8"?>
 <p:sld xmlns:a="http://schemas.openxmlformats.org/drawingml/2006/main" xmlns:r="http://schemas.openxmlformats.org/officeDocument/2006/relationships" xmlns:p="http://schemas.openxmlformats.org/presentationml/2006/main">
   <p:cSld>
     <p:spTree>
@@ -27637,7 +25272,7 @@
 </p:sld>
 </file>
 
-<file path=ppt/slides/slide18.xml><?xml version="1.0" encoding="utf-8"?>
+<file path=ppt/slides/slide15.xml><?xml version="1.0" encoding="utf-8"?>
 <p:sld xmlns:a="http://schemas.openxmlformats.org/drawingml/2006/main" xmlns:r="http://schemas.openxmlformats.org/officeDocument/2006/relationships" xmlns:p="http://schemas.openxmlformats.org/presentationml/2006/main">
   <p:cSld>
     <p:spTree>
@@ -28560,7 +26195,7 @@
 </p:sld>
 </file>
 
-<file path=ppt/slides/slide19.xml><?xml version="1.0" encoding="utf-8"?>
+<file path=ppt/slides/slide16.xml><?xml version="1.0" encoding="utf-8"?>
 <p:sld xmlns:a="http://schemas.openxmlformats.org/drawingml/2006/main" xmlns:r="http://schemas.openxmlformats.org/officeDocument/2006/relationships" xmlns:p="http://schemas.openxmlformats.org/presentationml/2006/main">
   <p:cSld>
     <p:spTree>
@@ -29428,6 +27063,1923 @@
 </p:sld>
 </file>
 
+<file path=ppt/slides/slide17.xml><?xml version="1.0" encoding="utf-8"?>
+<p:sld xmlns:a="http://schemas.openxmlformats.org/drawingml/2006/main" xmlns:r="http://schemas.openxmlformats.org/officeDocument/2006/relationships" xmlns:p="http://schemas.openxmlformats.org/presentationml/2006/main">
+  <p:cSld>
+    <p:spTree>
+      <p:nvGrpSpPr>
+        <p:cNvPr id="1" name=""/>
+        <p:cNvGrpSpPr/>
+        <p:nvPr/>
+      </p:nvGrpSpPr>
+      <p:grpSpPr>
+        <a:xfrm>
+          <a:off x="0" y="0"/>
+          <a:ext cx="0" cy="0"/>
+          <a:chOff x="0" y="0"/>
+          <a:chExt cx="0" cy="0"/>
+        </a:xfrm>
+      </p:grpSpPr>
+      <p:sp>
+        <p:nvSpPr>
+          <p:cNvPr id="2" name="Title 1">
+            <a:extLst>
+              <a:ext uri="{FF2B5EF4-FFF2-40B4-BE49-F238E27FC236}">
+                <a16:creationId xmlns:a16="http://schemas.microsoft.com/office/drawing/2014/main" id="{15C869D5-4E6C-6766-7E06-98B25E955D87}"/>
+              </a:ext>
+            </a:extLst>
+          </p:cNvPr>
+          <p:cNvSpPr>
+            <a:spLocks noGrp="1"/>
+          </p:cNvSpPr>
+          <p:nvPr>
+            <p:ph type="title"/>
+          </p:nvPr>
+        </p:nvSpPr>
+        <p:spPr/>
+        <p:txBody>
+          <a:bodyPr>
+            <a:normAutofit/>
+          </a:bodyPr>
+          <a:lstStyle/>
+          <a:p>
+            <a:r>
+              <a:rPr lang="en-US" sz="4000" dirty="0"/>
+              <a:t>Performance measures</a:t>
+            </a:r>
+          </a:p>
+        </p:txBody>
+      </p:sp>
+      <p:sp>
+        <p:nvSpPr>
+          <p:cNvPr id="4" name="Rectángulo 3">
+            <a:extLst>
+              <a:ext uri="{FF2B5EF4-FFF2-40B4-BE49-F238E27FC236}">
+                <a16:creationId xmlns:a16="http://schemas.microsoft.com/office/drawing/2014/main" id="{27E372AA-1ACE-5D2D-EDED-66DB6F5F4F88}"/>
+              </a:ext>
+            </a:extLst>
+          </p:cNvPr>
+          <p:cNvSpPr/>
+          <p:nvPr/>
+        </p:nvSpPr>
+        <p:spPr>
+          <a:xfrm>
+            <a:off x="0" y="0"/>
+            <a:ext cx="374469" cy="6858000"/>
+          </a:xfrm>
+          <a:prstGeom prst="rect">
+            <a:avLst/>
+          </a:prstGeom>
+        </p:spPr>
+        <p:style>
+          <a:lnRef idx="2">
+            <a:schemeClr val="accent2">
+              <a:shade val="50000"/>
+            </a:schemeClr>
+          </a:lnRef>
+          <a:fillRef idx="1">
+            <a:schemeClr val="accent2"/>
+          </a:fillRef>
+          <a:effectRef idx="0">
+            <a:schemeClr val="accent2"/>
+          </a:effectRef>
+          <a:fontRef idx="minor">
+            <a:schemeClr val="lt1"/>
+          </a:fontRef>
+        </p:style>
+        <p:txBody>
+          <a:bodyPr rtlCol="0" anchor="ctr"/>
+          <a:lstStyle/>
+          <a:p>
+            <a:pPr algn="ctr"/>
+            <a:endParaRPr lang="es-ES"/>
+          </a:p>
+        </p:txBody>
+      </p:sp>
+      <p:sp>
+        <p:nvSpPr>
+          <p:cNvPr id="5" name="Rectangle 143">
+            <a:extLst>
+              <a:ext uri="{FF2B5EF4-FFF2-40B4-BE49-F238E27FC236}">
+                <a16:creationId xmlns:a16="http://schemas.microsoft.com/office/drawing/2014/main" id="{4CAC6C5C-8798-AF6F-C852-967659577BF3}"/>
+              </a:ext>
+            </a:extLst>
+          </p:cNvPr>
+          <p:cNvSpPr>
+            <a:spLocks noChangeArrowheads="1"/>
+          </p:cNvSpPr>
+          <p:nvPr/>
+        </p:nvSpPr>
+        <p:spPr bwMode="auto">
+          <a:xfrm>
+            <a:off x="448342" y="6482412"/>
+            <a:ext cx="5730175" cy="276999"/>
+          </a:xfrm>
+          <a:prstGeom prst="rect">
+            <a:avLst/>
+          </a:prstGeom>
+          <a:noFill/>
+          <a:ln>
+            <a:noFill/>
+          </a:ln>
+          <a:effectLst/>
+          <a:extLst>
+            <a:ext uri="{909E8E84-426E-40DD-AFC4-6F175D3DCCD1}">
+              <a14:hiddenFill xmlns:a14="http://schemas.microsoft.com/office/drawing/2010/main">
+                <a:solidFill>
+                  <a:schemeClr val="accent1"/>
+                </a:solidFill>
+              </a14:hiddenFill>
+            </a:ext>
+            <a:ext uri="{91240B29-F687-4F45-9708-019B960494DF}">
+              <a14:hiddenLine xmlns:a14="http://schemas.microsoft.com/office/drawing/2010/main" w="9525">
+                <a:solidFill>
+                  <a:schemeClr val="tx1"/>
+                </a:solidFill>
+                <a:miter lim="800000"/>
+                <a:headEnd/>
+                <a:tailEnd/>
+              </a14:hiddenLine>
+            </a:ext>
+            <a:ext uri="{AF507438-7753-43E0-B8FC-AC1667EBCBE1}">
+              <a14:hiddenEffects xmlns:a14="http://schemas.microsoft.com/office/drawing/2010/main">
+                <a:effectLst>
+                  <a:outerShdw dist="35921" dir="2700000" algn="ctr" rotWithShape="0">
+                    <a:schemeClr val="bg2"/>
+                  </a:outerShdw>
+                </a:effectLst>
+              </a14:hiddenEffects>
+            </a:ext>
+          </a:extLst>
+        </p:spPr>
+        <p:txBody>
+          <a:bodyPr vert="horz" wrap="square" lIns="91440" tIns="45720" rIns="91440" bIns="45720" numCol="1" anchor="ctr" anchorCtr="0" compatLnSpc="1">
+            <a:prstTxWarp prst="textNoShape">
+              <a:avLst/>
+            </a:prstTxWarp>
+            <a:spAutoFit/>
+          </a:bodyPr>
+          <a:lstStyle/>
+          <a:p>
+            <a:pPr marL="0" marR="0" lvl="0" indent="0" algn="l" defTabSz="914400" rtl="0" eaLnBrk="0" fontAlgn="base" latinLnBrk="0" hangingPunct="0">
+              <a:lnSpc>
+                <a:spcPct val="100000"/>
+              </a:lnSpc>
+              <a:spcBef>
+                <a:spcPct val="0"/>
+              </a:spcBef>
+              <a:spcAft>
+                <a:spcPct val="0"/>
+              </a:spcAft>
+              <a:buClrTx/>
+              <a:buSzTx/>
+              <a:buFontTx/>
+              <a:buNone/>
+              <a:tabLst/>
+            </a:pPr>
+            <a:r>
+              <a:rPr kumimoji="0" lang="en-US" altLang="es-ES" sz="1200" b="0" i="0" u="none" strike="noStrike" cap="none" normalizeH="0" baseline="0" dirty="0">
+                <a:ln>
+                  <a:noFill/>
+                </a:ln>
+                <a:solidFill>
+                  <a:srgbClr val="F4A200"/>
+                </a:solidFill>
+                <a:effectLst/>
+                <a:latin typeface="Arial" panose="020B0604020202020204" pitchFamily="34" charset="0"/>
+                <a:ea typeface="Myriad Pro Light"/>
+                <a:cs typeface="Times New Roman" panose="02020603050405020304" pitchFamily="18" charset="0"/>
+              </a:rPr>
+              <a:t>Master in Quantitative Economic Analysis </a:t>
+            </a:r>
+            <a:r>
+              <a:rPr kumimoji="0" lang="en-US" altLang="es-ES" sz="1200" b="0" i="0" u="none" strike="noStrike" cap="none" normalizeH="0" baseline="0" dirty="0" err="1">
+                <a:ln>
+                  <a:noFill/>
+                </a:ln>
+                <a:solidFill>
+                  <a:srgbClr val="F4A200"/>
+                </a:solidFill>
+                <a:effectLst/>
+                <a:latin typeface="Arial" panose="020B0604020202020204" pitchFamily="34" charset="0"/>
+                <a:ea typeface="Myriad Pro Light"/>
+                <a:cs typeface="Times New Roman" panose="02020603050405020304" pitchFamily="18" charset="0"/>
+              </a:rPr>
+              <a:t>MQuEA</a:t>
+            </a:r>
+            <a:endParaRPr kumimoji="0" lang="es-ES" altLang="es-ES" sz="400" b="0" i="0" u="none" strike="noStrike" cap="none" normalizeH="0" baseline="0" dirty="0">
+              <a:ln>
+                <a:noFill/>
+              </a:ln>
+              <a:solidFill>
+                <a:schemeClr val="tx1"/>
+              </a:solidFill>
+              <a:effectLst/>
+              <a:latin typeface="Arial" panose="020B0604020202020204" pitchFamily="34" charset="0"/>
+            </a:endParaRPr>
+          </a:p>
+        </p:txBody>
+      </p:sp>
+      <p:sp>
+        <p:nvSpPr>
+          <p:cNvPr id="6" name="Rectangle 143">
+            <a:extLst>
+              <a:ext uri="{FF2B5EF4-FFF2-40B4-BE49-F238E27FC236}">
+                <a16:creationId xmlns:a16="http://schemas.microsoft.com/office/drawing/2014/main" id="{09E0FB32-C00A-A390-E094-76FC3EA5C288}"/>
+              </a:ext>
+            </a:extLst>
+          </p:cNvPr>
+          <p:cNvSpPr>
+            <a:spLocks noChangeArrowheads="1"/>
+          </p:cNvSpPr>
+          <p:nvPr/>
+        </p:nvSpPr>
+        <p:spPr bwMode="auto">
+          <a:xfrm>
+            <a:off x="6186394" y="6493050"/>
+            <a:ext cx="5730175" cy="276999"/>
+          </a:xfrm>
+          <a:prstGeom prst="rect">
+            <a:avLst/>
+          </a:prstGeom>
+          <a:noFill/>
+          <a:ln>
+            <a:noFill/>
+          </a:ln>
+          <a:effectLst/>
+          <a:extLst>
+            <a:ext uri="{909E8E84-426E-40DD-AFC4-6F175D3DCCD1}">
+              <a14:hiddenFill xmlns:a14="http://schemas.microsoft.com/office/drawing/2010/main">
+                <a:solidFill>
+                  <a:schemeClr val="accent1"/>
+                </a:solidFill>
+              </a14:hiddenFill>
+            </a:ext>
+            <a:ext uri="{91240B29-F687-4F45-9708-019B960494DF}">
+              <a14:hiddenLine xmlns:a14="http://schemas.microsoft.com/office/drawing/2010/main" w="9525">
+                <a:solidFill>
+                  <a:schemeClr val="tx1"/>
+                </a:solidFill>
+                <a:miter lim="800000"/>
+                <a:headEnd/>
+                <a:tailEnd/>
+              </a14:hiddenLine>
+            </a:ext>
+            <a:ext uri="{AF507438-7753-43E0-B8FC-AC1667EBCBE1}">
+              <a14:hiddenEffects xmlns:a14="http://schemas.microsoft.com/office/drawing/2010/main">
+                <a:effectLst>
+                  <a:outerShdw dist="35921" dir="2700000" algn="ctr" rotWithShape="0">
+                    <a:schemeClr val="bg2"/>
+                  </a:outerShdw>
+                </a:effectLst>
+              </a14:hiddenEffects>
+            </a:ext>
+          </a:extLst>
+        </p:spPr>
+        <p:txBody>
+          <a:bodyPr vert="horz" wrap="square" lIns="91440" tIns="45720" rIns="91440" bIns="45720" numCol="1" anchor="ctr" anchorCtr="0" compatLnSpc="1">
+            <a:prstTxWarp prst="textNoShape">
+              <a:avLst/>
+            </a:prstTxWarp>
+            <a:spAutoFit/>
+          </a:bodyPr>
+          <a:lstStyle/>
+          <a:p>
+            <a:pPr marL="0" marR="0" lvl="0" indent="0" algn="r" defTabSz="914400" rtl="0" eaLnBrk="0" fontAlgn="base" latinLnBrk="0" hangingPunct="0">
+              <a:lnSpc>
+                <a:spcPct val="100000"/>
+              </a:lnSpc>
+              <a:spcBef>
+                <a:spcPct val="0"/>
+              </a:spcBef>
+              <a:spcAft>
+                <a:spcPct val="0"/>
+              </a:spcAft>
+              <a:buClrTx/>
+              <a:buSzTx/>
+              <a:buFontTx/>
+              <a:buNone/>
+              <a:tabLst/>
+            </a:pPr>
+            <a:r>
+              <a:rPr kumimoji="0" lang="en-US" altLang="es-ES" sz="1200" b="0" i="0" u="none" strike="noStrike" cap="none" normalizeH="0" baseline="0" dirty="0">
+                <a:ln>
+                  <a:noFill/>
+                </a:ln>
+                <a:solidFill>
+                  <a:srgbClr val="F4A200"/>
+                </a:solidFill>
+                <a:effectLst/>
+                <a:latin typeface="Arial" panose="020B0604020202020204" pitchFamily="34" charset="0"/>
+                <a:ea typeface="Myriad Pro Light"/>
+                <a:cs typeface="Times New Roman" panose="02020603050405020304" pitchFamily="18" charset="0"/>
+              </a:rPr>
+              <a:t>Universidad </a:t>
+            </a:r>
+            <a:r>
+              <a:rPr kumimoji="0" lang="en-US" altLang="es-ES" sz="1200" b="0" i="0" u="none" strike="noStrike" cap="none" normalizeH="0" baseline="0" dirty="0" err="1">
+                <a:ln>
+                  <a:noFill/>
+                </a:ln>
+                <a:solidFill>
+                  <a:srgbClr val="F4A200"/>
+                </a:solidFill>
+                <a:effectLst/>
+                <a:latin typeface="Arial" panose="020B0604020202020204" pitchFamily="34" charset="0"/>
+                <a:ea typeface="Myriad Pro Light"/>
+                <a:cs typeface="Times New Roman" panose="02020603050405020304" pitchFamily="18" charset="0"/>
+              </a:rPr>
+              <a:t>Aut</a:t>
+            </a:r>
+            <a:r>
+              <a:rPr lang="en-US" altLang="es-ES" sz="1200" dirty="0" err="1">
+                <a:solidFill>
+                  <a:srgbClr val="F4A200"/>
+                </a:solidFill>
+                <a:latin typeface="Arial" panose="020B0604020202020204" pitchFamily="34" charset="0"/>
+                <a:ea typeface="Myriad Pro Light"/>
+                <a:cs typeface="Times New Roman" panose="02020603050405020304" pitchFamily="18" charset="0"/>
+              </a:rPr>
+              <a:t>ó</a:t>
+            </a:r>
+            <a:r>
+              <a:rPr kumimoji="0" lang="en-US" altLang="es-ES" sz="1200" b="0" i="0" u="none" strike="noStrike" cap="none" normalizeH="0" baseline="0" dirty="0" err="1">
+                <a:ln>
+                  <a:noFill/>
+                </a:ln>
+                <a:solidFill>
+                  <a:srgbClr val="F4A200"/>
+                </a:solidFill>
+                <a:effectLst/>
+                <a:latin typeface="Arial" panose="020B0604020202020204" pitchFamily="34" charset="0"/>
+                <a:ea typeface="Myriad Pro Light"/>
+                <a:cs typeface="Times New Roman" panose="02020603050405020304" pitchFamily="18" charset="0"/>
+              </a:rPr>
+              <a:t>noma</a:t>
+            </a:r>
+            <a:r>
+              <a:rPr kumimoji="0" lang="en-US" altLang="es-ES" sz="1200" b="0" i="0" u="none" strike="noStrike" cap="none" normalizeH="0" baseline="0" dirty="0">
+                <a:ln>
+                  <a:noFill/>
+                </a:ln>
+                <a:solidFill>
+                  <a:srgbClr val="F4A200"/>
+                </a:solidFill>
+                <a:effectLst/>
+                <a:latin typeface="Arial" panose="020B0604020202020204" pitchFamily="34" charset="0"/>
+                <a:ea typeface="Myriad Pro Light"/>
+                <a:cs typeface="Times New Roman" panose="02020603050405020304" pitchFamily="18" charset="0"/>
+              </a:rPr>
+              <a:t> de Madrid</a:t>
+            </a:r>
+            <a:endParaRPr kumimoji="0" lang="es-ES" altLang="es-ES" sz="400" b="0" i="0" u="none" strike="noStrike" cap="none" normalizeH="0" baseline="0" dirty="0">
+              <a:ln>
+                <a:noFill/>
+              </a:ln>
+              <a:solidFill>
+                <a:schemeClr val="tx1"/>
+              </a:solidFill>
+              <a:effectLst/>
+              <a:latin typeface="Arial" panose="020B0604020202020204" pitchFamily="34" charset="0"/>
+            </a:endParaRPr>
+          </a:p>
+        </p:txBody>
+      </p:sp>
+      <p:sp>
+        <p:nvSpPr>
+          <p:cNvPr id="3" name="Content Placeholder 2">
+            <a:extLst>
+              <a:ext uri="{FF2B5EF4-FFF2-40B4-BE49-F238E27FC236}">
+                <a16:creationId xmlns:a16="http://schemas.microsoft.com/office/drawing/2014/main" id="{F7EF27C5-01B7-9F60-ECDA-A1F376586FC5}"/>
+              </a:ext>
+            </a:extLst>
+          </p:cNvPr>
+          <p:cNvSpPr>
+            <a:spLocks noGrp="1"/>
+          </p:cNvSpPr>
+          <p:nvPr>
+            <p:ph idx="1"/>
+          </p:nvPr>
+        </p:nvSpPr>
+        <p:spPr/>
+        <p:txBody>
+          <a:bodyPr>
+            <a:normAutofit/>
+          </a:bodyPr>
+          <a:lstStyle/>
+          <a:p>
+            <a:pPr>
+              <a:lnSpc>
+                <a:spcPct val="100000"/>
+              </a:lnSpc>
+              <a:buFont typeface="Wingdings" panose="05000000000000000000" pitchFamily="2" charset="2"/>
+              <a:buChar char="§"/>
+            </a:pPr>
+            <a:r>
+              <a:rPr lang="en-US" sz="2000" dirty="0">
+                <a:latin typeface="+mj-lt"/>
+              </a:rPr>
+              <a:t>Now, classifiers assign labels based on a threshold. For each instance, it computes a score based on a decision function. If that score is greater than a threshold, it assigns the instance to the positive class; otherwise, it assigns it to the negative class</a:t>
+            </a:r>
+          </a:p>
+          <a:p>
+            <a:pPr>
+              <a:lnSpc>
+                <a:spcPct val="100000"/>
+              </a:lnSpc>
+              <a:buFont typeface="Wingdings" panose="05000000000000000000" pitchFamily="2" charset="2"/>
+              <a:buChar char="§"/>
+            </a:pPr>
+            <a:r>
+              <a:rPr lang="en-US" sz="2000" dirty="0">
+                <a:latin typeface="+mj-lt"/>
+              </a:rPr>
+              <a:t>Therefore, if we modify the threshold, the classification will vary, achieving better or worse predictions, and yielding different Precision and Recall</a:t>
+            </a:r>
+          </a:p>
+        </p:txBody>
+      </p:sp>
+      <p:pic>
+        <p:nvPicPr>
+          <p:cNvPr id="8" name="Picture 7" descr="Diagram&#10;&#10;Description automatically generated">
+            <a:extLst>
+              <a:ext uri="{FF2B5EF4-FFF2-40B4-BE49-F238E27FC236}">
+                <a16:creationId xmlns:a16="http://schemas.microsoft.com/office/drawing/2014/main" id="{9881C9A0-2340-D44D-5D9E-46C0DEB06956}"/>
+              </a:ext>
+            </a:extLst>
+          </p:cNvPr>
+          <p:cNvPicPr>
+            <a:picLocks noChangeAspect="1"/>
+          </p:cNvPicPr>
+          <p:nvPr/>
+        </p:nvPicPr>
+        <p:blipFill>
+          <a:blip r:embed="rId2">
+            <a:extLst>
+              <a:ext uri="{28A0092B-C50C-407E-A947-70E740481C1C}">
+                <a14:useLocalDpi xmlns:a14="http://schemas.microsoft.com/office/drawing/2010/main" val="0"/>
+              </a:ext>
+            </a:extLst>
+          </a:blip>
+          <a:stretch>
+            <a:fillRect/>
+          </a:stretch>
+        </p:blipFill>
+        <p:spPr>
+          <a:xfrm>
+            <a:off x="3352794" y="3909195"/>
+            <a:ext cx="5486412" cy="1865379"/>
+          </a:xfrm>
+          <a:prstGeom prst="rect">
+            <a:avLst/>
+          </a:prstGeom>
+        </p:spPr>
+      </p:pic>
+      <p:sp>
+        <p:nvSpPr>
+          <p:cNvPr id="7" name="TextBox 6">
+            <a:extLst>
+              <a:ext uri="{FF2B5EF4-FFF2-40B4-BE49-F238E27FC236}">
+                <a16:creationId xmlns:a16="http://schemas.microsoft.com/office/drawing/2014/main" id="{37720FBC-73EA-B6D0-4103-EA431CC846B4}"/>
+              </a:ext>
+            </a:extLst>
+          </p:cNvPr>
+          <p:cNvSpPr txBox="1"/>
+          <p:nvPr/>
+        </p:nvSpPr>
+        <p:spPr>
+          <a:xfrm>
+            <a:off x="9227382" y="3710710"/>
+            <a:ext cx="2493989" cy="738664"/>
+          </a:xfrm>
+          <a:prstGeom prst="rect">
+            <a:avLst/>
+          </a:prstGeom>
+          <a:noFill/>
+        </p:spPr>
+        <p:txBody>
+          <a:bodyPr wrap="square" rtlCol="0">
+            <a:spAutoFit/>
+          </a:bodyPr>
+          <a:lstStyle/>
+          <a:p>
+            <a:pPr algn="ctr"/>
+            <a:r>
+              <a:rPr lang="es-ES" sz="1400" dirty="0">
+                <a:solidFill>
+                  <a:srgbClr val="FF0000"/>
+                </a:solidFill>
+              </a:rPr>
+              <a:t>*</a:t>
+            </a:r>
+            <a:r>
+              <a:rPr lang="es-ES" sz="1400" dirty="0" err="1">
+                <a:solidFill>
+                  <a:srgbClr val="FF0000"/>
+                </a:solidFill>
+              </a:rPr>
+              <a:t>Images</a:t>
+            </a:r>
+            <a:r>
+              <a:rPr lang="es-ES" sz="1400" dirty="0">
+                <a:solidFill>
+                  <a:srgbClr val="FF0000"/>
+                </a:solidFill>
+              </a:rPr>
+              <a:t> </a:t>
+            </a:r>
+            <a:r>
+              <a:rPr lang="es-ES" sz="1400" dirty="0" err="1">
+                <a:solidFill>
+                  <a:srgbClr val="FF0000"/>
+                </a:solidFill>
+              </a:rPr>
+              <a:t>ordered</a:t>
+            </a:r>
+            <a:r>
+              <a:rPr lang="es-ES" sz="1400" dirty="0">
+                <a:solidFill>
+                  <a:srgbClr val="FF0000"/>
+                </a:solidFill>
+              </a:rPr>
+              <a:t> </a:t>
+            </a:r>
+            <a:r>
+              <a:rPr lang="es-ES" sz="1400" dirty="0" err="1">
+                <a:solidFill>
+                  <a:srgbClr val="FF0000"/>
+                </a:solidFill>
+              </a:rPr>
+              <a:t>according</a:t>
+            </a:r>
+            <a:r>
+              <a:rPr lang="es-ES" sz="1400" dirty="0">
+                <a:solidFill>
+                  <a:srgbClr val="FF0000"/>
+                </a:solidFill>
+              </a:rPr>
+              <a:t> </a:t>
+            </a:r>
+            <a:r>
+              <a:rPr lang="es-ES" sz="1400" dirty="0" err="1">
+                <a:solidFill>
+                  <a:srgbClr val="FF0000"/>
+                </a:solidFill>
+              </a:rPr>
+              <a:t>to</a:t>
+            </a:r>
+            <a:r>
+              <a:rPr lang="es-ES" sz="1400" dirty="0">
+                <a:solidFill>
+                  <a:srgbClr val="FF0000"/>
+                </a:solidFill>
+              </a:rPr>
+              <a:t> </a:t>
+            </a:r>
+            <a:r>
+              <a:rPr lang="es-ES" sz="1400" dirty="0" err="1">
+                <a:solidFill>
+                  <a:srgbClr val="FF0000"/>
+                </a:solidFill>
+              </a:rPr>
+              <a:t>their</a:t>
+            </a:r>
+            <a:r>
+              <a:rPr lang="es-ES" sz="1400" dirty="0">
+                <a:solidFill>
+                  <a:srgbClr val="FF0000"/>
+                </a:solidFill>
+              </a:rPr>
+              <a:t> (</a:t>
+            </a:r>
+            <a:r>
+              <a:rPr lang="es-ES" sz="1400" dirty="0" err="1">
+                <a:solidFill>
+                  <a:srgbClr val="FF0000"/>
+                </a:solidFill>
+              </a:rPr>
+              <a:t>increasing</a:t>
+            </a:r>
+            <a:r>
+              <a:rPr lang="es-ES" sz="1400" dirty="0">
+                <a:solidFill>
+                  <a:srgbClr val="FF0000"/>
+                </a:solidFill>
+              </a:rPr>
+              <a:t>) </a:t>
+            </a:r>
+            <a:r>
+              <a:rPr lang="es-ES" sz="1400" dirty="0" err="1">
+                <a:solidFill>
+                  <a:srgbClr val="FF0000"/>
+                </a:solidFill>
+              </a:rPr>
+              <a:t>probability</a:t>
+            </a:r>
+            <a:r>
+              <a:rPr lang="es-ES" sz="1400" dirty="0">
+                <a:solidFill>
+                  <a:srgbClr val="FF0000"/>
+                </a:solidFill>
+              </a:rPr>
+              <a:t> </a:t>
+            </a:r>
+            <a:r>
+              <a:rPr lang="es-ES" sz="1400" dirty="0" err="1">
+                <a:solidFill>
+                  <a:srgbClr val="FF0000"/>
+                </a:solidFill>
+              </a:rPr>
+              <a:t>of</a:t>
+            </a:r>
+            <a:r>
+              <a:rPr lang="es-ES" sz="1400" dirty="0">
+                <a:solidFill>
+                  <a:srgbClr val="FF0000"/>
+                </a:solidFill>
+              </a:rPr>
+              <a:t> “</a:t>
+            </a:r>
+            <a:r>
+              <a:rPr lang="es-ES" sz="1400" dirty="0" err="1">
+                <a:solidFill>
+                  <a:srgbClr val="FF0000"/>
+                </a:solidFill>
+              </a:rPr>
+              <a:t>being</a:t>
+            </a:r>
+            <a:r>
+              <a:rPr lang="es-ES" sz="1400" dirty="0">
+                <a:solidFill>
+                  <a:srgbClr val="FF0000"/>
+                </a:solidFill>
+              </a:rPr>
+              <a:t> a 5”</a:t>
+            </a:r>
+            <a:endParaRPr lang="en-US" sz="1400" dirty="0">
+              <a:solidFill>
+                <a:srgbClr val="FF0000"/>
+              </a:solidFill>
+            </a:endParaRPr>
+          </a:p>
+        </p:txBody>
+      </p:sp>
+      <p:sp>
+        <p:nvSpPr>
+          <p:cNvPr id="9" name="TextBox 8">
+            <a:extLst>
+              <a:ext uri="{FF2B5EF4-FFF2-40B4-BE49-F238E27FC236}">
+                <a16:creationId xmlns:a16="http://schemas.microsoft.com/office/drawing/2014/main" id="{E1954FAC-9C26-4E01-5260-4D6A0B3FD4A4}"/>
+              </a:ext>
+            </a:extLst>
+          </p:cNvPr>
+          <p:cNvSpPr txBox="1"/>
+          <p:nvPr/>
+        </p:nvSpPr>
+        <p:spPr>
+          <a:xfrm>
+            <a:off x="2866937" y="3873654"/>
+            <a:ext cx="1068217" cy="276999"/>
+          </a:xfrm>
+          <a:prstGeom prst="rect">
+            <a:avLst/>
+          </a:prstGeom>
+          <a:noFill/>
+        </p:spPr>
+        <p:txBody>
+          <a:bodyPr wrap="square" rtlCol="0">
+            <a:spAutoFit/>
+          </a:bodyPr>
+          <a:lstStyle/>
+          <a:p>
+            <a:pPr algn="ctr"/>
+            <a:r>
+              <a:rPr lang="es-ES" sz="1200" dirty="0">
+                <a:solidFill>
+                  <a:srgbClr val="FF0000"/>
+                </a:solidFill>
+              </a:rPr>
+              <a:t>TP</a:t>
+            </a:r>
+            <a:r>
+              <a:rPr lang="en-US" sz="1200" dirty="0">
+                <a:solidFill>
+                  <a:srgbClr val="FF0000"/>
+                </a:solidFill>
+              </a:rPr>
+              <a:t>/(TP+FP)</a:t>
+            </a:r>
+          </a:p>
+        </p:txBody>
+      </p:sp>
+      <p:sp>
+        <p:nvSpPr>
+          <p:cNvPr id="10" name="TextBox 9">
+            <a:extLst>
+              <a:ext uri="{FF2B5EF4-FFF2-40B4-BE49-F238E27FC236}">
+                <a16:creationId xmlns:a16="http://schemas.microsoft.com/office/drawing/2014/main" id="{A29FFB1B-A0A9-B55C-B155-77C01FCDD992}"/>
+              </a:ext>
+            </a:extLst>
+          </p:cNvPr>
+          <p:cNvSpPr txBox="1"/>
+          <p:nvPr/>
+        </p:nvSpPr>
+        <p:spPr>
+          <a:xfrm>
+            <a:off x="2882488" y="4050428"/>
+            <a:ext cx="1068217" cy="276999"/>
+          </a:xfrm>
+          <a:prstGeom prst="rect">
+            <a:avLst/>
+          </a:prstGeom>
+          <a:noFill/>
+        </p:spPr>
+        <p:txBody>
+          <a:bodyPr wrap="square" rtlCol="0">
+            <a:spAutoFit/>
+          </a:bodyPr>
+          <a:lstStyle/>
+          <a:p>
+            <a:pPr algn="ctr"/>
+            <a:r>
+              <a:rPr lang="es-ES" sz="1200" dirty="0">
+                <a:solidFill>
+                  <a:srgbClr val="FF0000"/>
+                </a:solidFill>
+              </a:rPr>
+              <a:t>TP</a:t>
+            </a:r>
+            <a:r>
+              <a:rPr lang="en-US" sz="1200" dirty="0">
+                <a:solidFill>
+                  <a:srgbClr val="FF0000"/>
+                </a:solidFill>
+              </a:rPr>
+              <a:t>/(TP+FN)</a:t>
+            </a:r>
+          </a:p>
+        </p:txBody>
+      </p:sp>
+    </p:spTree>
+    <p:extLst>
+      <p:ext uri="{BB962C8B-B14F-4D97-AF65-F5344CB8AC3E}">
+        <p14:creationId xmlns:p14="http://schemas.microsoft.com/office/powerpoint/2010/main" val="192070580"/>
+      </p:ext>
+    </p:extLst>
+  </p:cSld>
+  <p:clrMapOvr>
+    <a:masterClrMapping/>
+  </p:clrMapOvr>
+</p:sld>
+</file>
+
+<file path=ppt/slides/slide18.xml><?xml version="1.0" encoding="utf-8"?>
+<p:sld xmlns:a="http://schemas.openxmlformats.org/drawingml/2006/main" xmlns:r="http://schemas.openxmlformats.org/officeDocument/2006/relationships" xmlns:p="http://schemas.openxmlformats.org/presentationml/2006/main">
+  <p:cSld>
+    <p:spTree>
+      <p:nvGrpSpPr>
+        <p:cNvPr id="1" name=""/>
+        <p:cNvGrpSpPr/>
+        <p:nvPr/>
+      </p:nvGrpSpPr>
+      <p:grpSpPr>
+        <a:xfrm>
+          <a:off x="0" y="0"/>
+          <a:ext cx="0" cy="0"/>
+          <a:chOff x="0" y="0"/>
+          <a:chExt cx="0" cy="0"/>
+        </a:xfrm>
+      </p:grpSpPr>
+      <p:sp>
+        <p:nvSpPr>
+          <p:cNvPr id="2" name="Title 1">
+            <a:extLst>
+              <a:ext uri="{FF2B5EF4-FFF2-40B4-BE49-F238E27FC236}">
+                <a16:creationId xmlns:a16="http://schemas.microsoft.com/office/drawing/2014/main" id="{15C869D5-4E6C-6766-7E06-98B25E955D87}"/>
+              </a:ext>
+            </a:extLst>
+          </p:cNvPr>
+          <p:cNvSpPr>
+            <a:spLocks noGrp="1"/>
+          </p:cNvSpPr>
+          <p:nvPr>
+            <p:ph type="title"/>
+          </p:nvPr>
+        </p:nvSpPr>
+        <p:spPr/>
+        <p:txBody>
+          <a:bodyPr>
+            <a:normAutofit/>
+          </a:bodyPr>
+          <a:lstStyle/>
+          <a:p>
+            <a:r>
+              <a:rPr lang="en-US" sz="4000" dirty="0"/>
+              <a:t>Performance measures</a:t>
+            </a:r>
+          </a:p>
+        </p:txBody>
+      </p:sp>
+      <p:sp>
+        <p:nvSpPr>
+          <p:cNvPr id="4" name="Rectángulo 3">
+            <a:extLst>
+              <a:ext uri="{FF2B5EF4-FFF2-40B4-BE49-F238E27FC236}">
+                <a16:creationId xmlns:a16="http://schemas.microsoft.com/office/drawing/2014/main" id="{27E372AA-1ACE-5D2D-EDED-66DB6F5F4F88}"/>
+              </a:ext>
+            </a:extLst>
+          </p:cNvPr>
+          <p:cNvSpPr/>
+          <p:nvPr/>
+        </p:nvSpPr>
+        <p:spPr>
+          <a:xfrm>
+            <a:off x="0" y="0"/>
+            <a:ext cx="374469" cy="6858000"/>
+          </a:xfrm>
+          <a:prstGeom prst="rect">
+            <a:avLst/>
+          </a:prstGeom>
+        </p:spPr>
+        <p:style>
+          <a:lnRef idx="2">
+            <a:schemeClr val="accent2">
+              <a:shade val="50000"/>
+            </a:schemeClr>
+          </a:lnRef>
+          <a:fillRef idx="1">
+            <a:schemeClr val="accent2"/>
+          </a:fillRef>
+          <a:effectRef idx="0">
+            <a:schemeClr val="accent2"/>
+          </a:effectRef>
+          <a:fontRef idx="minor">
+            <a:schemeClr val="lt1"/>
+          </a:fontRef>
+        </p:style>
+        <p:txBody>
+          <a:bodyPr rtlCol="0" anchor="ctr"/>
+          <a:lstStyle/>
+          <a:p>
+            <a:pPr algn="ctr"/>
+            <a:endParaRPr lang="es-ES"/>
+          </a:p>
+        </p:txBody>
+      </p:sp>
+      <p:sp>
+        <p:nvSpPr>
+          <p:cNvPr id="5" name="Rectangle 143">
+            <a:extLst>
+              <a:ext uri="{FF2B5EF4-FFF2-40B4-BE49-F238E27FC236}">
+                <a16:creationId xmlns:a16="http://schemas.microsoft.com/office/drawing/2014/main" id="{4CAC6C5C-8798-AF6F-C852-967659577BF3}"/>
+              </a:ext>
+            </a:extLst>
+          </p:cNvPr>
+          <p:cNvSpPr>
+            <a:spLocks noChangeArrowheads="1"/>
+          </p:cNvSpPr>
+          <p:nvPr/>
+        </p:nvSpPr>
+        <p:spPr bwMode="auto">
+          <a:xfrm>
+            <a:off x="448342" y="6482412"/>
+            <a:ext cx="5730175" cy="276999"/>
+          </a:xfrm>
+          <a:prstGeom prst="rect">
+            <a:avLst/>
+          </a:prstGeom>
+          <a:noFill/>
+          <a:ln>
+            <a:noFill/>
+          </a:ln>
+          <a:effectLst/>
+          <a:extLst>
+            <a:ext uri="{909E8E84-426E-40DD-AFC4-6F175D3DCCD1}">
+              <a14:hiddenFill xmlns:a14="http://schemas.microsoft.com/office/drawing/2010/main">
+                <a:solidFill>
+                  <a:schemeClr val="accent1"/>
+                </a:solidFill>
+              </a14:hiddenFill>
+            </a:ext>
+            <a:ext uri="{91240B29-F687-4F45-9708-019B960494DF}">
+              <a14:hiddenLine xmlns:a14="http://schemas.microsoft.com/office/drawing/2010/main" w="9525">
+                <a:solidFill>
+                  <a:schemeClr val="tx1"/>
+                </a:solidFill>
+                <a:miter lim="800000"/>
+                <a:headEnd/>
+                <a:tailEnd/>
+              </a14:hiddenLine>
+            </a:ext>
+            <a:ext uri="{AF507438-7753-43E0-B8FC-AC1667EBCBE1}">
+              <a14:hiddenEffects xmlns:a14="http://schemas.microsoft.com/office/drawing/2010/main">
+                <a:effectLst>
+                  <a:outerShdw dist="35921" dir="2700000" algn="ctr" rotWithShape="0">
+                    <a:schemeClr val="bg2"/>
+                  </a:outerShdw>
+                </a:effectLst>
+              </a14:hiddenEffects>
+            </a:ext>
+          </a:extLst>
+        </p:spPr>
+        <p:txBody>
+          <a:bodyPr vert="horz" wrap="square" lIns="91440" tIns="45720" rIns="91440" bIns="45720" numCol="1" anchor="ctr" anchorCtr="0" compatLnSpc="1">
+            <a:prstTxWarp prst="textNoShape">
+              <a:avLst/>
+            </a:prstTxWarp>
+            <a:spAutoFit/>
+          </a:bodyPr>
+          <a:lstStyle/>
+          <a:p>
+            <a:pPr marL="0" marR="0" lvl="0" indent="0" algn="l" defTabSz="914400" rtl="0" eaLnBrk="0" fontAlgn="base" latinLnBrk="0" hangingPunct="0">
+              <a:lnSpc>
+                <a:spcPct val="100000"/>
+              </a:lnSpc>
+              <a:spcBef>
+                <a:spcPct val="0"/>
+              </a:spcBef>
+              <a:spcAft>
+                <a:spcPct val="0"/>
+              </a:spcAft>
+              <a:buClrTx/>
+              <a:buSzTx/>
+              <a:buFontTx/>
+              <a:buNone/>
+              <a:tabLst/>
+            </a:pPr>
+            <a:r>
+              <a:rPr kumimoji="0" lang="en-US" altLang="es-ES" sz="1200" b="0" i="0" u="none" strike="noStrike" cap="none" normalizeH="0" baseline="0" dirty="0">
+                <a:ln>
+                  <a:noFill/>
+                </a:ln>
+                <a:solidFill>
+                  <a:srgbClr val="F4A200"/>
+                </a:solidFill>
+                <a:effectLst/>
+                <a:latin typeface="Arial" panose="020B0604020202020204" pitchFamily="34" charset="0"/>
+                <a:ea typeface="Myriad Pro Light"/>
+                <a:cs typeface="Times New Roman" panose="02020603050405020304" pitchFamily="18" charset="0"/>
+              </a:rPr>
+              <a:t>Master in Quantitative Economic Analysis </a:t>
+            </a:r>
+            <a:r>
+              <a:rPr kumimoji="0" lang="en-US" altLang="es-ES" sz="1200" b="0" i="0" u="none" strike="noStrike" cap="none" normalizeH="0" baseline="0" dirty="0" err="1">
+                <a:ln>
+                  <a:noFill/>
+                </a:ln>
+                <a:solidFill>
+                  <a:srgbClr val="F4A200"/>
+                </a:solidFill>
+                <a:effectLst/>
+                <a:latin typeface="Arial" panose="020B0604020202020204" pitchFamily="34" charset="0"/>
+                <a:ea typeface="Myriad Pro Light"/>
+                <a:cs typeface="Times New Roman" panose="02020603050405020304" pitchFamily="18" charset="0"/>
+              </a:rPr>
+              <a:t>MQuEA</a:t>
+            </a:r>
+            <a:endParaRPr kumimoji="0" lang="es-ES" altLang="es-ES" sz="400" b="0" i="0" u="none" strike="noStrike" cap="none" normalizeH="0" baseline="0" dirty="0">
+              <a:ln>
+                <a:noFill/>
+              </a:ln>
+              <a:solidFill>
+                <a:schemeClr val="tx1"/>
+              </a:solidFill>
+              <a:effectLst/>
+              <a:latin typeface="Arial" panose="020B0604020202020204" pitchFamily="34" charset="0"/>
+            </a:endParaRPr>
+          </a:p>
+        </p:txBody>
+      </p:sp>
+      <p:sp>
+        <p:nvSpPr>
+          <p:cNvPr id="6" name="Rectangle 143">
+            <a:extLst>
+              <a:ext uri="{FF2B5EF4-FFF2-40B4-BE49-F238E27FC236}">
+                <a16:creationId xmlns:a16="http://schemas.microsoft.com/office/drawing/2014/main" id="{09E0FB32-C00A-A390-E094-76FC3EA5C288}"/>
+              </a:ext>
+            </a:extLst>
+          </p:cNvPr>
+          <p:cNvSpPr>
+            <a:spLocks noChangeArrowheads="1"/>
+          </p:cNvSpPr>
+          <p:nvPr/>
+        </p:nvSpPr>
+        <p:spPr bwMode="auto">
+          <a:xfrm>
+            <a:off x="6186394" y="6493050"/>
+            <a:ext cx="5730175" cy="276999"/>
+          </a:xfrm>
+          <a:prstGeom prst="rect">
+            <a:avLst/>
+          </a:prstGeom>
+          <a:noFill/>
+          <a:ln>
+            <a:noFill/>
+          </a:ln>
+          <a:effectLst/>
+          <a:extLst>
+            <a:ext uri="{909E8E84-426E-40DD-AFC4-6F175D3DCCD1}">
+              <a14:hiddenFill xmlns:a14="http://schemas.microsoft.com/office/drawing/2010/main">
+                <a:solidFill>
+                  <a:schemeClr val="accent1"/>
+                </a:solidFill>
+              </a14:hiddenFill>
+            </a:ext>
+            <a:ext uri="{91240B29-F687-4F45-9708-019B960494DF}">
+              <a14:hiddenLine xmlns:a14="http://schemas.microsoft.com/office/drawing/2010/main" w="9525">
+                <a:solidFill>
+                  <a:schemeClr val="tx1"/>
+                </a:solidFill>
+                <a:miter lim="800000"/>
+                <a:headEnd/>
+                <a:tailEnd/>
+              </a14:hiddenLine>
+            </a:ext>
+            <a:ext uri="{AF507438-7753-43E0-B8FC-AC1667EBCBE1}">
+              <a14:hiddenEffects xmlns:a14="http://schemas.microsoft.com/office/drawing/2010/main">
+                <a:effectLst>
+                  <a:outerShdw dist="35921" dir="2700000" algn="ctr" rotWithShape="0">
+                    <a:schemeClr val="bg2"/>
+                  </a:outerShdw>
+                </a:effectLst>
+              </a14:hiddenEffects>
+            </a:ext>
+          </a:extLst>
+        </p:spPr>
+        <p:txBody>
+          <a:bodyPr vert="horz" wrap="square" lIns="91440" tIns="45720" rIns="91440" bIns="45720" numCol="1" anchor="ctr" anchorCtr="0" compatLnSpc="1">
+            <a:prstTxWarp prst="textNoShape">
+              <a:avLst/>
+            </a:prstTxWarp>
+            <a:spAutoFit/>
+          </a:bodyPr>
+          <a:lstStyle/>
+          <a:p>
+            <a:pPr marL="0" marR="0" lvl="0" indent="0" algn="r" defTabSz="914400" rtl="0" eaLnBrk="0" fontAlgn="base" latinLnBrk="0" hangingPunct="0">
+              <a:lnSpc>
+                <a:spcPct val="100000"/>
+              </a:lnSpc>
+              <a:spcBef>
+                <a:spcPct val="0"/>
+              </a:spcBef>
+              <a:spcAft>
+                <a:spcPct val="0"/>
+              </a:spcAft>
+              <a:buClrTx/>
+              <a:buSzTx/>
+              <a:buFontTx/>
+              <a:buNone/>
+              <a:tabLst/>
+            </a:pPr>
+            <a:r>
+              <a:rPr kumimoji="0" lang="en-US" altLang="es-ES" sz="1200" b="0" i="0" u="none" strike="noStrike" cap="none" normalizeH="0" baseline="0" dirty="0">
+                <a:ln>
+                  <a:noFill/>
+                </a:ln>
+                <a:solidFill>
+                  <a:srgbClr val="F4A200"/>
+                </a:solidFill>
+                <a:effectLst/>
+                <a:latin typeface="Arial" panose="020B0604020202020204" pitchFamily="34" charset="0"/>
+                <a:ea typeface="Myriad Pro Light"/>
+                <a:cs typeface="Times New Roman" panose="02020603050405020304" pitchFamily="18" charset="0"/>
+              </a:rPr>
+              <a:t>Universidad </a:t>
+            </a:r>
+            <a:r>
+              <a:rPr kumimoji="0" lang="en-US" altLang="es-ES" sz="1200" b="0" i="0" u="none" strike="noStrike" cap="none" normalizeH="0" baseline="0" dirty="0" err="1">
+                <a:ln>
+                  <a:noFill/>
+                </a:ln>
+                <a:solidFill>
+                  <a:srgbClr val="F4A200"/>
+                </a:solidFill>
+                <a:effectLst/>
+                <a:latin typeface="Arial" panose="020B0604020202020204" pitchFamily="34" charset="0"/>
+                <a:ea typeface="Myriad Pro Light"/>
+                <a:cs typeface="Times New Roman" panose="02020603050405020304" pitchFamily="18" charset="0"/>
+              </a:rPr>
+              <a:t>Aut</a:t>
+            </a:r>
+            <a:r>
+              <a:rPr lang="en-US" altLang="es-ES" sz="1200" dirty="0" err="1">
+                <a:solidFill>
+                  <a:srgbClr val="F4A200"/>
+                </a:solidFill>
+                <a:latin typeface="Arial" panose="020B0604020202020204" pitchFamily="34" charset="0"/>
+                <a:ea typeface="Myriad Pro Light"/>
+                <a:cs typeface="Times New Roman" panose="02020603050405020304" pitchFamily="18" charset="0"/>
+              </a:rPr>
+              <a:t>ó</a:t>
+            </a:r>
+            <a:r>
+              <a:rPr kumimoji="0" lang="en-US" altLang="es-ES" sz="1200" b="0" i="0" u="none" strike="noStrike" cap="none" normalizeH="0" baseline="0" dirty="0" err="1">
+                <a:ln>
+                  <a:noFill/>
+                </a:ln>
+                <a:solidFill>
+                  <a:srgbClr val="F4A200"/>
+                </a:solidFill>
+                <a:effectLst/>
+                <a:latin typeface="Arial" panose="020B0604020202020204" pitchFamily="34" charset="0"/>
+                <a:ea typeface="Myriad Pro Light"/>
+                <a:cs typeface="Times New Roman" panose="02020603050405020304" pitchFamily="18" charset="0"/>
+              </a:rPr>
+              <a:t>noma</a:t>
+            </a:r>
+            <a:r>
+              <a:rPr kumimoji="0" lang="en-US" altLang="es-ES" sz="1200" b="0" i="0" u="none" strike="noStrike" cap="none" normalizeH="0" baseline="0" dirty="0">
+                <a:ln>
+                  <a:noFill/>
+                </a:ln>
+                <a:solidFill>
+                  <a:srgbClr val="F4A200"/>
+                </a:solidFill>
+                <a:effectLst/>
+                <a:latin typeface="Arial" panose="020B0604020202020204" pitchFamily="34" charset="0"/>
+                <a:ea typeface="Myriad Pro Light"/>
+                <a:cs typeface="Times New Roman" panose="02020603050405020304" pitchFamily="18" charset="0"/>
+              </a:rPr>
+              <a:t> de Madrid</a:t>
+            </a:r>
+            <a:endParaRPr kumimoji="0" lang="es-ES" altLang="es-ES" sz="400" b="0" i="0" u="none" strike="noStrike" cap="none" normalizeH="0" baseline="0" dirty="0">
+              <a:ln>
+                <a:noFill/>
+              </a:ln>
+              <a:solidFill>
+                <a:schemeClr val="tx1"/>
+              </a:solidFill>
+              <a:effectLst/>
+              <a:latin typeface="Arial" panose="020B0604020202020204" pitchFamily="34" charset="0"/>
+            </a:endParaRPr>
+          </a:p>
+        </p:txBody>
+      </p:sp>
+      <p:sp>
+        <p:nvSpPr>
+          <p:cNvPr id="3" name="Content Placeholder 2">
+            <a:extLst>
+              <a:ext uri="{FF2B5EF4-FFF2-40B4-BE49-F238E27FC236}">
+                <a16:creationId xmlns:a16="http://schemas.microsoft.com/office/drawing/2014/main" id="{F7EF27C5-01B7-9F60-ECDA-A1F376586FC5}"/>
+              </a:ext>
+            </a:extLst>
+          </p:cNvPr>
+          <p:cNvSpPr>
+            <a:spLocks noGrp="1"/>
+          </p:cNvSpPr>
+          <p:nvPr>
+            <p:ph idx="1"/>
+          </p:nvPr>
+        </p:nvSpPr>
+        <p:spPr/>
+        <p:txBody>
+          <a:bodyPr>
+            <a:normAutofit/>
+          </a:bodyPr>
+          <a:lstStyle/>
+          <a:p>
+            <a:pPr>
+              <a:lnSpc>
+                <a:spcPct val="100000"/>
+              </a:lnSpc>
+              <a:buFont typeface="Wingdings" panose="05000000000000000000" pitchFamily="2" charset="2"/>
+              <a:buChar char="§"/>
+            </a:pPr>
+            <a:r>
+              <a:rPr lang="en-US" sz="2000" dirty="0">
+                <a:latin typeface="+mj-lt"/>
+              </a:rPr>
+              <a:t>When Precision increases, Recall decreases, and vice versa</a:t>
+            </a:r>
+          </a:p>
+        </p:txBody>
+      </p:sp>
+      <p:pic>
+        <p:nvPicPr>
+          <p:cNvPr id="9" name="Picture 8" descr="Chart, line chart&#10;&#10;Description automatically generated">
+            <a:extLst>
+              <a:ext uri="{FF2B5EF4-FFF2-40B4-BE49-F238E27FC236}">
+                <a16:creationId xmlns:a16="http://schemas.microsoft.com/office/drawing/2014/main" id="{1DE37376-1AE9-D64D-FA42-22B5B0525F41}"/>
+              </a:ext>
+            </a:extLst>
+          </p:cNvPr>
+          <p:cNvPicPr>
+            <a:picLocks noChangeAspect="1"/>
+          </p:cNvPicPr>
+          <p:nvPr/>
+        </p:nvPicPr>
+        <p:blipFill>
+          <a:blip r:embed="rId2">
+            <a:extLst>
+              <a:ext uri="{28A0092B-C50C-407E-A947-70E740481C1C}">
+                <a14:useLocalDpi xmlns:a14="http://schemas.microsoft.com/office/drawing/2010/main" val="0"/>
+              </a:ext>
+            </a:extLst>
+          </a:blip>
+          <a:stretch>
+            <a:fillRect/>
+          </a:stretch>
+        </p:blipFill>
+        <p:spPr>
+          <a:xfrm>
+            <a:off x="1280597" y="3148096"/>
+            <a:ext cx="4754890" cy="2250648"/>
+          </a:xfrm>
+          <a:prstGeom prst="rect">
+            <a:avLst/>
+          </a:prstGeom>
+        </p:spPr>
+      </p:pic>
+      <p:pic>
+        <p:nvPicPr>
+          <p:cNvPr id="11" name="Picture 10" descr="Chart&#10;&#10;Description automatically generated">
+            <a:extLst>
+              <a:ext uri="{FF2B5EF4-FFF2-40B4-BE49-F238E27FC236}">
+                <a16:creationId xmlns:a16="http://schemas.microsoft.com/office/drawing/2014/main" id="{690C69FA-F60D-A00B-B1B8-8F4A2FF5EDC0}"/>
+              </a:ext>
+            </a:extLst>
+          </p:cNvPr>
+          <p:cNvPicPr>
+            <a:picLocks noChangeAspect="1"/>
+          </p:cNvPicPr>
+          <p:nvPr/>
+        </p:nvPicPr>
+        <p:blipFill>
+          <a:blip r:embed="rId3">
+            <a:extLst>
+              <a:ext uri="{28A0092B-C50C-407E-A947-70E740481C1C}">
+                <a14:useLocalDpi xmlns:a14="http://schemas.microsoft.com/office/drawing/2010/main" val="0"/>
+              </a:ext>
+            </a:extLst>
+          </a:blip>
+          <a:stretch>
+            <a:fillRect/>
+          </a:stretch>
+        </p:blipFill>
+        <p:spPr>
+          <a:xfrm>
+            <a:off x="7201172" y="2698820"/>
+            <a:ext cx="3840488" cy="3149200"/>
+          </a:xfrm>
+          <a:prstGeom prst="rect">
+            <a:avLst/>
+          </a:prstGeom>
+        </p:spPr>
+      </p:pic>
+    </p:spTree>
+    <p:extLst>
+      <p:ext uri="{BB962C8B-B14F-4D97-AF65-F5344CB8AC3E}">
+        <p14:creationId xmlns:p14="http://schemas.microsoft.com/office/powerpoint/2010/main" val="3007389573"/>
+      </p:ext>
+    </p:extLst>
+  </p:cSld>
+  <p:clrMapOvr>
+    <a:masterClrMapping/>
+  </p:clrMapOvr>
+</p:sld>
+</file>
+
+<file path=ppt/slides/slide19.xml><?xml version="1.0" encoding="utf-8"?>
+<p:sld xmlns:a="http://schemas.openxmlformats.org/drawingml/2006/main" xmlns:r="http://schemas.openxmlformats.org/officeDocument/2006/relationships" xmlns:p="http://schemas.openxmlformats.org/presentationml/2006/main">
+  <p:cSld>
+    <p:spTree>
+      <p:nvGrpSpPr>
+        <p:cNvPr id="1" name=""/>
+        <p:cNvGrpSpPr/>
+        <p:nvPr/>
+      </p:nvGrpSpPr>
+      <p:grpSpPr>
+        <a:xfrm>
+          <a:off x="0" y="0"/>
+          <a:ext cx="0" cy="0"/>
+          <a:chOff x="0" y="0"/>
+          <a:chExt cx="0" cy="0"/>
+        </a:xfrm>
+      </p:grpSpPr>
+      <p:sp>
+        <p:nvSpPr>
+          <p:cNvPr id="2" name="Title 1">
+            <a:extLst>
+              <a:ext uri="{FF2B5EF4-FFF2-40B4-BE49-F238E27FC236}">
+                <a16:creationId xmlns:a16="http://schemas.microsoft.com/office/drawing/2014/main" id="{15C869D5-4E6C-6766-7E06-98B25E955D87}"/>
+              </a:ext>
+            </a:extLst>
+          </p:cNvPr>
+          <p:cNvSpPr>
+            <a:spLocks noGrp="1"/>
+          </p:cNvSpPr>
+          <p:nvPr>
+            <p:ph type="title"/>
+          </p:nvPr>
+        </p:nvSpPr>
+        <p:spPr/>
+        <p:txBody>
+          <a:bodyPr>
+            <a:normAutofit/>
+          </a:bodyPr>
+          <a:lstStyle/>
+          <a:p>
+            <a:r>
+              <a:rPr lang="en-US" sz="4000" dirty="0"/>
+              <a:t>Performance measures</a:t>
+            </a:r>
+          </a:p>
+        </p:txBody>
+      </p:sp>
+      <p:sp>
+        <p:nvSpPr>
+          <p:cNvPr id="4" name="Rectángulo 3">
+            <a:extLst>
+              <a:ext uri="{FF2B5EF4-FFF2-40B4-BE49-F238E27FC236}">
+                <a16:creationId xmlns:a16="http://schemas.microsoft.com/office/drawing/2014/main" id="{27E372AA-1ACE-5D2D-EDED-66DB6F5F4F88}"/>
+              </a:ext>
+            </a:extLst>
+          </p:cNvPr>
+          <p:cNvSpPr/>
+          <p:nvPr/>
+        </p:nvSpPr>
+        <p:spPr>
+          <a:xfrm>
+            <a:off x="0" y="0"/>
+            <a:ext cx="374469" cy="6858000"/>
+          </a:xfrm>
+          <a:prstGeom prst="rect">
+            <a:avLst/>
+          </a:prstGeom>
+        </p:spPr>
+        <p:style>
+          <a:lnRef idx="2">
+            <a:schemeClr val="accent2">
+              <a:shade val="50000"/>
+            </a:schemeClr>
+          </a:lnRef>
+          <a:fillRef idx="1">
+            <a:schemeClr val="accent2"/>
+          </a:fillRef>
+          <a:effectRef idx="0">
+            <a:schemeClr val="accent2"/>
+          </a:effectRef>
+          <a:fontRef idx="minor">
+            <a:schemeClr val="lt1"/>
+          </a:fontRef>
+        </p:style>
+        <p:txBody>
+          <a:bodyPr rtlCol="0" anchor="ctr"/>
+          <a:lstStyle/>
+          <a:p>
+            <a:pPr algn="ctr"/>
+            <a:endParaRPr lang="es-ES"/>
+          </a:p>
+        </p:txBody>
+      </p:sp>
+      <p:sp>
+        <p:nvSpPr>
+          <p:cNvPr id="5" name="Rectangle 143">
+            <a:extLst>
+              <a:ext uri="{FF2B5EF4-FFF2-40B4-BE49-F238E27FC236}">
+                <a16:creationId xmlns:a16="http://schemas.microsoft.com/office/drawing/2014/main" id="{4CAC6C5C-8798-AF6F-C852-967659577BF3}"/>
+              </a:ext>
+            </a:extLst>
+          </p:cNvPr>
+          <p:cNvSpPr>
+            <a:spLocks noChangeArrowheads="1"/>
+          </p:cNvSpPr>
+          <p:nvPr/>
+        </p:nvSpPr>
+        <p:spPr bwMode="auto">
+          <a:xfrm>
+            <a:off x="448342" y="6482412"/>
+            <a:ext cx="5730175" cy="276999"/>
+          </a:xfrm>
+          <a:prstGeom prst="rect">
+            <a:avLst/>
+          </a:prstGeom>
+          <a:noFill/>
+          <a:ln>
+            <a:noFill/>
+          </a:ln>
+          <a:effectLst/>
+          <a:extLst>
+            <a:ext uri="{909E8E84-426E-40DD-AFC4-6F175D3DCCD1}">
+              <a14:hiddenFill xmlns:a14="http://schemas.microsoft.com/office/drawing/2010/main">
+                <a:solidFill>
+                  <a:schemeClr val="accent1"/>
+                </a:solidFill>
+              </a14:hiddenFill>
+            </a:ext>
+            <a:ext uri="{91240B29-F687-4F45-9708-019B960494DF}">
+              <a14:hiddenLine xmlns:a14="http://schemas.microsoft.com/office/drawing/2010/main" w="9525">
+                <a:solidFill>
+                  <a:schemeClr val="tx1"/>
+                </a:solidFill>
+                <a:miter lim="800000"/>
+                <a:headEnd/>
+                <a:tailEnd/>
+              </a14:hiddenLine>
+            </a:ext>
+            <a:ext uri="{AF507438-7753-43E0-B8FC-AC1667EBCBE1}">
+              <a14:hiddenEffects xmlns:a14="http://schemas.microsoft.com/office/drawing/2010/main">
+                <a:effectLst>
+                  <a:outerShdw dist="35921" dir="2700000" algn="ctr" rotWithShape="0">
+                    <a:schemeClr val="bg2"/>
+                  </a:outerShdw>
+                </a:effectLst>
+              </a14:hiddenEffects>
+            </a:ext>
+          </a:extLst>
+        </p:spPr>
+        <p:txBody>
+          <a:bodyPr vert="horz" wrap="square" lIns="91440" tIns="45720" rIns="91440" bIns="45720" numCol="1" anchor="ctr" anchorCtr="0" compatLnSpc="1">
+            <a:prstTxWarp prst="textNoShape">
+              <a:avLst/>
+            </a:prstTxWarp>
+            <a:spAutoFit/>
+          </a:bodyPr>
+          <a:lstStyle/>
+          <a:p>
+            <a:pPr marL="0" marR="0" lvl="0" indent="0" algn="l" defTabSz="914400" rtl="0" eaLnBrk="0" fontAlgn="base" latinLnBrk="0" hangingPunct="0">
+              <a:lnSpc>
+                <a:spcPct val="100000"/>
+              </a:lnSpc>
+              <a:spcBef>
+                <a:spcPct val="0"/>
+              </a:spcBef>
+              <a:spcAft>
+                <a:spcPct val="0"/>
+              </a:spcAft>
+              <a:buClrTx/>
+              <a:buSzTx/>
+              <a:buFontTx/>
+              <a:buNone/>
+              <a:tabLst/>
+            </a:pPr>
+            <a:r>
+              <a:rPr kumimoji="0" lang="en-US" altLang="es-ES" sz="1200" b="0" i="0" u="none" strike="noStrike" cap="none" normalizeH="0" baseline="0" dirty="0">
+                <a:ln>
+                  <a:noFill/>
+                </a:ln>
+                <a:solidFill>
+                  <a:srgbClr val="F4A200"/>
+                </a:solidFill>
+                <a:effectLst/>
+                <a:latin typeface="Arial" panose="020B0604020202020204" pitchFamily="34" charset="0"/>
+                <a:ea typeface="Myriad Pro Light"/>
+                <a:cs typeface="Times New Roman" panose="02020603050405020304" pitchFamily="18" charset="0"/>
+              </a:rPr>
+              <a:t>Master in Quantitative Economic Analysis </a:t>
+            </a:r>
+            <a:r>
+              <a:rPr kumimoji="0" lang="en-US" altLang="es-ES" sz="1200" b="0" i="0" u="none" strike="noStrike" cap="none" normalizeH="0" baseline="0" dirty="0" err="1">
+                <a:ln>
+                  <a:noFill/>
+                </a:ln>
+                <a:solidFill>
+                  <a:srgbClr val="F4A200"/>
+                </a:solidFill>
+                <a:effectLst/>
+                <a:latin typeface="Arial" panose="020B0604020202020204" pitchFamily="34" charset="0"/>
+                <a:ea typeface="Myriad Pro Light"/>
+                <a:cs typeface="Times New Roman" panose="02020603050405020304" pitchFamily="18" charset="0"/>
+              </a:rPr>
+              <a:t>MQuEA</a:t>
+            </a:r>
+            <a:endParaRPr kumimoji="0" lang="es-ES" altLang="es-ES" sz="400" b="0" i="0" u="none" strike="noStrike" cap="none" normalizeH="0" baseline="0" dirty="0">
+              <a:ln>
+                <a:noFill/>
+              </a:ln>
+              <a:solidFill>
+                <a:schemeClr val="tx1"/>
+              </a:solidFill>
+              <a:effectLst/>
+              <a:latin typeface="Arial" panose="020B0604020202020204" pitchFamily="34" charset="0"/>
+            </a:endParaRPr>
+          </a:p>
+        </p:txBody>
+      </p:sp>
+      <p:sp>
+        <p:nvSpPr>
+          <p:cNvPr id="6" name="Rectangle 143">
+            <a:extLst>
+              <a:ext uri="{FF2B5EF4-FFF2-40B4-BE49-F238E27FC236}">
+                <a16:creationId xmlns:a16="http://schemas.microsoft.com/office/drawing/2014/main" id="{09E0FB32-C00A-A390-E094-76FC3EA5C288}"/>
+              </a:ext>
+            </a:extLst>
+          </p:cNvPr>
+          <p:cNvSpPr>
+            <a:spLocks noChangeArrowheads="1"/>
+          </p:cNvSpPr>
+          <p:nvPr/>
+        </p:nvSpPr>
+        <p:spPr bwMode="auto">
+          <a:xfrm>
+            <a:off x="6186394" y="6493050"/>
+            <a:ext cx="5730175" cy="276999"/>
+          </a:xfrm>
+          <a:prstGeom prst="rect">
+            <a:avLst/>
+          </a:prstGeom>
+          <a:noFill/>
+          <a:ln>
+            <a:noFill/>
+          </a:ln>
+          <a:effectLst/>
+          <a:extLst>
+            <a:ext uri="{909E8E84-426E-40DD-AFC4-6F175D3DCCD1}">
+              <a14:hiddenFill xmlns:a14="http://schemas.microsoft.com/office/drawing/2010/main">
+                <a:solidFill>
+                  <a:schemeClr val="accent1"/>
+                </a:solidFill>
+              </a14:hiddenFill>
+            </a:ext>
+            <a:ext uri="{91240B29-F687-4F45-9708-019B960494DF}">
+              <a14:hiddenLine xmlns:a14="http://schemas.microsoft.com/office/drawing/2010/main" w="9525">
+                <a:solidFill>
+                  <a:schemeClr val="tx1"/>
+                </a:solidFill>
+                <a:miter lim="800000"/>
+                <a:headEnd/>
+                <a:tailEnd/>
+              </a14:hiddenLine>
+            </a:ext>
+            <a:ext uri="{AF507438-7753-43E0-B8FC-AC1667EBCBE1}">
+              <a14:hiddenEffects xmlns:a14="http://schemas.microsoft.com/office/drawing/2010/main">
+                <a:effectLst>
+                  <a:outerShdw dist="35921" dir="2700000" algn="ctr" rotWithShape="0">
+                    <a:schemeClr val="bg2"/>
+                  </a:outerShdw>
+                </a:effectLst>
+              </a14:hiddenEffects>
+            </a:ext>
+          </a:extLst>
+        </p:spPr>
+        <p:txBody>
+          <a:bodyPr vert="horz" wrap="square" lIns="91440" tIns="45720" rIns="91440" bIns="45720" numCol="1" anchor="ctr" anchorCtr="0" compatLnSpc="1">
+            <a:prstTxWarp prst="textNoShape">
+              <a:avLst/>
+            </a:prstTxWarp>
+            <a:spAutoFit/>
+          </a:bodyPr>
+          <a:lstStyle/>
+          <a:p>
+            <a:pPr marL="0" marR="0" lvl="0" indent="0" algn="r" defTabSz="914400" rtl="0" eaLnBrk="0" fontAlgn="base" latinLnBrk="0" hangingPunct="0">
+              <a:lnSpc>
+                <a:spcPct val="100000"/>
+              </a:lnSpc>
+              <a:spcBef>
+                <a:spcPct val="0"/>
+              </a:spcBef>
+              <a:spcAft>
+                <a:spcPct val="0"/>
+              </a:spcAft>
+              <a:buClrTx/>
+              <a:buSzTx/>
+              <a:buFontTx/>
+              <a:buNone/>
+              <a:tabLst/>
+            </a:pPr>
+            <a:r>
+              <a:rPr kumimoji="0" lang="en-US" altLang="es-ES" sz="1200" b="0" i="0" u="none" strike="noStrike" cap="none" normalizeH="0" baseline="0" dirty="0">
+                <a:ln>
+                  <a:noFill/>
+                </a:ln>
+                <a:solidFill>
+                  <a:srgbClr val="F4A200"/>
+                </a:solidFill>
+                <a:effectLst/>
+                <a:latin typeface="Arial" panose="020B0604020202020204" pitchFamily="34" charset="0"/>
+                <a:ea typeface="Myriad Pro Light"/>
+                <a:cs typeface="Times New Roman" panose="02020603050405020304" pitchFamily="18" charset="0"/>
+              </a:rPr>
+              <a:t>Universidad </a:t>
+            </a:r>
+            <a:r>
+              <a:rPr kumimoji="0" lang="en-US" altLang="es-ES" sz="1200" b="0" i="0" u="none" strike="noStrike" cap="none" normalizeH="0" baseline="0" dirty="0" err="1">
+                <a:ln>
+                  <a:noFill/>
+                </a:ln>
+                <a:solidFill>
+                  <a:srgbClr val="F4A200"/>
+                </a:solidFill>
+                <a:effectLst/>
+                <a:latin typeface="Arial" panose="020B0604020202020204" pitchFamily="34" charset="0"/>
+                <a:ea typeface="Myriad Pro Light"/>
+                <a:cs typeface="Times New Roman" panose="02020603050405020304" pitchFamily="18" charset="0"/>
+              </a:rPr>
+              <a:t>Aut</a:t>
+            </a:r>
+            <a:r>
+              <a:rPr lang="en-US" altLang="es-ES" sz="1200" dirty="0" err="1">
+                <a:solidFill>
+                  <a:srgbClr val="F4A200"/>
+                </a:solidFill>
+                <a:latin typeface="Arial" panose="020B0604020202020204" pitchFamily="34" charset="0"/>
+                <a:ea typeface="Myriad Pro Light"/>
+                <a:cs typeface="Times New Roman" panose="02020603050405020304" pitchFamily="18" charset="0"/>
+              </a:rPr>
+              <a:t>ó</a:t>
+            </a:r>
+            <a:r>
+              <a:rPr kumimoji="0" lang="en-US" altLang="es-ES" sz="1200" b="0" i="0" u="none" strike="noStrike" cap="none" normalizeH="0" baseline="0" dirty="0" err="1">
+                <a:ln>
+                  <a:noFill/>
+                </a:ln>
+                <a:solidFill>
+                  <a:srgbClr val="F4A200"/>
+                </a:solidFill>
+                <a:effectLst/>
+                <a:latin typeface="Arial" panose="020B0604020202020204" pitchFamily="34" charset="0"/>
+                <a:ea typeface="Myriad Pro Light"/>
+                <a:cs typeface="Times New Roman" panose="02020603050405020304" pitchFamily="18" charset="0"/>
+              </a:rPr>
+              <a:t>noma</a:t>
+            </a:r>
+            <a:r>
+              <a:rPr kumimoji="0" lang="en-US" altLang="es-ES" sz="1200" b="0" i="0" u="none" strike="noStrike" cap="none" normalizeH="0" baseline="0" dirty="0">
+                <a:ln>
+                  <a:noFill/>
+                </a:ln>
+                <a:solidFill>
+                  <a:srgbClr val="F4A200"/>
+                </a:solidFill>
+                <a:effectLst/>
+                <a:latin typeface="Arial" panose="020B0604020202020204" pitchFamily="34" charset="0"/>
+                <a:ea typeface="Myriad Pro Light"/>
+                <a:cs typeface="Times New Roman" panose="02020603050405020304" pitchFamily="18" charset="0"/>
+              </a:rPr>
+              <a:t> de Madrid</a:t>
+            </a:r>
+            <a:endParaRPr kumimoji="0" lang="es-ES" altLang="es-ES" sz="400" b="0" i="0" u="none" strike="noStrike" cap="none" normalizeH="0" baseline="0" dirty="0">
+              <a:ln>
+                <a:noFill/>
+              </a:ln>
+              <a:solidFill>
+                <a:schemeClr val="tx1"/>
+              </a:solidFill>
+              <a:effectLst/>
+              <a:latin typeface="Arial" panose="020B0604020202020204" pitchFamily="34" charset="0"/>
+            </a:endParaRPr>
+          </a:p>
+        </p:txBody>
+      </p:sp>
+      <p:sp>
+        <p:nvSpPr>
+          <p:cNvPr id="3" name="Content Placeholder 2">
+            <a:extLst>
+              <a:ext uri="{FF2B5EF4-FFF2-40B4-BE49-F238E27FC236}">
+                <a16:creationId xmlns:a16="http://schemas.microsoft.com/office/drawing/2014/main" id="{F7EF27C5-01B7-9F60-ECDA-A1F376586FC5}"/>
+              </a:ext>
+            </a:extLst>
+          </p:cNvPr>
+          <p:cNvSpPr>
+            <a:spLocks noGrp="1"/>
+          </p:cNvSpPr>
+          <p:nvPr>
+            <p:ph idx="1"/>
+          </p:nvPr>
+        </p:nvSpPr>
+        <p:spPr/>
+        <p:txBody>
+          <a:bodyPr>
+            <a:normAutofit/>
+          </a:bodyPr>
+          <a:lstStyle/>
+          <a:p>
+            <a:pPr>
+              <a:lnSpc>
+                <a:spcPct val="100000"/>
+              </a:lnSpc>
+              <a:buFont typeface="Wingdings" panose="05000000000000000000" pitchFamily="2" charset="2"/>
+              <a:buChar char="§"/>
+            </a:pPr>
+            <a:r>
+              <a:rPr lang="en-US" sz="2000" dirty="0">
+                <a:latin typeface="+mj-lt"/>
+              </a:rPr>
+              <a:t>Instead of plotting Precision and Recall, it is common to plot the </a:t>
+            </a:r>
+            <a:r>
+              <a:rPr lang="en-US" sz="2000" i="1" dirty="0">
+                <a:latin typeface="+mj-lt"/>
+              </a:rPr>
+              <a:t>True Positive Rate </a:t>
+            </a:r>
+            <a:r>
+              <a:rPr lang="en-US" sz="2000" dirty="0">
+                <a:latin typeface="+mj-lt"/>
+              </a:rPr>
+              <a:t>(TPR)</a:t>
+            </a:r>
+            <a:r>
+              <a:rPr lang="en-US" sz="2000" i="1" dirty="0">
+                <a:latin typeface="+mj-lt"/>
+              </a:rPr>
+              <a:t> </a:t>
+            </a:r>
+            <a:r>
+              <a:rPr lang="en-US" sz="2000" dirty="0">
+                <a:latin typeface="+mj-lt"/>
+              </a:rPr>
+              <a:t>against the </a:t>
+            </a:r>
+            <a:r>
+              <a:rPr lang="en-US" sz="2000" i="1" dirty="0">
+                <a:latin typeface="+mj-lt"/>
+              </a:rPr>
+              <a:t>False Positive Rate </a:t>
+            </a:r>
+            <a:r>
+              <a:rPr lang="en-US" sz="2000" dirty="0">
+                <a:latin typeface="+mj-lt"/>
+              </a:rPr>
+              <a:t>(FPR), or, which is the same, </a:t>
+            </a:r>
+            <a:r>
+              <a:rPr lang="en-US" sz="2000" i="1" dirty="0">
+                <a:latin typeface="+mj-lt"/>
+              </a:rPr>
+              <a:t>Sensitivity</a:t>
+            </a:r>
+            <a:r>
+              <a:rPr lang="en-US" sz="2000" dirty="0">
+                <a:latin typeface="+mj-lt"/>
+              </a:rPr>
+              <a:t> (</a:t>
+            </a:r>
+            <a:r>
+              <a:rPr lang="en-US" sz="2000" i="1" dirty="0">
+                <a:latin typeface="+mj-lt"/>
+              </a:rPr>
+              <a:t>true positive rate</a:t>
+            </a:r>
+            <a:r>
+              <a:rPr lang="en-US" sz="2000" dirty="0">
+                <a:latin typeface="+mj-lt"/>
+              </a:rPr>
+              <a:t>) versus </a:t>
+            </a:r>
+            <a:r>
+              <a:rPr lang="en-US" sz="2000" i="1" dirty="0">
+                <a:latin typeface="+mj-lt"/>
+              </a:rPr>
+              <a:t>1 – Specificity </a:t>
+            </a:r>
+            <a:r>
+              <a:rPr lang="en-US" sz="2000" dirty="0">
+                <a:latin typeface="+mj-lt"/>
+              </a:rPr>
+              <a:t>(</a:t>
+            </a:r>
+            <a:r>
+              <a:rPr lang="en-US" sz="2000" i="1" dirty="0">
+                <a:latin typeface="+mj-lt"/>
+              </a:rPr>
+              <a:t>true negative rate</a:t>
+            </a:r>
+            <a:r>
+              <a:rPr lang="en-US" sz="2000" dirty="0">
+                <a:latin typeface="+mj-lt"/>
+              </a:rPr>
+              <a:t>)</a:t>
+            </a:r>
+          </a:p>
+          <a:p>
+            <a:pPr>
+              <a:lnSpc>
+                <a:spcPct val="100000"/>
+              </a:lnSpc>
+              <a:buFont typeface="Wingdings" panose="05000000000000000000" pitchFamily="2" charset="2"/>
+              <a:buChar char="§"/>
+            </a:pPr>
+            <a:r>
+              <a:rPr lang="en-US" sz="2000" dirty="0">
+                <a:latin typeface="+mj-lt"/>
+              </a:rPr>
+              <a:t>This plot is called the </a:t>
+            </a:r>
+            <a:r>
+              <a:rPr lang="en-US" sz="2000" b="1" i="1" dirty="0">
+                <a:latin typeface="+mj-lt"/>
+              </a:rPr>
+              <a:t>Receiver Operating Characteristic</a:t>
+            </a:r>
+            <a:r>
+              <a:rPr lang="en-US" sz="2000" b="1" dirty="0">
+                <a:latin typeface="+mj-lt"/>
+              </a:rPr>
+              <a:t> (ROC) curve</a:t>
+            </a:r>
+            <a:endParaRPr lang="en-US" sz="2000" b="1" i="1" dirty="0">
+              <a:latin typeface="+mj-lt"/>
+            </a:endParaRPr>
+          </a:p>
+        </p:txBody>
+      </p:sp>
+      <p:pic>
+        <p:nvPicPr>
+          <p:cNvPr id="8" name="Picture 7" descr="Chart&#10;&#10;Description automatically generated">
+            <a:extLst>
+              <a:ext uri="{FF2B5EF4-FFF2-40B4-BE49-F238E27FC236}">
+                <a16:creationId xmlns:a16="http://schemas.microsoft.com/office/drawing/2014/main" id="{76AEBF3B-C772-6843-4D0F-2E3870D5E757}"/>
+              </a:ext>
+            </a:extLst>
+          </p:cNvPr>
+          <p:cNvPicPr>
+            <a:picLocks noChangeAspect="1"/>
+          </p:cNvPicPr>
+          <p:nvPr/>
+        </p:nvPicPr>
+        <p:blipFill>
+          <a:blip r:embed="rId2">
+            <a:extLst>
+              <a:ext uri="{28A0092B-C50C-407E-A947-70E740481C1C}">
+                <a14:useLocalDpi xmlns:a14="http://schemas.microsoft.com/office/drawing/2010/main" val="0"/>
+              </a:ext>
+            </a:extLst>
+          </a:blip>
+          <a:stretch>
+            <a:fillRect/>
+          </a:stretch>
+        </p:blipFill>
+        <p:spPr>
+          <a:xfrm>
+            <a:off x="1471468" y="3202345"/>
+            <a:ext cx="3840488" cy="3155601"/>
+          </a:xfrm>
+          <a:prstGeom prst="rect">
+            <a:avLst/>
+          </a:prstGeom>
+        </p:spPr>
+      </p:pic>
+      <p:sp>
+        <p:nvSpPr>
+          <p:cNvPr id="10" name="TextBox 9">
+            <a:extLst>
+              <a:ext uri="{FF2B5EF4-FFF2-40B4-BE49-F238E27FC236}">
+                <a16:creationId xmlns:a16="http://schemas.microsoft.com/office/drawing/2014/main" id="{FD153B7C-AA7A-8E9E-1514-6E91D58A1C22}"/>
+              </a:ext>
+            </a:extLst>
+          </p:cNvPr>
+          <p:cNvSpPr txBox="1"/>
+          <p:nvPr/>
+        </p:nvSpPr>
+        <p:spPr>
+          <a:xfrm>
+            <a:off x="6186394" y="3295787"/>
+            <a:ext cx="5003494" cy="1323439"/>
+          </a:xfrm>
+          <a:prstGeom prst="rect">
+            <a:avLst/>
+          </a:prstGeom>
+          <a:noFill/>
+        </p:spPr>
+        <p:txBody>
+          <a:bodyPr wrap="square" rtlCol="0">
+            <a:spAutoFit/>
+          </a:bodyPr>
+          <a:lstStyle/>
+          <a:p>
+            <a:r>
+              <a:rPr lang="en-US" sz="2000" dirty="0">
+                <a:latin typeface="+mj-lt"/>
+              </a:rPr>
+              <a:t>To compare two classifiers, we compute the </a:t>
+            </a:r>
+            <a:r>
+              <a:rPr lang="en-US" sz="2000" i="1" dirty="0">
+                <a:latin typeface="+mj-lt"/>
+              </a:rPr>
+              <a:t>area under the curve </a:t>
+            </a:r>
+            <a:r>
+              <a:rPr lang="en-US" sz="2000" dirty="0">
+                <a:latin typeface="+mj-lt"/>
+              </a:rPr>
+              <a:t>(AUC)</a:t>
+            </a:r>
+          </a:p>
+          <a:p>
+            <a:r>
+              <a:rPr lang="en-US" sz="2000" dirty="0">
+                <a:latin typeface="+mj-lt"/>
+              </a:rPr>
+              <a:t>A perfect classifier would have an area of 1; so the higher, the better</a:t>
+            </a:r>
+          </a:p>
+        </p:txBody>
+      </p:sp>
+    </p:spTree>
+    <p:extLst>
+      <p:ext uri="{BB962C8B-B14F-4D97-AF65-F5344CB8AC3E}">
+        <p14:creationId xmlns:p14="http://schemas.microsoft.com/office/powerpoint/2010/main" val="4119110571"/>
+      </p:ext>
+    </p:extLst>
+  </p:cSld>
+  <p:clrMapOvr>
+    <a:masterClrMapping/>
+  </p:clrMapOvr>
+</p:sld>
+</file>
+
 <file path=ppt/slides/slide2.xml><?xml version="1.0" encoding="utf-8"?>
 <p:sld xmlns:a="http://schemas.openxmlformats.org/drawingml/2006/main" xmlns:r="http://schemas.openxmlformats.org/officeDocument/2006/relationships" xmlns:p="http://schemas.openxmlformats.org/presentationml/2006/main">
   <p:cSld>
@@ -30213,8 +29765,8 @@
         </p:nvSpPr>
         <p:spPr>
           <a:xfrm rot="20710547">
-            <a:off x="6412261" y="2943630"/>
-            <a:ext cx="1913570" cy="1038099"/>
+            <a:off x="6380375" y="2943630"/>
+            <a:ext cx="2546962" cy="1038099"/>
           </a:xfrm>
           <a:prstGeom prst="leftArrow">
             <a:avLst/>
@@ -30253,7 +29805,7 @@
                   <a:srgbClr val="FF0000"/>
                 </a:solidFill>
               </a:rPr>
-              <a:t>This is actually an optimization method!</a:t>
+              <a:t>Actually an optimization method</a:t>
             </a:r>
           </a:p>
         </p:txBody>
@@ -30262,1923 +29814,6 @@
     <p:extLst>
       <p:ext uri="{BB962C8B-B14F-4D97-AF65-F5344CB8AC3E}">
         <p14:creationId xmlns:p14="http://schemas.microsoft.com/office/powerpoint/2010/main" val="3676436470"/>
-      </p:ext>
-    </p:extLst>
-  </p:cSld>
-  <p:clrMapOvr>
-    <a:masterClrMapping/>
-  </p:clrMapOvr>
-</p:sld>
-</file>
-
-<file path=ppt/slides/slide20.xml><?xml version="1.0" encoding="utf-8"?>
-<p:sld xmlns:a="http://schemas.openxmlformats.org/drawingml/2006/main" xmlns:r="http://schemas.openxmlformats.org/officeDocument/2006/relationships" xmlns:p="http://schemas.openxmlformats.org/presentationml/2006/main">
-  <p:cSld>
-    <p:spTree>
-      <p:nvGrpSpPr>
-        <p:cNvPr id="1" name=""/>
-        <p:cNvGrpSpPr/>
-        <p:nvPr/>
-      </p:nvGrpSpPr>
-      <p:grpSpPr>
-        <a:xfrm>
-          <a:off x="0" y="0"/>
-          <a:ext cx="0" cy="0"/>
-          <a:chOff x="0" y="0"/>
-          <a:chExt cx="0" cy="0"/>
-        </a:xfrm>
-      </p:grpSpPr>
-      <p:sp>
-        <p:nvSpPr>
-          <p:cNvPr id="2" name="Title 1">
-            <a:extLst>
-              <a:ext uri="{FF2B5EF4-FFF2-40B4-BE49-F238E27FC236}">
-                <a16:creationId xmlns:a16="http://schemas.microsoft.com/office/drawing/2014/main" id="{15C869D5-4E6C-6766-7E06-98B25E955D87}"/>
-              </a:ext>
-            </a:extLst>
-          </p:cNvPr>
-          <p:cNvSpPr>
-            <a:spLocks noGrp="1"/>
-          </p:cNvSpPr>
-          <p:nvPr>
-            <p:ph type="title"/>
-          </p:nvPr>
-        </p:nvSpPr>
-        <p:spPr/>
-        <p:txBody>
-          <a:bodyPr>
-            <a:normAutofit/>
-          </a:bodyPr>
-          <a:lstStyle/>
-          <a:p>
-            <a:r>
-              <a:rPr lang="en-US" sz="4000" dirty="0"/>
-              <a:t>Performance measures</a:t>
-            </a:r>
-          </a:p>
-        </p:txBody>
-      </p:sp>
-      <p:sp>
-        <p:nvSpPr>
-          <p:cNvPr id="4" name="Rectángulo 3">
-            <a:extLst>
-              <a:ext uri="{FF2B5EF4-FFF2-40B4-BE49-F238E27FC236}">
-                <a16:creationId xmlns:a16="http://schemas.microsoft.com/office/drawing/2014/main" id="{27E372AA-1ACE-5D2D-EDED-66DB6F5F4F88}"/>
-              </a:ext>
-            </a:extLst>
-          </p:cNvPr>
-          <p:cNvSpPr/>
-          <p:nvPr/>
-        </p:nvSpPr>
-        <p:spPr>
-          <a:xfrm>
-            <a:off x="0" y="0"/>
-            <a:ext cx="374469" cy="6858000"/>
-          </a:xfrm>
-          <a:prstGeom prst="rect">
-            <a:avLst/>
-          </a:prstGeom>
-        </p:spPr>
-        <p:style>
-          <a:lnRef idx="2">
-            <a:schemeClr val="accent2">
-              <a:shade val="50000"/>
-            </a:schemeClr>
-          </a:lnRef>
-          <a:fillRef idx="1">
-            <a:schemeClr val="accent2"/>
-          </a:fillRef>
-          <a:effectRef idx="0">
-            <a:schemeClr val="accent2"/>
-          </a:effectRef>
-          <a:fontRef idx="minor">
-            <a:schemeClr val="lt1"/>
-          </a:fontRef>
-        </p:style>
-        <p:txBody>
-          <a:bodyPr rtlCol="0" anchor="ctr"/>
-          <a:lstStyle/>
-          <a:p>
-            <a:pPr algn="ctr"/>
-            <a:endParaRPr lang="es-ES"/>
-          </a:p>
-        </p:txBody>
-      </p:sp>
-      <p:sp>
-        <p:nvSpPr>
-          <p:cNvPr id="5" name="Rectangle 143">
-            <a:extLst>
-              <a:ext uri="{FF2B5EF4-FFF2-40B4-BE49-F238E27FC236}">
-                <a16:creationId xmlns:a16="http://schemas.microsoft.com/office/drawing/2014/main" id="{4CAC6C5C-8798-AF6F-C852-967659577BF3}"/>
-              </a:ext>
-            </a:extLst>
-          </p:cNvPr>
-          <p:cNvSpPr>
-            <a:spLocks noChangeArrowheads="1"/>
-          </p:cNvSpPr>
-          <p:nvPr/>
-        </p:nvSpPr>
-        <p:spPr bwMode="auto">
-          <a:xfrm>
-            <a:off x="448342" y="6482412"/>
-            <a:ext cx="5730175" cy="276999"/>
-          </a:xfrm>
-          <a:prstGeom prst="rect">
-            <a:avLst/>
-          </a:prstGeom>
-          <a:noFill/>
-          <a:ln>
-            <a:noFill/>
-          </a:ln>
-          <a:effectLst/>
-          <a:extLst>
-            <a:ext uri="{909E8E84-426E-40DD-AFC4-6F175D3DCCD1}">
-              <a14:hiddenFill xmlns:a14="http://schemas.microsoft.com/office/drawing/2010/main">
-                <a:solidFill>
-                  <a:schemeClr val="accent1"/>
-                </a:solidFill>
-              </a14:hiddenFill>
-            </a:ext>
-            <a:ext uri="{91240B29-F687-4F45-9708-019B960494DF}">
-              <a14:hiddenLine xmlns:a14="http://schemas.microsoft.com/office/drawing/2010/main" w="9525">
-                <a:solidFill>
-                  <a:schemeClr val="tx1"/>
-                </a:solidFill>
-                <a:miter lim="800000"/>
-                <a:headEnd/>
-                <a:tailEnd/>
-              </a14:hiddenLine>
-            </a:ext>
-            <a:ext uri="{AF507438-7753-43E0-B8FC-AC1667EBCBE1}">
-              <a14:hiddenEffects xmlns:a14="http://schemas.microsoft.com/office/drawing/2010/main">
-                <a:effectLst>
-                  <a:outerShdw dist="35921" dir="2700000" algn="ctr" rotWithShape="0">
-                    <a:schemeClr val="bg2"/>
-                  </a:outerShdw>
-                </a:effectLst>
-              </a14:hiddenEffects>
-            </a:ext>
-          </a:extLst>
-        </p:spPr>
-        <p:txBody>
-          <a:bodyPr vert="horz" wrap="square" lIns="91440" tIns="45720" rIns="91440" bIns="45720" numCol="1" anchor="ctr" anchorCtr="0" compatLnSpc="1">
-            <a:prstTxWarp prst="textNoShape">
-              <a:avLst/>
-            </a:prstTxWarp>
-            <a:spAutoFit/>
-          </a:bodyPr>
-          <a:lstStyle/>
-          <a:p>
-            <a:pPr marL="0" marR="0" lvl="0" indent="0" algn="l" defTabSz="914400" rtl="0" eaLnBrk="0" fontAlgn="base" latinLnBrk="0" hangingPunct="0">
-              <a:lnSpc>
-                <a:spcPct val="100000"/>
-              </a:lnSpc>
-              <a:spcBef>
-                <a:spcPct val="0"/>
-              </a:spcBef>
-              <a:spcAft>
-                <a:spcPct val="0"/>
-              </a:spcAft>
-              <a:buClrTx/>
-              <a:buSzTx/>
-              <a:buFontTx/>
-              <a:buNone/>
-              <a:tabLst/>
-            </a:pPr>
-            <a:r>
-              <a:rPr kumimoji="0" lang="en-US" altLang="es-ES" sz="1200" b="0" i="0" u="none" strike="noStrike" cap="none" normalizeH="0" baseline="0" dirty="0">
-                <a:ln>
-                  <a:noFill/>
-                </a:ln>
-                <a:solidFill>
-                  <a:srgbClr val="F4A200"/>
-                </a:solidFill>
-                <a:effectLst/>
-                <a:latin typeface="Arial" panose="020B0604020202020204" pitchFamily="34" charset="0"/>
-                <a:ea typeface="Myriad Pro Light"/>
-                <a:cs typeface="Times New Roman" panose="02020603050405020304" pitchFamily="18" charset="0"/>
-              </a:rPr>
-              <a:t>Master in Quantitative Economic Analysis </a:t>
-            </a:r>
-            <a:r>
-              <a:rPr kumimoji="0" lang="en-US" altLang="es-ES" sz="1200" b="0" i="0" u="none" strike="noStrike" cap="none" normalizeH="0" baseline="0" dirty="0" err="1">
-                <a:ln>
-                  <a:noFill/>
-                </a:ln>
-                <a:solidFill>
-                  <a:srgbClr val="F4A200"/>
-                </a:solidFill>
-                <a:effectLst/>
-                <a:latin typeface="Arial" panose="020B0604020202020204" pitchFamily="34" charset="0"/>
-                <a:ea typeface="Myriad Pro Light"/>
-                <a:cs typeface="Times New Roman" panose="02020603050405020304" pitchFamily="18" charset="0"/>
-              </a:rPr>
-              <a:t>MQuEA</a:t>
-            </a:r>
-            <a:endParaRPr kumimoji="0" lang="es-ES" altLang="es-ES" sz="400" b="0" i="0" u="none" strike="noStrike" cap="none" normalizeH="0" baseline="0" dirty="0">
-              <a:ln>
-                <a:noFill/>
-              </a:ln>
-              <a:solidFill>
-                <a:schemeClr val="tx1"/>
-              </a:solidFill>
-              <a:effectLst/>
-              <a:latin typeface="Arial" panose="020B0604020202020204" pitchFamily="34" charset="0"/>
-            </a:endParaRPr>
-          </a:p>
-        </p:txBody>
-      </p:sp>
-      <p:sp>
-        <p:nvSpPr>
-          <p:cNvPr id="6" name="Rectangle 143">
-            <a:extLst>
-              <a:ext uri="{FF2B5EF4-FFF2-40B4-BE49-F238E27FC236}">
-                <a16:creationId xmlns:a16="http://schemas.microsoft.com/office/drawing/2014/main" id="{09E0FB32-C00A-A390-E094-76FC3EA5C288}"/>
-              </a:ext>
-            </a:extLst>
-          </p:cNvPr>
-          <p:cNvSpPr>
-            <a:spLocks noChangeArrowheads="1"/>
-          </p:cNvSpPr>
-          <p:nvPr/>
-        </p:nvSpPr>
-        <p:spPr bwMode="auto">
-          <a:xfrm>
-            <a:off x="6186394" y="6493050"/>
-            <a:ext cx="5730175" cy="276999"/>
-          </a:xfrm>
-          <a:prstGeom prst="rect">
-            <a:avLst/>
-          </a:prstGeom>
-          <a:noFill/>
-          <a:ln>
-            <a:noFill/>
-          </a:ln>
-          <a:effectLst/>
-          <a:extLst>
-            <a:ext uri="{909E8E84-426E-40DD-AFC4-6F175D3DCCD1}">
-              <a14:hiddenFill xmlns:a14="http://schemas.microsoft.com/office/drawing/2010/main">
-                <a:solidFill>
-                  <a:schemeClr val="accent1"/>
-                </a:solidFill>
-              </a14:hiddenFill>
-            </a:ext>
-            <a:ext uri="{91240B29-F687-4F45-9708-019B960494DF}">
-              <a14:hiddenLine xmlns:a14="http://schemas.microsoft.com/office/drawing/2010/main" w="9525">
-                <a:solidFill>
-                  <a:schemeClr val="tx1"/>
-                </a:solidFill>
-                <a:miter lim="800000"/>
-                <a:headEnd/>
-                <a:tailEnd/>
-              </a14:hiddenLine>
-            </a:ext>
-            <a:ext uri="{AF507438-7753-43E0-B8FC-AC1667EBCBE1}">
-              <a14:hiddenEffects xmlns:a14="http://schemas.microsoft.com/office/drawing/2010/main">
-                <a:effectLst>
-                  <a:outerShdw dist="35921" dir="2700000" algn="ctr" rotWithShape="0">
-                    <a:schemeClr val="bg2"/>
-                  </a:outerShdw>
-                </a:effectLst>
-              </a14:hiddenEffects>
-            </a:ext>
-          </a:extLst>
-        </p:spPr>
-        <p:txBody>
-          <a:bodyPr vert="horz" wrap="square" lIns="91440" tIns="45720" rIns="91440" bIns="45720" numCol="1" anchor="ctr" anchorCtr="0" compatLnSpc="1">
-            <a:prstTxWarp prst="textNoShape">
-              <a:avLst/>
-            </a:prstTxWarp>
-            <a:spAutoFit/>
-          </a:bodyPr>
-          <a:lstStyle/>
-          <a:p>
-            <a:pPr marL="0" marR="0" lvl="0" indent="0" algn="r" defTabSz="914400" rtl="0" eaLnBrk="0" fontAlgn="base" latinLnBrk="0" hangingPunct="0">
-              <a:lnSpc>
-                <a:spcPct val="100000"/>
-              </a:lnSpc>
-              <a:spcBef>
-                <a:spcPct val="0"/>
-              </a:spcBef>
-              <a:spcAft>
-                <a:spcPct val="0"/>
-              </a:spcAft>
-              <a:buClrTx/>
-              <a:buSzTx/>
-              <a:buFontTx/>
-              <a:buNone/>
-              <a:tabLst/>
-            </a:pPr>
-            <a:r>
-              <a:rPr kumimoji="0" lang="en-US" altLang="es-ES" sz="1200" b="0" i="0" u="none" strike="noStrike" cap="none" normalizeH="0" baseline="0" dirty="0">
-                <a:ln>
-                  <a:noFill/>
-                </a:ln>
-                <a:solidFill>
-                  <a:srgbClr val="F4A200"/>
-                </a:solidFill>
-                <a:effectLst/>
-                <a:latin typeface="Arial" panose="020B0604020202020204" pitchFamily="34" charset="0"/>
-                <a:ea typeface="Myriad Pro Light"/>
-                <a:cs typeface="Times New Roman" panose="02020603050405020304" pitchFamily="18" charset="0"/>
-              </a:rPr>
-              <a:t>Universidad </a:t>
-            </a:r>
-            <a:r>
-              <a:rPr kumimoji="0" lang="en-US" altLang="es-ES" sz="1200" b="0" i="0" u="none" strike="noStrike" cap="none" normalizeH="0" baseline="0" dirty="0" err="1">
-                <a:ln>
-                  <a:noFill/>
-                </a:ln>
-                <a:solidFill>
-                  <a:srgbClr val="F4A200"/>
-                </a:solidFill>
-                <a:effectLst/>
-                <a:latin typeface="Arial" panose="020B0604020202020204" pitchFamily="34" charset="0"/>
-                <a:ea typeface="Myriad Pro Light"/>
-                <a:cs typeface="Times New Roman" panose="02020603050405020304" pitchFamily="18" charset="0"/>
-              </a:rPr>
-              <a:t>Aut</a:t>
-            </a:r>
-            <a:r>
-              <a:rPr lang="en-US" altLang="es-ES" sz="1200" dirty="0" err="1">
-                <a:solidFill>
-                  <a:srgbClr val="F4A200"/>
-                </a:solidFill>
-                <a:latin typeface="Arial" panose="020B0604020202020204" pitchFamily="34" charset="0"/>
-                <a:ea typeface="Myriad Pro Light"/>
-                <a:cs typeface="Times New Roman" panose="02020603050405020304" pitchFamily="18" charset="0"/>
-              </a:rPr>
-              <a:t>ó</a:t>
-            </a:r>
-            <a:r>
-              <a:rPr kumimoji="0" lang="en-US" altLang="es-ES" sz="1200" b="0" i="0" u="none" strike="noStrike" cap="none" normalizeH="0" baseline="0" dirty="0" err="1">
-                <a:ln>
-                  <a:noFill/>
-                </a:ln>
-                <a:solidFill>
-                  <a:srgbClr val="F4A200"/>
-                </a:solidFill>
-                <a:effectLst/>
-                <a:latin typeface="Arial" panose="020B0604020202020204" pitchFamily="34" charset="0"/>
-                <a:ea typeface="Myriad Pro Light"/>
-                <a:cs typeface="Times New Roman" panose="02020603050405020304" pitchFamily="18" charset="0"/>
-              </a:rPr>
-              <a:t>noma</a:t>
-            </a:r>
-            <a:r>
-              <a:rPr kumimoji="0" lang="en-US" altLang="es-ES" sz="1200" b="0" i="0" u="none" strike="noStrike" cap="none" normalizeH="0" baseline="0" dirty="0">
-                <a:ln>
-                  <a:noFill/>
-                </a:ln>
-                <a:solidFill>
-                  <a:srgbClr val="F4A200"/>
-                </a:solidFill>
-                <a:effectLst/>
-                <a:latin typeface="Arial" panose="020B0604020202020204" pitchFamily="34" charset="0"/>
-                <a:ea typeface="Myriad Pro Light"/>
-                <a:cs typeface="Times New Roman" panose="02020603050405020304" pitchFamily="18" charset="0"/>
-              </a:rPr>
-              <a:t> de Madrid</a:t>
-            </a:r>
-            <a:endParaRPr kumimoji="0" lang="es-ES" altLang="es-ES" sz="400" b="0" i="0" u="none" strike="noStrike" cap="none" normalizeH="0" baseline="0" dirty="0">
-              <a:ln>
-                <a:noFill/>
-              </a:ln>
-              <a:solidFill>
-                <a:schemeClr val="tx1"/>
-              </a:solidFill>
-              <a:effectLst/>
-              <a:latin typeface="Arial" panose="020B0604020202020204" pitchFamily="34" charset="0"/>
-            </a:endParaRPr>
-          </a:p>
-        </p:txBody>
-      </p:sp>
-      <p:sp>
-        <p:nvSpPr>
-          <p:cNvPr id="3" name="Content Placeholder 2">
-            <a:extLst>
-              <a:ext uri="{FF2B5EF4-FFF2-40B4-BE49-F238E27FC236}">
-                <a16:creationId xmlns:a16="http://schemas.microsoft.com/office/drawing/2014/main" id="{F7EF27C5-01B7-9F60-ECDA-A1F376586FC5}"/>
-              </a:ext>
-            </a:extLst>
-          </p:cNvPr>
-          <p:cNvSpPr>
-            <a:spLocks noGrp="1"/>
-          </p:cNvSpPr>
-          <p:nvPr>
-            <p:ph idx="1"/>
-          </p:nvPr>
-        </p:nvSpPr>
-        <p:spPr/>
-        <p:txBody>
-          <a:bodyPr>
-            <a:normAutofit/>
-          </a:bodyPr>
-          <a:lstStyle/>
-          <a:p>
-            <a:pPr>
-              <a:lnSpc>
-                <a:spcPct val="100000"/>
-              </a:lnSpc>
-              <a:buFont typeface="Wingdings" panose="05000000000000000000" pitchFamily="2" charset="2"/>
-              <a:buChar char="§"/>
-            </a:pPr>
-            <a:r>
-              <a:rPr lang="en-US" sz="2000" dirty="0">
-                <a:latin typeface="+mj-lt"/>
-              </a:rPr>
-              <a:t>Now, classifiers assign labels based on a threshold. For each instance, it computes a score based on a decision function. If that score is greater than a threshold, it assigns the instance to the positive class; otherwise, it assigns it to the negative class</a:t>
-            </a:r>
-          </a:p>
-          <a:p>
-            <a:pPr>
-              <a:lnSpc>
-                <a:spcPct val="100000"/>
-              </a:lnSpc>
-              <a:buFont typeface="Wingdings" panose="05000000000000000000" pitchFamily="2" charset="2"/>
-              <a:buChar char="§"/>
-            </a:pPr>
-            <a:r>
-              <a:rPr lang="en-US" sz="2000" dirty="0">
-                <a:latin typeface="+mj-lt"/>
-              </a:rPr>
-              <a:t>Therefore, if we modify the threshold, the classification will vary, achieving better or worse predictions, and yielding different Precision and Recall</a:t>
-            </a:r>
-          </a:p>
-        </p:txBody>
-      </p:sp>
-      <p:pic>
-        <p:nvPicPr>
-          <p:cNvPr id="8" name="Picture 7" descr="Diagram&#10;&#10;Description automatically generated">
-            <a:extLst>
-              <a:ext uri="{FF2B5EF4-FFF2-40B4-BE49-F238E27FC236}">
-                <a16:creationId xmlns:a16="http://schemas.microsoft.com/office/drawing/2014/main" id="{9881C9A0-2340-D44D-5D9E-46C0DEB06956}"/>
-              </a:ext>
-            </a:extLst>
-          </p:cNvPr>
-          <p:cNvPicPr>
-            <a:picLocks noChangeAspect="1"/>
-          </p:cNvPicPr>
-          <p:nvPr/>
-        </p:nvPicPr>
-        <p:blipFill>
-          <a:blip r:embed="rId2">
-            <a:extLst>
-              <a:ext uri="{28A0092B-C50C-407E-A947-70E740481C1C}">
-                <a14:useLocalDpi xmlns:a14="http://schemas.microsoft.com/office/drawing/2010/main" val="0"/>
-              </a:ext>
-            </a:extLst>
-          </a:blip>
-          <a:stretch>
-            <a:fillRect/>
-          </a:stretch>
-        </p:blipFill>
-        <p:spPr>
-          <a:xfrm>
-            <a:off x="3352794" y="3909195"/>
-            <a:ext cx="5486412" cy="1865379"/>
-          </a:xfrm>
-          <a:prstGeom prst="rect">
-            <a:avLst/>
-          </a:prstGeom>
-        </p:spPr>
-      </p:pic>
-      <p:sp>
-        <p:nvSpPr>
-          <p:cNvPr id="7" name="TextBox 6">
-            <a:extLst>
-              <a:ext uri="{FF2B5EF4-FFF2-40B4-BE49-F238E27FC236}">
-                <a16:creationId xmlns:a16="http://schemas.microsoft.com/office/drawing/2014/main" id="{37720FBC-73EA-B6D0-4103-EA431CC846B4}"/>
-              </a:ext>
-            </a:extLst>
-          </p:cNvPr>
-          <p:cNvSpPr txBox="1"/>
-          <p:nvPr/>
-        </p:nvSpPr>
-        <p:spPr>
-          <a:xfrm>
-            <a:off x="9227382" y="3710710"/>
-            <a:ext cx="2493989" cy="738664"/>
-          </a:xfrm>
-          <a:prstGeom prst="rect">
-            <a:avLst/>
-          </a:prstGeom>
-          <a:noFill/>
-        </p:spPr>
-        <p:txBody>
-          <a:bodyPr wrap="square" rtlCol="0">
-            <a:spAutoFit/>
-          </a:bodyPr>
-          <a:lstStyle/>
-          <a:p>
-            <a:pPr algn="ctr"/>
-            <a:r>
-              <a:rPr lang="es-ES" sz="1400" dirty="0">
-                <a:solidFill>
-                  <a:srgbClr val="FF0000"/>
-                </a:solidFill>
-              </a:rPr>
-              <a:t>*</a:t>
-            </a:r>
-            <a:r>
-              <a:rPr lang="es-ES" sz="1400" dirty="0" err="1">
-                <a:solidFill>
-                  <a:srgbClr val="FF0000"/>
-                </a:solidFill>
-              </a:rPr>
-              <a:t>Images</a:t>
-            </a:r>
-            <a:r>
-              <a:rPr lang="es-ES" sz="1400" dirty="0">
-                <a:solidFill>
-                  <a:srgbClr val="FF0000"/>
-                </a:solidFill>
-              </a:rPr>
-              <a:t> </a:t>
-            </a:r>
-            <a:r>
-              <a:rPr lang="es-ES" sz="1400" dirty="0" err="1">
-                <a:solidFill>
-                  <a:srgbClr val="FF0000"/>
-                </a:solidFill>
-              </a:rPr>
-              <a:t>ordered</a:t>
-            </a:r>
-            <a:r>
-              <a:rPr lang="es-ES" sz="1400" dirty="0">
-                <a:solidFill>
-                  <a:srgbClr val="FF0000"/>
-                </a:solidFill>
-              </a:rPr>
-              <a:t> </a:t>
-            </a:r>
-            <a:r>
-              <a:rPr lang="es-ES" sz="1400" dirty="0" err="1">
-                <a:solidFill>
-                  <a:srgbClr val="FF0000"/>
-                </a:solidFill>
-              </a:rPr>
-              <a:t>according</a:t>
-            </a:r>
-            <a:r>
-              <a:rPr lang="es-ES" sz="1400" dirty="0">
-                <a:solidFill>
-                  <a:srgbClr val="FF0000"/>
-                </a:solidFill>
-              </a:rPr>
-              <a:t> </a:t>
-            </a:r>
-            <a:r>
-              <a:rPr lang="es-ES" sz="1400" dirty="0" err="1">
-                <a:solidFill>
-                  <a:srgbClr val="FF0000"/>
-                </a:solidFill>
-              </a:rPr>
-              <a:t>to</a:t>
-            </a:r>
-            <a:r>
-              <a:rPr lang="es-ES" sz="1400" dirty="0">
-                <a:solidFill>
-                  <a:srgbClr val="FF0000"/>
-                </a:solidFill>
-              </a:rPr>
-              <a:t> </a:t>
-            </a:r>
-            <a:r>
-              <a:rPr lang="es-ES" sz="1400" dirty="0" err="1">
-                <a:solidFill>
-                  <a:srgbClr val="FF0000"/>
-                </a:solidFill>
-              </a:rPr>
-              <a:t>their</a:t>
-            </a:r>
-            <a:r>
-              <a:rPr lang="es-ES" sz="1400" dirty="0">
-                <a:solidFill>
-                  <a:srgbClr val="FF0000"/>
-                </a:solidFill>
-              </a:rPr>
-              <a:t> (</a:t>
-            </a:r>
-            <a:r>
-              <a:rPr lang="es-ES" sz="1400" dirty="0" err="1">
-                <a:solidFill>
-                  <a:srgbClr val="FF0000"/>
-                </a:solidFill>
-              </a:rPr>
-              <a:t>increasing</a:t>
-            </a:r>
-            <a:r>
-              <a:rPr lang="es-ES" sz="1400" dirty="0">
-                <a:solidFill>
-                  <a:srgbClr val="FF0000"/>
-                </a:solidFill>
-              </a:rPr>
-              <a:t>) </a:t>
-            </a:r>
-            <a:r>
-              <a:rPr lang="es-ES" sz="1400" dirty="0" err="1">
-                <a:solidFill>
-                  <a:srgbClr val="FF0000"/>
-                </a:solidFill>
-              </a:rPr>
-              <a:t>probability</a:t>
-            </a:r>
-            <a:r>
-              <a:rPr lang="es-ES" sz="1400" dirty="0">
-                <a:solidFill>
-                  <a:srgbClr val="FF0000"/>
-                </a:solidFill>
-              </a:rPr>
-              <a:t> </a:t>
-            </a:r>
-            <a:r>
-              <a:rPr lang="es-ES" sz="1400" dirty="0" err="1">
-                <a:solidFill>
-                  <a:srgbClr val="FF0000"/>
-                </a:solidFill>
-              </a:rPr>
-              <a:t>of</a:t>
-            </a:r>
-            <a:r>
-              <a:rPr lang="es-ES" sz="1400" dirty="0">
-                <a:solidFill>
-                  <a:srgbClr val="FF0000"/>
-                </a:solidFill>
-              </a:rPr>
-              <a:t> “</a:t>
-            </a:r>
-            <a:r>
-              <a:rPr lang="es-ES" sz="1400" dirty="0" err="1">
-                <a:solidFill>
-                  <a:srgbClr val="FF0000"/>
-                </a:solidFill>
-              </a:rPr>
-              <a:t>being</a:t>
-            </a:r>
-            <a:r>
-              <a:rPr lang="es-ES" sz="1400" dirty="0">
-                <a:solidFill>
-                  <a:srgbClr val="FF0000"/>
-                </a:solidFill>
-              </a:rPr>
-              <a:t> a 5”</a:t>
-            </a:r>
-            <a:endParaRPr lang="en-US" sz="1400" dirty="0">
-              <a:solidFill>
-                <a:srgbClr val="FF0000"/>
-              </a:solidFill>
-            </a:endParaRPr>
-          </a:p>
-        </p:txBody>
-      </p:sp>
-      <p:sp>
-        <p:nvSpPr>
-          <p:cNvPr id="9" name="TextBox 8">
-            <a:extLst>
-              <a:ext uri="{FF2B5EF4-FFF2-40B4-BE49-F238E27FC236}">
-                <a16:creationId xmlns:a16="http://schemas.microsoft.com/office/drawing/2014/main" id="{E1954FAC-9C26-4E01-5260-4D6A0B3FD4A4}"/>
-              </a:ext>
-            </a:extLst>
-          </p:cNvPr>
-          <p:cNvSpPr txBox="1"/>
-          <p:nvPr/>
-        </p:nvSpPr>
-        <p:spPr>
-          <a:xfrm>
-            <a:off x="2866937" y="3873654"/>
-            <a:ext cx="1068217" cy="276999"/>
-          </a:xfrm>
-          <a:prstGeom prst="rect">
-            <a:avLst/>
-          </a:prstGeom>
-          <a:noFill/>
-        </p:spPr>
-        <p:txBody>
-          <a:bodyPr wrap="square" rtlCol="0">
-            <a:spAutoFit/>
-          </a:bodyPr>
-          <a:lstStyle/>
-          <a:p>
-            <a:pPr algn="ctr"/>
-            <a:r>
-              <a:rPr lang="es-ES" sz="1200" dirty="0">
-                <a:solidFill>
-                  <a:srgbClr val="FF0000"/>
-                </a:solidFill>
-              </a:rPr>
-              <a:t>TP</a:t>
-            </a:r>
-            <a:r>
-              <a:rPr lang="en-US" sz="1200" dirty="0">
-                <a:solidFill>
-                  <a:srgbClr val="FF0000"/>
-                </a:solidFill>
-              </a:rPr>
-              <a:t>/(TP+FP)</a:t>
-            </a:r>
-          </a:p>
-        </p:txBody>
-      </p:sp>
-      <p:sp>
-        <p:nvSpPr>
-          <p:cNvPr id="10" name="TextBox 9">
-            <a:extLst>
-              <a:ext uri="{FF2B5EF4-FFF2-40B4-BE49-F238E27FC236}">
-                <a16:creationId xmlns:a16="http://schemas.microsoft.com/office/drawing/2014/main" id="{A29FFB1B-A0A9-B55C-B155-77C01FCDD992}"/>
-              </a:ext>
-            </a:extLst>
-          </p:cNvPr>
-          <p:cNvSpPr txBox="1"/>
-          <p:nvPr/>
-        </p:nvSpPr>
-        <p:spPr>
-          <a:xfrm>
-            <a:off x="2882488" y="4050428"/>
-            <a:ext cx="1068217" cy="276999"/>
-          </a:xfrm>
-          <a:prstGeom prst="rect">
-            <a:avLst/>
-          </a:prstGeom>
-          <a:noFill/>
-        </p:spPr>
-        <p:txBody>
-          <a:bodyPr wrap="square" rtlCol="0">
-            <a:spAutoFit/>
-          </a:bodyPr>
-          <a:lstStyle/>
-          <a:p>
-            <a:pPr algn="ctr"/>
-            <a:r>
-              <a:rPr lang="es-ES" sz="1200" dirty="0">
-                <a:solidFill>
-                  <a:srgbClr val="FF0000"/>
-                </a:solidFill>
-              </a:rPr>
-              <a:t>TP</a:t>
-            </a:r>
-            <a:r>
-              <a:rPr lang="en-US" sz="1200" dirty="0">
-                <a:solidFill>
-                  <a:srgbClr val="FF0000"/>
-                </a:solidFill>
-              </a:rPr>
-              <a:t>/(TP+FN)</a:t>
-            </a:r>
-          </a:p>
-        </p:txBody>
-      </p:sp>
-    </p:spTree>
-    <p:extLst>
-      <p:ext uri="{BB962C8B-B14F-4D97-AF65-F5344CB8AC3E}">
-        <p14:creationId xmlns:p14="http://schemas.microsoft.com/office/powerpoint/2010/main" val="192070580"/>
-      </p:ext>
-    </p:extLst>
-  </p:cSld>
-  <p:clrMapOvr>
-    <a:masterClrMapping/>
-  </p:clrMapOvr>
-</p:sld>
-</file>
-
-<file path=ppt/slides/slide21.xml><?xml version="1.0" encoding="utf-8"?>
-<p:sld xmlns:a="http://schemas.openxmlformats.org/drawingml/2006/main" xmlns:r="http://schemas.openxmlformats.org/officeDocument/2006/relationships" xmlns:p="http://schemas.openxmlformats.org/presentationml/2006/main">
-  <p:cSld>
-    <p:spTree>
-      <p:nvGrpSpPr>
-        <p:cNvPr id="1" name=""/>
-        <p:cNvGrpSpPr/>
-        <p:nvPr/>
-      </p:nvGrpSpPr>
-      <p:grpSpPr>
-        <a:xfrm>
-          <a:off x="0" y="0"/>
-          <a:ext cx="0" cy="0"/>
-          <a:chOff x="0" y="0"/>
-          <a:chExt cx="0" cy="0"/>
-        </a:xfrm>
-      </p:grpSpPr>
-      <p:sp>
-        <p:nvSpPr>
-          <p:cNvPr id="2" name="Title 1">
-            <a:extLst>
-              <a:ext uri="{FF2B5EF4-FFF2-40B4-BE49-F238E27FC236}">
-                <a16:creationId xmlns:a16="http://schemas.microsoft.com/office/drawing/2014/main" id="{15C869D5-4E6C-6766-7E06-98B25E955D87}"/>
-              </a:ext>
-            </a:extLst>
-          </p:cNvPr>
-          <p:cNvSpPr>
-            <a:spLocks noGrp="1"/>
-          </p:cNvSpPr>
-          <p:nvPr>
-            <p:ph type="title"/>
-          </p:nvPr>
-        </p:nvSpPr>
-        <p:spPr/>
-        <p:txBody>
-          <a:bodyPr>
-            <a:normAutofit/>
-          </a:bodyPr>
-          <a:lstStyle/>
-          <a:p>
-            <a:r>
-              <a:rPr lang="en-US" sz="4000" dirty="0"/>
-              <a:t>Performance measures</a:t>
-            </a:r>
-          </a:p>
-        </p:txBody>
-      </p:sp>
-      <p:sp>
-        <p:nvSpPr>
-          <p:cNvPr id="4" name="Rectángulo 3">
-            <a:extLst>
-              <a:ext uri="{FF2B5EF4-FFF2-40B4-BE49-F238E27FC236}">
-                <a16:creationId xmlns:a16="http://schemas.microsoft.com/office/drawing/2014/main" id="{27E372AA-1ACE-5D2D-EDED-66DB6F5F4F88}"/>
-              </a:ext>
-            </a:extLst>
-          </p:cNvPr>
-          <p:cNvSpPr/>
-          <p:nvPr/>
-        </p:nvSpPr>
-        <p:spPr>
-          <a:xfrm>
-            <a:off x="0" y="0"/>
-            <a:ext cx="374469" cy="6858000"/>
-          </a:xfrm>
-          <a:prstGeom prst="rect">
-            <a:avLst/>
-          </a:prstGeom>
-        </p:spPr>
-        <p:style>
-          <a:lnRef idx="2">
-            <a:schemeClr val="accent2">
-              <a:shade val="50000"/>
-            </a:schemeClr>
-          </a:lnRef>
-          <a:fillRef idx="1">
-            <a:schemeClr val="accent2"/>
-          </a:fillRef>
-          <a:effectRef idx="0">
-            <a:schemeClr val="accent2"/>
-          </a:effectRef>
-          <a:fontRef idx="minor">
-            <a:schemeClr val="lt1"/>
-          </a:fontRef>
-        </p:style>
-        <p:txBody>
-          <a:bodyPr rtlCol="0" anchor="ctr"/>
-          <a:lstStyle/>
-          <a:p>
-            <a:pPr algn="ctr"/>
-            <a:endParaRPr lang="es-ES"/>
-          </a:p>
-        </p:txBody>
-      </p:sp>
-      <p:sp>
-        <p:nvSpPr>
-          <p:cNvPr id="5" name="Rectangle 143">
-            <a:extLst>
-              <a:ext uri="{FF2B5EF4-FFF2-40B4-BE49-F238E27FC236}">
-                <a16:creationId xmlns:a16="http://schemas.microsoft.com/office/drawing/2014/main" id="{4CAC6C5C-8798-AF6F-C852-967659577BF3}"/>
-              </a:ext>
-            </a:extLst>
-          </p:cNvPr>
-          <p:cNvSpPr>
-            <a:spLocks noChangeArrowheads="1"/>
-          </p:cNvSpPr>
-          <p:nvPr/>
-        </p:nvSpPr>
-        <p:spPr bwMode="auto">
-          <a:xfrm>
-            <a:off x="448342" y="6482412"/>
-            <a:ext cx="5730175" cy="276999"/>
-          </a:xfrm>
-          <a:prstGeom prst="rect">
-            <a:avLst/>
-          </a:prstGeom>
-          <a:noFill/>
-          <a:ln>
-            <a:noFill/>
-          </a:ln>
-          <a:effectLst/>
-          <a:extLst>
-            <a:ext uri="{909E8E84-426E-40DD-AFC4-6F175D3DCCD1}">
-              <a14:hiddenFill xmlns:a14="http://schemas.microsoft.com/office/drawing/2010/main">
-                <a:solidFill>
-                  <a:schemeClr val="accent1"/>
-                </a:solidFill>
-              </a14:hiddenFill>
-            </a:ext>
-            <a:ext uri="{91240B29-F687-4F45-9708-019B960494DF}">
-              <a14:hiddenLine xmlns:a14="http://schemas.microsoft.com/office/drawing/2010/main" w="9525">
-                <a:solidFill>
-                  <a:schemeClr val="tx1"/>
-                </a:solidFill>
-                <a:miter lim="800000"/>
-                <a:headEnd/>
-                <a:tailEnd/>
-              </a14:hiddenLine>
-            </a:ext>
-            <a:ext uri="{AF507438-7753-43E0-B8FC-AC1667EBCBE1}">
-              <a14:hiddenEffects xmlns:a14="http://schemas.microsoft.com/office/drawing/2010/main">
-                <a:effectLst>
-                  <a:outerShdw dist="35921" dir="2700000" algn="ctr" rotWithShape="0">
-                    <a:schemeClr val="bg2"/>
-                  </a:outerShdw>
-                </a:effectLst>
-              </a14:hiddenEffects>
-            </a:ext>
-          </a:extLst>
-        </p:spPr>
-        <p:txBody>
-          <a:bodyPr vert="horz" wrap="square" lIns="91440" tIns="45720" rIns="91440" bIns="45720" numCol="1" anchor="ctr" anchorCtr="0" compatLnSpc="1">
-            <a:prstTxWarp prst="textNoShape">
-              <a:avLst/>
-            </a:prstTxWarp>
-            <a:spAutoFit/>
-          </a:bodyPr>
-          <a:lstStyle/>
-          <a:p>
-            <a:pPr marL="0" marR="0" lvl="0" indent="0" algn="l" defTabSz="914400" rtl="0" eaLnBrk="0" fontAlgn="base" latinLnBrk="0" hangingPunct="0">
-              <a:lnSpc>
-                <a:spcPct val="100000"/>
-              </a:lnSpc>
-              <a:spcBef>
-                <a:spcPct val="0"/>
-              </a:spcBef>
-              <a:spcAft>
-                <a:spcPct val="0"/>
-              </a:spcAft>
-              <a:buClrTx/>
-              <a:buSzTx/>
-              <a:buFontTx/>
-              <a:buNone/>
-              <a:tabLst/>
-            </a:pPr>
-            <a:r>
-              <a:rPr kumimoji="0" lang="en-US" altLang="es-ES" sz="1200" b="0" i="0" u="none" strike="noStrike" cap="none" normalizeH="0" baseline="0" dirty="0">
-                <a:ln>
-                  <a:noFill/>
-                </a:ln>
-                <a:solidFill>
-                  <a:srgbClr val="F4A200"/>
-                </a:solidFill>
-                <a:effectLst/>
-                <a:latin typeface="Arial" panose="020B0604020202020204" pitchFamily="34" charset="0"/>
-                <a:ea typeface="Myriad Pro Light"/>
-                <a:cs typeface="Times New Roman" panose="02020603050405020304" pitchFamily="18" charset="0"/>
-              </a:rPr>
-              <a:t>Master in Quantitative Economic Analysis </a:t>
-            </a:r>
-            <a:r>
-              <a:rPr kumimoji="0" lang="en-US" altLang="es-ES" sz="1200" b="0" i="0" u="none" strike="noStrike" cap="none" normalizeH="0" baseline="0" dirty="0" err="1">
-                <a:ln>
-                  <a:noFill/>
-                </a:ln>
-                <a:solidFill>
-                  <a:srgbClr val="F4A200"/>
-                </a:solidFill>
-                <a:effectLst/>
-                <a:latin typeface="Arial" panose="020B0604020202020204" pitchFamily="34" charset="0"/>
-                <a:ea typeface="Myriad Pro Light"/>
-                <a:cs typeface="Times New Roman" panose="02020603050405020304" pitchFamily="18" charset="0"/>
-              </a:rPr>
-              <a:t>MQuEA</a:t>
-            </a:r>
-            <a:endParaRPr kumimoji="0" lang="es-ES" altLang="es-ES" sz="400" b="0" i="0" u="none" strike="noStrike" cap="none" normalizeH="0" baseline="0" dirty="0">
-              <a:ln>
-                <a:noFill/>
-              </a:ln>
-              <a:solidFill>
-                <a:schemeClr val="tx1"/>
-              </a:solidFill>
-              <a:effectLst/>
-              <a:latin typeface="Arial" panose="020B0604020202020204" pitchFamily="34" charset="0"/>
-            </a:endParaRPr>
-          </a:p>
-        </p:txBody>
-      </p:sp>
-      <p:sp>
-        <p:nvSpPr>
-          <p:cNvPr id="6" name="Rectangle 143">
-            <a:extLst>
-              <a:ext uri="{FF2B5EF4-FFF2-40B4-BE49-F238E27FC236}">
-                <a16:creationId xmlns:a16="http://schemas.microsoft.com/office/drawing/2014/main" id="{09E0FB32-C00A-A390-E094-76FC3EA5C288}"/>
-              </a:ext>
-            </a:extLst>
-          </p:cNvPr>
-          <p:cNvSpPr>
-            <a:spLocks noChangeArrowheads="1"/>
-          </p:cNvSpPr>
-          <p:nvPr/>
-        </p:nvSpPr>
-        <p:spPr bwMode="auto">
-          <a:xfrm>
-            <a:off x="6186394" y="6493050"/>
-            <a:ext cx="5730175" cy="276999"/>
-          </a:xfrm>
-          <a:prstGeom prst="rect">
-            <a:avLst/>
-          </a:prstGeom>
-          <a:noFill/>
-          <a:ln>
-            <a:noFill/>
-          </a:ln>
-          <a:effectLst/>
-          <a:extLst>
-            <a:ext uri="{909E8E84-426E-40DD-AFC4-6F175D3DCCD1}">
-              <a14:hiddenFill xmlns:a14="http://schemas.microsoft.com/office/drawing/2010/main">
-                <a:solidFill>
-                  <a:schemeClr val="accent1"/>
-                </a:solidFill>
-              </a14:hiddenFill>
-            </a:ext>
-            <a:ext uri="{91240B29-F687-4F45-9708-019B960494DF}">
-              <a14:hiddenLine xmlns:a14="http://schemas.microsoft.com/office/drawing/2010/main" w="9525">
-                <a:solidFill>
-                  <a:schemeClr val="tx1"/>
-                </a:solidFill>
-                <a:miter lim="800000"/>
-                <a:headEnd/>
-                <a:tailEnd/>
-              </a14:hiddenLine>
-            </a:ext>
-            <a:ext uri="{AF507438-7753-43E0-B8FC-AC1667EBCBE1}">
-              <a14:hiddenEffects xmlns:a14="http://schemas.microsoft.com/office/drawing/2010/main">
-                <a:effectLst>
-                  <a:outerShdw dist="35921" dir="2700000" algn="ctr" rotWithShape="0">
-                    <a:schemeClr val="bg2"/>
-                  </a:outerShdw>
-                </a:effectLst>
-              </a14:hiddenEffects>
-            </a:ext>
-          </a:extLst>
-        </p:spPr>
-        <p:txBody>
-          <a:bodyPr vert="horz" wrap="square" lIns="91440" tIns="45720" rIns="91440" bIns="45720" numCol="1" anchor="ctr" anchorCtr="0" compatLnSpc="1">
-            <a:prstTxWarp prst="textNoShape">
-              <a:avLst/>
-            </a:prstTxWarp>
-            <a:spAutoFit/>
-          </a:bodyPr>
-          <a:lstStyle/>
-          <a:p>
-            <a:pPr marL="0" marR="0" lvl="0" indent="0" algn="r" defTabSz="914400" rtl="0" eaLnBrk="0" fontAlgn="base" latinLnBrk="0" hangingPunct="0">
-              <a:lnSpc>
-                <a:spcPct val="100000"/>
-              </a:lnSpc>
-              <a:spcBef>
-                <a:spcPct val="0"/>
-              </a:spcBef>
-              <a:spcAft>
-                <a:spcPct val="0"/>
-              </a:spcAft>
-              <a:buClrTx/>
-              <a:buSzTx/>
-              <a:buFontTx/>
-              <a:buNone/>
-              <a:tabLst/>
-            </a:pPr>
-            <a:r>
-              <a:rPr kumimoji="0" lang="en-US" altLang="es-ES" sz="1200" b="0" i="0" u="none" strike="noStrike" cap="none" normalizeH="0" baseline="0" dirty="0">
-                <a:ln>
-                  <a:noFill/>
-                </a:ln>
-                <a:solidFill>
-                  <a:srgbClr val="F4A200"/>
-                </a:solidFill>
-                <a:effectLst/>
-                <a:latin typeface="Arial" panose="020B0604020202020204" pitchFamily="34" charset="0"/>
-                <a:ea typeface="Myriad Pro Light"/>
-                <a:cs typeface="Times New Roman" panose="02020603050405020304" pitchFamily="18" charset="0"/>
-              </a:rPr>
-              <a:t>Universidad </a:t>
-            </a:r>
-            <a:r>
-              <a:rPr kumimoji="0" lang="en-US" altLang="es-ES" sz="1200" b="0" i="0" u="none" strike="noStrike" cap="none" normalizeH="0" baseline="0" dirty="0" err="1">
-                <a:ln>
-                  <a:noFill/>
-                </a:ln>
-                <a:solidFill>
-                  <a:srgbClr val="F4A200"/>
-                </a:solidFill>
-                <a:effectLst/>
-                <a:latin typeface="Arial" panose="020B0604020202020204" pitchFamily="34" charset="0"/>
-                <a:ea typeface="Myriad Pro Light"/>
-                <a:cs typeface="Times New Roman" panose="02020603050405020304" pitchFamily="18" charset="0"/>
-              </a:rPr>
-              <a:t>Aut</a:t>
-            </a:r>
-            <a:r>
-              <a:rPr lang="en-US" altLang="es-ES" sz="1200" dirty="0" err="1">
-                <a:solidFill>
-                  <a:srgbClr val="F4A200"/>
-                </a:solidFill>
-                <a:latin typeface="Arial" panose="020B0604020202020204" pitchFamily="34" charset="0"/>
-                <a:ea typeface="Myriad Pro Light"/>
-                <a:cs typeface="Times New Roman" panose="02020603050405020304" pitchFamily="18" charset="0"/>
-              </a:rPr>
-              <a:t>ó</a:t>
-            </a:r>
-            <a:r>
-              <a:rPr kumimoji="0" lang="en-US" altLang="es-ES" sz="1200" b="0" i="0" u="none" strike="noStrike" cap="none" normalizeH="0" baseline="0" dirty="0" err="1">
-                <a:ln>
-                  <a:noFill/>
-                </a:ln>
-                <a:solidFill>
-                  <a:srgbClr val="F4A200"/>
-                </a:solidFill>
-                <a:effectLst/>
-                <a:latin typeface="Arial" panose="020B0604020202020204" pitchFamily="34" charset="0"/>
-                <a:ea typeface="Myriad Pro Light"/>
-                <a:cs typeface="Times New Roman" panose="02020603050405020304" pitchFamily="18" charset="0"/>
-              </a:rPr>
-              <a:t>noma</a:t>
-            </a:r>
-            <a:r>
-              <a:rPr kumimoji="0" lang="en-US" altLang="es-ES" sz="1200" b="0" i="0" u="none" strike="noStrike" cap="none" normalizeH="0" baseline="0" dirty="0">
-                <a:ln>
-                  <a:noFill/>
-                </a:ln>
-                <a:solidFill>
-                  <a:srgbClr val="F4A200"/>
-                </a:solidFill>
-                <a:effectLst/>
-                <a:latin typeface="Arial" panose="020B0604020202020204" pitchFamily="34" charset="0"/>
-                <a:ea typeface="Myriad Pro Light"/>
-                <a:cs typeface="Times New Roman" panose="02020603050405020304" pitchFamily="18" charset="0"/>
-              </a:rPr>
-              <a:t> de Madrid</a:t>
-            </a:r>
-            <a:endParaRPr kumimoji="0" lang="es-ES" altLang="es-ES" sz="400" b="0" i="0" u="none" strike="noStrike" cap="none" normalizeH="0" baseline="0" dirty="0">
-              <a:ln>
-                <a:noFill/>
-              </a:ln>
-              <a:solidFill>
-                <a:schemeClr val="tx1"/>
-              </a:solidFill>
-              <a:effectLst/>
-              <a:latin typeface="Arial" panose="020B0604020202020204" pitchFamily="34" charset="0"/>
-            </a:endParaRPr>
-          </a:p>
-        </p:txBody>
-      </p:sp>
-      <p:sp>
-        <p:nvSpPr>
-          <p:cNvPr id="3" name="Content Placeholder 2">
-            <a:extLst>
-              <a:ext uri="{FF2B5EF4-FFF2-40B4-BE49-F238E27FC236}">
-                <a16:creationId xmlns:a16="http://schemas.microsoft.com/office/drawing/2014/main" id="{F7EF27C5-01B7-9F60-ECDA-A1F376586FC5}"/>
-              </a:ext>
-            </a:extLst>
-          </p:cNvPr>
-          <p:cNvSpPr>
-            <a:spLocks noGrp="1"/>
-          </p:cNvSpPr>
-          <p:nvPr>
-            <p:ph idx="1"/>
-          </p:nvPr>
-        </p:nvSpPr>
-        <p:spPr/>
-        <p:txBody>
-          <a:bodyPr>
-            <a:normAutofit/>
-          </a:bodyPr>
-          <a:lstStyle/>
-          <a:p>
-            <a:pPr>
-              <a:lnSpc>
-                <a:spcPct val="100000"/>
-              </a:lnSpc>
-              <a:buFont typeface="Wingdings" panose="05000000000000000000" pitchFamily="2" charset="2"/>
-              <a:buChar char="§"/>
-            </a:pPr>
-            <a:r>
-              <a:rPr lang="en-US" sz="2000" dirty="0">
-                <a:latin typeface="+mj-lt"/>
-              </a:rPr>
-              <a:t>When Precision increases, Recall decreases, and vice versa</a:t>
-            </a:r>
-          </a:p>
-        </p:txBody>
-      </p:sp>
-      <p:pic>
-        <p:nvPicPr>
-          <p:cNvPr id="9" name="Picture 8" descr="Chart, line chart&#10;&#10;Description automatically generated">
-            <a:extLst>
-              <a:ext uri="{FF2B5EF4-FFF2-40B4-BE49-F238E27FC236}">
-                <a16:creationId xmlns:a16="http://schemas.microsoft.com/office/drawing/2014/main" id="{1DE37376-1AE9-D64D-FA42-22B5B0525F41}"/>
-              </a:ext>
-            </a:extLst>
-          </p:cNvPr>
-          <p:cNvPicPr>
-            <a:picLocks noChangeAspect="1"/>
-          </p:cNvPicPr>
-          <p:nvPr/>
-        </p:nvPicPr>
-        <p:blipFill>
-          <a:blip r:embed="rId2">
-            <a:extLst>
-              <a:ext uri="{28A0092B-C50C-407E-A947-70E740481C1C}">
-                <a14:useLocalDpi xmlns:a14="http://schemas.microsoft.com/office/drawing/2010/main" val="0"/>
-              </a:ext>
-            </a:extLst>
-          </a:blip>
-          <a:stretch>
-            <a:fillRect/>
-          </a:stretch>
-        </p:blipFill>
-        <p:spPr>
-          <a:xfrm>
-            <a:off x="1280597" y="3148096"/>
-            <a:ext cx="4754890" cy="2250648"/>
-          </a:xfrm>
-          <a:prstGeom prst="rect">
-            <a:avLst/>
-          </a:prstGeom>
-        </p:spPr>
-      </p:pic>
-      <p:pic>
-        <p:nvPicPr>
-          <p:cNvPr id="11" name="Picture 10" descr="Chart&#10;&#10;Description automatically generated">
-            <a:extLst>
-              <a:ext uri="{FF2B5EF4-FFF2-40B4-BE49-F238E27FC236}">
-                <a16:creationId xmlns:a16="http://schemas.microsoft.com/office/drawing/2014/main" id="{690C69FA-F60D-A00B-B1B8-8F4A2FF5EDC0}"/>
-              </a:ext>
-            </a:extLst>
-          </p:cNvPr>
-          <p:cNvPicPr>
-            <a:picLocks noChangeAspect="1"/>
-          </p:cNvPicPr>
-          <p:nvPr/>
-        </p:nvPicPr>
-        <p:blipFill>
-          <a:blip r:embed="rId3">
-            <a:extLst>
-              <a:ext uri="{28A0092B-C50C-407E-A947-70E740481C1C}">
-                <a14:useLocalDpi xmlns:a14="http://schemas.microsoft.com/office/drawing/2010/main" val="0"/>
-              </a:ext>
-            </a:extLst>
-          </a:blip>
-          <a:stretch>
-            <a:fillRect/>
-          </a:stretch>
-        </p:blipFill>
-        <p:spPr>
-          <a:xfrm>
-            <a:off x="7201172" y="2698820"/>
-            <a:ext cx="3840488" cy="3149200"/>
-          </a:xfrm>
-          <a:prstGeom prst="rect">
-            <a:avLst/>
-          </a:prstGeom>
-        </p:spPr>
-      </p:pic>
-    </p:spTree>
-    <p:extLst>
-      <p:ext uri="{BB962C8B-B14F-4D97-AF65-F5344CB8AC3E}">
-        <p14:creationId xmlns:p14="http://schemas.microsoft.com/office/powerpoint/2010/main" val="3007389573"/>
-      </p:ext>
-    </p:extLst>
-  </p:cSld>
-  <p:clrMapOvr>
-    <a:masterClrMapping/>
-  </p:clrMapOvr>
-</p:sld>
-</file>
-
-<file path=ppt/slides/slide22.xml><?xml version="1.0" encoding="utf-8"?>
-<p:sld xmlns:a="http://schemas.openxmlformats.org/drawingml/2006/main" xmlns:r="http://schemas.openxmlformats.org/officeDocument/2006/relationships" xmlns:p="http://schemas.openxmlformats.org/presentationml/2006/main">
-  <p:cSld>
-    <p:spTree>
-      <p:nvGrpSpPr>
-        <p:cNvPr id="1" name=""/>
-        <p:cNvGrpSpPr/>
-        <p:nvPr/>
-      </p:nvGrpSpPr>
-      <p:grpSpPr>
-        <a:xfrm>
-          <a:off x="0" y="0"/>
-          <a:ext cx="0" cy="0"/>
-          <a:chOff x="0" y="0"/>
-          <a:chExt cx="0" cy="0"/>
-        </a:xfrm>
-      </p:grpSpPr>
-      <p:sp>
-        <p:nvSpPr>
-          <p:cNvPr id="2" name="Title 1">
-            <a:extLst>
-              <a:ext uri="{FF2B5EF4-FFF2-40B4-BE49-F238E27FC236}">
-                <a16:creationId xmlns:a16="http://schemas.microsoft.com/office/drawing/2014/main" id="{15C869D5-4E6C-6766-7E06-98B25E955D87}"/>
-              </a:ext>
-            </a:extLst>
-          </p:cNvPr>
-          <p:cNvSpPr>
-            <a:spLocks noGrp="1"/>
-          </p:cNvSpPr>
-          <p:nvPr>
-            <p:ph type="title"/>
-          </p:nvPr>
-        </p:nvSpPr>
-        <p:spPr/>
-        <p:txBody>
-          <a:bodyPr>
-            <a:normAutofit/>
-          </a:bodyPr>
-          <a:lstStyle/>
-          <a:p>
-            <a:r>
-              <a:rPr lang="en-US" sz="4000" dirty="0"/>
-              <a:t>Performance measures</a:t>
-            </a:r>
-          </a:p>
-        </p:txBody>
-      </p:sp>
-      <p:sp>
-        <p:nvSpPr>
-          <p:cNvPr id="4" name="Rectángulo 3">
-            <a:extLst>
-              <a:ext uri="{FF2B5EF4-FFF2-40B4-BE49-F238E27FC236}">
-                <a16:creationId xmlns:a16="http://schemas.microsoft.com/office/drawing/2014/main" id="{27E372AA-1ACE-5D2D-EDED-66DB6F5F4F88}"/>
-              </a:ext>
-            </a:extLst>
-          </p:cNvPr>
-          <p:cNvSpPr/>
-          <p:nvPr/>
-        </p:nvSpPr>
-        <p:spPr>
-          <a:xfrm>
-            <a:off x="0" y="0"/>
-            <a:ext cx="374469" cy="6858000"/>
-          </a:xfrm>
-          <a:prstGeom prst="rect">
-            <a:avLst/>
-          </a:prstGeom>
-        </p:spPr>
-        <p:style>
-          <a:lnRef idx="2">
-            <a:schemeClr val="accent2">
-              <a:shade val="50000"/>
-            </a:schemeClr>
-          </a:lnRef>
-          <a:fillRef idx="1">
-            <a:schemeClr val="accent2"/>
-          </a:fillRef>
-          <a:effectRef idx="0">
-            <a:schemeClr val="accent2"/>
-          </a:effectRef>
-          <a:fontRef idx="minor">
-            <a:schemeClr val="lt1"/>
-          </a:fontRef>
-        </p:style>
-        <p:txBody>
-          <a:bodyPr rtlCol="0" anchor="ctr"/>
-          <a:lstStyle/>
-          <a:p>
-            <a:pPr algn="ctr"/>
-            <a:endParaRPr lang="es-ES"/>
-          </a:p>
-        </p:txBody>
-      </p:sp>
-      <p:sp>
-        <p:nvSpPr>
-          <p:cNvPr id="5" name="Rectangle 143">
-            <a:extLst>
-              <a:ext uri="{FF2B5EF4-FFF2-40B4-BE49-F238E27FC236}">
-                <a16:creationId xmlns:a16="http://schemas.microsoft.com/office/drawing/2014/main" id="{4CAC6C5C-8798-AF6F-C852-967659577BF3}"/>
-              </a:ext>
-            </a:extLst>
-          </p:cNvPr>
-          <p:cNvSpPr>
-            <a:spLocks noChangeArrowheads="1"/>
-          </p:cNvSpPr>
-          <p:nvPr/>
-        </p:nvSpPr>
-        <p:spPr bwMode="auto">
-          <a:xfrm>
-            <a:off x="448342" y="6482412"/>
-            <a:ext cx="5730175" cy="276999"/>
-          </a:xfrm>
-          <a:prstGeom prst="rect">
-            <a:avLst/>
-          </a:prstGeom>
-          <a:noFill/>
-          <a:ln>
-            <a:noFill/>
-          </a:ln>
-          <a:effectLst/>
-          <a:extLst>
-            <a:ext uri="{909E8E84-426E-40DD-AFC4-6F175D3DCCD1}">
-              <a14:hiddenFill xmlns:a14="http://schemas.microsoft.com/office/drawing/2010/main">
-                <a:solidFill>
-                  <a:schemeClr val="accent1"/>
-                </a:solidFill>
-              </a14:hiddenFill>
-            </a:ext>
-            <a:ext uri="{91240B29-F687-4F45-9708-019B960494DF}">
-              <a14:hiddenLine xmlns:a14="http://schemas.microsoft.com/office/drawing/2010/main" w="9525">
-                <a:solidFill>
-                  <a:schemeClr val="tx1"/>
-                </a:solidFill>
-                <a:miter lim="800000"/>
-                <a:headEnd/>
-                <a:tailEnd/>
-              </a14:hiddenLine>
-            </a:ext>
-            <a:ext uri="{AF507438-7753-43E0-B8FC-AC1667EBCBE1}">
-              <a14:hiddenEffects xmlns:a14="http://schemas.microsoft.com/office/drawing/2010/main">
-                <a:effectLst>
-                  <a:outerShdw dist="35921" dir="2700000" algn="ctr" rotWithShape="0">
-                    <a:schemeClr val="bg2"/>
-                  </a:outerShdw>
-                </a:effectLst>
-              </a14:hiddenEffects>
-            </a:ext>
-          </a:extLst>
-        </p:spPr>
-        <p:txBody>
-          <a:bodyPr vert="horz" wrap="square" lIns="91440" tIns="45720" rIns="91440" bIns="45720" numCol="1" anchor="ctr" anchorCtr="0" compatLnSpc="1">
-            <a:prstTxWarp prst="textNoShape">
-              <a:avLst/>
-            </a:prstTxWarp>
-            <a:spAutoFit/>
-          </a:bodyPr>
-          <a:lstStyle/>
-          <a:p>
-            <a:pPr marL="0" marR="0" lvl="0" indent="0" algn="l" defTabSz="914400" rtl="0" eaLnBrk="0" fontAlgn="base" latinLnBrk="0" hangingPunct="0">
-              <a:lnSpc>
-                <a:spcPct val="100000"/>
-              </a:lnSpc>
-              <a:spcBef>
-                <a:spcPct val="0"/>
-              </a:spcBef>
-              <a:spcAft>
-                <a:spcPct val="0"/>
-              </a:spcAft>
-              <a:buClrTx/>
-              <a:buSzTx/>
-              <a:buFontTx/>
-              <a:buNone/>
-              <a:tabLst/>
-            </a:pPr>
-            <a:r>
-              <a:rPr kumimoji="0" lang="en-US" altLang="es-ES" sz="1200" b="0" i="0" u="none" strike="noStrike" cap="none" normalizeH="0" baseline="0" dirty="0">
-                <a:ln>
-                  <a:noFill/>
-                </a:ln>
-                <a:solidFill>
-                  <a:srgbClr val="F4A200"/>
-                </a:solidFill>
-                <a:effectLst/>
-                <a:latin typeface="Arial" panose="020B0604020202020204" pitchFamily="34" charset="0"/>
-                <a:ea typeface="Myriad Pro Light"/>
-                <a:cs typeface="Times New Roman" panose="02020603050405020304" pitchFamily="18" charset="0"/>
-              </a:rPr>
-              <a:t>Master in Quantitative Economic Analysis </a:t>
-            </a:r>
-            <a:r>
-              <a:rPr kumimoji="0" lang="en-US" altLang="es-ES" sz="1200" b="0" i="0" u="none" strike="noStrike" cap="none" normalizeH="0" baseline="0" dirty="0" err="1">
-                <a:ln>
-                  <a:noFill/>
-                </a:ln>
-                <a:solidFill>
-                  <a:srgbClr val="F4A200"/>
-                </a:solidFill>
-                <a:effectLst/>
-                <a:latin typeface="Arial" panose="020B0604020202020204" pitchFamily="34" charset="0"/>
-                <a:ea typeface="Myriad Pro Light"/>
-                <a:cs typeface="Times New Roman" panose="02020603050405020304" pitchFamily="18" charset="0"/>
-              </a:rPr>
-              <a:t>MQuEA</a:t>
-            </a:r>
-            <a:endParaRPr kumimoji="0" lang="es-ES" altLang="es-ES" sz="400" b="0" i="0" u="none" strike="noStrike" cap="none" normalizeH="0" baseline="0" dirty="0">
-              <a:ln>
-                <a:noFill/>
-              </a:ln>
-              <a:solidFill>
-                <a:schemeClr val="tx1"/>
-              </a:solidFill>
-              <a:effectLst/>
-              <a:latin typeface="Arial" panose="020B0604020202020204" pitchFamily="34" charset="0"/>
-            </a:endParaRPr>
-          </a:p>
-        </p:txBody>
-      </p:sp>
-      <p:sp>
-        <p:nvSpPr>
-          <p:cNvPr id="6" name="Rectangle 143">
-            <a:extLst>
-              <a:ext uri="{FF2B5EF4-FFF2-40B4-BE49-F238E27FC236}">
-                <a16:creationId xmlns:a16="http://schemas.microsoft.com/office/drawing/2014/main" id="{09E0FB32-C00A-A390-E094-76FC3EA5C288}"/>
-              </a:ext>
-            </a:extLst>
-          </p:cNvPr>
-          <p:cNvSpPr>
-            <a:spLocks noChangeArrowheads="1"/>
-          </p:cNvSpPr>
-          <p:nvPr/>
-        </p:nvSpPr>
-        <p:spPr bwMode="auto">
-          <a:xfrm>
-            <a:off x="6186394" y="6493050"/>
-            <a:ext cx="5730175" cy="276999"/>
-          </a:xfrm>
-          <a:prstGeom prst="rect">
-            <a:avLst/>
-          </a:prstGeom>
-          <a:noFill/>
-          <a:ln>
-            <a:noFill/>
-          </a:ln>
-          <a:effectLst/>
-          <a:extLst>
-            <a:ext uri="{909E8E84-426E-40DD-AFC4-6F175D3DCCD1}">
-              <a14:hiddenFill xmlns:a14="http://schemas.microsoft.com/office/drawing/2010/main">
-                <a:solidFill>
-                  <a:schemeClr val="accent1"/>
-                </a:solidFill>
-              </a14:hiddenFill>
-            </a:ext>
-            <a:ext uri="{91240B29-F687-4F45-9708-019B960494DF}">
-              <a14:hiddenLine xmlns:a14="http://schemas.microsoft.com/office/drawing/2010/main" w="9525">
-                <a:solidFill>
-                  <a:schemeClr val="tx1"/>
-                </a:solidFill>
-                <a:miter lim="800000"/>
-                <a:headEnd/>
-                <a:tailEnd/>
-              </a14:hiddenLine>
-            </a:ext>
-            <a:ext uri="{AF507438-7753-43E0-B8FC-AC1667EBCBE1}">
-              <a14:hiddenEffects xmlns:a14="http://schemas.microsoft.com/office/drawing/2010/main">
-                <a:effectLst>
-                  <a:outerShdw dist="35921" dir="2700000" algn="ctr" rotWithShape="0">
-                    <a:schemeClr val="bg2"/>
-                  </a:outerShdw>
-                </a:effectLst>
-              </a14:hiddenEffects>
-            </a:ext>
-          </a:extLst>
-        </p:spPr>
-        <p:txBody>
-          <a:bodyPr vert="horz" wrap="square" lIns="91440" tIns="45720" rIns="91440" bIns="45720" numCol="1" anchor="ctr" anchorCtr="0" compatLnSpc="1">
-            <a:prstTxWarp prst="textNoShape">
-              <a:avLst/>
-            </a:prstTxWarp>
-            <a:spAutoFit/>
-          </a:bodyPr>
-          <a:lstStyle/>
-          <a:p>
-            <a:pPr marL="0" marR="0" lvl="0" indent="0" algn="r" defTabSz="914400" rtl="0" eaLnBrk="0" fontAlgn="base" latinLnBrk="0" hangingPunct="0">
-              <a:lnSpc>
-                <a:spcPct val="100000"/>
-              </a:lnSpc>
-              <a:spcBef>
-                <a:spcPct val="0"/>
-              </a:spcBef>
-              <a:spcAft>
-                <a:spcPct val="0"/>
-              </a:spcAft>
-              <a:buClrTx/>
-              <a:buSzTx/>
-              <a:buFontTx/>
-              <a:buNone/>
-              <a:tabLst/>
-            </a:pPr>
-            <a:r>
-              <a:rPr kumimoji="0" lang="en-US" altLang="es-ES" sz="1200" b="0" i="0" u="none" strike="noStrike" cap="none" normalizeH="0" baseline="0" dirty="0">
-                <a:ln>
-                  <a:noFill/>
-                </a:ln>
-                <a:solidFill>
-                  <a:srgbClr val="F4A200"/>
-                </a:solidFill>
-                <a:effectLst/>
-                <a:latin typeface="Arial" panose="020B0604020202020204" pitchFamily="34" charset="0"/>
-                <a:ea typeface="Myriad Pro Light"/>
-                <a:cs typeface="Times New Roman" panose="02020603050405020304" pitchFamily="18" charset="0"/>
-              </a:rPr>
-              <a:t>Universidad </a:t>
-            </a:r>
-            <a:r>
-              <a:rPr kumimoji="0" lang="en-US" altLang="es-ES" sz="1200" b="0" i="0" u="none" strike="noStrike" cap="none" normalizeH="0" baseline="0" dirty="0" err="1">
-                <a:ln>
-                  <a:noFill/>
-                </a:ln>
-                <a:solidFill>
-                  <a:srgbClr val="F4A200"/>
-                </a:solidFill>
-                <a:effectLst/>
-                <a:latin typeface="Arial" panose="020B0604020202020204" pitchFamily="34" charset="0"/>
-                <a:ea typeface="Myriad Pro Light"/>
-                <a:cs typeface="Times New Roman" panose="02020603050405020304" pitchFamily="18" charset="0"/>
-              </a:rPr>
-              <a:t>Aut</a:t>
-            </a:r>
-            <a:r>
-              <a:rPr lang="en-US" altLang="es-ES" sz="1200" dirty="0" err="1">
-                <a:solidFill>
-                  <a:srgbClr val="F4A200"/>
-                </a:solidFill>
-                <a:latin typeface="Arial" panose="020B0604020202020204" pitchFamily="34" charset="0"/>
-                <a:ea typeface="Myriad Pro Light"/>
-                <a:cs typeface="Times New Roman" panose="02020603050405020304" pitchFamily="18" charset="0"/>
-              </a:rPr>
-              <a:t>ó</a:t>
-            </a:r>
-            <a:r>
-              <a:rPr kumimoji="0" lang="en-US" altLang="es-ES" sz="1200" b="0" i="0" u="none" strike="noStrike" cap="none" normalizeH="0" baseline="0" dirty="0" err="1">
-                <a:ln>
-                  <a:noFill/>
-                </a:ln>
-                <a:solidFill>
-                  <a:srgbClr val="F4A200"/>
-                </a:solidFill>
-                <a:effectLst/>
-                <a:latin typeface="Arial" panose="020B0604020202020204" pitchFamily="34" charset="0"/>
-                <a:ea typeface="Myriad Pro Light"/>
-                <a:cs typeface="Times New Roman" panose="02020603050405020304" pitchFamily="18" charset="0"/>
-              </a:rPr>
-              <a:t>noma</a:t>
-            </a:r>
-            <a:r>
-              <a:rPr kumimoji="0" lang="en-US" altLang="es-ES" sz="1200" b="0" i="0" u="none" strike="noStrike" cap="none" normalizeH="0" baseline="0" dirty="0">
-                <a:ln>
-                  <a:noFill/>
-                </a:ln>
-                <a:solidFill>
-                  <a:srgbClr val="F4A200"/>
-                </a:solidFill>
-                <a:effectLst/>
-                <a:latin typeface="Arial" panose="020B0604020202020204" pitchFamily="34" charset="0"/>
-                <a:ea typeface="Myriad Pro Light"/>
-                <a:cs typeface="Times New Roman" panose="02020603050405020304" pitchFamily="18" charset="0"/>
-              </a:rPr>
-              <a:t> de Madrid</a:t>
-            </a:r>
-            <a:endParaRPr kumimoji="0" lang="es-ES" altLang="es-ES" sz="400" b="0" i="0" u="none" strike="noStrike" cap="none" normalizeH="0" baseline="0" dirty="0">
-              <a:ln>
-                <a:noFill/>
-              </a:ln>
-              <a:solidFill>
-                <a:schemeClr val="tx1"/>
-              </a:solidFill>
-              <a:effectLst/>
-              <a:latin typeface="Arial" panose="020B0604020202020204" pitchFamily="34" charset="0"/>
-            </a:endParaRPr>
-          </a:p>
-        </p:txBody>
-      </p:sp>
-      <p:sp>
-        <p:nvSpPr>
-          <p:cNvPr id="3" name="Content Placeholder 2">
-            <a:extLst>
-              <a:ext uri="{FF2B5EF4-FFF2-40B4-BE49-F238E27FC236}">
-                <a16:creationId xmlns:a16="http://schemas.microsoft.com/office/drawing/2014/main" id="{F7EF27C5-01B7-9F60-ECDA-A1F376586FC5}"/>
-              </a:ext>
-            </a:extLst>
-          </p:cNvPr>
-          <p:cNvSpPr>
-            <a:spLocks noGrp="1"/>
-          </p:cNvSpPr>
-          <p:nvPr>
-            <p:ph idx="1"/>
-          </p:nvPr>
-        </p:nvSpPr>
-        <p:spPr/>
-        <p:txBody>
-          <a:bodyPr>
-            <a:normAutofit/>
-          </a:bodyPr>
-          <a:lstStyle/>
-          <a:p>
-            <a:pPr>
-              <a:lnSpc>
-                <a:spcPct val="100000"/>
-              </a:lnSpc>
-              <a:buFont typeface="Wingdings" panose="05000000000000000000" pitchFamily="2" charset="2"/>
-              <a:buChar char="§"/>
-            </a:pPr>
-            <a:r>
-              <a:rPr lang="en-US" sz="2000" dirty="0">
-                <a:latin typeface="+mj-lt"/>
-              </a:rPr>
-              <a:t>Instead of plotting Precision and Recall, it is common to plot the </a:t>
-            </a:r>
-            <a:r>
-              <a:rPr lang="en-US" sz="2000" i="1" dirty="0">
-                <a:latin typeface="+mj-lt"/>
-              </a:rPr>
-              <a:t>True Positive Rate </a:t>
-            </a:r>
-            <a:r>
-              <a:rPr lang="en-US" sz="2000" dirty="0">
-                <a:latin typeface="+mj-lt"/>
-              </a:rPr>
-              <a:t>(TPR)</a:t>
-            </a:r>
-            <a:r>
-              <a:rPr lang="en-US" sz="2000" i="1" dirty="0">
-                <a:latin typeface="+mj-lt"/>
-              </a:rPr>
-              <a:t> </a:t>
-            </a:r>
-            <a:r>
-              <a:rPr lang="en-US" sz="2000" dirty="0">
-                <a:latin typeface="+mj-lt"/>
-              </a:rPr>
-              <a:t>against the </a:t>
-            </a:r>
-            <a:r>
-              <a:rPr lang="en-US" sz="2000" i="1" dirty="0">
-                <a:latin typeface="+mj-lt"/>
-              </a:rPr>
-              <a:t>False Positive Rate </a:t>
-            </a:r>
-            <a:r>
-              <a:rPr lang="en-US" sz="2000" dirty="0">
-                <a:latin typeface="+mj-lt"/>
-              </a:rPr>
-              <a:t>(FPR), or, which is the same, </a:t>
-            </a:r>
-            <a:r>
-              <a:rPr lang="en-US" sz="2000" i="1" dirty="0">
-                <a:latin typeface="+mj-lt"/>
-              </a:rPr>
-              <a:t>Sensitivity</a:t>
-            </a:r>
-            <a:r>
-              <a:rPr lang="en-US" sz="2000" dirty="0">
-                <a:latin typeface="+mj-lt"/>
-              </a:rPr>
-              <a:t> (</a:t>
-            </a:r>
-            <a:r>
-              <a:rPr lang="en-US" sz="2000" i="1" dirty="0">
-                <a:latin typeface="+mj-lt"/>
-              </a:rPr>
-              <a:t>true positive rate</a:t>
-            </a:r>
-            <a:r>
-              <a:rPr lang="en-US" sz="2000" dirty="0">
-                <a:latin typeface="+mj-lt"/>
-              </a:rPr>
-              <a:t>) versus </a:t>
-            </a:r>
-            <a:r>
-              <a:rPr lang="en-US" sz="2000" i="1" dirty="0">
-                <a:latin typeface="+mj-lt"/>
-              </a:rPr>
-              <a:t>1 – Specificity </a:t>
-            </a:r>
-            <a:r>
-              <a:rPr lang="en-US" sz="2000" dirty="0">
-                <a:latin typeface="+mj-lt"/>
-              </a:rPr>
-              <a:t>(</a:t>
-            </a:r>
-            <a:r>
-              <a:rPr lang="en-US" sz="2000" i="1" dirty="0">
-                <a:latin typeface="+mj-lt"/>
-              </a:rPr>
-              <a:t>true negative rate</a:t>
-            </a:r>
-            <a:r>
-              <a:rPr lang="en-US" sz="2000" dirty="0">
-                <a:latin typeface="+mj-lt"/>
-              </a:rPr>
-              <a:t>)</a:t>
-            </a:r>
-          </a:p>
-          <a:p>
-            <a:pPr>
-              <a:lnSpc>
-                <a:spcPct val="100000"/>
-              </a:lnSpc>
-              <a:buFont typeface="Wingdings" panose="05000000000000000000" pitchFamily="2" charset="2"/>
-              <a:buChar char="§"/>
-            </a:pPr>
-            <a:r>
-              <a:rPr lang="en-US" sz="2000" dirty="0">
-                <a:latin typeface="+mj-lt"/>
-              </a:rPr>
-              <a:t>This plot is called the </a:t>
-            </a:r>
-            <a:r>
-              <a:rPr lang="en-US" sz="2000" b="1" i="1" dirty="0">
-                <a:latin typeface="+mj-lt"/>
-              </a:rPr>
-              <a:t>Receiver Operating Characteristic</a:t>
-            </a:r>
-            <a:r>
-              <a:rPr lang="en-US" sz="2000" b="1" dirty="0">
-                <a:latin typeface="+mj-lt"/>
-              </a:rPr>
-              <a:t> (ROC) curve</a:t>
-            </a:r>
-            <a:endParaRPr lang="en-US" sz="2000" b="1" i="1" dirty="0">
-              <a:latin typeface="+mj-lt"/>
-            </a:endParaRPr>
-          </a:p>
-        </p:txBody>
-      </p:sp>
-      <p:pic>
-        <p:nvPicPr>
-          <p:cNvPr id="8" name="Picture 7" descr="Chart&#10;&#10;Description automatically generated">
-            <a:extLst>
-              <a:ext uri="{FF2B5EF4-FFF2-40B4-BE49-F238E27FC236}">
-                <a16:creationId xmlns:a16="http://schemas.microsoft.com/office/drawing/2014/main" id="{76AEBF3B-C772-6843-4D0F-2E3870D5E757}"/>
-              </a:ext>
-            </a:extLst>
-          </p:cNvPr>
-          <p:cNvPicPr>
-            <a:picLocks noChangeAspect="1"/>
-          </p:cNvPicPr>
-          <p:nvPr/>
-        </p:nvPicPr>
-        <p:blipFill>
-          <a:blip r:embed="rId2">
-            <a:extLst>
-              <a:ext uri="{28A0092B-C50C-407E-A947-70E740481C1C}">
-                <a14:useLocalDpi xmlns:a14="http://schemas.microsoft.com/office/drawing/2010/main" val="0"/>
-              </a:ext>
-            </a:extLst>
-          </a:blip>
-          <a:stretch>
-            <a:fillRect/>
-          </a:stretch>
-        </p:blipFill>
-        <p:spPr>
-          <a:xfrm>
-            <a:off x="1471468" y="3202345"/>
-            <a:ext cx="3840488" cy="3155601"/>
-          </a:xfrm>
-          <a:prstGeom prst="rect">
-            <a:avLst/>
-          </a:prstGeom>
-        </p:spPr>
-      </p:pic>
-      <p:sp>
-        <p:nvSpPr>
-          <p:cNvPr id="10" name="TextBox 9">
-            <a:extLst>
-              <a:ext uri="{FF2B5EF4-FFF2-40B4-BE49-F238E27FC236}">
-                <a16:creationId xmlns:a16="http://schemas.microsoft.com/office/drawing/2014/main" id="{FD153B7C-AA7A-8E9E-1514-6E91D58A1C22}"/>
-              </a:ext>
-            </a:extLst>
-          </p:cNvPr>
-          <p:cNvSpPr txBox="1"/>
-          <p:nvPr/>
-        </p:nvSpPr>
-        <p:spPr>
-          <a:xfrm>
-            <a:off x="6186394" y="3295787"/>
-            <a:ext cx="5003494" cy="1323439"/>
-          </a:xfrm>
-          <a:prstGeom prst="rect">
-            <a:avLst/>
-          </a:prstGeom>
-          <a:noFill/>
-        </p:spPr>
-        <p:txBody>
-          <a:bodyPr wrap="square" rtlCol="0">
-            <a:spAutoFit/>
-          </a:bodyPr>
-          <a:lstStyle/>
-          <a:p>
-            <a:r>
-              <a:rPr lang="en-US" sz="2000" dirty="0">
-                <a:latin typeface="+mj-lt"/>
-              </a:rPr>
-              <a:t>To compare two classifiers, we compute the </a:t>
-            </a:r>
-            <a:r>
-              <a:rPr lang="en-US" sz="2000" i="1" dirty="0">
-                <a:latin typeface="+mj-lt"/>
-              </a:rPr>
-              <a:t>area under the curve </a:t>
-            </a:r>
-            <a:r>
-              <a:rPr lang="en-US" sz="2000" dirty="0">
-                <a:latin typeface="+mj-lt"/>
-              </a:rPr>
-              <a:t>(AUC)</a:t>
-            </a:r>
-          </a:p>
-          <a:p>
-            <a:r>
-              <a:rPr lang="en-US" sz="2000" dirty="0">
-                <a:latin typeface="+mj-lt"/>
-              </a:rPr>
-              <a:t>A perfect classifier would have an area of 1; so the higher, the better</a:t>
-            </a:r>
-          </a:p>
-        </p:txBody>
-      </p:sp>
-    </p:spTree>
-    <p:extLst>
-      <p:ext uri="{BB962C8B-B14F-4D97-AF65-F5344CB8AC3E}">
-        <p14:creationId xmlns:p14="http://schemas.microsoft.com/office/powerpoint/2010/main" val="4119110571"/>
       </p:ext>
     </p:extLst>
   </p:cSld>
@@ -32362,7 +29997,7 @@
               <a:rPr lang="en-US" sz="2000" i="1" dirty="0">
                 <a:latin typeface="+mj-lt"/>
               </a:rPr>
-              <a:t>A bank needs to determine if a transaction is fraudulent or not on the basis of historical transaction history, IP address, and other information</a:t>
+              <a:t>A bank needs to determine if a transaction is fraudulent or not based on transaction history, IP address, and other information</a:t>
             </a:r>
           </a:p>
           <a:p>
@@ -32826,7 +30461,19 @@
               <a:rPr lang="en-US" sz="2400" dirty="0">
                 <a:latin typeface="+mj-lt"/>
               </a:rPr>
-              <a:t>The problem becomes assigning each observation to a category, this is classifying them into the correct label</a:t>
+              <a:t>The problem becomes assigning each observation to a category, this is, </a:t>
+            </a:r>
+            <a:r>
+              <a:rPr lang="en-US" sz="2400" b="1" dirty="0">
+                <a:latin typeface="+mj-lt"/>
+              </a:rPr>
+              <a:t>classifying</a:t>
+            </a:r>
+            <a:r>
+              <a:rPr lang="en-US" sz="2400" dirty="0">
+                <a:latin typeface="+mj-lt"/>
+              </a:rPr>
+              <a:t> them into the correct label</a:t>
             </a:r>
           </a:p>
           <a:p>
@@ -32853,7 +30500,7 @@
               <a:rPr lang="en-US" sz="2400" dirty="0">
                 <a:latin typeface="+mj-lt"/>
               </a:rPr>
-              <a:t>(of belonging to each category) as the basis of making the classification.</a:t>
+              <a:t>(of falling into a category) as the basis of making the classification.</a:t>
             </a:r>
           </a:p>
           <a:p>
@@ -34580,7 +32227,7 @@
               <a:rPr lang="en-US" sz="2000" dirty="0">
                 <a:latin typeface="+mj-lt"/>
               </a:rPr>
-              <a:t>s are plugged in the regression, they reproduce the sample labels as much as possible.</a:t>
+              <a:t>s are plugged into the regression, they reproduce the sample labels as closely as possible.</a:t>
             </a:r>
           </a:p>
           <a:p>
@@ -36760,7 +34407,13 @@
               <a:rPr lang="en-US" sz="2000" dirty="0">
                 <a:latin typeface="+mj-lt"/>
               </a:rPr>
-              <a:t>It behaves well in classification tasks in small to medium size datasets</a:t>
+              <a:t>It behaves well in classification tasks in </a:t>
+            </a:r>
+            <a:r>
+              <a:rPr lang="en-US" sz="2000" b="1" dirty="0">
+                <a:latin typeface="+mj-lt"/>
+              </a:rPr>
+              <a:t>small to medium datasets</a:t>
             </a:r>
           </a:p>
           <a:p>
@@ -37937,19 +35590,19 @@
               <a:rPr lang="en-US" sz="2000" dirty="0">
                 <a:latin typeface="+mj-lt"/>
               </a:rPr>
-              <a:t>What if sets are not completely separable? </a:t>
+              <a:t>What if sets are not perfectly separable? </a:t>
             </a:r>
             <a:r>
               <a:rPr lang="en-US" sz="2000" i="1" dirty="0">
                 <a:latin typeface="+mj-lt"/>
               </a:rPr>
-              <a:t>Soft margins</a:t>
+              <a:t>Soft margins and</a:t>
             </a:r>
             <a:r>
               <a:rPr lang="en-US" sz="2000" dirty="0">
                 <a:latin typeface="+mj-lt"/>
               </a:rPr>
-              <a:t> or </a:t>
+              <a:t> </a:t>
             </a:r>
             <a:r>
               <a:rPr lang="en-US" sz="2000" i="1" dirty="0">
@@ -38009,7 +35662,7 @@
         </p:blipFill>
         <p:spPr>
           <a:xfrm>
-            <a:off x="1945103" y="2635149"/>
+            <a:off x="1735243" y="2635149"/>
             <a:ext cx="3239588" cy="3169049"/>
           </a:xfrm>
           <a:prstGeom prst="rect">
@@ -38039,7 +35692,7 @@
         </p:blipFill>
         <p:spPr>
           <a:xfrm>
-            <a:off x="6191589" y="2635150"/>
+            <a:off x="5104808" y="2635150"/>
             <a:ext cx="3399827" cy="3335731"/>
           </a:xfrm>
           <a:prstGeom prst="rect">
@@ -38061,7 +35714,7 @@
         </p:nvSpPr>
         <p:spPr>
           <a:xfrm>
-            <a:off x="2618210" y="5970881"/>
+            <a:off x="2430835" y="5970881"/>
             <a:ext cx="2091937" cy="307777"/>
           </a:xfrm>
           <a:prstGeom prst="rect">
@@ -38099,7 +35752,7 @@
         </p:nvSpPr>
         <p:spPr>
           <a:xfrm>
-            <a:off x="7151820" y="6023074"/>
+            <a:off x="6139987" y="6023074"/>
             <a:ext cx="2091937" cy="307777"/>
           </a:xfrm>
           <a:prstGeom prst="rect">
@@ -38119,48 +35772,6 @@
                 <a:latin typeface="+mj-lt"/>
               </a:rPr>
               <a:t>Soft margin</a:t>
-            </a:r>
-          </a:p>
-        </p:txBody>
-      </p:sp>
-      <p:sp>
-        <p:nvSpPr>
-          <p:cNvPr id="15" name="TextBox 14">
-            <a:extLst>
-              <a:ext uri="{FF2B5EF4-FFF2-40B4-BE49-F238E27FC236}">
-                <a16:creationId xmlns:a16="http://schemas.microsoft.com/office/drawing/2014/main" id="{B9E1F2FF-9D12-49E7-8ED5-D57A1329526B}"/>
-              </a:ext>
-            </a:extLst>
-          </p:cNvPr>
-          <p:cNvSpPr txBox="1"/>
-          <p:nvPr/>
-        </p:nvSpPr>
-        <p:spPr>
-          <a:xfrm rot="20637315">
-            <a:off x="9262063" y="2890337"/>
-            <a:ext cx="2395924" cy="1650742"/>
-          </a:xfrm>
-          <a:prstGeom prst="leftArrow">
-            <a:avLst/>
-          </a:prstGeom>
-          <a:solidFill>
-            <a:srgbClr val="FFFF00"/>
-          </a:solidFill>
-        </p:spPr>
-        <p:txBody>
-          <a:bodyPr wrap="square" rtlCol="0" anchor="ctr">
-            <a:spAutoFit/>
-          </a:bodyPr>
-          <a:lstStyle/>
-          <a:p>
-            <a:pPr algn="ctr"/>
-            <a:r>
-              <a:rPr lang="en-US" sz="1600" dirty="0">
-                <a:solidFill>
-                  <a:srgbClr val="FF0000"/>
-                </a:solidFill>
-              </a:rPr>
-              <a:t>A non-linear boundary would actually fit better </a:t>
             </a:r>
           </a:p>
         </p:txBody>
@@ -38181,8 +35792,8 @@
         </p:nvCxnSpPr>
         <p:spPr>
           <a:xfrm flipV="1">
-            <a:off x="1528997" y="4557010"/>
-            <a:ext cx="1491521" cy="187377"/>
+            <a:off x="1605266" y="5044216"/>
+            <a:ext cx="1047992" cy="144457"/>
           </a:xfrm>
           <a:prstGeom prst="straightConnector1">
             <a:avLst/>
@@ -38223,7 +35834,7 @@
         </p:nvSpPr>
         <p:spPr>
           <a:xfrm>
-            <a:off x="554636" y="5096656"/>
+            <a:off x="554636" y="4819341"/>
             <a:ext cx="1214203" cy="738664"/>
           </a:xfrm>
           <a:prstGeom prst="rect">
@@ -38263,7 +35874,7 @@
         </p:nvSpPr>
         <p:spPr>
           <a:xfrm>
-            <a:off x="3576320" y="3490043"/>
+            <a:off x="3381450" y="3490043"/>
             <a:ext cx="216191" cy="177717"/>
           </a:xfrm>
           <a:prstGeom prst="ellipse">
@@ -38315,7 +35926,7 @@
         </p:nvSpPr>
         <p:spPr>
           <a:xfrm>
-            <a:off x="2860040" y="4589951"/>
+            <a:off x="2665170" y="4589951"/>
             <a:ext cx="216191" cy="177717"/>
           </a:xfrm>
           <a:prstGeom prst="ellipse">
@@ -38367,7 +35978,7 @@
         </p:nvSpPr>
         <p:spPr>
           <a:xfrm>
-            <a:off x="3348706" y="4589951"/>
+            <a:off x="3153836" y="4589951"/>
             <a:ext cx="216191" cy="177717"/>
           </a:xfrm>
           <a:prstGeom prst="ellipse">
@@ -38460,6 +36071,174 @@
                 </a:solidFill>
               </a:rPr>
               <a:t>Support vectors</a:t>
+            </a:r>
+          </a:p>
+        </p:txBody>
+      </p:sp>
+      <p:sp>
+        <p:nvSpPr>
+          <p:cNvPr id="7" name="TextBox 6">
+            <a:extLst>
+              <a:ext uri="{FF2B5EF4-FFF2-40B4-BE49-F238E27FC236}">
+                <a16:creationId xmlns:a16="http://schemas.microsoft.com/office/drawing/2014/main" id="{22B2EC76-678F-F957-F964-E20A68DD6FF9}"/>
+              </a:ext>
+            </a:extLst>
+          </p:cNvPr>
+          <p:cNvSpPr txBox="1"/>
+          <p:nvPr/>
+        </p:nvSpPr>
+        <p:spPr>
+          <a:xfrm>
+            <a:off x="8572323" y="2893102"/>
+            <a:ext cx="3546933" cy="3139321"/>
+          </a:xfrm>
+          <a:prstGeom prst="rect">
+            <a:avLst/>
+          </a:prstGeom>
+          <a:noFill/>
+        </p:spPr>
+        <p:txBody>
+          <a:bodyPr wrap="none" rtlCol="0">
+            <a:spAutoFit/>
+          </a:bodyPr>
+          <a:lstStyle/>
+          <a:p>
+            <a:r>
+              <a:rPr lang="en-US" u="sng" dirty="0">
+                <a:latin typeface="+mj-lt"/>
+              </a:rPr>
+              <a:t>Soft margin</a:t>
+            </a:r>
+          </a:p>
+          <a:p>
+            <a:endParaRPr lang="en-US" dirty="0">
+              <a:latin typeface="+mj-lt"/>
+            </a:endParaRPr>
+          </a:p>
+          <a:p>
+            <a:r>
+              <a:rPr lang="en-US" dirty="0">
+                <a:latin typeface="+mj-lt"/>
+              </a:rPr>
+              <a:t>Letting the classifier </a:t>
+            </a:r>
+            <a:r>
+              <a:rPr lang="en-US" i="1" dirty="0">
+                <a:latin typeface="+mj-lt"/>
+              </a:rPr>
+              <a:t>fail</a:t>
+            </a:r>
+            <a:r>
+              <a:rPr lang="en-US" dirty="0">
+                <a:latin typeface="+mj-lt"/>
+              </a:rPr>
+              <a:t> for some </a:t>
+            </a:r>
+          </a:p>
+          <a:p>
+            <a:r>
+              <a:rPr lang="en-US" dirty="0" err="1">
+                <a:latin typeface="+mj-lt"/>
+              </a:rPr>
+              <a:t>obs</a:t>
+            </a:r>
+            <a:r>
+              <a:rPr lang="en-US" dirty="0">
+                <a:latin typeface="+mj-lt"/>
+              </a:rPr>
+              <a:t>, can make it:</a:t>
+            </a:r>
+          </a:p>
+          <a:p>
+            <a:endParaRPr lang="en-US" dirty="0">
+              <a:latin typeface="+mj-lt"/>
+            </a:endParaRPr>
+          </a:p>
+          <a:p>
+            <a:pPr marL="285750" indent="-285750">
+              <a:buFont typeface="Wingdings" panose="05000000000000000000" pitchFamily="2" charset="2"/>
+              <a:buChar char="§"/>
+            </a:pPr>
+            <a:r>
+              <a:rPr lang="en-US" dirty="0">
+                <a:latin typeface="+mj-lt"/>
+              </a:rPr>
+              <a:t>A better classifier of </a:t>
+            </a:r>
+            <a:r>
+              <a:rPr lang="en-US" i="1" dirty="0">
+                <a:latin typeface="+mj-lt"/>
+              </a:rPr>
+              <a:t>most</a:t>
+            </a:r>
+            <a:r>
+              <a:rPr lang="en-US" dirty="0">
+                <a:latin typeface="+mj-lt"/>
+              </a:rPr>
+              <a:t> </a:t>
+            </a:r>
+          </a:p>
+          <a:p>
+            <a:r>
+              <a:rPr lang="en-US" dirty="0">
+                <a:latin typeface="+mj-lt"/>
+              </a:rPr>
+              <a:t>of the </a:t>
+            </a:r>
+            <a:r>
+              <a:rPr lang="en-US" dirty="0" err="1">
+                <a:latin typeface="+mj-lt"/>
+              </a:rPr>
+              <a:t>obs</a:t>
+            </a:r>
+            <a:endParaRPr lang="en-US" dirty="0">
+              <a:latin typeface="+mj-lt"/>
+            </a:endParaRPr>
+          </a:p>
+          <a:p>
+            <a:pPr marL="285750" indent="-285750">
+              <a:buFont typeface="Wingdings" panose="05000000000000000000" pitchFamily="2" charset="2"/>
+              <a:buChar char="§"/>
+            </a:pPr>
+            <a:r>
+              <a:rPr lang="en-US" dirty="0">
+                <a:latin typeface="+mj-lt"/>
+              </a:rPr>
+              <a:t>More robust to individual </a:t>
+            </a:r>
+            <a:r>
+              <a:rPr lang="en-US" dirty="0" err="1">
+                <a:latin typeface="+mj-lt"/>
+              </a:rPr>
+              <a:t>obs</a:t>
+            </a:r>
+            <a:endParaRPr lang="en-US" dirty="0">
+              <a:latin typeface="+mj-lt"/>
+            </a:endParaRPr>
+          </a:p>
+          <a:p>
+            <a:pPr marL="285750" indent="-285750">
+              <a:buFont typeface="Wingdings" panose="05000000000000000000" pitchFamily="2" charset="2"/>
+              <a:buChar char="§"/>
+            </a:pPr>
+            <a:endParaRPr lang="en-US" dirty="0">
+              <a:latin typeface="+mj-lt"/>
+            </a:endParaRPr>
+          </a:p>
+          <a:p>
+            <a:r>
+              <a:rPr lang="en-US" dirty="0">
+                <a:latin typeface="+mj-lt"/>
+              </a:rPr>
+              <a:t>But it imposes additional restrictions</a:t>
+            </a:r>
+          </a:p>
+          <a:p>
+            <a:r>
+              <a:rPr lang="en-US" dirty="0">
+                <a:latin typeface="+mj-lt"/>
+              </a:rPr>
+              <a:t>In the optimization problem to solve</a:t>
             </a:r>
           </a:p>
         </p:txBody>

--- a/Course content/Slides/Topic 4 - Classification.pptx
+++ b/Course content/Slides/Topic 4 - Classification.pptx
@@ -5,7 +5,7 @@
     <p:sldMasterId id="2147483648" r:id="rId1"/>
   </p:sldMasterIdLst>
   <p:notesMasterIdLst>
-    <p:notesMasterId r:id="rId21"/>
+    <p:notesMasterId r:id="rId22"/>
   </p:notesMasterIdLst>
   <p:sldIdLst>
     <p:sldId id="278" r:id="rId2"/>
@@ -16,17 +16,18 @@
     <p:sldId id="281" r:id="rId7"/>
     <p:sldId id="282" r:id="rId8"/>
     <p:sldId id="286" r:id="rId9"/>
-    <p:sldId id="288" r:id="rId10"/>
-    <p:sldId id="289" r:id="rId11"/>
-    <p:sldId id="290" r:id="rId12"/>
-    <p:sldId id="291" r:id="rId13"/>
-    <p:sldId id="292" r:id="rId14"/>
-    <p:sldId id="294" r:id="rId15"/>
-    <p:sldId id="295" r:id="rId16"/>
-    <p:sldId id="296" r:id="rId17"/>
-    <p:sldId id="297" r:id="rId18"/>
-    <p:sldId id="298" r:id="rId19"/>
-    <p:sldId id="299" r:id="rId20"/>
+    <p:sldId id="300" r:id="rId10"/>
+    <p:sldId id="288" r:id="rId11"/>
+    <p:sldId id="289" r:id="rId12"/>
+    <p:sldId id="290" r:id="rId13"/>
+    <p:sldId id="291" r:id="rId14"/>
+    <p:sldId id="292" r:id="rId15"/>
+    <p:sldId id="294" r:id="rId16"/>
+    <p:sldId id="295" r:id="rId17"/>
+    <p:sldId id="296" r:id="rId18"/>
+    <p:sldId id="297" r:id="rId19"/>
+    <p:sldId id="298" r:id="rId20"/>
+    <p:sldId id="299" r:id="rId21"/>
   </p:sldIdLst>
   <p:sldSz cx="12192000" cy="6858000"/>
   <p:notesSz cx="6858000" cy="9144000"/>
@@ -128,7 +129,7 @@
   <p:extLst>
     <p:ext uri="{EFAFB233-063F-42B5-8137-9DF3F51BA10A}">
       <p15:sldGuideLst xmlns:p15="http://schemas.microsoft.com/office/powerpoint/2012/main">
-        <p15:guide id="1" orient="horz" pos="1536" userDrawn="1">
+        <p15:guide id="1" orient="horz" pos="3864" userDrawn="1">
           <p15:clr>
             <a:srgbClr val="A4A3A4"/>
           </p15:clr>
@@ -147,7 +148,7 @@
 <file path=ppt/revisionInfo.xml><?xml version="1.0" encoding="utf-8"?>
 <p1510:revInfo xmlns:a="http://schemas.openxmlformats.org/drawingml/2006/main" xmlns:r="http://schemas.openxmlformats.org/officeDocument/2006/relationships" xmlns:p1510="http://schemas.microsoft.com/office/powerpoint/2015/10/main">
   <p1510:revLst>
-    <p1510:client id="{3C9ABCAB-493E-4D17-839E-F2056CFBE8FD}" v="19" dt="2023-10-30T17:04:11.925"/>
+    <p1510:client id="{3C9ABCAB-493E-4D17-839E-F2056CFBE8FD}" v="93" dt="2023-10-31T17:11:11.313"/>
   </p1510:revLst>
 </p1510:revInfo>
 </file>
@@ -156,8 +157,8 @@
 <pc:chgInfo xmlns:a="http://schemas.openxmlformats.org/drawingml/2006/main" xmlns:r="http://schemas.openxmlformats.org/officeDocument/2006/relationships" xmlns:ac="http://schemas.microsoft.com/office/drawing/2013/main/command" xmlns:pc="http://schemas.microsoft.com/office/powerpoint/2013/main/command">
   <pc:docChgLst>
     <pc:chgData name="Javier Bas Vicente" userId="96bf8a96-3310-496c-8c7e-8a087f977faa" providerId="ADAL" clId="{3C9ABCAB-493E-4D17-839E-F2056CFBE8FD}"/>
-    <pc:docChg chg="undo custSel delSld modSld">
-      <pc:chgData name="Javier Bas Vicente" userId="96bf8a96-3310-496c-8c7e-8a087f977faa" providerId="ADAL" clId="{3C9ABCAB-493E-4D17-839E-F2056CFBE8FD}" dt="2023-10-30T17:04:11.925" v="711" actId="313"/>
+    <pc:docChg chg="undo redo custSel addSld delSld modSld sldOrd">
+      <pc:chgData name="Javier Bas Vicente" userId="96bf8a96-3310-496c-8c7e-8a087f977faa" providerId="ADAL" clId="{3C9ABCAB-493E-4D17-839E-F2056CFBE8FD}" dt="2023-10-31T17:18:08.146" v="1762" actId="20577"/>
       <pc:docMkLst>
         <pc:docMk/>
       </pc:docMkLst>
@@ -176,18 +177,26 @@
           </ac:spMkLst>
         </pc:spChg>
       </pc:sldChg>
-      <pc:sldChg chg="modSp mod">
-        <pc:chgData name="Javier Bas Vicente" userId="96bf8a96-3310-496c-8c7e-8a087f977faa" providerId="ADAL" clId="{3C9ABCAB-493E-4D17-839E-F2056CFBE8FD}" dt="2023-10-30T15:38:13.495" v="29" actId="1038"/>
+      <pc:sldChg chg="delSp modSp mod">
+        <pc:chgData name="Javier Bas Vicente" userId="96bf8a96-3310-496c-8c7e-8a087f977faa" providerId="ADAL" clId="{3C9ABCAB-493E-4D17-839E-F2056CFBE8FD}" dt="2023-10-31T14:49:06.203" v="715" actId="27636"/>
         <pc:sldMkLst>
           <pc:docMk/>
           <pc:sldMk cId="3676436470" sldId="279"/>
         </pc:sldMkLst>
-        <pc:spChg chg="mod">
-          <ac:chgData name="Javier Bas Vicente" userId="96bf8a96-3310-496c-8c7e-8a087f977faa" providerId="ADAL" clId="{3C9ABCAB-493E-4D17-839E-F2056CFBE8FD}" dt="2023-10-30T15:38:13.495" v="29" actId="1038"/>
+        <pc:spChg chg="del mod">
+          <ac:chgData name="Javier Bas Vicente" userId="96bf8a96-3310-496c-8c7e-8a087f977faa" providerId="ADAL" clId="{3C9ABCAB-493E-4D17-839E-F2056CFBE8FD}" dt="2023-10-31T14:49:02.745" v="713" actId="478"/>
           <ac:spMkLst>
             <pc:docMk/>
             <pc:sldMk cId="3676436470" sldId="279"/>
             <ac:spMk id="5" creationId="{FD38933F-31C8-2AB5-6517-D9F2A467F431}"/>
+          </ac:spMkLst>
+        </pc:spChg>
+        <pc:spChg chg="mod">
+          <ac:chgData name="Javier Bas Vicente" userId="96bf8a96-3310-496c-8c7e-8a087f977faa" providerId="ADAL" clId="{3C9ABCAB-493E-4D17-839E-F2056CFBE8FD}" dt="2023-10-31T14:49:06.203" v="715" actId="27636"/>
+          <ac:spMkLst>
+            <pc:docMk/>
+            <pc:sldMk cId="3676436470" sldId="279"/>
+            <ac:spMk id="152" creationId="{B7719AE7-5D76-3CA6-C03E-F772C1896EF4}"/>
           </ac:spMkLst>
         </pc:spChg>
       </pc:sldChg>
@@ -282,13 +291,13 @@
         </pc:spChg>
       </pc:sldChg>
       <pc:sldChg chg="addSp delSp modSp mod">
-        <pc:chgData name="Javier Bas Vicente" userId="96bf8a96-3310-496c-8c7e-8a087f977faa" providerId="ADAL" clId="{3C9ABCAB-493E-4D17-839E-F2056CFBE8FD}" dt="2023-10-30T16:53:22.966" v="663" actId="14100"/>
+        <pc:chgData name="Javier Bas Vicente" userId="96bf8a96-3310-496c-8c7e-8a087f977faa" providerId="ADAL" clId="{3C9ABCAB-493E-4D17-839E-F2056CFBE8FD}" dt="2023-10-31T15:26:46.150" v="1290" actId="20577"/>
         <pc:sldMkLst>
           <pc:docMk/>
           <pc:sldMk cId="2946059860" sldId="288"/>
         </pc:sldMkLst>
         <pc:spChg chg="mod">
-          <ac:chgData name="Javier Bas Vicente" userId="96bf8a96-3310-496c-8c7e-8a087f977faa" providerId="ADAL" clId="{3C9ABCAB-493E-4D17-839E-F2056CFBE8FD}" dt="2023-10-30T16:47:54.163" v="84" actId="6549"/>
+          <ac:chgData name="Javier Bas Vicente" userId="96bf8a96-3310-496c-8c7e-8a087f977faa" providerId="ADAL" clId="{3C9ABCAB-493E-4D17-839E-F2056CFBE8FD}" dt="2023-10-31T15:26:46.150" v="1290" actId="20577"/>
           <ac:spMkLst>
             <pc:docMk/>
             <pc:sldMk cId="2946059860" sldId="288"/>
@@ -296,15 +305,15 @@
           </ac:spMkLst>
         </pc:spChg>
         <pc:spChg chg="add mod">
-          <ac:chgData name="Javier Bas Vicente" userId="96bf8a96-3310-496c-8c7e-8a087f977faa" providerId="ADAL" clId="{3C9ABCAB-493E-4D17-839E-F2056CFBE8FD}" dt="2023-10-30T16:52:51.961" v="615" actId="1037"/>
+          <ac:chgData name="Javier Bas Vicente" userId="96bf8a96-3310-496c-8c7e-8a087f977faa" providerId="ADAL" clId="{3C9ABCAB-493E-4D17-839E-F2056CFBE8FD}" dt="2023-10-31T15:26:34.534" v="1281" actId="20577"/>
           <ac:spMkLst>
             <pc:docMk/>
             <pc:sldMk cId="2946059860" sldId="288"/>
             <ac:spMk id="7" creationId="{22B2EC76-678F-F957-F964-E20A68DD6FF9}"/>
           </ac:spMkLst>
         </pc:spChg>
-        <pc:spChg chg="mod">
-          <ac:chgData name="Javier Bas Vicente" userId="96bf8a96-3310-496c-8c7e-8a087f977faa" providerId="ADAL" clId="{3C9ABCAB-493E-4D17-839E-F2056CFBE8FD}" dt="2023-10-30T16:50:10.832" v="433" actId="1037"/>
+        <pc:spChg chg="del mod">
+          <ac:chgData name="Javier Bas Vicente" userId="96bf8a96-3310-496c-8c7e-8a087f977faa" providerId="ADAL" clId="{3C9ABCAB-493E-4D17-839E-F2056CFBE8FD}" dt="2023-10-31T15:25:41.386" v="1144" actId="478"/>
           <ac:spMkLst>
             <pc:docMk/>
             <pc:sldMk cId="2946059860" sldId="288"/>
@@ -312,7 +321,7 @@
           </ac:spMkLst>
         </pc:spChg>
         <pc:spChg chg="mod">
-          <ac:chgData name="Javier Bas Vicente" userId="96bf8a96-3310-496c-8c7e-8a087f977faa" providerId="ADAL" clId="{3C9ABCAB-493E-4D17-839E-F2056CFBE8FD}" dt="2023-10-30T16:52:51.961" v="615" actId="1037"/>
+          <ac:chgData name="Javier Bas Vicente" userId="96bf8a96-3310-496c-8c7e-8a087f977faa" providerId="ADAL" clId="{3C9ABCAB-493E-4D17-839E-F2056CFBE8FD}" dt="2023-10-31T15:25:55.588" v="1226" actId="14100"/>
           <ac:spMkLst>
             <pc:docMk/>
             <pc:sldMk cId="2946059860" sldId="288"/>
@@ -327,40 +336,48 @@
             <ac:spMk id="15" creationId="{B9E1F2FF-9D12-49E7-8ED5-D57A1329526B}"/>
           </ac:spMkLst>
         </pc:spChg>
-        <pc:spChg chg="mod">
-          <ac:chgData name="Javier Bas Vicente" userId="96bf8a96-3310-496c-8c7e-8a087f977faa" providerId="ADAL" clId="{3C9ABCAB-493E-4D17-839E-F2056CFBE8FD}" dt="2023-10-30T16:53:15.323" v="661" actId="1035"/>
+        <pc:spChg chg="del mod">
+          <ac:chgData name="Javier Bas Vicente" userId="96bf8a96-3310-496c-8c7e-8a087f977faa" providerId="ADAL" clId="{3C9ABCAB-493E-4D17-839E-F2056CFBE8FD}" dt="2023-10-31T15:25:41.386" v="1144" actId="478"/>
           <ac:spMkLst>
             <pc:docMk/>
             <pc:sldMk cId="2946059860" sldId="288"/>
             <ac:spMk id="16" creationId="{167984DF-5D1C-E385-D180-E5B1AD8867FB}"/>
           </ac:spMkLst>
         </pc:spChg>
-        <pc:spChg chg="mod">
-          <ac:chgData name="Javier Bas Vicente" userId="96bf8a96-3310-496c-8c7e-8a087f977faa" providerId="ADAL" clId="{3C9ABCAB-493E-4D17-839E-F2056CFBE8FD}" dt="2023-10-30T16:53:08.778" v="638" actId="1038"/>
+        <pc:spChg chg="del mod">
+          <ac:chgData name="Javier Bas Vicente" userId="96bf8a96-3310-496c-8c7e-8a087f977faa" providerId="ADAL" clId="{3C9ABCAB-493E-4D17-839E-F2056CFBE8FD}" dt="2023-10-31T15:25:41.386" v="1144" actId="478"/>
           <ac:spMkLst>
             <pc:docMk/>
             <pc:sldMk cId="2946059860" sldId="288"/>
             <ac:spMk id="20" creationId="{77723D12-E298-5276-D69B-3E8C18F03501}"/>
           </ac:spMkLst>
         </pc:spChg>
-        <pc:spChg chg="mod">
-          <ac:chgData name="Javier Bas Vicente" userId="96bf8a96-3310-496c-8c7e-8a087f977faa" providerId="ADAL" clId="{3C9ABCAB-493E-4D17-839E-F2056CFBE8FD}" dt="2023-10-30T16:53:08.778" v="638" actId="1038"/>
+        <pc:spChg chg="del mod">
+          <ac:chgData name="Javier Bas Vicente" userId="96bf8a96-3310-496c-8c7e-8a087f977faa" providerId="ADAL" clId="{3C9ABCAB-493E-4D17-839E-F2056CFBE8FD}" dt="2023-10-31T15:25:41.386" v="1144" actId="478"/>
           <ac:spMkLst>
             <pc:docMk/>
             <pc:sldMk cId="2946059860" sldId="288"/>
             <ac:spMk id="21" creationId="{E810AA24-FBC5-9ECC-6E41-A52F7C872F31}"/>
           </ac:spMkLst>
         </pc:spChg>
-        <pc:spChg chg="mod">
-          <ac:chgData name="Javier Bas Vicente" userId="96bf8a96-3310-496c-8c7e-8a087f977faa" providerId="ADAL" clId="{3C9ABCAB-493E-4D17-839E-F2056CFBE8FD}" dt="2023-10-30T16:53:08.778" v="638" actId="1038"/>
+        <pc:spChg chg="del mod">
+          <ac:chgData name="Javier Bas Vicente" userId="96bf8a96-3310-496c-8c7e-8a087f977faa" providerId="ADAL" clId="{3C9ABCAB-493E-4D17-839E-F2056CFBE8FD}" dt="2023-10-31T15:25:41.386" v="1144" actId="478"/>
           <ac:spMkLst>
             <pc:docMk/>
             <pc:sldMk cId="2946059860" sldId="288"/>
             <ac:spMk id="22" creationId="{E6B287B8-B69F-6039-592D-0C990309A52C}"/>
           </ac:spMkLst>
         </pc:spChg>
-        <pc:picChg chg="mod">
-          <ac:chgData name="Javier Bas Vicente" userId="96bf8a96-3310-496c-8c7e-8a087f977faa" providerId="ADAL" clId="{3C9ABCAB-493E-4D17-839E-F2056CFBE8FD}" dt="2023-10-30T16:50:06.967" v="420" actId="1037"/>
+        <pc:spChg chg="del">
+          <ac:chgData name="Javier Bas Vicente" userId="96bf8a96-3310-496c-8c7e-8a087f977faa" providerId="ADAL" clId="{3C9ABCAB-493E-4D17-839E-F2056CFBE8FD}" dt="2023-10-31T15:25:41.386" v="1144" actId="478"/>
+          <ac:spMkLst>
+            <pc:docMk/>
+            <pc:sldMk cId="2946059860" sldId="288"/>
+            <ac:spMk id="23" creationId="{99E02092-4B79-9314-EFE8-F5077AB66630}"/>
+          </ac:spMkLst>
+        </pc:spChg>
+        <pc:picChg chg="del mod">
+          <ac:chgData name="Javier Bas Vicente" userId="96bf8a96-3310-496c-8c7e-8a087f977faa" providerId="ADAL" clId="{3C9ABCAB-493E-4D17-839E-F2056CFBE8FD}" dt="2023-10-31T15:25:41.386" v="1144" actId="478"/>
           <ac:picMkLst>
             <pc:docMk/>
             <pc:sldMk cId="2946059860" sldId="288"/>
@@ -368,15 +385,15 @@
           </ac:picMkLst>
         </pc:picChg>
         <pc:picChg chg="mod">
-          <ac:chgData name="Javier Bas Vicente" userId="96bf8a96-3310-496c-8c7e-8a087f977faa" providerId="ADAL" clId="{3C9ABCAB-493E-4D17-839E-F2056CFBE8FD}" dt="2023-10-30T16:52:51.961" v="615" actId="1037"/>
+          <ac:chgData name="Javier Bas Vicente" userId="96bf8a96-3310-496c-8c7e-8a087f977faa" providerId="ADAL" clId="{3C9ABCAB-493E-4D17-839E-F2056CFBE8FD}" dt="2023-10-31T15:25:55.588" v="1226" actId="14100"/>
           <ac:picMkLst>
             <pc:docMk/>
             <pc:sldMk cId="2946059860" sldId="288"/>
             <ac:picMk id="11" creationId="{D6474E9B-2814-21BD-E486-F59921F3FDF6}"/>
           </ac:picMkLst>
         </pc:picChg>
-        <pc:cxnChg chg="mod">
-          <ac:chgData name="Javier Bas Vicente" userId="96bf8a96-3310-496c-8c7e-8a087f977faa" providerId="ADAL" clId="{3C9ABCAB-493E-4D17-839E-F2056CFBE8FD}" dt="2023-10-30T16:53:22.966" v="663" actId="14100"/>
+        <pc:cxnChg chg="del mod">
+          <ac:chgData name="Javier Bas Vicente" userId="96bf8a96-3310-496c-8c7e-8a087f977faa" providerId="ADAL" clId="{3C9ABCAB-493E-4D17-839E-F2056CFBE8FD}" dt="2023-10-31T15:25:41.386" v="1144" actId="478"/>
           <ac:cxnSpMkLst>
             <pc:docMk/>
             <pc:sldMk cId="2946059860" sldId="288"/>
@@ -385,13 +402,13 @@
         </pc:cxnChg>
       </pc:sldChg>
       <pc:sldChg chg="addSp delSp modSp mod">
-        <pc:chgData name="Javier Bas Vicente" userId="96bf8a96-3310-496c-8c7e-8a087f977faa" providerId="ADAL" clId="{3C9ABCAB-493E-4D17-839E-F2056CFBE8FD}" dt="2023-10-30T17:04:11.925" v="711" actId="313"/>
+        <pc:chgData name="Javier Bas Vicente" userId="96bf8a96-3310-496c-8c7e-8a087f977faa" providerId="ADAL" clId="{3C9ABCAB-493E-4D17-839E-F2056CFBE8FD}" dt="2023-10-31T15:43:12.751" v="1291" actId="6549"/>
         <pc:sldMkLst>
           <pc:docMk/>
           <pc:sldMk cId="1434330880" sldId="290"/>
         </pc:sldMkLst>
         <pc:spChg chg="mod">
-          <ac:chgData name="Javier Bas Vicente" userId="96bf8a96-3310-496c-8c7e-8a087f977faa" providerId="ADAL" clId="{3C9ABCAB-493E-4D17-839E-F2056CFBE8FD}" dt="2023-10-30T17:04:11.925" v="711" actId="313"/>
+          <ac:chgData name="Javier Bas Vicente" userId="96bf8a96-3310-496c-8c7e-8a087f977faa" providerId="ADAL" clId="{3C9ABCAB-493E-4D17-839E-F2056CFBE8FD}" dt="2023-10-31T15:43:12.751" v="1291" actId="6549"/>
           <ac:spMkLst>
             <pc:docMk/>
             <pc:sldMk cId="1434330880" sldId="290"/>
@@ -406,6 +423,240 @@
             <ac:spMk id="7" creationId="{61259946-3012-9066-31E4-C63BA9D94F28}"/>
           </ac:spMkLst>
         </pc:spChg>
+      </pc:sldChg>
+      <pc:sldChg chg="addSp modSp mod">
+        <pc:chgData name="Javier Bas Vicente" userId="96bf8a96-3310-496c-8c7e-8a087f977faa" providerId="ADAL" clId="{3C9ABCAB-493E-4D17-839E-F2056CFBE8FD}" dt="2023-10-31T15:52:28.741" v="1505" actId="1037"/>
+        <pc:sldMkLst>
+          <pc:docMk/>
+          <pc:sldMk cId="4096357962" sldId="292"/>
+        </pc:sldMkLst>
+        <pc:spChg chg="add mod">
+          <ac:chgData name="Javier Bas Vicente" userId="96bf8a96-3310-496c-8c7e-8a087f977faa" providerId="ADAL" clId="{3C9ABCAB-493E-4D17-839E-F2056CFBE8FD}" dt="2023-10-31T15:52:28.741" v="1505" actId="1037"/>
+          <ac:spMkLst>
+            <pc:docMk/>
+            <pc:sldMk cId="4096357962" sldId="292"/>
+            <ac:spMk id="3" creationId="{BA89FC74-4CB6-28FE-7039-F264C47F2E4C}"/>
+          </ac:spMkLst>
+        </pc:spChg>
+        <pc:spChg chg="mod">
+          <ac:chgData name="Javier Bas Vicente" userId="96bf8a96-3310-496c-8c7e-8a087f977faa" providerId="ADAL" clId="{3C9ABCAB-493E-4D17-839E-F2056CFBE8FD}" dt="2023-10-31T15:48:11.837" v="1356" actId="20577"/>
+          <ac:spMkLst>
+            <pc:docMk/>
+            <pc:sldMk cId="4096357962" sldId="292"/>
+            <ac:spMk id="7" creationId="{9EAA3807-656A-ABEE-0950-BF49490A30B0}"/>
+          </ac:spMkLst>
+        </pc:spChg>
+        <pc:picChg chg="mod">
+          <ac:chgData name="Javier Bas Vicente" userId="96bf8a96-3310-496c-8c7e-8a087f977faa" providerId="ADAL" clId="{3C9ABCAB-493E-4D17-839E-F2056CFBE8FD}" dt="2023-10-31T15:48:27.838" v="1386" actId="1036"/>
+          <ac:picMkLst>
+            <pc:docMk/>
+            <pc:sldMk cId="4096357962" sldId="292"/>
+            <ac:picMk id="9" creationId="{5B5D2FB5-8036-59E2-FE4D-3ACE146026D5}"/>
+          </ac:picMkLst>
+        </pc:picChg>
+        <pc:picChg chg="mod">
+          <ac:chgData name="Javier Bas Vicente" userId="96bf8a96-3310-496c-8c7e-8a087f977faa" providerId="ADAL" clId="{3C9ABCAB-493E-4D17-839E-F2056CFBE8FD}" dt="2023-10-31T15:48:27.838" v="1386" actId="1036"/>
+          <ac:picMkLst>
+            <pc:docMk/>
+            <pc:sldMk cId="4096357962" sldId="292"/>
+            <ac:picMk id="13" creationId="{A9FBD28C-076D-CA6E-FB74-FEBAF67E716A}"/>
+          </ac:picMkLst>
+        </pc:picChg>
+        <pc:cxnChg chg="mod">
+          <ac:chgData name="Javier Bas Vicente" userId="96bf8a96-3310-496c-8c7e-8a087f977faa" providerId="ADAL" clId="{3C9ABCAB-493E-4D17-839E-F2056CFBE8FD}" dt="2023-10-31T15:48:27.838" v="1386" actId="1036"/>
+          <ac:cxnSpMkLst>
+            <pc:docMk/>
+            <pc:sldMk cId="4096357962" sldId="292"/>
+            <ac:cxnSpMk id="10" creationId="{501CFA49-B6F6-2F5A-D627-7DC74BB1676B}"/>
+          </ac:cxnSpMkLst>
+        </pc:cxnChg>
+        <pc:cxnChg chg="mod">
+          <ac:chgData name="Javier Bas Vicente" userId="96bf8a96-3310-496c-8c7e-8a087f977faa" providerId="ADAL" clId="{3C9ABCAB-493E-4D17-839E-F2056CFBE8FD}" dt="2023-10-31T15:48:27.838" v="1386" actId="1036"/>
+          <ac:cxnSpMkLst>
+            <pc:docMk/>
+            <pc:sldMk cId="4096357962" sldId="292"/>
+            <ac:cxnSpMk id="12" creationId="{5D618F56-9772-CF65-F17E-DC63DAFF5AED}"/>
+          </ac:cxnSpMkLst>
+        </pc:cxnChg>
+      </pc:sldChg>
+      <pc:sldChg chg="modSp mod">
+        <pc:chgData name="Javier Bas Vicente" userId="96bf8a96-3310-496c-8c7e-8a087f977faa" providerId="ADAL" clId="{3C9ABCAB-493E-4D17-839E-F2056CFBE8FD}" dt="2023-10-31T15:57:08.917" v="1609" actId="20577"/>
+        <pc:sldMkLst>
+          <pc:docMk/>
+          <pc:sldMk cId="276195200" sldId="294"/>
+        </pc:sldMkLst>
+        <pc:spChg chg="mod">
+          <ac:chgData name="Javier Bas Vicente" userId="96bf8a96-3310-496c-8c7e-8a087f977faa" providerId="ADAL" clId="{3C9ABCAB-493E-4D17-839E-F2056CFBE8FD}" dt="2023-10-31T15:57:08.917" v="1609" actId="20577"/>
+          <ac:spMkLst>
+            <pc:docMk/>
+            <pc:sldMk cId="276195200" sldId="294"/>
+            <ac:spMk id="3" creationId="{F7EF27C5-01B7-9F60-ECDA-A1F376586FC5}"/>
+          </ac:spMkLst>
+        </pc:spChg>
+      </pc:sldChg>
+      <pc:sldChg chg="modSp mod">
+        <pc:chgData name="Javier Bas Vicente" userId="96bf8a96-3310-496c-8c7e-8a087f977faa" providerId="ADAL" clId="{3C9ABCAB-493E-4D17-839E-F2056CFBE8FD}" dt="2023-10-31T17:11:20.178" v="1756" actId="1037"/>
+        <pc:sldMkLst>
+          <pc:docMk/>
+          <pc:sldMk cId="2985155455" sldId="295"/>
+        </pc:sldMkLst>
+        <pc:spChg chg="mod">
+          <ac:chgData name="Javier Bas Vicente" userId="96bf8a96-3310-496c-8c7e-8a087f977faa" providerId="ADAL" clId="{3C9ABCAB-493E-4D17-839E-F2056CFBE8FD}" dt="2023-10-31T17:06:28.835" v="1610" actId="20577"/>
+          <ac:spMkLst>
+            <pc:docMk/>
+            <pc:sldMk cId="2985155455" sldId="295"/>
+            <ac:spMk id="3" creationId="{F7EF27C5-01B7-9F60-ECDA-A1F376586FC5}"/>
+          </ac:spMkLst>
+        </pc:spChg>
+        <pc:spChg chg="mod">
+          <ac:chgData name="Javier Bas Vicente" userId="96bf8a96-3310-496c-8c7e-8a087f977faa" providerId="ADAL" clId="{3C9ABCAB-493E-4D17-839E-F2056CFBE8FD}" dt="2023-10-31T17:11:02.059" v="1709" actId="20577"/>
+          <ac:spMkLst>
+            <pc:docMk/>
+            <pc:sldMk cId="2985155455" sldId="295"/>
+            <ac:spMk id="14" creationId="{12731CC3-D1E2-9E0F-9DE8-FB53F20144D7}"/>
+          </ac:spMkLst>
+        </pc:spChg>
+        <pc:spChg chg="mod">
+          <ac:chgData name="Javier Bas Vicente" userId="96bf8a96-3310-496c-8c7e-8a087f977faa" providerId="ADAL" clId="{3C9ABCAB-493E-4D17-839E-F2056CFBE8FD}" dt="2023-10-31T17:11:20.178" v="1756" actId="1037"/>
+          <ac:spMkLst>
+            <pc:docMk/>
+            <pc:sldMk cId="2985155455" sldId="295"/>
+            <ac:spMk id="15" creationId="{CDA52ACE-3DE3-D61B-2E14-9D8A97E840A1}"/>
+          </ac:spMkLst>
+        </pc:spChg>
+      </pc:sldChg>
+      <pc:sldChg chg="modSp">
+        <pc:chgData name="Javier Bas Vicente" userId="96bf8a96-3310-496c-8c7e-8a087f977faa" providerId="ADAL" clId="{3C9ABCAB-493E-4D17-839E-F2056CFBE8FD}" dt="2023-10-31T17:10:57.961" v="1701" actId="20577"/>
+        <pc:sldMkLst>
+          <pc:docMk/>
+          <pc:sldMk cId="418663697" sldId="296"/>
+        </pc:sldMkLst>
+        <pc:spChg chg="mod">
+          <ac:chgData name="Javier Bas Vicente" userId="96bf8a96-3310-496c-8c7e-8a087f977faa" providerId="ADAL" clId="{3C9ABCAB-493E-4D17-839E-F2056CFBE8FD}" dt="2023-10-31T17:10:57.961" v="1701" actId="20577"/>
+          <ac:spMkLst>
+            <pc:docMk/>
+            <pc:sldMk cId="418663697" sldId="296"/>
+            <ac:spMk id="3" creationId="{F7EF27C5-01B7-9F60-ECDA-A1F376586FC5}"/>
+          </ac:spMkLst>
+        </pc:spChg>
+      </pc:sldChg>
+      <pc:sldChg chg="modSp mod">
+        <pc:chgData name="Javier Bas Vicente" userId="96bf8a96-3310-496c-8c7e-8a087f977faa" providerId="ADAL" clId="{3C9ABCAB-493E-4D17-839E-F2056CFBE8FD}" dt="2023-10-31T17:18:08.146" v="1762" actId="20577"/>
+        <pc:sldMkLst>
+          <pc:docMk/>
+          <pc:sldMk cId="4119110571" sldId="299"/>
+        </pc:sldMkLst>
+        <pc:spChg chg="mod">
+          <ac:chgData name="Javier Bas Vicente" userId="96bf8a96-3310-496c-8c7e-8a087f977faa" providerId="ADAL" clId="{3C9ABCAB-493E-4D17-839E-F2056CFBE8FD}" dt="2023-10-31T17:18:08.146" v="1762" actId="20577"/>
+          <ac:spMkLst>
+            <pc:docMk/>
+            <pc:sldMk cId="4119110571" sldId="299"/>
+            <ac:spMk id="3" creationId="{F7EF27C5-01B7-9F60-ECDA-A1F376586FC5}"/>
+          </ac:spMkLst>
+        </pc:spChg>
+      </pc:sldChg>
+      <pc:sldChg chg="delSp modSp add mod ord">
+        <pc:chgData name="Javier Bas Vicente" userId="96bf8a96-3310-496c-8c7e-8a087f977faa" providerId="ADAL" clId="{3C9ABCAB-493E-4D17-839E-F2056CFBE8FD}" dt="2023-10-31T15:25:36.421" v="1143" actId="1036"/>
+        <pc:sldMkLst>
+          <pc:docMk/>
+          <pc:sldMk cId="59019250" sldId="300"/>
+        </pc:sldMkLst>
+        <pc:spChg chg="mod">
+          <ac:chgData name="Javier Bas Vicente" userId="96bf8a96-3310-496c-8c7e-8a087f977faa" providerId="ADAL" clId="{3C9ABCAB-493E-4D17-839E-F2056CFBE8FD}" dt="2023-10-31T15:25:06.659" v="1125" actId="6549"/>
+          <ac:spMkLst>
+            <pc:docMk/>
+            <pc:sldMk cId="59019250" sldId="300"/>
+            <ac:spMk id="3" creationId="{F7EF27C5-01B7-9F60-ECDA-A1F376586FC5}"/>
+          </ac:spMkLst>
+        </pc:spChg>
+        <pc:spChg chg="del">
+          <ac:chgData name="Javier Bas Vicente" userId="96bf8a96-3310-496c-8c7e-8a087f977faa" providerId="ADAL" clId="{3C9ABCAB-493E-4D17-839E-F2056CFBE8FD}" dt="2023-10-31T15:21:16.556" v="718" actId="478"/>
+          <ac:spMkLst>
+            <pc:docMk/>
+            <pc:sldMk cId="59019250" sldId="300"/>
+            <ac:spMk id="7" creationId="{22B2EC76-678F-F957-F964-E20A68DD6FF9}"/>
+          </ac:spMkLst>
+        </pc:spChg>
+        <pc:spChg chg="mod">
+          <ac:chgData name="Javier Bas Vicente" userId="96bf8a96-3310-496c-8c7e-8a087f977faa" providerId="ADAL" clId="{3C9ABCAB-493E-4D17-839E-F2056CFBE8FD}" dt="2023-10-31T15:25:36.421" v="1143" actId="1036"/>
+          <ac:spMkLst>
+            <pc:docMk/>
+            <pc:sldMk cId="59019250" sldId="300"/>
+            <ac:spMk id="12" creationId="{B4DA19C9-C5DC-5E6E-F21C-D9FC76E063EE}"/>
+          </ac:spMkLst>
+        </pc:spChg>
+        <pc:spChg chg="del">
+          <ac:chgData name="Javier Bas Vicente" userId="96bf8a96-3310-496c-8c7e-8a087f977faa" providerId="ADAL" clId="{3C9ABCAB-493E-4D17-839E-F2056CFBE8FD}" dt="2023-10-31T15:21:18.722" v="719" actId="478"/>
+          <ac:spMkLst>
+            <pc:docMk/>
+            <pc:sldMk cId="59019250" sldId="300"/>
+            <ac:spMk id="13" creationId="{3567DF27-2684-0050-C0DD-AAF72EAA15D8}"/>
+          </ac:spMkLst>
+        </pc:spChg>
+        <pc:spChg chg="mod">
+          <ac:chgData name="Javier Bas Vicente" userId="96bf8a96-3310-496c-8c7e-8a087f977faa" providerId="ADAL" clId="{3C9ABCAB-493E-4D17-839E-F2056CFBE8FD}" dt="2023-10-31T15:25:36.421" v="1143" actId="1036"/>
+          <ac:spMkLst>
+            <pc:docMk/>
+            <pc:sldMk cId="59019250" sldId="300"/>
+            <ac:spMk id="16" creationId="{167984DF-5D1C-E385-D180-E5B1AD8867FB}"/>
+          </ac:spMkLst>
+        </pc:spChg>
+        <pc:spChg chg="mod">
+          <ac:chgData name="Javier Bas Vicente" userId="96bf8a96-3310-496c-8c7e-8a087f977faa" providerId="ADAL" clId="{3C9ABCAB-493E-4D17-839E-F2056CFBE8FD}" dt="2023-10-31T15:25:36.421" v="1143" actId="1036"/>
+          <ac:spMkLst>
+            <pc:docMk/>
+            <pc:sldMk cId="59019250" sldId="300"/>
+            <ac:spMk id="20" creationId="{77723D12-E298-5276-D69B-3E8C18F03501}"/>
+          </ac:spMkLst>
+        </pc:spChg>
+        <pc:spChg chg="mod">
+          <ac:chgData name="Javier Bas Vicente" userId="96bf8a96-3310-496c-8c7e-8a087f977faa" providerId="ADAL" clId="{3C9ABCAB-493E-4D17-839E-F2056CFBE8FD}" dt="2023-10-31T15:25:36.421" v="1143" actId="1036"/>
+          <ac:spMkLst>
+            <pc:docMk/>
+            <pc:sldMk cId="59019250" sldId="300"/>
+            <ac:spMk id="21" creationId="{E810AA24-FBC5-9ECC-6E41-A52F7C872F31}"/>
+          </ac:spMkLst>
+        </pc:spChg>
+        <pc:spChg chg="mod">
+          <ac:chgData name="Javier Bas Vicente" userId="96bf8a96-3310-496c-8c7e-8a087f977faa" providerId="ADAL" clId="{3C9ABCAB-493E-4D17-839E-F2056CFBE8FD}" dt="2023-10-31T15:25:36.421" v="1143" actId="1036"/>
+          <ac:spMkLst>
+            <pc:docMk/>
+            <pc:sldMk cId="59019250" sldId="300"/>
+            <ac:spMk id="22" creationId="{E6B287B8-B69F-6039-592D-0C990309A52C}"/>
+          </ac:spMkLst>
+        </pc:spChg>
+        <pc:spChg chg="mod">
+          <ac:chgData name="Javier Bas Vicente" userId="96bf8a96-3310-496c-8c7e-8a087f977faa" providerId="ADAL" clId="{3C9ABCAB-493E-4D17-839E-F2056CFBE8FD}" dt="2023-10-31T15:25:36.421" v="1143" actId="1036"/>
+          <ac:spMkLst>
+            <pc:docMk/>
+            <pc:sldMk cId="59019250" sldId="300"/>
+            <ac:spMk id="23" creationId="{99E02092-4B79-9314-EFE8-F5077AB66630}"/>
+          </ac:spMkLst>
+        </pc:spChg>
+        <pc:picChg chg="mod">
+          <ac:chgData name="Javier Bas Vicente" userId="96bf8a96-3310-496c-8c7e-8a087f977faa" providerId="ADAL" clId="{3C9ABCAB-493E-4D17-839E-F2056CFBE8FD}" dt="2023-10-31T15:25:36.421" v="1143" actId="1036"/>
+          <ac:picMkLst>
+            <pc:docMk/>
+            <pc:sldMk cId="59019250" sldId="300"/>
+            <ac:picMk id="8" creationId="{1DA296CE-107F-EBC7-F9F9-596CE8402C39}"/>
+          </ac:picMkLst>
+        </pc:picChg>
+        <pc:picChg chg="del">
+          <ac:chgData name="Javier Bas Vicente" userId="96bf8a96-3310-496c-8c7e-8a087f977faa" providerId="ADAL" clId="{3C9ABCAB-493E-4D17-839E-F2056CFBE8FD}" dt="2023-10-31T15:21:15.150" v="717" actId="478"/>
+          <ac:picMkLst>
+            <pc:docMk/>
+            <pc:sldMk cId="59019250" sldId="300"/>
+            <ac:picMk id="11" creationId="{D6474E9B-2814-21BD-E486-F59921F3FDF6}"/>
+          </ac:picMkLst>
+        </pc:picChg>
+        <pc:cxnChg chg="mod">
+          <ac:chgData name="Javier Bas Vicente" userId="96bf8a96-3310-496c-8c7e-8a087f977faa" providerId="ADAL" clId="{3C9ABCAB-493E-4D17-839E-F2056CFBE8FD}" dt="2023-10-31T15:25:36.421" v="1143" actId="1036"/>
+          <ac:cxnSpMkLst>
+            <pc:docMk/>
+            <pc:sldMk cId="59019250" sldId="300"/>
+            <ac:cxnSpMk id="14" creationId="{22E80EF3-D563-F8AB-4632-9DA2DEC0C1A8}"/>
+          </ac:cxnSpMkLst>
+        </pc:cxnChg>
       </pc:sldChg>
     </pc:docChg>
   </pc:docChgLst>
@@ -494,7 +745,7 @@
           <a:p>
             <a:fld id="{B9B1DC7F-8587-4047-9A5D-1FCB6614CAE0}" type="datetimeFigureOut">
               <a:rPr lang="en-US" smtClean="0"/>
-              <a:t>10/30/2023</a:t>
+              <a:t>10/31/2023</a:t>
             </a:fld>
             <a:endParaRPr lang="en-US"/>
           </a:p>
@@ -908,7 +1159,7 @@
           <a:p>
             <a:fld id="{A7DB5662-7327-465C-9A70-AD96B7A8D67A}" type="datetimeFigureOut">
               <a:rPr lang="en-US" smtClean="0"/>
-              <a:t>10/30/2023</a:t>
+              <a:t>10/31/2023</a:t>
             </a:fld>
             <a:endParaRPr lang="en-US"/>
           </a:p>
@@ -1106,7 +1357,7 @@
           <a:p>
             <a:fld id="{A7DB5662-7327-465C-9A70-AD96B7A8D67A}" type="datetimeFigureOut">
               <a:rPr lang="en-US" smtClean="0"/>
-              <a:t>10/30/2023</a:t>
+              <a:t>10/31/2023</a:t>
             </a:fld>
             <a:endParaRPr lang="en-US"/>
           </a:p>
@@ -1314,7 +1565,7 @@
           <a:p>
             <a:fld id="{A7DB5662-7327-465C-9A70-AD96B7A8D67A}" type="datetimeFigureOut">
               <a:rPr lang="en-US" smtClean="0"/>
-              <a:t>10/30/2023</a:t>
+              <a:t>10/31/2023</a:t>
             </a:fld>
             <a:endParaRPr lang="en-US"/>
           </a:p>
@@ -1512,7 +1763,7 @@
           <a:p>
             <a:fld id="{A7DB5662-7327-465C-9A70-AD96B7A8D67A}" type="datetimeFigureOut">
               <a:rPr lang="en-US" smtClean="0"/>
-              <a:t>10/30/2023</a:t>
+              <a:t>10/31/2023</a:t>
             </a:fld>
             <a:endParaRPr lang="en-US"/>
           </a:p>
@@ -1787,7 +2038,7 @@
           <a:p>
             <a:fld id="{A7DB5662-7327-465C-9A70-AD96B7A8D67A}" type="datetimeFigureOut">
               <a:rPr lang="en-US" smtClean="0"/>
-              <a:t>10/30/2023</a:t>
+              <a:t>10/31/2023</a:t>
             </a:fld>
             <a:endParaRPr lang="en-US"/>
           </a:p>
@@ -2052,7 +2303,7 @@
           <a:p>
             <a:fld id="{A7DB5662-7327-465C-9A70-AD96B7A8D67A}" type="datetimeFigureOut">
               <a:rPr lang="en-US" smtClean="0"/>
-              <a:t>10/30/2023</a:t>
+              <a:t>10/31/2023</a:t>
             </a:fld>
             <a:endParaRPr lang="en-US"/>
           </a:p>
@@ -2464,7 +2715,7 @@
           <a:p>
             <a:fld id="{A7DB5662-7327-465C-9A70-AD96B7A8D67A}" type="datetimeFigureOut">
               <a:rPr lang="en-US" smtClean="0"/>
-              <a:t>10/30/2023</a:t>
+              <a:t>10/31/2023</a:t>
             </a:fld>
             <a:endParaRPr lang="en-US"/>
           </a:p>
@@ -2605,7 +2856,7 @@
           <a:p>
             <a:fld id="{A7DB5662-7327-465C-9A70-AD96B7A8D67A}" type="datetimeFigureOut">
               <a:rPr lang="en-US" smtClean="0"/>
-              <a:t>10/30/2023</a:t>
+              <a:t>10/31/2023</a:t>
             </a:fld>
             <a:endParaRPr lang="en-US"/>
           </a:p>
@@ -2718,7 +2969,7 @@
           <a:p>
             <a:fld id="{A7DB5662-7327-465C-9A70-AD96B7A8D67A}" type="datetimeFigureOut">
               <a:rPr lang="en-US" smtClean="0"/>
-              <a:t>10/30/2023</a:t>
+              <a:t>10/31/2023</a:t>
             </a:fld>
             <a:endParaRPr lang="en-US"/>
           </a:p>
@@ -3029,7 +3280,7 @@
           <a:p>
             <a:fld id="{A7DB5662-7327-465C-9A70-AD96B7A8D67A}" type="datetimeFigureOut">
               <a:rPr lang="en-US" smtClean="0"/>
-              <a:t>10/30/2023</a:t>
+              <a:t>10/31/2023</a:t>
             </a:fld>
             <a:endParaRPr lang="en-US"/>
           </a:p>
@@ -3317,7 +3568,7 @@
           <a:p>
             <a:fld id="{A7DB5662-7327-465C-9A70-AD96B7A8D67A}" type="datetimeFigureOut">
               <a:rPr lang="en-US" smtClean="0"/>
-              <a:t>10/30/2023</a:t>
+              <a:t>10/31/2023</a:t>
             </a:fld>
             <a:endParaRPr lang="en-US"/>
           </a:p>
@@ -3558,7 +3809,7 @@
           <a:p>
             <a:fld id="{A7DB5662-7327-465C-9A70-AD96B7A8D67A}" type="datetimeFigureOut">
               <a:rPr lang="en-US" smtClean="0"/>
-              <a:t>10/30/2023</a:t>
+              <a:t>10/31/2023</a:t>
             </a:fld>
             <a:endParaRPr lang="en-US"/>
           </a:p>
@@ -22021,8 +22272,8 @@
         </p:nvSpPr>
         <p:spPr bwMode="auto">
           <a:xfrm>
-            <a:off x="448342" y="6482412"/>
-            <a:ext cx="5730175" cy="276999"/>
+            <a:off x="448342" y="6401243"/>
+            <a:ext cx="5730175" cy="307777"/>
           </a:xfrm>
           <a:prstGeom prst="rect">
             <a:avLst/>
@@ -22087,7 +22338,7 @@
               <a:tabLst/>
             </a:pPr>
             <a:r>
-              <a:rPr kumimoji="0" lang="en-US" altLang="es-ES" sz="1200" b="0" i="0" u="none" strike="noStrike" cap="none" normalizeH="0" baseline="0" dirty="0">
+              <a:rPr kumimoji="0" lang="en-US" altLang="es-ES" sz="1400" b="0" i="0" u="none" strike="noStrike" cap="none" normalizeH="0" baseline="0" dirty="0">
                 <a:ln>
                   <a:noFill/>
                 </a:ln>
@@ -22102,7 +22353,7 @@
               <a:t>Master in Quantitative Economic Analysis </a:t>
             </a:r>
             <a:r>
-              <a:rPr kumimoji="0" lang="en-US" altLang="es-ES" sz="1200" b="0" i="0" u="none" strike="noStrike" cap="none" normalizeH="0" baseline="0" dirty="0" err="1">
+              <a:rPr kumimoji="0" lang="en-US" altLang="es-ES" sz="1400" b="0" i="0" u="none" strike="noStrike" cap="none" normalizeH="0" baseline="0" dirty="0" err="1">
                 <a:ln>
                   <a:noFill/>
                 </a:ln>
@@ -22116,7 +22367,7 @@
               </a:rPr>
               <a:t>MQuEA</a:t>
             </a:r>
-            <a:endParaRPr kumimoji="0" lang="es-ES" altLang="es-ES" sz="400" b="0" i="0" u="none" strike="noStrike" cap="none" normalizeH="0" baseline="0" dirty="0">
+            <a:endParaRPr kumimoji="0" lang="es-ES" altLang="es-ES" sz="500" b="0" i="0" u="none" strike="noStrike" cap="none" normalizeH="0" baseline="0" dirty="0">
               <a:ln>
                 <a:noFill/>
               </a:ln>
@@ -22145,8 +22396,8 @@
         </p:nvSpPr>
         <p:spPr bwMode="auto">
           <a:xfrm>
-            <a:off x="6186394" y="6493050"/>
-            <a:ext cx="5730175" cy="276999"/>
+            <a:off x="6186394" y="6411881"/>
+            <a:ext cx="5730175" cy="307777"/>
           </a:xfrm>
           <a:prstGeom prst="rect">
             <a:avLst/>
@@ -22211,7 +22462,7 @@
               <a:tabLst/>
             </a:pPr>
             <a:r>
-              <a:rPr kumimoji="0" lang="en-US" altLang="es-ES" sz="1200" b="0" i="0" u="none" strike="noStrike" cap="none" normalizeH="0" baseline="0" dirty="0">
+              <a:rPr kumimoji="0" lang="en-US" altLang="es-ES" sz="1400" b="0" i="0" u="none" strike="noStrike" cap="none" normalizeH="0" baseline="0" dirty="0">
                 <a:ln>
                   <a:noFill/>
                 </a:ln>
@@ -22226,7 +22477,7 @@
               <a:t>Universidad </a:t>
             </a:r>
             <a:r>
-              <a:rPr kumimoji="0" lang="en-US" altLang="es-ES" sz="1200" b="0" i="0" u="none" strike="noStrike" cap="none" normalizeH="0" baseline="0" dirty="0" err="1">
+              <a:rPr kumimoji="0" lang="en-US" altLang="es-ES" sz="1400" b="0" i="0" u="none" strike="noStrike" cap="none" normalizeH="0" baseline="0" dirty="0" err="1">
                 <a:ln>
                   <a:noFill/>
                 </a:ln>
@@ -22241,7 +22492,7 @@
               <a:t>Aut</a:t>
             </a:r>
             <a:r>
-              <a:rPr lang="en-US" altLang="es-ES" sz="1200" dirty="0" err="1">
+              <a:rPr lang="en-US" altLang="es-ES" sz="1400" dirty="0" err="1">
                 <a:solidFill>
                   <a:srgbClr val="F4A200"/>
                 </a:solidFill>
@@ -22252,7 +22503,7 @@
               <a:t>ó</a:t>
             </a:r>
             <a:r>
-              <a:rPr kumimoji="0" lang="en-US" altLang="es-ES" sz="1200" b="0" i="0" u="none" strike="noStrike" cap="none" normalizeH="0" baseline="0" dirty="0" err="1">
+              <a:rPr kumimoji="0" lang="en-US" altLang="es-ES" sz="1400" b="0" i="0" u="none" strike="noStrike" cap="none" normalizeH="0" baseline="0" dirty="0" err="1">
                 <a:ln>
                   <a:noFill/>
                 </a:ln>
@@ -22267,7 +22518,7 @@
               <a:t>noma</a:t>
             </a:r>
             <a:r>
-              <a:rPr kumimoji="0" lang="en-US" altLang="es-ES" sz="1200" b="0" i="0" u="none" strike="noStrike" cap="none" normalizeH="0" baseline="0" dirty="0">
+              <a:rPr kumimoji="0" lang="en-US" altLang="es-ES" sz="1400" b="0" i="0" u="none" strike="noStrike" cap="none" normalizeH="0" baseline="0" dirty="0">
                 <a:ln>
                   <a:noFill/>
                 </a:ln>
@@ -22281,7 +22532,7 @@
               </a:rPr>
               <a:t> de Madrid</a:t>
             </a:r>
-            <a:endParaRPr kumimoji="0" lang="es-ES" altLang="es-ES" sz="400" b="0" i="0" u="none" strike="noStrike" cap="none" normalizeH="0" baseline="0" dirty="0">
+            <a:endParaRPr kumimoji="0" lang="es-ES" altLang="es-ES" sz="500" b="0" i="0" u="none" strike="noStrike" cap="none" normalizeH="0" baseline="0" dirty="0">
               <a:ln>
                 <a:noFill/>
               </a:ln>
@@ -22325,52 +22576,18 @@
               <a:buChar char="§"/>
             </a:pPr>
             <a:r>
-              <a:rPr lang="en-US" sz="1800" dirty="0">
+              <a:rPr lang="en-US" sz="2000" dirty="0">
                 <a:latin typeface="+mj-lt"/>
               </a:rPr>
-              <a:t>The Support Vector Machine is an extension of the Support Vector Classifier, it allows to enlarger the feature space in a specific way using </a:t>
-            </a:r>
-            <a:r>
-              <a:rPr lang="en-US" sz="1800" b="1" i="1" dirty="0">
+              <a:t>What if sets are not perfectly separable? </a:t>
+            </a:r>
+            <a:r>
+              <a:rPr lang="en-US" sz="2000" i="1" dirty="0">
                 <a:latin typeface="+mj-lt"/>
               </a:rPr>
-              <a:t>kernels</a:t>
-            </a:r>
-            <a:r>
-              <a:rPr lang="en-US" sz="1800" i="1" dirty="0">
-                <a:latin typeface="+mj-lt"/>
-              </a:rPr>
-              <a:t>. </a:t>
-            </a:r>
-            <a:r>
-              <a:rPr lang="en-US" sz="1800" dirty="0">
-                <a:latin typeface="+mj-lt"/>
-              </a:rPr>
-              <a:t>In other words, look for boundaries o different shapes.</a:t>
-            </a:r>
-          </a:p>
-          <a:p>
-            <a:pPr>
-              <a:lnSpc>
-                <a:spcPct val="100000"/>
-              </a:lnSpc>
-              <a:buFont typeface="Wingdings" panose="05000000000000000000" pitchFamily="2" charset="2"/>
-              <a:buChar char="§"/>
-            </a:pPr>
-            <a:r>
-              <a:rPr lang="en-US" sz="1800" dirty="0">
-                <a:latin typeface="+mj-lt"/>
-              </a:rPr>
-              <a:t>Here is the scikit-learn documentation about SVM: </a:t>
-            </a:r>
-            <a:r>
-              <a:rPr lang="en-US" sz="1800" dirty="0">
-                <a:latin typeface="+mj-lt"/>
-                <a:hlinkClick r:id="rId2"/>
-              </a:rPr>
-              <a:t>https://scikit-learn.org/stable/modules/generated/sklearn.svm.SVC.html?highlight=svc#sklearn.svm.SVC</a:t>
-            </a:r>
-            <a:endParaRPr lang="en-US" sz="1800" dirty="0">
+              <a:t>Kernels</a:t>
+            </a:r>
+            <a:endParaRPr lang="en-US" sz="1200" i="1" dirty="0">
               <a:latin typeface="+mj-lt"/>
             </a:endParaRPr>
           </a:p>
@@ -22386,46 +22603,50 @@
               <a:latin typeface="+mj-lt"/>
             </a:endParaRPr>
           </a:p>
+          <a:p>
+            <a:pPr>
+              <a:lnSpc>
+                <a:spcPct val="100000"/>
+              </a:lnSpc>
+              <a:buFont typeface="Wingdings" panose="05000000000000000000" pitchFamily="2" charset="2"/>
+              <a:buChar char="§"/>
+            </a:pPr>
+            <a:endParaRPr lang="en-US" sz="1600" dirty="0">
+              <a:latin typeface="+mj-lt"/>
+            </a:endParaRPr>
+          </a:p>
         </p:txBody>
       </p:sp>
-      <p:sp>
-        <p:nvSpPr>
-          <p:cNvPr id="12" name="TextBox 11">
+      <p:pic>
+        <p:nvPicPr>
+          <p:cNvPr id="11" name="Picture 10">
             <a:extLst>
               <a:ext uri="{FF2B5EF4-FFF2-40B4-BE49-F238E27FC236}">
-                <a16:creationId xmlns:a16="http://schemas.microsoft.com/office/drawing/2014/main" id="{B4DA19C9-C5DC-5E6E-F21C-D9FC76E063EE}"/>
+                <a16:creationId xmlns:a16="http://schemas.microsoft.com/office/drawing/2014/main" id="{D6474E9B-2814-21BD-E486-F59921F3FDF6}"/>
               </a:ext>
             </a:extLst>
           </p:cNvPr>
-          <p:cNvSpPr txBox="1"/>
+          <p:cNvPicPr>
+            <a:picLocks noChangeAspect="1"/>
+          </p:cNvPicPr>
           <p:nvPr/>
-        </p:nvSpPr>
+        </p:nvPicPr>
+        <p:blipFill>
+          <a:blip r:embed="rId2"/>
+          <a:stretch>
+            <a:fillRect/>
+          </a:stretch>
+        </p:blipFill>
         <p:spPr>
           <a:xfrm>
-            <a:off x="3684570" y="6124287"/>
-            <a:ext cx="2301131" cy="295345"/>
+            <a:off x="1619598" y="2635150"/>
+            <a:ext cx="3399827" cy="3335731"/>
           </a:xfrm>
           <a:prstGeom prst="rect">
             <a:avLst/>
           </a:prstGeom>
-          <a:noFill/>
         </p:spPr>
-        <p:txBody>
-          <a:bodyPr wrap="square" rtlCol="0">
-            <a:spAutoFit/>
-          </a:bodyPr>
-          <a:lstStyle/>
-          <a:p>
-            <a:pPr algn="ctr"/>
-            <a:r>
-              <a:rPr lang="en-US" sz="1400" dirty="0">
-                <a:latin typeface="+mj-lt"/>
-              </a:rPr>
-              <a:t>Polynomial kernel (degree 3)</a:t>
-            </a:r>
-          </a:p>
-        </p:txBody>
-      </p:sp>
+      </p:pic>
       <p:sp>
         <p:nvSpPr>
           <p:cNvPr id="13" name="TextBox 12">
@@ -22440,7 +22661,7 @@
         </p:nvSpPr>
         <p:spPr>
           <a:xfrm>
-            <a:off x="6642248" y="6132934"/>
+            <a:off x="2654777" y="6023074"/>
             <a:ext cx="2091937" cy="307777"/>
           </a:xfrm>
           <a:prstGeom prst="rect">
@@ -22459,45 +22680,135 @@
               <a:rPr lang="en-US" sz="1400" dirty="0">
                 <a:latin typeface="+mj-lt"/>
               </a:rPr>
-              <a:t>Radial kernel</a:t>
+              <a:t>Soft margin</a:t>
             </a:r>
           </a:p>
         </p:txBody>
       </p:sp>
-      <p:pic>
-        <p:nvPicPr>
-          <p:cNvPr id="9" name="Picture 8">
+      <p:sp>
+        <p:nvSpPr>
+          <p:cNvPr id="7" name="TextBox 6">
             <a:extLst>
               <a:ext uri="{FF2B5EF4-FFF2-40B4-BE49-F238E27FC236}">
-                <a16:creationId xmlns:a16="http://schemas.microsoft.com/office/drawing/2014/main" id="{0E3593C8-56F2-0955-E3A7-D7AE00F48F0A}"/>
+                <a16:creationId xmlns:a16="http://schemas.microsoft.com/office/drawing/2014/main" id="{22B2EC76-678F-F957-F964-E20A68DD6FF9}"/>
               </a:ext>
             </a:extLst>
           </p:cNvPr>
-          <p:cNvPicPr>
-            <a:picLocks noChangeAspect="1"/>
-          </p:cNvPicPr>
+          <p:cNvSpPr txBox="1"/>
           <p:nvPr/>
-        </p:nvPicPr>
-        <p:blipFill>
-          <a:blip r:embed="rId3"/>
-          <a:stretch>
-            <a:fillRect/>
-          </a:stretch>
-        </p:blipFill>
+        </p:nvSpPr>
         <p:spPr>
           <a:xfrm>
-            <a:off x="2923253" y="3237952"/>
-            <a:ext cx="5967984" cy="2892987"/>
+            <a:off x="5868422" y="2635150"/>
+            <a:ext cx="5006718" cy="2862322"/>
           </a:xfrm>
           <a:prstGeom prst="rect">
             <a:avLst/>
           </a:prstGeom>
+          <a:noFill/>
         </p:spPr>
-      </p:pic>
+        <p:txBody>
+          <a:bodyPr wrap="square" rtlCol="0">
+            <a:spAutoFit/>
+          </a:bodyPr>
+          <a:lstStyle/>
+          <a:p>
+            <a:r>
+              <a:rPr lang="en-US" u="sng" dirty="0">
+                <a:latin typeface="+mj-lt"/>
+              </a:rPr>
+              <a:t>Soft margin</a:t>
+            </a:r>
+          </a:p>
+          <a:p>
+            <a:endParaRPr lang="en-US" dirty="0">
+              <a:latin typeface="+mj-lt"/>
+            </a:endParaRPr>
+          </a:p>
+          <a:p>
+            <a:r>
+              <a:rPr lang="en-US" dirty="0">
+                <a:latin typeface="+mj-lt"/>
+              </a:rPr>
+              <a:t>Letting the classifier </a:t>
+            </a:r>
+            <a:r>
+              <a:rPr lang="en-US" i="1" dirty="0">
+                <a:latin typeface="+mj-lt"/>
+              </a:rPr>
+              <a:t>fail</a:t>
+            </a:r>
+            <a:r>
+              <a:rPr lang="en-US" dirty="0">
+                <a:latin typeface="+mj-lt"/>
+              </a:rPr>
+              <a:t> for some observations, can make it:</a:t>
+            </a:r>
+          </a:p>
+          <a:p>
+            <a:endParaRPr lang="en-US" dirty="0">
+              <a:latin typeface="+mj-lt"/>
+            </a:endParaRPr>
+          </a:p>
+          <a:p>
+            <a:pPr marL="285750" indent="-285750">
+              <a:buFont typeface="Wingdings" panose="05000000000000000000" pitchFamily="2" charset="2"/>
+              <a:buChar char="§"/>
+            </a:pPr>
+            <a:r>
+              <a:rPr lang="en-US" dirty="0">
+                <a:latin typeface="+mj-lt"/>
+              </a:rPr>
+              <a:t>A better classifier of </a:t>
+            </a:r>
+            <a:r>
+              <a:rPr lang="en-US" i="1" dirty="0">
+                <a:latin typeface="+mj-lt"/>
+              </a:rPr>
+              <a:t>most</a:t>
+            </a:r>
+            <a:r>
+              <a:rPr lang="en-US" dirty="0">
+                <a:latin typeface="+mj-lt"/>
+              </a:rPr>
+              <a:t> of the observations</a:t>
+            </a:r>
+          </a:p>
+          <a:p>
+            <a:pPr marL="285750" indent="-285750">
+              <a:buFont typeface="Wingdings" panose="05000000000000000000" pitchFamily="2" charset="2"/>
+              <a:buChar char="§"/>
+            </a:pPr>
+            <a:r>
+              <a:rPr lang="en-US" dirty="0">
+                <a:latin typeface="+mj-lt"/>
+              </a:rPr>
+              <a:t>More robust to individual observations</a:t>
+            </a:r>
+          </a:p>
+          <a:p>
+            <a:pPr marL="285750" indent="-285750">
+              <a:buFont typeface="Wingdings" panose="05000000000000000000" pitchFamily="2" charset="2"/>
+              <a:buChar char="§"/>
+            </a:pPr>
+            <a:endParaRPr lang="en-US" dirty="0">
+              <a:latin typeface="+mj-lt"/>
+            </a:endParaRPr>
+          </a:p>
+          <a:p>
+            <a:r>
+              <a:rPr lang="en-US" dirty="0">
+                <a:latin typeface="+mj-lt"/>
+              </a:rPr>
+              <a:t>However, this imposes additional restrictions in the optimization problem to be solved.</a:t>
+            </a:r>
+          </a:p>
+        </p:txBody>
+      </p:sp>
     </p:spTree>
     <p:extLst>
       <p:ext uri="{BB962C8B-B14F-4D97-AF65-F5344CB8AC3E}">
-        <p14:creationId xmlns:p14="http://schemas.microsoft.com/office/powerpoint/2010/main" val="3244398427"/>
+        <p14:creationId xmlns:p14="http://schemas.microsoft.com/office/powerpoint/2010/main" val="2946059860"/>
       </p:ext>
     </p:extLst>
   </p:cSld>
@@ -22549,27 +22860,7 @@
           <a:p>
             <a:r>
               <a:rPr lang="en-US" sz="4000" dirty="0"/>
-              <a:t>Classifiers – </a:t>
-            </a:r>
-            <a:r>
-              <a:rPr lang="en-US" sz="4000" i="1" dirty="0"/>
-              <a:t>k</a:t>
-            </a:r>
-            <a:r>
-              <a:rPr lang="en-US" sz="4000" dirty="0"/>
-              <a:t>-Nearest Neighbors </a:t>
-            </a:r>
-            <a:r>
-              <a:rPr lang="en-US" sz="4000" i="1" dirty="0"/>
-              <a:t>(k-</a:t>
-            </a:r>
-            <a:r>
-              <a:rPr lang="en-US" sz="4000" dirty="0"/>
-              <a:t>NN</a:t>
-            </a:r>
-            <a:r>
-              <a:rPr lang="en-US" sz="4000" i="1" dirty="0"/>
-              <a:t>)</a:t>
+              <a:t>Classifiers – Support Vector Machines (SVM)</a:t>
             </a:r>
           </a:p>
         </p:txBody>
@@ -22911,6 +23202,621 @@
       </p:sp>
       <p:sp>
         <p:nvSpPr>
+          <p:cNvPr id="3" name="Content Placeholder 2">
+            <a:extLst>
+              <a:ext uri="{FF2B5EF4-FFF2-40B4-BE49-F238E27FC236}">
+                <a16:creationId xmlns:a16="http://schemas.microsoft.com/office/drawing/2014/main" id="{F7EF27C5-01B7-9F60-ECDA-A1F376586FC5}"/>
+              </a:ext>
+            </a:extLst>
+          </p:cNvPr>
+          <p:cNvSpPr>
+            <a:spLocks noGrp="1"/>
+          </p:cNvSpPr>
+          <p:nvPr>
+            <p:ph idx="1"/>
+          </p:nvPr>
+        </p:nvSpPr>
+        <p:spPr/>
+        <p:txBody>
+          <a:bodyPr>
+            <a:normAutofit/>
+          </a:bodyPr>
+          <a:lstStyle/>
+          <a:p>
+            <a:pPr>
+              <a:lnSpc>
+                <a:spcPct val="100000"/>
+              </a:lnSpc>
+              <a:buFont typeface="Wingdings" panose="05000000000000000000" pitchFamily="2" charset="2"/>
+              <a:buChar char="§"/>
+            </a:pPr>
+            <a:r>
+              <a:rPr lang="en-US" sz="1800" dirty="0">
+                <a:latin typeface="+mj-lt"/>
+              </a:rPr>
+              <a:t>The Support Vector Machine is an extension of the Support Vector Classifier, it allows to enlarger the feature space in a specific way using </a:t>
+            </a:r>
+            <a:r>
+              <a:rPr lang="en-US" sz="1800" b="1" i="1" dirty="0">
+                <a:latin typeface="+mj-lt"/>
+              </a:rPr>
+              <a:t>kernels</a:t>
+            </a:r>
+            <a:r>
+              <a:rPr lang="en-US" sz="1800" i="1" dirty="0">
+                <a:latin typeface="+mj-lt"/>
+              </a:rPr>
+              <a:t>. </a:t>
+            </a:r>
+            <a:r>
+              <a:rPr lang="en-US" sz="1800" dirty="0">
+                <a:latin typeface="+mj-lt"/>
+              </a:rPr>
+              <a:t>In other words, look for boundaries o different shapes.</a:t>
+            </a:r>
+          </a:p>
+          <a:p>
+            <a:pPr>
+              <a:lnSpc>
+                <a:spcPct val="100000"/>
+              </a:lnSpc>
+              <a:buFont typeface="Wingdings" panose="05000000000000000000" pitchFamily="2" charset="2"/>
+              <a:buChar char="§"/>
+            </a:pPr>
+            <a:r>
+              <a:rPr lang="en-US" sz="1800" dirty="0">
+                <a:latin typeface="+mj-lt"/>
+              </a:rPr>
+              <a:t>Here is the scikit-learn documentation about SVM: </a:t>
+            </a:r>
+            <a:r>
+              <a:rPr lang="en-US" sz="1800" dirty="0">
+                <a:latin typeface="+mj-lt"/>
+                <a:hlinkClick r:id="rId2"/>
+              </a:rPr>
+              <a:t>https://scikit-learn.org/stable/modules/generated/sklearn.svm.SVC.html?highlight=svc#sklearn.svm.SVC</a:t>
+            </a:r>
+            <a:endParaRPr lang="en-US" sz="1800" dirty="0">
+              <a:latin typeface="+mj-lt"/>
+            </a:endParaRPr>
+          </a:p>
+          <a:p>
+            <a:pPr>
+              <a:lnSpc>
+                <a:spcPct val="100000"/>
+              </a:lnSpc>
+              <a:buFont typeface="Wingdings" panose="05000000000000000000" pitchFamily="2" charset="2"/>
+              <a:buChar char="§"/>
+            </a:pPr>
+            <a:endParaRPr lang="en-US" sz="1800" dirty="0">
+              <a:latin typeface="+mj-lt"/>
+            </a:endParaRPr>
+          </a:p>
+        </p:txBody>
+      </p:sp>
+      <p:sp>
+        <p:nvSpPr>
+          <p:cNvPr id="12" name="TextBox 11">
+            <a:extLst>
+              <a:ext uri="{FF2B5EF4-FFF2-40B4-BE49-F238E27FC236}">
+                <a16:creationId xmlns:a16="http://schemas.microsoft.com/office/drawing/2014/main" id="{B4DA19C9-C5DC-5E6E-F21C-D9FC76E063EE}"/>
+              </a:ext>
+            </a:extLst>
+          </p:cNvPr>
+          <p:cNvSpPr txBox="1"/>
+          <p:nvPr/>
+        </p:nvSpPr>
+        <p:spPr>
+          <a:xfrm>
+            <a:off x="3684570" y="6124287"/>
+            <a:ext cx="2301131" cy="295345"/>
+          </a:xfrm>
+          <a:prstGeom prst="rect">
+            <a:avLst/>
+          </a:prstGeom>
+          <a:noFill/>
+        </p:spPr>
+        <p:txBody>
+          <a:bodyPr wrap="square" rtlCol="0">
+            <a:spAutoFit/>
+          </a:bodyPr>
+          <a:lstStyle/>
+          <a:p>
+            <a:pPr algn="ctr"/>
+            <a:r>
+              <a:rPr lang="en-US" sz="1400" dirty="0">
+                <a:latin typeface="+mj-lt"/>
+              </a:rPr>
+              <a:t>Polynomial kernel (degree 3)</a:t>
+            </a:r>
+          </a:p>
+        </p:txBody>
+      </p:sp>
+      <p:sp>
+        <p:nvSpPr>
+          <p:cNvPr id="13" name="TextBox 12">
+            <a:extLst>
+              <a:ext uri="{FF2B5EF4-FFF2-40B4-BE49-F238E27FC236}">
+                <a16:creationId xmlns:a16="http://schemas.microsoft.com/office/drawing/2014/main" id="{3567DF27-2684-0050-C0DD-AAF72EAA15D8}"/>
+              </a:ext>
+            </a:extLst>
+          </p:cNvPr>
+          <p:cNvSpPr txBox="1"/>
+          <p:nvPr/>
+        </p:nvSpPr>
+        <p:spPr>
+          <a:xfrm>
+            <a:off x="6642248" y="6132934"/>
+            <a:ext cx="2091937" cy="307777"/>
+          </a:xfrm>
+          <a:prstGeom prst="rect">
+            <a:avLst/>
+          </a:prstGeom>
+          <a:noFill/>
+        </p:spPr>
+        <p:txBody>
+          <a:bodyPr wrap="square" rtlCol="0">
+            <a:spAutoFit/>
+          </a:bodyPr>
+          <a:lstStyle/>
+          <a:p>
+            <a:pPr algn="ctr"/>
+            <a:r>
+              <a:rPr lang="en-US" sz="1400" dirty="0">
+                <a:latin typeface="+mj-lt"/>
+              </a:rPr>
+              <a:t>Radial kernel</a:t>
+            </a:r>
+          </a:p>
+        </p:txBody>
+      </p:sp>
+      <p:pic>
+        <p:nvPicPr>
+          <p:cNvPr id="9" name="Picture 8">
+            <a:extLst>
+              <a:ext uri="{FF2B5EF4-FFF2-40B4-BE49-F238E27FC236}">
+                <a16:creationId xmlns:a16="http://schemas.microsoft.com/office/drawing/2014/main" id="{0E3593C8-56F2-0955-E3A7-D7AE00F48F0A}"/>
+              </a:ext>
+            </a:extLst>
+          </p:cNvPr>
+          <p:cNvPicPr>
+            <a:picLocks noChangeAspect="1"/>
+          </p:cNvPicPr>
+          <p:nvPr/>
+        </p:nvPicPr>
+        <p:blipFill>
+          <a:blip r:embed="rId3"/>
+          <a:stretch>
+            <a:fillRect/>
+          </a:stretch>
+        </p:blipFill>
+        <p:spPr>
+          <a:xfrm>
+            <a:off x="2923253" y="3237952"/>
+            <a:ext cx="5967984" cy="2892987"/>
+          </a:xfrm>
+          <a:prstGeom prst="rect">
+            <a:avLst/>
+          </a:prstGeom>
+        </p:spPr>
+      </p:pic>
+    </p:spTree>
+    <p:extLst>
+      <p:ext uri="{BB962C8B-B14F-4D97-AF65-F5344CB8AC3E}">
+        <p14:creationId xmlns:p14="http://schemas.microsoft.com/office/powerpoint/2010/main" val="3244398427"/>
+      </p:ext>
+    </p:extLst>
+  </p:cSld>
+  <p:clrMapOvr>
+    <a:masterClrMapping/>
+  </p:clrMapOvr>
+</p:sld>
+</file>
+
+<file path=ppt/slides/slide12.xml><?xml version="1.0" encoding="utf-8"?>
+<p:sld xmlns:a="http://schemas.openxmlformats.org/drawingml/2006/main" xmlns:r="http://schemas.openxmlformats.org/officeDocument/2006/relationships" xmlns:p="http://schemas.openxmlformats.org/presentationml/2006/main">
+  <p:cSld>
+    <p:spTree>
+      <p:nvGrpSpPr>
+        <p:cNvPr id="1" name=""/>
+        <p:cNvGrpSpPr/>
+        <p:nvPr/>
+      </p:nvGrpSpPr>
+      <p:grpSpPr>
+        <a:xfrm>
+          <a:off x="0" y="0"/>
+          <a:ext cx="0" cy="0"/>
+          <a:chOff x="0" y="0"/>
+          <a:chExt cx="0" cy="0"/>
+        </a:xfrm>
+      </p:grpSpPr>
+      <p:sp>
+        <p:nvSpPr>
+          <p:cNvPr id="2" name="Title 1">
+            <a:extLst>
+              <a:ext uri="{FF2B5EF4-FFF2-40B4-BE49-F238E27FC236}">
+                <a16:creationId xmlns:a16="http://schemas.microsoft.com/office/drawing/2014/main" id="{15C869D5-4E6C-6766-7E06-98B25E955D87}"/>
+              </a:ext>
+            </a:extLst>
+          </p:cNvPr>
+          <p:cNvSpPr>
+            <a:spLocks noGrp="1"/>
+          </p:cNvSpPr>
+          <p:nvPr>
+            <p:ph type="title"/>
+          </p:nvPr>
+        </p:nvSpPr>
+        <p:spPr/>
+        <p:txBody>
+          <a:bodyPr>
+            <a:normAutofit/>
+          </a:bodyPr>
+          <a:lstStyle/>
+          <a:p>
+            <a:r>
+              <a:rPr lang="en-US" sz="4000" dirty="0"/>
+              <a:t>Classifiers – </a:t>
+            </a:r>
+            <a:r>
+              <a:rPr lang="en-US" sz="4000" i="1" dirty="0"/>
+              <a:t>k</a:t>
+            </a:r>
+            <a:r>
+              <a:rPr lang="en-US" sz="4000" dirty="0"/>
+              <a:t>-Nearest Neighbors </a:t>
+            </a:r>
+            <a:r>
+              <a:rPr lang="en-US" sz="4000" i="1" dirty="0"/>
+              <a:t>(k-</a:t>
+            </a:r>
+            <a:r>
+              <a:rPr lang="en-US" sz="4000" dirty="0"/>
+              <a:t>NN</a:t>
+            </a:r>
+            <a:r>
+              <a:rPr lang="en-US" sz="4000" i="1" dirty="0"/>
+              <a:t>)</a:t>
+            </a:r>
+          </a:p>
+        </p:txBody>
+      </p:sp>
+      <p:sp>
+        <p:nvSpPr>
+          <p:cNvPr id="4" name="Rectángulo 3">
+            <a:extLst>
+              <a:ext uri="{FF2B5EF4-FFF2-40B4-BE49-F238E27FC236}">
+                <a16:creationId xmlns:a16="http://schemas.microsoft.com/office/drawing/2014/main" id="{27E372AA-1ACE-5D2D-EDED-66DB6F5F4F88}"/>
+              </a:ext>
+            </a:extLst>
+          </p:cNvPr>
+          <p:cNvSpPr/>
+          <p:nvPr/>
+        </p:nvSpPr>
+        <p:spPr>
+          <a:xfrm>
+            <a:off x="0" y="0"/>
+            <a:ext cx="374469" cy="6858000"/>
+          </a:xfrm>
+          <a:prstGeom prst="rect">
+            <a:avLst/>
+          </a:prstGeom>
+        </p:spPr>
+        <p:style>
+          <a:lnRef idx="2">
+            <a:schemeClr val="accent2">
+              <a:shade val="50000"/>
+            </a:schemeClr>
+          </a:lnRef>
+          <a:fillRef idx="1">
+            <a:schemeClr val="accent2"/>
+          </a:fillRef>
+          <a:effectRef idx="0">
+            <a:schemeClr val="accent2"/>
+          </a:effectRef>
+          <a:fontRef idx="minor">
+            <a:schemeClr val="lt1"/>
+          </a:fontRef>
+        </p:style>
+        <p:txBody>
+          <a:bodyPr rtlCol="0" anchor="ctr"/>
+          <a:lstStyle/>
+          <a:p>
+            <a:pPr algn="ctr"/>
+            <a:endParaRPr lang="es-ES"/>
+          </a:p>
+        </p:txBody>
+      </p:sp>
+      <p:sp>
+        <p:nvSpPr>
+          <p:cNvPr id="5" name="Rectangle 143">
+            <a:extLst>
+              <a:ext uri="{FF2B5EF4-FFF2-40B4-BE49-F238E27FC236}">
+                <a16:creationId xmlns:a16="http://schemas.microsoft.com/office/drawing/2014/main" id="{4CAC6C5C-8798-AF6F-C852-967659577BF3}"/>
+              </a:ext>
+            </a:extLst>
+          </p:cNvPr>
+          <p:cNvSpPr>
+            <a:spLocks noChangeArrowheads="1"/>
+          </p:cNvSpPr>
+          <p:nvPr/>
+        </p:nvSpPr>
+        <p:spPr bwMode="auto">
+          <a:xfrm>
+            <a:off x="448342" y="6482412"/>
+            <a:ext cx="5730175" cy="276999"/>
+          </a:xfrm>
+          <a:prstGeom prst="rect">
+            <a:avLst/>
+          </a:prstGeom>
+          <a:noFill/>
+          <a:ln>
+            <a:noFill/>
+          </a:ln>
+          <a:effectLst/>
+          <a:extLst>
+            <a:ext uri="{909E8E84-426E-40DD-AFC4-6F175D3DCCD1}">
+              <a14:hiddenFill xmlns:a14="http://schemas.microsoft.com/office/drawing/2010/main">
+                <a:solidFill>
+                  <a:schemeClr val="accent1"/>
+                </a:solidFill>
+              </a14:hiddenFill>
+            </a:ext>
+            <a:ext uri="{91240B29-F687-4F45-9708-019B960494DF}">
+              <a14:hiddenLine xmlns:a14="http://schemas.microsoft.com/office/drawing/2010/main" w="9525">
+                <a:solidFill>
+                  <a:schemeClr val="tx1"/>
+                </a:solidFill>
+                <a:miter lim="800000"/>
+                <a:headEnd/>
+                <a:tailEnd/>
+              </a14:hiddenLine>
+            </a:ext>
+            <a:ext uri="{AF507438-7753-43E0-B8FC-AC1667EBCBE1}">
+              <a14:hiddenEffects xmlns:a14="http://schemas.microsoft.com/office/drawing/2010/main">
+                <a:effectLst>
+                  <a:outerShdw dist="35921" dir="2700000" algn="ctr" rotWithShape="0">
+                    <a:schemeClr val="bg2"/>
+                  </a:outerShdw>
+                </a:effectLst>
+              </a14:hiddenEffects>
+            </a:ext>
+          </a:extLst>
+        </p:spPr>
+        <p:txBody>
+          <a:bodyPr vert="horz" wrap="square" lIns="91440" tIns="45720" rIns="91440" bIns="45720" numCol="1" anchor="ctr" anchorCtr="0" compatLnSpc="1">
+            <a:prstTxWarp prst="textNoShape">
+              <a:avLst/>
+            </a:prstTxWarp>
+            <a:spAutoFit/>
+          </a:bodyPr>
+          <a:lstStyle/>
+          <a:p>
+            <a:pPr marL="0" marR="0" lvl="0" indent="0" algn="l" defTabSz="914400" rtl="0" eaLnBrk="0" fontAlgn="base" latinLnBrk="0" hangingPunct="0">
+              <a:lnSpc>
+                <a:spcPct val="100000"/>
+              </a:lnSpc>
+              <a:spcBef>
+                <a:spcPct val="0"/>
+              </a:spcBef>
+              <a:spcAft>
+                <a:spcPct val="0"/>
+              </a:spcAft>
+              <a:buClrTx/>
+              <a:buSzTx/>
+              <a:buFontTx/>
+              <a:buNone/>
+              <a:tabLst/>
+            </a:pPr>
+            <a:r>
+              <a:rPr kumimoji="0" lang="en-US" altLang="es-ES" sz="1200" b="0" i="0" u="none" strike="noStrike" cap="none" normalizeH="0" baseline="0" dirty="0">
+                <a:ln>
+                  <a:noFill/>
+                </a:ln>
+                <a:solidFill>
+                  <a:srgbClr val="F4A200"/>
+                </a:solidFill>
+                <a:effectLst/>
+                <a:latin typeface="Arial" panose="020B0604020202020204" pitchFamily="34" charset="0"/>
+                <a:ea typeface="Myriad Pro Light"/>
+                <a:cs typeface="Times New Roman" panose="02020603050405020304" pitchFamily="18" charset="0"/>
+              </a:rPr>
+              <a:t>Master in Quantitative Economic Analysis </a:t>
+            </a:r>
+            <a:r>
+              <a:rPr kumimoji="0" lang="en-US" altLang="es-ES" sz="1200" b="0" i="0" u="none" strike="noStrike" cap="none" normalizeH="0" baseline="0" dirty="0" err="1">
+                <a:ln>
+                  <a:noFill/>
+                </a:ln>
+                <a:solidFill>
+                  <a:srgbClr val="F4A200"/>
+                </a:solidFill>
+                <a:effectLst/>
+                <a:latin typeface="Arial" panose="020B0604020202020204" pitchFamily="34" charset="0"/>
+                <a:ea typeface="Myriad Pro Light"/>
+                <a:cs typeface="Times New Roman" panose="02020603050405020304" pitchFamily="18" charset="0"/>
+              </a:rPr>
+              <a:t>MQuEA</a:t>
+            </a:r>
+            <a:endParaRPr kumimoji="0" lang="es-ES" altLang="es-ES" sz="400" b="0" i="0" u="none" strike="noStrike" cap="none" normalizeH="0" baseline="0" dirty="0">
+              <a:ln>
+                <a:noFill/>
+              </a:ln>
+              <a:solidFill>
+                <a:schemeClr val="tx1"/>
+              </a:solidFill>
+              <a:effectLst/>
+              <a:latin typeface="Arial" panose="020B0604020202020204" pitchFamily="34" charset="0"/>
+            </a:endParaRPr>
+          </a:p>
+        </p:txBody>
+      </p:sp>
+      <p:sp>
+        <p:nvSpPr>
+          <p:cNvPr id="6" name="Rectangle 143">
+            <a:extLst>
+              <a:ext uri="{FF2B5EF4-FFF2-40B4-BE49-F238E27FC236}">
+                <a16:creationId xmlns:a16="http://schemas.microsoft.com/office/drawing/2014/main" id="{09E0FB32-C00A-A390-E094-76FC3EA5C288}"/>
+              </a:ext>
+            </a:extLst>
+          </p:cNvPr>
+          <p:cNvSpPr>
+            <a:spLocks noChangeArrowheads="1"/>
+          </p:cNvSpPr>
+          <p:nvPr/>
+        </p:nvSpPr>
+        <p:spPr bwMode="auto">
+          <a:xfrm>
+            <a:off x="6186394" y="6493050"/>
+            <a:ext cx="5730175" cy="276999"/>
+          </a:xfrm>
+          <a:prstGeom prst="rect">
+            <a:avLst/>
+          </a:prstGeom>
+          <a:noFill/>
+          <a:ln>
+            <a:noFill/>
+          </a:ln>
+          <a:effectLst/>
+          <a:extLst>
+            <a:ext uri="{909E8E84-426E-40DD-AFC4-6F175D3DCCD1}">
+              <a14:hiddenFill xmlns:a14="http://schemas.microsoft.com/office/drawing/2010/main">
+                <a:solidFill>
+                  <a:schemeClr val="accent1"/>
+                </a:solidFill>
+              </a14:hiddenFill>
+            </a:ext>
+            <a:ext uri="{91240B29-F687-4F45-9708-019B960494DF}">
+              <a14:hiddenLine xmlns:a14="http://schemas.microsoft.com/office/drawing/2010/main" w="9525">
+                <a:solidFill>
+                  <a:schemeClr val="tx1"/>
+                </a:solidFill>
+                <a:miter lim="800000"/>
+                <a:headEnd/>
+                <a:tailEnd/>
+              </a14:hiddenLine>
+            </a:ext>
+            <a:ext uri="{AF507438-7753-43E0-B8FC-AC1667EBCBE1}">
+              <a14:hiddenEffects xmlns:a14="http://schemas.microsoft.com/office/drawing/2010/main">
+                <a:effectLst>
+                  <a:outerShdw dist="35921" dir="2700000" algn="ctr" rotWithShape="0">
+                    <a:schemeClr val="bg2"/>
+                  </a:outerShdw>
+                </a:effectLst>
+              </a14:hiddenEffects>
+            </a:ext>
+          </a:extLst>
+        </p:spPr>
+        <p:txBody>
+          <a:bodyPr vert="horz" wrap="square" lIns="91440" tIns="45720" rIns="91440" bIns="45720" numCol="1" anchor="ctr" anchorCtr="0" compatLnSpc="1">
+            <a:prstTxWarp prst="textNoShape">
+              <a:avLst/>
+            </a:prstTxWarp>
+            <a:spAutoFit/>
+          </a:bodyPr>
+          <a:lstStyle/>
+          <a:p>
+            <a:pPr marL="0" marR="0" lvl="0" indent="0" algn="r" defTabSz="914400" rtl="0" eaLnBrk="0" fontAlgn="base" latinLnBrk="0" hangingPunct="0">
+              <a:lnSpc>
+                <a:spcPct val="100000"/>
+              </a:lnSpc>
+              <a:spcBef>
+                <a:spcPct val="0"/>
+              </a:spcBef>
+              <a:spcAft>
+                <a:spcPct val="0"/>
+              </a:spcAft>
+              <a:buClrTx/>
+              <a:buSzTx/>
+              <a:buFontTx/>
+              <a:buNone/>
+              <a:tabLst/>
+            </a:pPr>
+            <a:r>
+              <a:rPr kumimoji="0" lang="en-US" altLang="es-ES" sz="1200" b="0" i="0" u="none" strike="noStrike" cap="none" normalizeH="0" baseline="0" dirty="0">
+                <a:ln>
+                  <a:noFill/>
+                </a:ln>
+                <a:solidFill>
+                  <a:srgbClr val="F4A200"/>
+                </a:solidFill>
+                <a:effectLst/>
+                <a:latin typeface="Arial" panose="020B0604020202020204" pitchFamily="34" charset="0"/>
+                <a:ea typeface="Myriad Pro Light"/>
+                <a:cs typeface="Times New Roman" panose="02020603050405020304" pitchFamily="18" charset="0"/>
+              </a:rPr>
+              <a:t>Universidad </a:t>
+            </a:r>
+            <a:r>
+              <a:rPr kumimoji="0" lang="en-US" altLang="es-ES" sz="1200" b="0" i="0" u="none" strike="noStrike" cap="none" normalizeH="0" baseline="0" dirty="0" err="1">
+                <a:ln>
+                  <a:noFill/>
+                </a:ln>
+                <a:solidFill>
+                  <a:srgbClr val="F4A200"/>
+                </a:solidFill>
+                <a:effectLst/>
+                <a:latin typeface="Arial" panose="020B0604020202020204" pitchFamily="34" charset="0"/>
+                <a:ea typeface="Myriad Pro Light"/>
+                <a:cs typeface="Times New Roman" panose="02020603050405020304" pitchFamily="18" charset="0"/>
+              </a:rPr>
+              <a:t>Aut</a:t>
+            </a:r>
+            <a:r>
+              <a:rPr lang="en-US" altLang="es-ES" sz="1200" dirty="0" err="1">
+                <a:solidFill>
+                  <a:srgbClr val="F4A200"/>
+                </a:solidFill>
+                <a:latin typeface="Arial" panose="020B0604020202020204" pitchFamily="34" charset="0"/>
+                <a:ea typeface="Myriad Pro Light"/>
+                <a:cs typeface="Times New Roman" panose="02020603050405020304" pitchFamily="18" charset="0"/>
+              </a:rPr>
+              <a:t>ó</a:t>
+            </a:r>
+            <a:r>
+              <a:rPr kumimoji="0" lang="en-US" altLang="es-ES" sz="1200" b="0" i="0" u="none" strike="noStrike" cap="none" normalizeH="0" baseline="0" dirty="0" err="1">
+                <a:ln>
+                  <a:noFill/>
+                </a:ln>
+                <a:solidFill>
+                  <a:srgbClr val="F4A200"/>
+                </a:solidFill>
+                <a:effectLst/>
+                <a:latin typeface="Arial" panose="020B0604020202020204" pitchFamily="34" charset="0"/>
+                <a:ea typeface="Myriad Pro Light"/>
+                <a:cs typeface="Times New Roman" panose="02020603050405020304" pitchFamily="18" charset="0"/>
+              </a:rPr>
+              <a:t>noma</a:t>
+            </a:r>
+            <a:r>
+              <a:rPr kumimoji="0" lang="en-US" altLang="es-ES" sz="1200" b="0" i="0" u="none" strike="noStrike" cap="none" normalizeH="0" baseline="0" dirty="0">
+                <a:ln>
+                  <a:noFill/>
+                </a:ln>
+                <a:solidFill>
+                  <a:srgbClr val="F4A200"/>
+                </a:solidFill>
+                <a:effectLst/>
+                <a:latin typeface="Arial" panose="020B0604020202020204" pitchFamily="34" charset="0"/>
+                <a:ea typeface="Myriad Pro Light"/>
+                <a:cs typeface="Times New Roman" panose="02020603050405020304" pitchFamily="18" charset="0"/>
+              </a:rPr>
+              <a:t> de Madrid</a:t>
+            </a:r>
+            <a:endParaRPr kumimoji="0" lang="es-ES" altLang="es-ES" sz="400" b="0" i="0" u="none" strike="noStrike" cap="none" normalizeH="0" baseline="0" dirty="0">
+              <a:ln>
+                <a:noFill/>
+              </a:ln>
+              <a:solidFill>
+                <a:schemeClr val="tx1"/>
+              </a:solidFill>
+              <a:effectLst/>
+              <a:latin typeface="Arial" panose="020B0604020202020204" pitchFamily="34" charset="0"/>
+            </a:endParaRPr>
+          </a:p>
+        </p:txBody>
+      </p:sp>
+      <p:sp>
+        <p:nvSpPr>
           <p:cNvPr id="7" name="TextBox 6">
             <a:extLst>
               <a:ext uri="{FF2B5EF4-FFF2-40B4-BE49-F238E27FC236}">
@@ -23022,25 +23928,13 @@
                   <a:rPr lang="en-US" sz="2000" i="1" dirty="0">
                     <a:latin typeface="+mj-lt"/>
                   </a:rPr>
-                  <a:t>, </a:t>
-                </a:r>
-                <a:r>
-                  <a:rPr lang="en-US" sz="2000" i="1">
-                    <a:latin typeface="+mj-lt"/>
-                  </a:rPr>
-                  <a:t>k</a:t>
-                </a:r>
-                <a:r>
-                  <a:rPr lang="en-US" sz="2000">
-                    <a:latin typeface="+mj-lt"/>
-                  </a:rPr>
-                  <a:t>-Nearest Neighbors </a:t>
+                  <a:t>, k</a:t>
                 </a:r>
                 <a:r>
                   <a:rPr lang="en-US" sz="2000" dirty="0">
                     <a:latin typeface="+mj-lt"/>
                   </a:rPr>
-                  <a:t>identifies </a:t>
+                  <a:t>-Nearest Neighbors identifies </a:t>
                 </a:r>
                 <a:r>
                   <a:rPr lang="en-US" sz="2000" i="1" dirty="0">
@@ -23458,21 +24352,6 @@
                   <a:latin typeface="+mj-lt"/>
                 </a:endParaRPr>
               </a:p>
-              <a:p>
-                <a:pPr>
-                  <a:lnSpc>
-                    <a:spcPct val="150000"/>
-                  </a:lnSpc>
-                  <a:buFont typeface="Wingdings" panose="05000000000000000000" pitchFamily="2" charset="2"/>
-                  <a:buChar char="§"/>
-                </a:pPr>
-                <a:r>
-                  <a:rPr lang="en-US" sz="2000" dirty="0">
-                    <a:latin typeface="+mj-lt"/>
-                  </a:rPr>
-                  <a:t>Then, Bayes’ rule is applied to classify the test observation to the class with the largest probability</a:t>
-                </a:r>
-              </a:p>
             </p:txBody>
           </p:sp>
         </mc:Choice>
@@ -23529,7 +24408,7 @@
 </p:sld>
 </file>
 
-<file path=ppt/slides/slide12.xml><?xml version="1.0" encoding="utf-8"?>
+<file path=ppt/slides/slide13.xml><?xml version="1.0" encoding="utf-8"?>
 <p:sld xmlns:a="http://schemas.openxmlformats.org/drawingml/2006/main" xmlns:r="http://schemas.openxmlformats.org/officeDocument/2006/relationships" xmlns:p="http://schemas.openxmlformats.org/presentationml/2006/main">
   <p:cSld>
     <p:spTree>
@@ -24047,7 +24926,7 @@
 </p:sld>
 </file>
 
-<file path=ppt/slides/slide13.xml><?xml version="1.0" encoding="utf-8"?>
+<file path=ppt/slides/slide14.xml><?xml version="1.0" encoding="utf-8"?>
 <p:sld xmlns:a="http://schemas.openxmlformats.org/drawingml/2006/main" xmlns:r="http://schemas.openxmlformats.org/officeDocument/2006/relationships" xmlns:p="http://schemas.openxmlformats.org/presentationml/2006/main">
   <p:cSld>
     <p:spTree>
@@ -24471,7 +25350,7 @@
         </p:blipFill>
         <p:spPr>
           <a:xfrm>
-            <a:off x="992593" y="2560560"/>
+            <a:off x="992593" y="2785410"/>
             <a:ext cx="4920169" cy="2764710"/>
           </a:xfrm>
           <a:prstGeom prst="rect">
@@ -24495,7 +25374,7 @@
         </p:nvCxnSpPr>
         <p:spPr>
           <a:xfrm>
-            <a:off x="6525789" y="2560560"/>
+            <a:off x="6525789" y="2785410"/>
             <a:ext cx="0" cy="3392598"/>
           </a:xfrm>
           <a:prstGeom prst="line">
@@ -24544,7 +25423,7 @@
         </p:blipFill>
         <p:spPr>
           <a:xfrm>
-            <a:off x="6941155" y="2560560"/>
+            <a:off x="6941155" y="2785410"/>
             <a:ext cx="4471851" cy="3438797"/>
           </a:xfrm>
           <a:prstGeom prst="rect">
@@ -24567,7 +25446,7 @@
         <p:spPr>
           <a:xfrm>
             <a:off x="992593" y="1484028"/>
-            <a:ext cx="10235040" cy="880369"/>
+            <a:ext cx="10235040" cy="1295868"/>
           </a:xfrm>
           <a:prstGeom prst="rect">
             <a:avLst/>
@@ -24603,7 +25482,7 @@
             </a:r>
             <a:r>
               <a:rPr lang="en-US" dirty="0"/>
-              <a:t> = 1 is too flexible and finds non-existent patterns. As </a:t>
+              <a:t> = 1 is too flexible and finds non-existent patterns (low bias, high variance). As </a:t>
             </a:r>
             <a:r>
               <a:rPr lang="en-US" i="1" dirty="0"/>
@@ -24611,7 +25490,7 @@
             </a:r>
             <a:r>
               <a:rPr lang="en-US" dirty="0"/>
-              <a:t> grows, the method becomes less and less flexible, until becoming an almost straight line.</a:t>
+              <a:t> grows, the method becomes less and less flexible, until becoming an almost straight line.(low variance, high bias)</a:t>
             </a:r>
           </a:p>
         </p:txBody>
@@ -24630,7 +25509,7 @@
         </p:nvCxnSpPr>
         <p:spPr>
           <a:xfrm flipV="1">
-            <a:off x="5681133" y="4800600"/>
+            <a:off x="5681133" y="5025450"/>
             <a:ext cx="3725334" cy="1143000"/>
           </a:xfrm>
           <a:prstGeom prst="straightConnector1">
@@ -24723,6 +25602,61 @@
           </a:p>
         </p:txBody>
       </p:sp>
+      <p:sp>
+        <p:nvSpPr>
+          <p:cNvPr id="3" name="TextBox 2">
+            <a:extLst>
+              <a:ext uri="{FF2B5EF4-FFF2-40B4-BE49-F238E27FC236}">
+                <a16:creationId xmlns:a16="http://schemas.microsoft.com/office/drawing/2014/main" id="{BA89FC74-4CB6-28FE-7039-F264C47F2E4C}"/>
+              </a:ext>
+            </a:extLst>
+          </p:cNvPr>
+          <p:cNvSpPr txBox="1"/>
+          <p:nvPr/>
+        </p:nvSpPr>
+        <p:spPr>
+          <a:xfrm>
+            <a:off x="9421508" y="6021669"/>
+            <a:ext cx="1858137" cy="461665"/>
+          </a:xfrm>
+          <a:prstGeom prst="rect">
+            <a:avLst/>
+          </a:prstGeom>
+          <a:noFill/>
+        </p:spPr>
+        <p:txBody>
+          <a:bodyPr wrap="none" rtlCol="0">
+            <a:spAutoFit/>
+          </a:bodyPr>
+          <a:lstStyle/>
+          <a:p>
+            <a:r>
+              <a:rPr lang="en-US" sz="1200" dirty="0">
+                <a:solidFill>
+                  <a:srgbClr val="FF0000"/>
+                </a:solidFill>
+                <a:sym typeface="Wingdings" panose="05000000000000000000" pitchFamily="2" charset="2"/>
+              </a:rPr>
+              <a:t></a:t>
+            </a:r>
+            <a:endParaRPr lang="en-US" sz="1200" dirty="0">
+              <a:solidFill>
+                <a:srgbClr val="FF0000"/>
+              </a:solidFill>
+            </a:endParaRPr>
+          </a:p>
+          <a:p>
+            <a:r>
+              <a:rPr lang="en-US" sz="1200" dirty="0">
+                <a:solidFill>
+                  <a:srgbClr val="FF0000"/>
+                </a:solidFill>
+              </a:rPr>
+              <a:t>To the right, less neighbors</a:t>
+            </a:r>
+          </a:p>
+        </p:txBody>
+      </p:sp>
     </p:spTree>
     <p:extLst>
       <p:ext uri="{BB962C8B-B14F-4D97-AF65-F5344CB8AC3E}">
@@ -24736,7 +25670,7 @@
 </p:sld>
 </file>
 
-<file path=ppt/slides/slide14.xml><?xml version="1.0" encoding="utf-8"?>
+<file path=ppt/slides/slide15.xml><?xml version="1.0" encoding="utf-8"?>
 <p:sld xmlns:a="http://schemas.openxmlformats.org/drawingml/2006/main" xmlns:r="http://schemas.openxmlformats.org/officeDocument/2006/relationships" xmlns:p="http://schemas.openxmlformats.org/presentationml/2006/main">
   <p:cSld>
     <p:spTree>
@@ -25149,10 +26083,10 @@
               <a:buChar char="§"/>
             </a:pPr>
             <a:r>
-              <a:rPr lang="en-US" sz="2000" dirty="0">
+              <a:rPr lang="en-US" sz="2400" dirty="0">
                 <a:latin typeface="+mj-lt"/>
               </a:rPr>
-              <a:t>To evaluate a regression, one only needs to pay attention to the performance measure (the lower, the better). But assessing performance in a classification is bit more nuance.</a:t>
+              <a:t>To evaluate a regression, we use a performance measure, the lower, the better. But assessing performance in a classification is bit more nuance.</a:t>
             </a:r>
           </a:p>
           <a:p>
@@ -25164,10 +26098,22 @@
               <a:buChar char="§"/>
             </a:pPr>
             <a:r>
-              <a:rPr lang="en-US" sz="2000" dirty="0">
+              <a:rPr lang="en-US" sz="2400" dirty="0">
                 <a:latin typeface="+mj-lt"/>
               </a:rPr>
-              <a:t>Just looking for a better accuracy (% of correct predictions) is not enough…</a:t>
+              <a:t>Just looking for a better </a:t>
+            </a:r>
+            <a:r>
+              <a:rPr lang="en-US" sz="2400" b="1" dirty="0">
+                <a:latin typeface="+mj-lt"/>
+              </a:rPr>
+              <a:t>accuracy</a:t>
+            </a:r>
+            <a:r>
+              <a:rPr lang="en-US" sz="2400" dirty="0">
+                <a:latin typeface="+mj-lt"/>
+              </a:rPr>
+              <a:t> (% of correct predictions) is not enough…</a:t>
             </a:r>
           </a:p>
           <a:p>
@@ -25179,10 +26125,10 @@
               <a:buChar char="§"/>
             </a:pPr>
             <a:r>
-              <a:rPr lang="en-US" sz="2000" dirty="0">
+              <a:rPr lang="en-US" sz="2400" dirty="0">
                 <a:latin typeface="+mj-lt"/>
               </a:rPr>
-              <a:t>Imagine a task consisting in classifying patients into COVID-19 infected or not. The algorithm will perform well if:</a:t>
+              <a:t>Imagine a task consisting in classifying patients into COVID-19 infected or not. In which situation would you say that the algorithm performs well?:</a:t>
             </a:r>
           </a:p>
           <a:p>
@@ -25194,7 +26140,7 @@
               <a:buChar char="§"/>
             </a:pPr>
             <a:r>
-              <a:rPr lang="en-US" sz="1600" dirty="0">
+              <a:rPr lang="en-US" sz="1800" dirty="0">
                 <a:latin typeface="+mj-lt"/>
               </a:rPr>
               <a:t>Maximizes the number of individuals classified as infected when they are so (True Positive)</a:t>
@@ -25209,7 +26155,7 @@
               <a:buChar char="§"/>
             </a:pPr>
             <a:r>
-              <a:rPr lang="en-US" sz="1600" dirty="0">
+              <a:rPr lang="en-US" sz="1800" dirty="0">
                 <a:latin typeface="+mj-lt"/>
               </a:rPr>
               <a:t>Maximizes the number of individuals classified as not infected when they do not have the disease.  (True Negative)</a:t>
@@ -25224,10 +26170,10 @@
               <a:buChar char="§"/>
             </a:pPr>
             <a:r>
-              <a:rPr lang="en-US" sz="1600" dirty="0">
+              <a:rPr lang="en-US" sz="1800" dirty="0">
                 <a:latin typeface="+mj-lt"/>
               </a:rPr>
-              <a:t>Minimizes the number of individuals classified as infected when they are (False Positive)</a:t>
+              <a:t>Minimizes the number of individuals classified as infected when they are not (False Positive)</a:t>
             </a:r>
           </a:p>
           <a:p>
@@ -25239,7 +26185,7 @@
               <a:buChar char="§"/>
             </a:pPr>
             <a:r>
-              <a:rPr lang="en-US" sz="1600" dirty="0">
+              <a:rPr lang="en-US" sz="1800" dirty="0">
                 <a:latin typeface="+mj-lt"/>
               </a:rPr>
               <a:t>Minimizes the number of individuals classify as not infected when they are actually sick (False Negative)</a:t>
@@ -25253,7 +26199,7 @@
               <a:buFont typeface="Wingdings" panose="05000000000000000000" pitchFamily="2" charset="2"/>
               <a:buChar char="§"/>
             </a:pPr>
-            <a:endParaRPr lang="en-US" sz="2000" dirty="0">
+            <a:endParaRPr lang="en-US" sz="2400" dirty="0">
               <a:latin typeface="+mj-lt"/>
             </a:endParaRPr>
           </a:p>
@@ -25272,7 +26218,7 @@
 </p:sld>
 </file>
 
-<file path=ppt/slides/slide15.xml><?xml version="1.0" encoding="utf-8"?>
+<file path=ppt/slides/slide16.xml><?xml version="1.0" encoding="utf-8"?>
 <p:sld xmlns:a="http://schemas.openxmlformats.org/drawingml/2006/main" xmlns:r="http://schemas.openxmlformats.org/officeDocument/2006/relationships" xmlns:p="http://schemas.openxmlformats.org/presentationml/2006/main">
   <p:cSld>
     <p:spTree>
@@ -25688,7 +26634,7 @@
               <a:rPr lang="en-US" sz="2000" dirty="0">
                 <a:latin typeface="+mj-lt"/>
               </a:rPr>
-              <a:t>That information, organize in the following way, is called </a:t>
+              <a:t>That information, organized in the following way, is called </a:t>
             </a:r>
             <a:r>
               <a:rPr lang="en-US" sz="2000" b="1" i="1" dirty="0">
@@ -25815,8 +26761,8 @@
           </a:prstGeom>
         </p:spPr>
       </p:pic>
-      <mc:AlternateContent xmlns:mc="http://schemas.openxmlformats.org/markup-compatibility/2006" xmlns:a14="http://schemas.microsoft.com/office/drawing/2010/main">
-        <mc:Choice Requires="a14">
+      <mc:AlternateContent xmlns:mc="http://schemas.openxmlformats.org/markup-compatibility/2006">
+        <mc:Choice xmlns:a14="http://schemas.microsoft.com/office/drawing/2010/main" Requires="a14">
           <p:sp>
             <p:nvSpPr>
               <p:cNvPr id="14" name="TextBox 13">
@@ -25923,7 +26869,7 @@
                     </m:oMathParaPr>
                     <m:oMath xmlns:m="http://schemas.openxmlformats.org/officeDocument/2006/math">
                       <m:r>
-                        <a:rPr lang="en-US" b="0" i="1" smtClean="0">
+                        <a:rPr lang="es-ES" b="0" i="1" smtClean="0">
                           <a:latin typeface="Cambria Math" panose="02040503050406030204" pitchFamily="18" charset="0"/>
                         </a:rPr>
                         <m:t>𝑅𝑒𝑐𝑎𝑙𝑙</m:t>
@@ -26053,7 +26999,7 @@
             </p:txBody>
           </p:sp>
         </mc:Choice>
-        <mc:Fallback xmlns="">
+        <mc:Fallback>
           <p:sp>
             <p:nvSpPr>
               <p:cNvPr id="14" name="TextBox 13">
@@ -26112,8 +27058,8 @@
         </p:nvSpPr>
         <p:spPr>
           <a:xfrm rot="212624">
-            <a:off x="8101335" y="4125876"/>
-            <a:ext cx="2178113" cy="858972"/>
+            <a:off x="8236248" y="4035684"/>
+            <a:ext cx="2178113" cy="1039356"/>
           </a:xfrm>
           <a:prstGeom prst="leftArrow">
             <a:avLst/>
@@ -26195,7 +27141,7 @@
 </p:sld>
 </file>
 
-<file path=ppt/slides/slide16.xml><?xml version="1.0" encoding="utf-8"?>
+<file path=ppt/slides/slide17.xml><?xml version="1.0" encoding="utf-8"?>
 <p:sld xmlns:a="http://schemas.openxmlformats.org/drawingml/2006/main" xmlns:r="http://schemas.openxmlformats.org/officeDocument/2006/relationships" xmlns:p="http://schemas.openxmlformats.org/presentationml/2006/main">
   <p:cSld>
     <p:spTree>
@@ -26577,8 +27523,8 @@
           </a:p>
         </p:txBody>
       </p:sp>
-      <mc:AlternateContent xmlns:mc="http://schemas.openxmlformats.org/markup-compatibility/2006" xmlns:a14="http://schemas.microsoft.com/office/drawing/2010/main">
-        <mc:Choice Requires="a14">
+      <mc:AlternateContent xmlns:mc="http://schemas.openxmlformats.org/markup-compatibility/2006">
+        <mc:Choice xmlns:a14="http://schemas.microsoft.com/office/drawing/2010/main" Requires="a14">
           <p:sp>
             <p:nvSpPr>
               <p:cNvPr id="3" name="Content Placeholder 2">
@@ -26684,25 +27630,13 @@
                   <a:rPr lang="en-US" sz="2000" dirty="0">
                     <a:latin typeface="+mj-lt"/>
                   </a:rPr>
-                  <a:t>score, which is the harmonic mean of </a:t>
+                  <a:t>score, which is the harmonic mean of them</a:t>
                 </a:r>
                 <a:r>
                   <a:rPr lang="en-US" sz="2000" i="1" dirty="0">
                     <a:latin typeface="+mj-lt"/>
                   </a:rPr>
-                  <a:t>precision </a:t>
-                </a:r>
-                <a:r>
-                  <a:rPr lang="en-US" sz="2000" dirty="0">
-                    <a:latin typeface="+mj-lt"/>
-                  </a:rPr>
-                  <a:t>and </a:t>
-                </a:r>
-                <a:r>
-                  <a:rPr lang="en-US" sz="2000" i="1" dirty="0">
-                    <a:latin typeface="+mj-lt"/>
-                  </a:rPr>
-                  <a:t>recall. </a:t>
+                  <a:t>. </a:t>
                 </a:r>
               </a:p>
               <a:p>
@@ -26821,7 +27755,7 @@
             </p:txBody>
           </p:sp>
         </mc:Choice>
-        <mc:Fallback xmlns="">
+        <mc:Fallback>
           <p:sp>
             <p:nvSpPr>
               <p:cNvPr id="3" name="Content Placeholder 2">
@@ -27063,7 +27997,7 @@
 </p:sld>
 </file>
 
-<file path=ppt/slides/slide17.xml><?xml version="1.0" encoding="utf-8"?>
+<file path=ppt/slides/slide18.xml><?xml version="1.0" encoding="utf-8"?>
 <p:sld xmlns:a="http://schemas.openxmlformats.org/drawingml/2006/main" xmlns:r="http://schemas.openxmlformats.org/officeDocument/2006/relationships" xmlns:p="http://schemas.openxmlformats.org/presentationml/2006/main">
   <p:cSld>
     <p:spTree>
@@ -27833,7 +28767,7 @@
 </p:sld>
 </file>
 
-<file path=ppt/slides/slide18.xml><?xml version="1.0" encoding="utf-8"?>
+<file path=ppt/slides/slide19.xml><?xml version="1.0" encoding="utf-8"?>
 <p:sld xmlns:a="http://schemas.openxmlformats.org/drawingml/2006/main" xmlns:r="http://schemas.openxmlformats.org/officeDocument/2006/relationships" xmlns:p="http://schemas.openxmlformats.org/presentationml/2006/main">
   <p:cSld>
     <p:spTree>
@@ -28339,647 +29273,6 @@
 </p:sld>
 </file>
 
-<file path=ppt/slides/slide19.xml><?xml version="1.0" encoding="utf-8"?>
-<p:sld xmlns:a="http://schemas.openxmlformats.org/drawingml/2006/main" xmlns:r="http://schemas.openxmlformats.org/officeDocument/2006/relationships" xmlns:p="http://schemas.openxmlformats.org/presentationml/2006/main">
-  <p:cSld>
-    <p:spTree>
-      <p:nvGrpSpPr>
-        <p:cNvPr id="1" name=""/>
-        <p:cNvGrpSpPr/>
-        <p:nvPr/>
-      </p:nvGrpSpPr>
-      <p:grpSpPr>
-        <a:xfrm>
-          <a:off x="0" y="0"/>
-          <a:ext cx="0" cy="0"/>
-          <a:chOff x="0" y="0"/>
-          <a:chExt cx="0" cy="0"/>
-        </a:xfrm>
-      </p:grpSpPr>
-      <p:sp>
-        <p:nvSpPr>
-          <p:cNvPr id="2" name="Title 1">
-            <a:extLst>
-              <a:ext uri="{FF2B5EF4-FFF2-40B4-BE49-F238E27FC236}">
-                <a16:creationId xmlns:a16="http://schemas.microsoft.com/office/drawing/2014/main" id="{15C869D5-4E6C-6766-7E06-98B25E955D87}"/>
-              </a:ext>
-            </a:extLst>
-          </p:cNvPr>
-          <p:cNvSpPr>
-            <a:spLocks noGrp="1"/>
-          </p:cNvSpPr>
-          <p:nvPr>
-            <p:ph type="title"/>
-          </p:nvPr>
-        </p:nvSpPr>
-        <p:spPr/>
-        <p:txBody>
-          <a:bodyPr>
-            <a:normAutofit/>
-          </a:bodyPr>
-          <a:lstStyle/>
-          <a:p>
-            <a:r>
-              <a:rPr lang="en-US" sz="4000" dirty="0"/>
-              <a:t>Performance measures</a:t>
-            </a:r>
-          </a:p>
-        </p:txBody>
-      </p:sp>
-      <p:sp>
-        <p:nvSpPr>
-          <p:cNvPr id="4" name="Rectángulo 3">
-            <a:extLst>
-              <a:ext uri="{FF2B5EF4-FFF2-40B4-BE49-F238E27FC236}">
-                <a16:creationId xmlns:a16="http://schemas.microsoft.com/office/drawing/2014/main" id="{27E372AA-1ACE-5D2D-EDED-66DB6F5F4F88}"/>
-              </a:ext>
-            </a:extLst>
-          </p:cNvPr>
-          <p:cNvSpPr/>
-          <p:nvPr/>
-        </p:nvSpPr>
-        <p:spPr>
-          <a:xfrm>
-            <a:off x="0" y="0"/>
-            <a:ext cx="374469" cy="6858000"/>
-          </a:xfrm>
-          <a:prstGeom prst="rect">
-            <a:avLst/>
-          </a:prstGeom>
-        </p:spPr>
-        <p:style>
-          <a:lnRef idx="2">
-            <a:schemeClr val="accent2">
-              <a:shade val="50000"/>
-            </a:schemeClr>
-          </a:lnRef>
-          <a:fillRef idx="1">
-            <a:schemeClr val="accent2"/>
-          </a:fillRef>
-          <a:effectRef idx="0">
-            <a:schemeClr val="accent2"/>
-          </a:effectRef>
-          <a:fontRef idx="minor">
-            <a:schemeClr val="lt1"/>
-          </a:fontRef>
-        </p:style>
-        <p:txBody>
-          <a:bodyPr rtlCol="0" anchor="ctr"/>
-          <a:lstStyle/>
-          <a:p>
-            <a:pPr algn="ctr"/>
-            <a:endParaRPr lang="es-ES"/>
-          </a:p>
-        </p:txBody>
-      </p:sp>
-      <p:sp>
-        <p:nvSpPr>
-          <p:cNvPr id="5" name="Rectangle 143">
-            <a:extLst>
-              <a:ext uri="{FF2B5EF4-FFF2-40B4-BE49-F238E27FC236}">
-                <a16:creationId xmlns:a16="http://schemas.microsoft.com/office/drawing/2014/main" id="{4CAC6C5C-8798-AF6F-C852-967659577BF3}"/>
-              </a:ext>
-            </a:extLst>
-          </p:cNvPr>
-          <p:cNvSpPr>
-            <a:spLocks noChangeArrowheads="1"/>
-          </p:cNvSpPr>
-          <p:nvPr/>
-        </p:nvSpPr>
-        <p:spPr bwMode="auto">
-          <a:xfrm>
-            <a:off x="448342" y="6482412"/>
-            <a:ext cx="5730175" cy="276999"/>
-          </a:xfrm>
-          <a:prstGeom prst="rect">
-            <a:avLst/>
-          </a:prstGeom>
-          <a:noFill/>
-          <a:ln>
-            <a:noFill/>
-          </a:ln>
-          <a:effectLst/>
-          <a:extLst>
-            <a:ext uri="{909E8E84-426E-40DD-AFC4-6F175D3DCCD1}">
-              <a14:hiddenFill xmlns:a14="http://schemas.microsoft.com/office/drawing/2010/main">
-                <a:solidFill>
-                  <a:schemeClr val="accent1"/>
-                </a:solidFill>
-              </a14:hiddenFill>
-            </a:ext>
-            <a:ext uri="{91240B29-F687-4F45-9708-019B960494DF}">
-              <a14:hiddenLine xmlns:a14="http://schemas.microsoft.com/office/drawing/2010/main" w="9525">
-                <a:solidFill>
-                  <a:schemeClr val="tx1"/>
-                </a:solidFill>
-                <a:miter lim="800000"/>
-                <a:headEnd/>
-                <a:tailEnd/>
-              </a14:hiddenLine>
-            </a:ext>
-            <a:ext uri="{AF507438-7753-43E0-B8FC-AC1667EBCBE1}">
-              <a14:hiddenEffects xmlns:a14="http://schemas.microsoft.com/office/drawing/2010/main">
-                <a:effectLst>
-                  <a:outerShdw dist="35921" dir="2700000" algn="ctr" rotWithShape="0">
-                    <a:schemeClr val="bg2"/>
-                  </a:outerShdw>
-                </a:effectLst>
-              </a14:hiddenEffects>
-            </a:ext>
-          </a:extLst>
-        </p:spPr>
-        <p:txBody>
-          <a:bodyPr vert="horz" wrap="square" lIns="91440" tIns="45720" rIns="91440" bIns="45720" numCol="1" anchor="ctr" anchorCtr="0" compatLnSpc="1">
-            <a:prstTxWarp prst="textNoShape">
-              <a:avLst/>
-            </a:prstTxWarp>
-            <a:spAutoFit/>
-          </a:bodyPr>
-          <a:lstStyle/>
-          <a:p>
-            <a:pPr marL="0" marR="0" lvl="0" indent="0" algn="l" defTabSz="914400" rtl="0" eaLnBrk="0" fontAlgn="base" latinLnBrk="0" hangingPunct="0">
-              <a:lnSpc>
-                <a:spcPct val="100000"/>
-              </a:lnSpc>
-              <a:spcBef>
-                <a:spcPct val="0"/>
-              </a:spcBef>
-              <a:spcAft>
-                <a:spcPct val="0"/>
-              </a:spcAft>
-              <a:buClrTx/>
-              <a:buSzTx/>
-              <a:buFontTx/>
-              <a:buNone/>
-              <a:tabLst/>
-            </a:pPr>
-            <a:r>
-              <a:rPr kumimoji="0" lang="en-US" altLang="es-ES" sz="1200" b="0" i="0" u="none" strike="noStrike" cap="none" normalizeH="0" baseline="0" dirty="0">
-                <a:ln>
-                  <a:noFill/>
-                </a:ln>
-                <a:solidFill>
-                  <a:srgbClr val="F4A200"/>
-                </a:solidFill>
-                <a:effectLst/>
-                <a:latin typeface="Arial" panose="020B0604020202020204" pitchFamily="34" charset="0"/>
-                <a:ea typeface="Myriad Pro Light"/>
-                <a:cs typeface="Times New Roman" panose="02020603050405020304" pitchFamily="18" charset="0"/>
-              </a:rPr>
-              <a:t>Master in Quantitative Economic Analysis </a:t>
-            </a:r>
-            <a:r>
-              <a:rPr kumimoji="0" lang="en-US" altLang="es-ES" sz="1200" b="0" i="0" u="none" strike="noStrike" cap="none" normalizeH="0" baseline="0" dirty="0" err="1">
-                <a:ln>
-                  <a:noFill/>
-                </a:ln>
-                <a:solidFill>
-                  <a:srgbClr val="F4A200"/>
-                </a:solidFill>
-                <a:effectLst/>
-                <a:latin typeface="Arial" panose="020B0604020202020204" pitchFamily="34" charset="0"/>
-                <a:ea typeface="Myriad Pro Light"/>
-                <a:cs typeface="Times New Roman" panose="02020603050405020304" pitchFamily="18" charset="0"/>
-              </a:rPr>
-              <a:t>MQuEA</a:t>
-            </a:r>
-            <a:endParaRPr kumimoji="0" lang="es-ES" altLang="es-ES" sz="400" b="0" i="0" u="none" strike="noStrike" cap="none" normalizeH="0" baseline="0" dirty="0">
-              <a:ln>
-                <a:noFill/>
-              </a:ln>
-              <a:solidFill>
-                <a:schemeClr val="tx1"/>
-              </a:solidFill>
-              <a:effectLst/>
-              <a:latin typeface="Arial" panose="020B0604020202020204" pitchFamily="34" charset="0"/>
-            </a:endParaRPr>
-          </a:p>
-        </p:txBody>
-      </p:sp>
-      <p:sp>
-        <p:nvSpPr>
-          <p:cNvPr id="6" name="Rectangle 143">
-            <a:extLst>
-              <a:ext uri="{FF2B5EF4-FFF2-40B4-BE49-F238E27FC236}">
-                <a16:creationId xmlns:a16="http://schemas.microsoft.com/office/drawing/2014/main" id="{09E0FB32-C00A-A390-E094-76FC3EA5C288}"/>
-              </a:ext>
-            </a:extLst>
-          </p:cNvPr>
-          <p:cNvSpPr>
-            <a:spLocks noChangeArrowheads="1"/>
-          </p:cNvSpPr>
-          <p:nvPr/>
-        </p:nvSpPr>
-        <p:spPr bwMode="auto">
-          <a:xfrm>
-            <a:off x="6186394" y="6493050"/>
-            <a:ext cx="5730175" cy="276999"/>
-          </a:xfrm>
-          <a:prstGeom prst="rect">
-            <a:avLst/>
-          </a:prstGeom>
-          <a:noFill/>
-          <a:ln>
-            <a:noFill/>
-          </a:ln>
-          <a:effectLst/>
-          <a:extLst>
-            <a:ext uri="{909E8E84-426E-40DD-AFC4-6F175D3DCCD1}">
-              <a14:hiddenFill xmlns:a14="http://schemas.microsoft.com/office/drawing/2010/main">
-                <a:solidFill>
-                  <a:schemeClr val="accent1"/>
-                </a:solidFill>
-              </a14:hiddenFill>
-            </a:ext>
-            <a:ext uri="{91240B29-F687-4F45-9708-019B960494DF}">
-              <a14:hiddenLine xmlns:a14="http://schemas.microsoft.com/office/drawing/2010/main" w="9525">
-                <a:solidFill>
-                  <a:schemeClr val="tx1"/>
-                </a:solidFill>
-                <a:miter lim="800000"/>
-                <a:headEnd/>
-                <a:tailEnd/>
-              </a14:hiddenLine>
-            </a:ext>
-            <a:ext uri="{AF507438-7753-43E0-B8FC-AC1667EBCBE1}">
-              <a14:hiddenEffects xmlns:a14="http://schemas.microsoft.com/office/drawing/2010/main">
-                <a:effectLst>
-                  <a:outerShdw dist="35921" dir="2700000" algn="ctr" rotWithShape="0">
-                    <a:schemeClr val="bg2"/>
-                  </a:outerShdw>
-                </a:effectLst>
-              </a14:hiddenEffects>
-            </a:ext>
-          </a:extLst>
-        </p:spPr>
-        <p:txBody>
-          <a:bodyPr vert="horz" wrap="square" lIns="91440" tIns="45720" rIns="91440" bIns="45720" numCol="1" anchor="ctr" anchorCtr="0" compatLnSpc="1">
-            <a:prstTxWarp prst="textNoShape">
-              <a:avLst/>
-            </a:prstTxWarp>
-            <a:spAutoFit/>
-          </a:bodyPr>
-          <a:lstStyle/>
-          <a:p>
-            <a:pPr marL="0" marR="0" lvl="0" indent="0" algn="r" defTabSz="914400" rtl="0" eaLnBrk="0" fontAlgn="base" latinLnBrk="0" hangingPunct="0">
-              <a:lnSpc>
-                <a:spcPct val="100000"/>
-              </a:lnSpc>
-              <a:spcBef>
-                <a:spcPct val="0"/>
-              </a:spcBef>
-              <a:spcAft>
-                <a:spcPct val="0"/>
-              </a:spcAft>
-              <a:buClrTx/>
-              <a:buSzTx/>
-              <a:buFontTx/>
-              <a:buNone/>
-              <a:tabLst/>
-            </a:pPr>
-            <a:r>
-              <a:rPr kumimoji="0" lang="en-US" altLang="es-ES" sz="1200" b="0" i="0" u="none" strike="noStrike" cap="none" normalizeH="0" baseline="0" dirty="0">
-                <a:ln>
-                  <a:noFill/>
-                </a:ln>
-                <a:solidFill>
-                  <a:srgbClr val="F4A200"/>
-                </a:solidFill>
-                <a:effectLst/>
-                <a:latin typeface="Arial" panose="020B0604020202020204" pitchFamily="34" charset="0"/>
-                <a:ea typeface="Myriad Pro Light"/>
-                <a:cs typeface="Times New Roman" panose="02020603050405020304" pitchFamily="18" charset="0"/>
-              </a:rPr>
-              <a:t>Universidad </a:t>
-            </a:r>
-            <a:r>
-              <a:rPr kumimoji="0" lang="en-US" altLang="es-ES" sz="1200" b="0" i="0" u="none" strike="noStrike" cap="none" normalizeH="0" baseline="0" dirty="0" err="1">
-                <a:ln>
-                  <a:noFill/>
-                </a:ln>
-                <a:solidFill>
-                  <a:srgbClr val="F4A200"/>
-                </a:solidFill>
-                <a:effectLst/>
-                <a:latin typeface="Arial" panose="020B0604020202020204" pitchFamily="34" charset="0"/>
-                <a:ea typeface="Myriad Pro Light"/>
-                <a:cs typeface="Times New Roman" panose="02020603050405020304" pitchFamily="18" charset="0"/>
-              </a:rPr>
-              <a:t>Aut</a:t>
-            </a:r>
-            <a:r>
-              <a:rPr lang="en-US" altLang="es-ES" sz="1200" dirty="0" err="1">
-                <a:solidFill>
-                  <a:srgbClr val="F4A200"/>
-                </a:solidFill>
-                <a:latin typeface="Arial" panose="020B0604020202020204" pitchFamily="34" charset="0"/>
-                <a:ea typeface="Myriad Pro Light"/>
-                <a:cs typeface="Times New Roman" panose="02020603050405020304" pitchFamily="18" charset="0"/>
-              </a:rPr>
-              <a:t>ó</a:t>
-            </a:r>
-            <a:r>
-              <a:rPr kumimoji="0" lang="en-US" altLang="es-ES" sz="1200" b="0" i="0" u="none" strike="noStrike" cap="none" normalizeH="0" baseline="0" dirty="0" err="1">
-                <a:ln>
-                  <a:noFill/>
-                </a:ln>
-                <a:solidFill>
-                  <a:srgbClr val="F4A200"/>
-                </a:solidFill>
-                <a:effectLst/>
-                <a:latin typeface="Arial" panose="020B0604020202020204" pitchFamily="34" charset="0"/>
-                <a:ea typeface="Myriad Pro Light"/>
-                <a:cs typeface="Times New Roman" panose="02020603050405020304" pitchFamily="18" charset="0"/>
-              </a:rPr>
-              <a:t>noma</a:t>
-            </a:r>
-            <a:r>
-              <a:rPr kumimoji="0" lang="en-US" altLang="es-ES" sz="1200" b="0" i="0" u="none" strike="noStrike" cap="none" normalizeH="0" baseline="0" dirty="0">
-                <a:ln>
-                  <a:noFill/>
-                </a:ln>
-                <a:solidFill>
-                  <a:srgbClr val="F4A200"/>
-                </a:solidFill>
-                <a:effectLst/>
-                <a:latin typeface="Arial" panose="020B0604020202020204" pitchFamily="34" charset="0"/>
-                <a:ea typeface="Myriad Pro Light"/>
-                <a:cs typeface="Times New Roman" panose="02020603050405020304" pitchFamily="18" charset="0"/>
-              </a:rPr>
-              <a:t> de Madrid</a:t>
-            </a:r>
-            <a:endParaRPr kumimoji="0" lang="es-ES" altLang="es-ES" sz="400" b="0" i="0" u="none" strike="noStrike" cap="none" normalizeH="0" baseline="0" dirty="0">
-              <a:ln>
-                <a:noFill/>
-              </a:ln>
-              <a:solidFill>
-                <a:schemeClr val="tx1"/>
-              </a:solidFill>
-              <a:effectLst/>
-              <a:latin typeface="Arial" panose="020B0604020202020204" pitchFamily="34" charset="0"/>
-            </a:endParaRPr>
-          </a:p>
-        </p:txBody>
-      </p:sp>
-      <p:sp>
-        <p:nvSpPr>
-          <p:cNvPr id="3" name="Content Placeholder 2">
-            <a:extLst>
-              <a:ext uri="{FF2B5EF4-FFF2-40B4-BE49-F238E27FC236}">
-                <a16:creationId xmlns:a16="http://schemas.microsoft.com/office/drawing/2014/main" id="{F7EF27C5-01B7-9F60-ECDA-A1F376586FC5}"/>
-              </a:ext>
-            </a:extLst>
-          </p:cNvPr>
-          <p:cNvSpPr>
-            <a:spLocks noGrp="1"/>
-          </p:cNvSpPr>
-          <p:nvPr>
-            <p:ph idx="1"/>
-          </p:nvPr>
-        </p:nvSpPr>
-        <p:spPr/>
-        <p:txBody>
-          <a:bodyPr>
-            <a:normAutofit/>
-          </a:bodyPr>
-          <a:lstStyle/>
-          <a:p>
-            <a:pPr>
-              <a:lnSpc>
-                <a:spcPct val="100000"/>
-              </a:lnSpc>
-              <a:buFont typeface="Wingdings" panose="05000000000000000000" pitchFamily="2" charset="2"/>
-              <a:buChar char="§"/>
-            </a:pPr>
-            <a:r>
-              <a:rPr lang="en-US" sz="2000" dirty="0">
-                <a:latin typeface="+mj-lt"/>
-              </a:rPr>
-              <a:t>Instead of plotting Precision and Recall, it is common to plot the </a:t>
-            </a:r>
-            <a:r>
-              <a:rPr lang="en-US" sz="2000" i="1" dirty="0">
-                <a:latin typeface="+mj-lt"/>
-              </a:rPr>
-              <a:t>True Positive Rate </a:t>
-            </a:r>
-            <a:r>
-              <a:rPr lang="en-US" sz="2000" dirty="0">
-                <a:latin typeface="+mj-lt"/>
-              </a:rPr>
-              <a:t>(TPR)</a:t>
-            </a:r>
-            <a:r>
-              <a:rPr lang="en-US" sz="2000" i="1" dirty="0">
-                <a:latin typeface="+mj-lt"/>
-              </a:rPr>
-              <a:t> </a:t>
-            </a:r>
-            <a:r>
-              <a:rPr lang="en-US" sz="2000" dirty="0">
-                <a:latin typeface="+mj-lt"/>
-              </a:rPr>
-              <a:t>against the </a:t>
-            </a:r>
-            <a:r>
-              <a:rPr lang="en-US" sz="2000" i="1" dirty="0">
-                <a:latin typeface="+mj-lt"/>
-              </a:rPr>
-              <a:t>False Positive Rate </a:t>
-            </a:r>
-            <a:r>
-              <a:rPr lang="en-US" sz="2000" dirty="0">
-                <a:latin typeface="+mj-lt"/>
-              </a:rPr>
-              <a:t>(FPR), or, which is the same, </a:t>
-            </a:r>
-            <a:r>
-              <a:rPr lang="en-US" sz="2000" i="1" dirty="0">
-                <a:latin typeface="+mj-lt"/>
-              </a:rPr>
-              <a:t>Sensitivity</a:t>
-            </a:r>
-            <a:r>
-              <a:rPr lang="en-US" sz="2000" dirty="0">
-                <a:latin typeface="+mj-lt"/>
-              </a:rPr>
-              <a:t> (</a:t>
-            </a:r>
-            <a:r>
-              <a:rPr lang="en-US" sz="2000" i="1" dirty="0">
-                <a:latin typeface="+mj-lt"/>
-              </a:rPr>
-              <a:t>true positive rate</a:t>
-            </a:r>
-            <a:r>
-              <a:rPr lang="en-US" sz="2000" dirty="0">
-                <a:latin typeface="+mj-lt"/>
-              </a:rPr>
-              <a:t>) versus </a:t>
-            </a:r>
-            <a:r>
-              <a:rPr lang="en-US" sz="2000" i="1" dirty="0">
-                <a:latin typeface="+mj-lt"/>
-              </a:rPr>
-              <a:t>1 – Specificity </a:t>
-            </a:r>
-            <a:r>
-              <a:rPr lang="en-US" sz="2000" dirty="0">
-                <a:latin typeface="+mj-lt"/>
-              </a:rPr>
-              <a:t>(</a:t>
-            </a:r>
-            <a:r>
-              <a:rPr lang="en-US" sz="2000" i="1" dirty="0">
-                <a:latin typeface="+mj-lt"/>
-              </a:rPr>
-              <a:t>true negative rate</a:t>
-            </a:r>
-            <a:r>
-              <a:rPr lang="en-US" sz="2000" dirty="0">
-                <a:latin typeface="+mj-lt"/>
-              </a:rPr>
-              <a:t>)</a:t>
-            </a:r>
-          </a:p>
-          <a:p>
-            <a:pPr>
-              <a:lnSpc>
-                <a:spcPct val="100000"/>
-              </a:lnSpc>
-              <a:buFont typeface="Wingdings" panose="05000000000000000000" pitchFamily="2" charset="2"/>
-              <a:buChar char="§"/>
-            </a:pPr>
-            <a:r>
-              <a:rPr lang="en-US" sz="2000" dirty="0">
-                <a:latin typeface="+mj-lt"/>
-              </a:rPr>
-              <a:t>This plot is called the </a:t>
-            </a:r>
-            <a:r>
-              <a:rPr lang="en-US" sz="2000" b="1" i="1" dirty="0">
-                <a:latin typeface="+mj-lt"/>
-              </a:rPr>
-              <a:t>Receiver Operating Characteristic</a:t>
-            </a:r>
-            <a:r>
-              <a:rPr lang="en-US" sz="2000" b="1" dirty="0">
-                <a:latin typeface="+mj-lt"/>
-              </a:rPr>
-              <a:t> (ROC) curve</a:t>
-            </a:r>
-            <a:endParaRPr lang="en-US" sz="2000" b="1" i="1" dirty="0">
-              <a:latin typeface="+mj-lt"/>
-            </a:endParaRPr>
-          </a:p>
-        </p:txBody>
-      </p:sp>
-      <p:pic>
-        <p:nvPicPr>
-          <p:cNvPr id="8" name="Picture 7" descr="Chart&#10;&#10;Description automatically generated">
-            <a:extLst>
-              <a:ext uri="{FF2B5EF4-FFF2-40B4-BE49-F238E27FC236}">
-                <a16:creationId xmlns:a16="http://schemas.microsoft.com/office/drawing/2014/main" id="{76AEBF3B-C772-6843-4D0F-2E3870D5E757}"/>
-              </a:ext>
-            </a:extLst>
-          </p:cNvPr>
-          <p:cNvPicPr>
-            <a:picLocks noChangeAspect="1"/>
-          </p:cNvPicPr>
-          <p:nvPr/>
-        </p:nvPicPr>
-        <p:blipFill>
-          <a:blip r:embed="rId2">
-            <a:extLst>
-              <a:ext uri="{28A0092B-C50C-407E-A947-70E740481C1C}">
-                <a14:useLocalDpi xmlns:a14="http://schemas.microsoft.com/office/drawing/2010/main" val="0"/>
-              </a:ext>
-            </a:extLst>
-          </a:blip>
-          <a:stretch>
-            <a:fillRect/>
-          </a:stretch>
-        </p:blipFill>
-        <p:spPr>
-          <a:xfrm>
-            <a:off x="1471468" y="3202345"/>
-            <a:ext cx="3840488" cy="3155601"/>
-          </a:xfrm>
-          <a:prstGeom prst="rect">
-            <a:avLst/>
-          </a:prstGeom>
-        </p:spPr>
-      </p:pic>
-      <p:sp>
-        <p:nvSpPr>
-          <p:cNvPr id="10" name="TextBox 9">
-            <a:extLst>
-              <a:ext uri="{FF2B5EF4-FFF2-40B4-BE49-F238E27FC236}">
-                <a16:creationId xmlns:a16="http://schemas.microsoft.com/office/drawing/2014/main" id="{FD153B7C-AA7A-8E9E-1514-6E91D58A1C22}"/>
-              </a:ext>
-            </a:extLst>
-          </p:cNvPr>
-          <p:cNvSpPr txBox="1"/>
-          <p:nvPr/>
-        </p:nvSpPr>
-        <p:spPr>
-          <a:xfrm>
-            <a:off x="6186394" y="3295787"/>
-            <a:ext cx="5003494" cy="1323439"/>
-          </a:xfrm>
-          <a:prstGeom prst="rect">
-            <a:avLst/>
-          </a:prstGeom>
-          <a:noFill/>
-        </p:spPr>
-        <p:txBody>
-          <a:bodyPr wrap="square" rtlCol="0">
-            <a:spAutoFit/>
-          </a:bodyPr>
-          <a:lstStyle/>
-          <a:p>
-            <a:r>
-              <a:rPr lang="en-US" sz="2000" dirty="0">
-                <a:latin typeface="+mj-lt"/>
-              </a:rPr>
-              <a:t>To compare two classifiers, we compute the </a:t>
-            </a:r>
-            <a:r>
-              <a:rPr lang="en-US" sz="2000" i="1" dirty="0">
-                <a:latin typeface="+mj-lt"/>
-              </a:rPr>
-              <a:t>area under the curve </a:t>
-            </a:r>
-            <a:r>
-              <a:rPr lang="en-US" sz="2000" dirty="0">
-                <a:latin typeface="+mj-lt"/>
-              </a:rPr>
-              <a:t>(AUC)</a:t>
-            </a:r>
-          </a:p>
-          <a:p>
-            <a:r>
-              <a:rPr lang="en-US" sz="2000" dirty="0">
-                <a:latin typeface="+mj-lt"/>
-              </a:rPr>
-              <a:t>A perfect classifier would have an area of 1; so the higher, the better</a:t>
-            </a:r>
-          </a:p>
-        </p:txBody>
-      </p:sp>
-    </p:spTree>
-    <p:extLst>
-      <p:ext uri="{BB962C8B-B14F-4D97-AF65-F5344CB8AC3E}">
-        <p14:creationId xmlns:p14="http://schemas.microsoft.com/office/powerpoint/2010/main" val="4119110571"/>
-      </p:ext>
-    </p:extLst>
-  </p:cSld>
-  <p:clrMapOvr>
-    <a:masterClrMapping/>
-  </p:clrMapOvr>
-</p:sld>
-</file>
-
 <file path=ppt/slides/slide2.xml><?xml version="1.0" encoding="utf-8"?>
 <p:sld xmlns:a="http://schemas.openxmlformats.org/drawingml/2006/main" xmlns:r="http://schemas.openxmlformats.org/officeDocument/2006/relationships" xmlns:p="http://schemas.openxmlformats.org/presentationml/2006/main">
   <p:cSld>
@@ -29068,7 +29361,7 @@
         </p:spPr>
         <p:txBody>
           <a:bodyPr vert="horz" lIns="91440" tIns="45720" rIns="91440" bIns="45720" rtlCol="0">
-            <a:normAutofit fontScale="92500" lnSpcReduction="10000"/>
+            <a:normAutofit lnSpcReduction="10000"/>
           </a:bodyPr>
           <a:lstStyle>
             <a:lvl1pPr marL="0" indent="0" algn="ctr" defTabSz="914400" rtl="0" eaLnBrk="1" latinLnBrk="0" hangingPunct="1">
@@ -29311,22 +29604,6 @@
                 <a:latin typeface="+mj-lt"/>
                 <a:cs typeface="Times New Roman" panose="02020603050405020304" pitchFamily="18" charset="0"/>
               </a:rPr>
-              <a:t>Stochastic Gradient Descent (SGD)</a:t>
-            </a:r>
-          </a:p>
-          <a:p>
-            <a:pPr marL="914400" lvl="1" indent="-457200" algn="l">
-              <a:lnSpc>
-                <a:spcPct val="100000"/>
-              </a:lnSpc>
-              <a:buFont typeface="Wingdings" panose="05000000000000000000" pitchFamily="2" charset="2"/>
-              <a:buChar char="§"/>
-            </a:pPr>
-            <a:r>
-              <a:rPr lang="en-US" sz="2400" dirty="0">
-                <a:latin typeface="+mj-lt"/>
-                <a:cs typeface="Times New Roman" panose="02020603050405020304" pitchFamily="18" charset="0"/>
-              </a:rPr>
               <a:t>Support Vector Machines (SVM)</a:t>
             </a:r>
           </a:p>
@@ -29751,12 +30028,72 @@
           </a:p>
         </p:txBody>
       </p:sp>
+    </p:spTree>
+    <p:extLst>
+      <p:ext uri="{BB962C8B-B14F-4D97-AF65-F5344CB8AC3E}">
+        <p14:creationId xmlns:p14="http://schemas.microsoft.com/office/powerpoint/2010/main" val="3676436470"/>
+      </p:ext>
+    </p:extLst>
+  </p:cSld>
+  <p:clrMapOvr>
+    <a:masterClrMapping/>
+  </p:clrMapOvr>
+</p:sld>
+</file>
+
+<file path=ppt/slides/slide20.xml><?xml version="1.0" encoding="utf-8"?>
+<p:sld xmlns:a="http://schemas.openxmlformats.org/drawingml/2006/main" xmlns:r="http://schemas.openxmlformats.org/officeDocument/2006/relationships" xmlns:p="http://schemas.openxmlformats.org/presentationml/2006/main">
+  <p:cSld>
+    <p:spTree>
+      <p:nvGrpSpPr>
+        <p:cNvPr id="1" name=""/>
+        <p:cNvGrpSpPr/>
+        <p:nvPr/>
+      </p:nvGrpSpPr>
+      <p:grpSpPr>
+        <a:xfrm>
+          <a:off x="0" y="0"/>
+          <a:ext cx="0" cy="0"/>
+          <a:chOff x="0" y="0"/>
+          <a:chExt cx="0" cy="0"/>
+        </a:xfrm>
+      </p:grpSpPr>
       <p:sp>
         <p:nvSpPr>
-          <p:cNvPr id="5" name="Arrow: Left 4">
+          <p:cNvPr id="2" name="Title 1">
             <a:extLst>
               <a:ext uri="{FF2B5EF4-FFF2-40B4-BE49-F238E27FC236}">
-                <a16:creationId xmlns:a16="http://schemas.microsoft.com/office/drawing/2014/main" id="{FD38933F-31C8-2AB5-6517-D9F2A467F431}"/>
+                <a16:creationId xmlns:a16="http://schemas.microsoft.com/office/drawing/2014/main" id="{15C869D5-4E6C-6766-7E06-98B25E955D87}"/>
+              </a:ext>
+            </a:extLst>
+          </p:cNvPr>
+          <p:cNvSpPr>
+            <a:spLocks noGrp="1"/>
+          </p:cNvSpPr>
+          <p:nvPr>
+            <p:ph type="title"/>
+          </p:nvPr>
+        </p:nvSpPr>
+        <p:spPr/>
+        <p:txBody>
+          <a:bodyPr>
+            <a:normAutofit/>
+          </a:bodyPr>
+          <a:lstStyle/>
+          <a:p>
+            <a:r>
+              <a:rPr lang="en-US" sz="4000" dirty="0"/>
+              <a:t>Performance measures</a:t>
+            </a:r>
+          </a:p>
+        </p:txBody>
+      </p:sp>
+      <p:sp>
+        <p:nvSpPr>
+          <p:cNvPr id="4" name="Rectángulo 3">
+            <a:extLst>
+              <a:ext uri="{FF2B5EF4-FFF2-40B4-BE49-F238E27FC236}">
+                <a16:creationId xmlns:a16="http://schemas.microsoft.com/office/drawing/2014/main" id="{27E372AA-1ACE-5D2D-EDED-66DB6F5F4F88}"/>
               </a:ext>
             </a:extLst>
           </p:cNvPr>
@@ -29764,31 +30101,25 @@
           <p:nvPr/>
         </p:nvSpPr>
         <p:spPr>
-          <a:xfrm rot="20710547">
-            <a:off x="6380375" y="2943630"/>
-            <a:ext cx="2546962" cy="1038099"/>
+          <a:xfrm>
+            <a:off x="0" y="0"/>
+            <a:ext cx="374469" cy="6858000"/>
           </a:xfrm>
-          <a:prstGeom prst="leftArrow">
+          <a:prstGeom prst="rect">
             <a:avLst/>
           </a:prstGeom>
-          <a:solidFill>
-            <a:srgbClr val="FFFF00"/>
-          </a:solidFill>
-          <a:ln>
-            <a:noFill/>
-          </a:ln>
         </p:spPr>
         <p:style>
           <a:lnRef idx="2">
-            <a:schemeClr val="accent1">
+            <a:schemeClr val="accent2">
               <a:shade val="50000"/>
             </a:schemeClr>
           </a:lnRef>
           <a:fillRef idx="1">
-            <a:schemeClr val="accent1"/>
+            <a:schemeClr val="accent2"/>
           </a:fillRef>
           <a:effectRef idx="0">
-            <a:schemeClr val="accent1"/>
+            <a:schemeClr val="accent2"/>
           </a:effectRef>
           <a:fontRef idx="minor">
             <a:schemeClr val="lt1"/>
@@ -29799,13 +30130,541 @@
           <a:lstStyle/>
           <a:p>
             <a:pPr algn="ctr"/>
-            <a:r>
-              <a:rPr lang="en-US" dirty="0">
+            <a:endParaRPr lang="es-ES"/>
+          </a:p>
+        </p:txBody>
+      </p:sp>
+      <p:sp>
+        <p:nvSpPr>
+          <p:cNvPr id="5" name="Rectangle 143">
+            <a:extLst>
+              <a:ext uri="{FF2B5EF4-FFF2-40B4-BE49-F238E27FC236}">
+                <a16:creationId xmlns:a16="http://schemas.microsoft.com/office/drawing/2014/main" id="{4CAC6C5C-8798-AF6F-C852-967659577BF3}"/>
+              </a:ext>
+            </a:extLst>
+          </p:cNvPr>
+          <p:cNvSpPr>
+            <a:spLocks noChangeArrowheads="1"/>
+          </p:cNvSpPr>
+          <p:nvPr/>
+        </p:nvSpPr>
+        <p:spPr bwMode="auto">
+          <a:xfrm>
+            <a:off x="448342" y="6482412"/>
+            <a:ext cx="5730175" cy="276999"/>
+          </a:xfrm>
+          <a:prstGeom prst="rect">
+            <a:avLst/>
+          </a:prstGeom>
+          <a:noFill/>
+          <a:ln>
+            <a:noFill/>
+          </a:ln>
+          <a:effectLst/>
+          <a:extLst>
+            <a:ext uri="{909E8E84-426E-40DD-AFC4-6F175D3DCCD1}">
+              <a14:hiddenFill xmlns:a14="http://schemas.microsoft.com/office/drawing/2010/main">
                 <a:solidFill>
-                  <a:srgbClr val="FF0000"/>
+                  <a:schemeClr val="accent1"/>
                 </a:solidFill>
+              </a14:hiddenFill>
+            </a:ext>
+            <a:ext uri="{91240B29-F687-4F45-9708-019B960494DF}">
+              <a14:hiddenLine xmlns:a14="http://schemas.microsoft.com/office/drawing/2010/main" w="9525">
+                <a:solidFill>
+                  <a:schemeClr val="tx1"/>
+                </a:solidFill>
+                <a:miter lim="800000"/>
+                <a:headEnd/>
+                <a:tailEnd/>
+              </a14:hiddenLine>
+            </a:ext>
+            <a:ext uri="{AF507438-7753-43E0-B8FC-AC1667EBCBE1}">
+              <a14:hiddenEffects xmlns:a14="http://schemas.microsoft.com/office/drawing/2010/main">
+                <a:effectLst>
+                  <a:outerShdw dist="35921" dir="2700000" algn="ctr" rotWithShape="0">
+                    <a:schemeClr val="bg2"/>
+                  </a:outerShdw>
+                </a:effectLst>
+              </a14:hiddenEffects>
+            </a:ext>
+          </a:extLst>
+        </p:spPr>
+        <p:txBody>
+          <a:bodyPr vert="horz" wrap="square" lIns="91440" tIns="45720" rIns="91440" bIns="45720" numCol="1" anchor="ctr" anchorCtr="0" compatLnSpc="1">
+            <a:prstTxWarp prst="textNoShape">
+              <a:avLst/>
+            </a:prstTxWarp>
+            <a:spAutoFit/>
+          </a:bodyPr>
+          <a:lstStyle/>
+          <a:p>
+            <a:pPr marL="0" marR="0" lvl="0" indent="0" algn="l" defTabSz="914400" rtl="0" eaLnBrk="0" fontAlgn="base" latinLnBrk="0" hangingPunct="0">
+              <a:lnSpc>
+                <a:spcPct val="100000"/>
+              </a:lnSpc>
+              <a:spcBef>
+                <a:spcPct val="0"/>
+              </a:spcBef>
+              <a:spcAft>
+                <a:spcPct val="0"/>
+              </a:spcAft>
+              <a:buClrTx/>
+              <a:buSzTx/>
+              <a:buFontTx/>
+              <a:buNone/>
+              <a:tabLst/>
+            </a:pPr>
+            <a:r>
+              <a:rPr kumimoji="0" lang="en-US" altLang="es-ES" sz="1200" b="0" i="0" u="none" strike="noStrike" cap="none" normalizeH="0" baseline="0" dirty="0">
+                <a:ln>
+                  <a:noFill/>
+                </a:ln>
+                <a:solidFill>
+                  <a:srgbClr val="F4A200"/>
+                </a:solidFill>
+                <a:effectLst/>
+                <a:latin typeface="Arial" panose="020B0604020202020204" pitchFamily="34" charset="0"/>
+                <a:ea typeface="Myriad Pro Light"/>
+                <a:cs typeface="Times New Roman" panose="02020603050405020304" pitchFamily="18" charset="0"/>
               </a:rPr>
-              <a:t>Actually an optimization method</a:t>
+              <a:t>Master in Quantitative Economic Analysis </a:t>
+            </a:r>
+            <a:r>
+              <a:rPr kumimoji="0" lang="en-US" altLang="es-ES" sz="1200" b="0" i="0" u="none" strike="noStrike" cap="none" normalizeH="0" baseline="0" dirty="0" err="1">
+                <a:ln>
+                  <a:noFill/>
+                </a:ln>
+                <a:solidFill>
+                  <a:srgbClr val="F4A200"/>
+                </a:solidFill>
+                <a:effectLst/>
+                <a:latin typeface="Arial" panose="020B0604020202020204" pitchFamily="34" charset="0"/>
+                <a:ea typeface="Myriad Pro Light"/>
+                <a:cs typeface="Times New Roman" panose="02020603050405020304" pitchFamily="18" charset="0"/>
+              </a:rPr>
+              <a:t>MQuEA</a:t>
+            </a:r>
+            <a:endParaRPr kumimoji="0" lang="es-ES" altLang="es-ES" sz="400" b="0" i="0" u="none" strike="noStrike" cap="none" normalizeH="0" baseline="0" dirty="0">
+              <a:ln>
+                <a:noFill/>
+              </a:ln>
+              <a:solidFill>
+                <a:schemeClr val="tx1"/>
+              </a:solidFill>
+              <a:effectLst/>
+              <a:latin typeface="Arial" panose="020B0604020202020204" pitchFamily="34" charset="0"/>
+            </a:endParaRPr>
+          </a:p>
+        </p:txBody>
+      </p:sp>
+      <p:sp>
+        <p:nvSpPr>
+          <p:cNvPr id="6" name="Rectangle 143">
+            <a:extLst>
+              <a:ext uri="{FF2B5EF4-FFF2-40B4-BE49-F238E27FC236}">
+                <a16:creationId xmlns:a16="http://schemas.microsoft.com/office/drawing/2014/main" id="{09E0FB32-C00A-A390-E094-76FC3EA5C288}"/>
+              </a:ext>
+            </a:extLst>
+          </p:cNvPr>
+          <p:cNvSpPr>
+            <a:spLocks noChangeArrowheads="1"/>
+          </p:cNvSpPr>
+          <p:nvPr/>
+        </p:nvSpPr>
+        <p:spPr bwMode="auto">
+          <a:xfrm>
+            <a:off x="6186394" y="6493050"/>
+            <a:ext cx="5730175" cy="276999"/>
+          </a:xfrm>
+          <a:prstGeom prst="rect">
+            <a:avLst/>
+          </a:prstGeom>
+          <a:noFill/>
+          <a:ln>
+            <a:noFill/>
+          </a:ln>
+          <a:effectLst/>
+          <a:extLst>
+            <a:ext uri="{909E8E84-426E-40DD-AFC4-6F175D3DCCD1}">
+              <a14:hiddenFill xmlns:a14="http://schemas.microsoft.com/office/drawing/2010/main">
+                <a:solidFill>
+                  <a:schemeClr val="accent1"/>
+                </a:solidFill>
+              </a14:hiddenFill>
+            </a:ext>
+            <a:ext uri="{91240B29-F687-4F45-9708-019B960494DF}">
+              <a14:hiddenLine xmlns:a14="http://schemas.microsoft.com/office/drawing/2010/main" w="9525">
+                <a:solidFill>
+                  <a:schemeClr val="tx1"/>
+                </a:solidFill>
+                <a:miter lim="800000"/>
+                <a:headEnd/>
+                <a:tailEnd/>
+              </a14:hiddenLine>
+            </a:ext>
+            <a:ext uri="{AF507438-7753-43E0-B8FC-AC1667EBCBE1}">
+              <a14:hiddenEffects xmlns:a14="http://schemas.microsoft.com/office/drawing/2010/main">
+                <a:effectLst>
+                  <a:outerShdw dist="35921" dir="2700000" algn="ctr" rotWithShape="0">
+                    <a:schemeClr val="bg2"/>
+                  </a:outerShdw>
+                </a:effectLst>
+              </a14:hiddenEffects>
+            </a:ext>
+          </a:extLst>
+        </p:spPr>
+        <p:txBody>
+          <a:bodyPr vert="horz" wrap="square" lIns="91440" tIns="45720" rIns="91440" bIns="45720" numCol="1" anchor="ctr" anchorCtr="0" compatLnSpc="1">
+            <a:prstTxWarp prst="textNoShape">
+              <a:avLst/>
+            </a:prstTxWarp>
+            <a:spAutoFit/>
+          </a:bodyPr>
+          <a:lstStyle/>
+          <a:p>
+            <a:pPr marL="0" marR="0" lvl="0" indent="0" algn="r" defTabSz="914400" rtl="0" eaLnBrk="0" fontAlgn="base" latinLnBrk="0" hangingPunct="0">
+              <a:lnSpc>
+                <a:spcPct val="100000"/>
+              </a:lnSpc>
+              <a:spcBef>
+                <a:spcPct val="0"/>
+              </a:spcBef>
+              <a:spcAft>
+                <a:spcPct val="0"/>
+              </a:spcAft>
+              <a:buClrTx/>
+              <a:buSzTx/>
+              <a:buFontTx/>
+              <a:buNone/>
+              <a:tabLst/>
+            </a:pPr>
+            <a:r>
+              <a:rPr kumimoji="0" lang="en-US" altLang="es-ES" sz="1200" b="0" i="0" u="none" strike="noStrike" cap="none" normalizeH="0" baseline="0" dirty="0">
+                <a:ln>
+                  <a:noFill/>
+                </a:ln>
+                <a:solidFill>
+                  <a:srgbClr val="F4A200"/>
+                </a:solidFill>
+                <a:effectLst/>
+                <a:latin typeface="Arial" panose="020B0604020202020204" pitchFamily="34" charset="0"/>
+                <a:ea typeface="Myriad Pro Light"/>
+                <a:cs typeface="Times New Roman" panose="02020603050405020304" pitchFamily="18" charset="0"/>
+              </a:rPr>
+              <a:t>Universidad </a:t>
+            </a:r>
+            <a:r>
+              <a:rPr kumimoji="0" lang="en-US" altLang="es-ES" sz="1200" b="0" i="0" u="none" strike="noStrike" cap="none" normalizeH="0" baseline="0" dirty="0" err="1">
+                <a:ln>
+                  <a:noFill/>
+                </a:ln>
+                <a:solidFill>
+                  <a:srgbClr val="F4A200"/>
+                </a:solidFill>
+                <a:effectLst/>
+                <a:latin typeface="Arial" panose="020B0604020202020204" pitchFamily="34" charset="0"/>
+                <a:ea typeface="Myriad Pro Light"/>
+                <a:cs typeface="Times New Roman" panose="02020603050405020304" pitchFamily="18" charset="0"/>
+              </a:rPr>
+              <a:t>Aut</a:t>
+            </a:r>
+            <a:r>
+              <a:rPr lang="en-US" altLang="es-ES" sz="1200" dirty="0" err="1">
+                <a:solidFill>
+                  <a:srgbClr val="F4A200"/>
+                </a:solidFill>
+                <a:latin typeface="Arial" panose="020B0604020202020204" pitchFamily="34" charset="0"/>
+                <a:ea typeface="Myriad Pro Light"/>
+                <a:cs typeface="Times New Roman" panose="02020603050405020304" pitchFamily="18" charset="0"/>
+              </a:rPr>
+              <a:t>ó</a:t>
+            </a:r>
+            <a:r>
+              <a:rPr kumimoji="0" lang="en-US" altLang="es-ES" sz="1200" b="0" i="0" u="none" strike="noStrike" cap="none" normalizeH="0" baseline="0" dirty="0" err="1">
+                <a:ln>
+                  <a:noFill/>
+                </a:ln>
+                <a:solidFill>
+                  <a:srgbClr val="F4A200"/>
+                </a:solidFill>
+                <a:effectLst/>
+                <a:latin typeface="Arial" panose="020B0604020202020204" pitchFamily="34" charset="0"/>
+                <a:ea typeface="Myriad Pro Light"/>
+                <a:cs typeface="Times New Roman" panose="02020603050405020304" pitchFamily="18" charset="0"/>
+              </a:rPr>
+              <a:t>noma</a:t>
+            </a:r>
+            <a:r>
+              <a:rPr kumimoji="0" lang="en-US" altLang="es-ES" sz="1200" b="0" i="0" u="none" strike="noStrike" cap="none" normalizeH="0" baseline="0" dirty="0">
+                <a:ln>
+                  <a:noFill/>
+                </a:ln>
+                <a:solidFill>
+                  <a:srgbClr val="F4A200"/>
+                </a:solidFill>
+                <a:effectLst/>
+                <a:latin typeface="Arial" panose="020B0604020202020204" pitchFamily="34" charset="0"/>
+                <a:ea typeface="Myriad Pro Light"/>
+                <a:cs typeface="Times New Roman" panose="02020603050405020304" pitchFamily="18" charset="0"/>
+              </a:rPr>
+              <a:t> de Madrid</a:t>
+            </a:r>
+            <a:endParaRPr kumimoji="0" lang="es-ES" altLang="es-ES" sz="400" b="0" i="0" u="none" strike="noStrike" cap="none" normalizeH="0" baseline="0" dirty="0">
+              <a:ln>
+                <a:noFill/>
+              </a:ln>
+              <a:solidFill>
+                <a:schemeClr val="tx1"/>
+              </a:solidFill>
+              <a:effectLst/>
+              <a:latin typeface="Arial" panose="020B0604020202020204" pitchFamily="34" charset="0"/>
+            </a:endParaRPr>
+          </a:p>
+        </p:txBody>
+      </p:sp>
+      <p:sp>
+        <p:nvSpPr>
+          <p:cNvPr id="3" name="Content Placeholder 2">
+            <a:extLst>
+              <a:ext uri="{FF2B5EF4-FFF2-40B4-BE49-F238E27FC236}">
+                <a16:creationId xmlns:a16="http://schemas.microsoft.com/office/drawing/2014/main" id="{F7EF27C5-01B7-9F60-ECDA-A1F376586FC5}"/>
+              </a:ext>
+            </a:extLst>
+          </p:cNvPr>
+          <p:cNvSpPr>
+            <a:spLocks noGrp="1"/>
+          </p:cNvSpPr>
+          <p:nvPr>
+            <p:ph idx="1"/>
+          </p:nvPr>
+        </p:nvSpPr>
+        <p:spPr/>
+        <p:txBody>
+          <a:bodyPr>
+            <a:normAutofit/>
+          </a:bodyPr>
+          <a:lstStyle/>
+          <a:p>
+            <a:pPr>
+              <a:lnSpc>
+                <a:spcPct val="100000"/>
+              </a:lnSpc>
+              <a:buFont typeface="Wingdings" panose="05000000000000000000" pitchFamily="2" charset="2"/>
+              <a:buChar char="§"/>
+            </a:pPr>
+            <a:r>
+              <a:rPr lang="en-US" sz="2000" dirty="0">
+                <a:latin typeface="+mj-lt"/>
+              </a:rPr>
+              <a:t>Instead of plotting Precision and Recall, it is common to plot the </a:t>
+            </a:r>
+            <a:r>
+              <a:rPr lang="en-US" sz="2000" i="1" dirty="0">
+                <a:latin typeface="+mj-lt"/>
+              </a:rPr>
+              <a:t>True Positive Rate </a:t>
+            </a:r>
+            <a:r>
+              <a:rPr lang="en-US" sz="2000" dirty="0">
+                <a:latin typeface="+mj-lt"/>
+              </a:rPr>
+              <a:t>(TPR)</a:t>
+            </a:r>
+            <a:r>
+              <a:rPr lang="en-US" sz="2000" i="1" dirty="0">
+                <a:latin typeface="+mj-lt"/>
+              </a:rPr>
+              <a:t> </a:t>
+            </a:r>
+            <a:r>
+              <a:rPr lang="en-US" sz="2000" dirty="0">
+                <a:latin typeface="+mj-lt"/>
+              </a:rPr>
+              <a:t>against the </a:t>
+            </a:r>
+            <a:r>
+              <a:rPr lang="en-US" sz="2000" i="1" dirty="0">
+                <a:latin typeface="+mj-lt"/>
+              </a:rPr>
+              <a:t>False Positive Rate </a:t>
+            </a:r>
+            <a:r>
+              <a:rPr lang="en-US" sz="2000" dirty="0">
+                <a:latin typeface="+mj-lt"/>
+              </a:rPr>
+              <a:t>(FPR), or, which is the same, </a:t>
+            </a:r>
+            <a:r>
+              <a:rPr lang="en-US" sz="2000" i="1" dirty="0">
+                <a:latin typeface="+mj-lt"/>
+              </a:rPr>
+              <a:t>Recall</a:t>
+            </a:r>
+            <a:r>
+              <a:rPr lang="en-US" sz="2000" dirty="0">
+                <a:latin typeface="+mj-lt"/>
+              </a:rPr>
+              <a:t> (</a:t>
+            </a:r>
+            <a:r>
+              <a:rPr lang="en-US" sz="2000" i="1" dirty="0">
+                <a:latin typeface="+mj-lt"/>
+              </a:rPr>
+              <a:t>true positive rate</a:t>
+            </a:r>
+            <a:r>
+              <a:rPr lang="en-US" sz="2000" dirty="0">
+                <a:latin typeface="+mj-lt"/>
+              </a:rPr>
+              <a:t>) versus </a:t>
+            </a:r>
+            <a:r>
+              <a:rPr lang="en-US" sz="2000" i="1" dirty="0">
+                <a:latin typeface="+mj-lt"/>
+              </a:rPr>
+              <a:t>1 – Specificity </a:t>
+            </a:r>
+            <a:r>
+              <a:rPr lang="en-US" sz="2000" dirty="0">
+                <a:latin typeface="+mj-lt"/>
+              </a:rPr>
+              <a:t>(</a:t>
+            </a:r>
+            <a:r>
+              <a:rPr lang="en-US" sz="2000" i="1" dirty="0">
+                <a:latin typeface="+mj-lt"/>
+              </a:rPr>
+              <a:t>true negative rate</a:t>
+            </a:r>
+            <a:r>
+              <a:rPr lang="en-US" sz="2000" dirty="0">
+                <a:latin typeface="+mj-lt"/>
+              </a:rPr>
+              <a:t>)</a:t>
+            </a:r>
+          </a:p>
+          <a:p>
+            <a:pPr>
+              <a:lnSpc>
+                <a:spcPct val="100000"/>
+              </a:lnSpc>
+              <a:buFont typeface="Wingdings" panose="05000000000000000000" pitchFamily="2" charset="2"/>
+              <a:buChar char="§"/>
+            </a:pPr>
+            <a:r>
+              <a:rPr lang="en-US" sz="2000" dirty="0">
+                <a:latin typeface="+mj-lt"/>
+              </a:rPr>
+              <a:t>This plot is called the </a:t>
+            </a:r>
+            <a:r>
+              <a:rPr lang="en-US" sz="2000" b="1" i="1" dirty="0">
+                <a:latin typeface="+mj-lt"/>
+              </a:rPr>
+              <a:t>Receiver Operating Characteristic</a:t>
+            </a:r>
+            <a:r>
+              <a:rPr lang="en-US" sz="2000" b="1" dirty="0">
+                <a:latin typeface="+mj-lt"/>
+              </a:rPr>
+              <a:t> (ROC) curve</a:t>
+            </a:r>
+            <a:endParaRPr lang="en-US" sz="2000" b="1" i="1" dirty="0">
+              <a:latin typeface="+mj-lt"/>
+            </a:endParaRPr>
+          </a:p>
+        </p:txBody>
+      </p:sp>
+      <p:pic>
+        <p:nvPicPr>
+          <p:cNvPr id="8" name="Picture 7" descr="Chart&#10;&#10;Description automatically generated">
+            <a:extLst>
+              <a:ext uri="{FF2B5EF4-FFF2-40B4-BE49-F238E27FC236}">
+                <a16:creationId xmlns:a16="http://schemas.microsoft.com/office/drawing/2014/main" id="{76AEBF3B-C772-6843-4D0F-2E3870D5E757}"/>
+              </a:ext>
+            </a:extLst>
+          </p:cNvPr>
+          <p:cNvPicPr>
+            <a:picLocks noChangeAspect="1"/>
+          </p:cNvPicPr>
+          <p:nvPr/>
+        </p:nvPicPr>
+        <p:blipFill>
+          <a:blip r:embed="rId2">
+            <a:extLst>
+              <a:ext uri="{28A0092B-C50C-407E-A947-70E740481C1C}">
+                <a14:useLocalDpi xmlns:a14="http://schemas.microsoft.com/office/drawing/2010/main" val="0"/>
+              </a:ext>
+            </a:extLst>
+          </a:blip>
+          <a:stretch>
+            <a:fillRect/>
+          </a:stretch>
+        </p:blipFill>
+        <p:spPr>
+          <a:xfrm>
+            <a:off x="1471468" y="3202345"/>
+            <a:ext cx="3840488" cy="3155601"/>
+          </a:xfrm>
+          <a:prstGeom prst="rect">
+            <a:avLst/>
+          </a:prstGeom>
+        </p:spPr>
+      </p:pic>
+      <p:sp>
+        <p:nvSpPr>
+          <p:cNvPr id="10" name="TextBox 9">
+            <a:extLst>
+              <a:ext uri="{FF2B5EF4-FFF2-40B4-BE49-F238E27FC236}">
+                <a16:creationId xmlns:a16="http://schemas.microsoft.com/office/drawing/2014/main" id="{FD153B7C-AA7A-8E9E-1514-6E91D58A1C22}"/>
+              </a:ext>
+            </a:extLst>
+          </p:cNvPr>
+          <p:cNvSpPr txBox="1"/>
+          <p:nvPr/>
+        </p:nvSpPr>
+        <p:spPr>
+          <a:xfrm>
+            <a:off x="6186394" y="3295787"/>
+            <a:ext cx="5003494" cy="1323439"/>
+          </a:xfrm>
+          <a:prstGeom prst="rect">
+            <a:avLst/>
+          </a:prstGeom>
+          <a:noFill/>
+        </p:spPr>
+        <p:txBody>
+          <a:bodyPr wrap="square" rtlCol="0">
+            <a:spAutoFit/>
+          </a:bodyPr>
+          <a:lstStyle/>
+          <a:p>
+            <a:r>
+              <a:rPr lang="en-US" sz="2000" dirty="0">
+                <a:latin typeface="+mj-lt"/>
+              </a:rPr>
+              <a:t>To compare two classifiers, we compute the </a:t>
+            </a:r>
+            <a:r>
+              <a:rPr lang="en-US" sz="2000" i="1" dirty="0">
+                <a:latin typeface="+mj-lt"/>
+              </a:rPr>
+              <a:t>area under the curve </a:t>
+            </a:r>
+            <a:r>
+              <a:rPr lang="en-US" sz="2000" dirty="0">
+                <a:latin typeface="+mj-lt"/>
+              </a:rPr>
+              <a:t>(AUC)</a:t>
+            </a:r>
+          </a:p>
+          <a:p>
+            <a:r>
+              <a:rPr lang="en-US" sz="2000" dirty="0">
+                <a:latin typeface="+mj-lt"/>
+              </a:rPr>
+              <a:t>A perfect classifier would have an area of 1; so the higher, the better</a:t>
             </a:r>
           </a:p>
         </p:txBody>
@@ -29813,7 +30672,7 @@
     </p:spTree>
     <p:extLst>
       <p:ext uri="{BB962C8B-B14F-4D97-AF65-F5344CB8AC3E}">
-        <p14:creationId xmlns:p14="http://schemas.microsoft.com/office/powerpoint/2010/main" val="3676436470"/>
+        <p14:creationId xmlns:p14="http://schemas.microsoft.com/office/powerpoint/2010/main" val="4119110571"/>
       </p:ext>
     </p:extLst>
   </p:cSld>
@@ -35590,29 +36449,23 @@
               <a:rPr lang="en-US" sz="2000" dirty="0">
                 <a:latin typeface="+mj-lt"/>
               </a:rPr>
-              <a:t>What if sets are not perfectly separable? </a:t>
-            </a:r>
-            <a:r>
-              <a:rPr lang="en-US" sz="2000" i="1" dirty="0">
-                <a:latin typeface="+mj-lt"/>
-              </a:rPr>
-              <a:t>Soft margins and</a:t>
-            </a:r>
+              <a:t>The further an observation from the decision boundary, the more confident of its classification. </a:t>
+            </a:r>
+          </a:p>
+          <a:p>
+            <a:pPr>
+              <a:lnSpc>
+                <a:spcPct val="100000"/>
+              </a:lnSpc>
+              <a:buFont typeface="Wingdings" panose="05000000000000000000" pitchFamily="2" charset="2"/>
+              <a:buChar char="§"/>
+            </a:pPr>
             <a:r>
               <a:rPr lang="en-US" sz="2000" dirty="0">
                 <a:latin typeface="+mj-lt"/>
               </a:rPr>
-              <a:t> </a:t>
-            </a:r>
-            <a:r>
-              <a:rPr lang="en-US" sz="2000" i="1" dirty="0">
-                <a:latin typeface="+mj-lt"/>
-              </a:rPr>
-              <a:t>kernels</a:t>
-            </a:r>
-            <a:endParaRPr lang="en-US" sz="1200" i="1" dirty="0">
-              <a:latin typeface="+mj-lt"/>
-            </a:endParaRPr>
+              <a:t>The hyperplane, then, is placed in the furthest location from all its surrounding observations</a:t>
+            </a:r>
           </a:p>
           <a:p>
             <a:pPr>
@@ -35662,38 +36515,8 @@
         </p:blipFill>
         <p:spPr>
           <a:xfrm>
-            <a:off x="1735243" y="2635149"/>
+            <a:off x="4478442" y="2762564"/>
             <a:ext cx="3239588" cy="3169049"/>
-          </a:xfrm>
-          <a:prstGeom prst="rect">
-            <a:avLst/>
-          </a:prstGeom>
-        </p:spPr>
-      </p:pic>
-      <p:pic>
-        <p:nvPicPr>
-          <p:cNvPr id="11" name="Picture 10">
-            <a:extLst>
-              <a:ext uri="{FF2B5EF4-FFF2-40B4-BE49-F238E27FC236}">
-                <a16:creationId xmlns:a16="http://schemas.microsoft.com/office/drawing/2014/main" id="{D6474E9B-2814-21BD-E486-F59921F3FDF6}"/>
-              </a:ext>
-            </a:extLst>
-          </p:cNvPr>
-          <p:cNvPicPr>
-            <a:picLocks noChangeAspect="1"/>
-          </p:cNvPicPr>
-          <p:nvPr/>
-        </p:nvPicPr>
-        <p:blipFill>
-          <a:blip r:embed="rId3"/>
-          <a:stretch>
-            <a:fillRect/>
-          </a:stretch>
-        </p:blipFill>
-        <p:spPr>
-          <a:xfrm>
-            <a:off x="5104808" y="2635150"/>
-            <a:ext cx="3399827" cy="3335731"/>
           </a:xfrm>
           <a:prstGeom prst="rect">
             <a:avLst/>
@@ -35714,7 +36537,7 @@
         </p:nvSpPr>
         <p:spPr>
           <a:xfrm>
-            <a:off x="2430835" y="5970881"/>
+            <a:off x="5174034" y="6098296"/>
             <a:ext cx="2091937" cy="307777"/>
           </a:xfrm>
           <a:prstGeom prst="rect">
@@ -35734,44 +36557,6 @@
                 <a:latin typeface="+mj-lt"/>
               </a:rPr>
               <a:t>Hard margin</a:t>
-            </a:r>
-          </a:p>
-        </p:txBody>
-      </p:sp>
-      <p:sp>
-        <p:nvSpPr>
-          <p:cNvPr id="13" name="TextBox 12">
-            <a:extLst>
-              <a:ext uri="{FF2B5EF4-FFF2-40B4-BE49-F238E27FC236}">
-                <a16:creationId xmlns:a16="http://schemas.microsoft.com/office/drawing/2014/main" id="{3567DF27-2684-0050-C0DD-AAF72EAA15D8}"/>
-              </a:ext>
-            </a:extLst>
-          </p:cNvPr>
-          <p:cNvSpPr txBox="1"/>
-          <p:nvPr/>
-        </p:nvSpPr>
-        <p:spPr>
-          <a:xfrm>
-            <a:off x="6139987" y="6023074"/>
-            <a:ext cx="2091937" cy="307777"/>
-          </a:xfrm>
-          <a:prstGeom prst="rect">
-            <a:avLst/>
-          </a:prstGeom>
-          <a:noFill/>
-        </p:spPr>
-        <p:txBody>
-          <a:bodyPr wrap="square" rtlCol="0">
-            <a:spAutoFit/>
-          </a:bodyPr>
-          <a:lstStyle/>
-          <a:p>
-            <a:pPr algn="ctr"/>
-            <a:r>
-              <a:rPr lang="en-US" sz="1400" dirty="0">
-                <a:latin typeface="+mj-lt"/>
-              </a:rPr>
-              <a:t>Soft margin</a:t>
             </a:r>
           </a:p>
         </p:txBody>
@@ -35792,7 +36577,7 @@
         </p:nvCxnSpPr>
         <p:spPr>
           <a:xfrm flipV="1">
-            <a:off x="1605266" y="5044216"/>
+            <a:off x="4348465" y="5171631"/>
             <a:ext cx="1047992" cy="144457"/>
           </a:xfrm>
           <a:prstGeom prst="straightConnector1">
@@ -35834,7 +36619,7 @@
         </p:nvSpPr>
         <p:spPr>
           <a:xfrm>
-            <a:off x="554636" y="4819341"/>
+            <a:off x="3297835" y="4946756"/>
             <a:ext cx="1214203" cy="738664"/>
           </a:xfrm>
           <a:prstGeom prst="rect">
@@ -35874,7 +36659,7 @@
         </p:nvSpPr>
         <p:spPr>
           <a:xfrm>
-            <a:off x="3381450" y="3490043"/>
+            <a:off x="6124649" y="3617458"/>
             <a:ext cx="216191" cy="177717"/>
           </a:xfrm>
           <a:prstGeom prst="ellipse">
@@ -35926,7 +36711,7 @@
         </p:nvSpPr>
         <p:spPr>
           <a:xfrm>
-            <a:off x="2665170" y="4589951"/>
+            <a:off x="5408369" y="4717366"/>
             <a:ext cx="216191" cy="177717"/>
           </a:xfrm>
           <a:prstGeom prst="ellipse">
@@ -35978,7 +36763,7 @@
         </p:nvSpPr>
         <p:spPr>
           <a:xfrm>
-            <a:off x="3153836" y="4589951"/>
+            <a:off x="5897035" y="4717366"/>
             <a:ext cx="216191" cy="177717"/>
           </a:xfrm>
           <a:prstGeom prst="ellipse">
@@ -36030,7 +36815,7 @@
         </p:nvSpPr>
         <p:spPr>
           <a:xfrm>
-            <a:off x="658033" y="3111976"/>
+            <a:off x="3401232" y="3239391"/>
             <a:ext cx="1016213" cy="698329"/>
           </a:xfrm>
           <a:prstGeom prst="ellipse">
@@ -36075,178 +36860,10 @@
           </a:p>
         </p:txBody>
       </p:sp>
-      <p:sp>
-        <p:nvSpPr>
-          <p:cNvPr id="7" name="TextBox 6">
-            <a:extLst>
-              <a:ext uri="{FF2B5EF4-FFF2-40B4-BE49-F238E27FC236}">
-                <a16:creationId xmlns:a16="http://schemas.microsoft.com/office/drawing/2014/main" id="{22B2EC76-678F-F957-F964-E20A68DD6FF9}"/>
-              </a:ext>
-            </a:extLst>
-          </p:cNvPr>
-          <p:cNvSpPr txBox="1"/>
-          <p:nvPr/>
-        </p:nvSpPr>
-        <p:spPr>
-          <a:xfrm>
-            <a:off x="8572323" y="2893102"/>
-            <a:ext cx="3546933" cy="3139321"/>
-          </a:xfrm>
-          <a:prstGeom prst="rect">
-            <a:avLst/>
-          </a:prstGeom>
-          <a:noFill/>
-        </p:spPr>
-        <p:txBody>
-          <a:bodyPr wrap="none" rtlCol="0">
-            <a:spAutoFit/>
-          </a:bodyPr>
-          <a:lstStyle/>
-          <a:p>
-            <a:r>
-              <a:rPr lang="en-US" u="sng" dirty="0">
-                <a:latin typeface="+mj-lt"/>
-              </a:rPr>
-              <a:t>Soft margin</a:t>
-            </a:r>
-          </a:p>
-          <a:p>
-            <a:endParaRPr lang="en-US" dirty="0">
-              <a:latin typeface="+mj-lt"/>
-            </a:endParaRPr>
-          </a:p>
-          <a:p>
-            <a:r>
-              <a:rPr lang="en-US" dirty="0">
-                <a:latin typeface="+mj-lt"/>
-              </a:rPr>
-              <a:t>Letting the classifier </a:t>
-            </a:r>
-            <a:r>
-              <a:rPr lang="en-US" i="1" dirty="0">
-                <a:latin typeface="+mj-lt"/>
-              </a:rPr>
-              <a:t>fail</a:t>
-            </a:r>
-            <a:r>
-              <a:rPr lang="en-US" dirty="0">
-                <a:latin typeface="+mj-lt"/>
-              </a:rPr>
-              <a:t> for some </a:t>
-            </a:r>
-          </a:p>
-          <a:p>
-            <a:r>
-              <a:rPr lang="en-US" dirty="0" err="1">
-                <a:latin typeface="+mj-lt"/>
-              </a:rPr>
-              <a:t>obs</a:t>
-            </a:r>
-            <a:r>
-              <a:rPr lang="en-US" dirty="0">
-                <a:latin typeface="+mj-lt"/>
-              </a:rPr>
-              <a:t>, can make it:</a:t>
-            </a:r>
-          </a:p>
-          <a:p>
-            <a:endParaRPr lang="en-US" dirty="0">
-              <a:latin typeface="+mj-lt"/>
-            </a:endParaRPr>
-          </a:p>
-          <a:p>
-            <a:pPr marL="285750" indent="-285750">
-              <a:buFont typeface="Wingdings" panose="05000000000000000000" pitchFamily="2" charset="2"/>
-              <a:buChar char="§"/>
-            </a:pPr>
-            <a:r>
-              <a:rPr lang="en-US" dirty="0">
-                <a:latin typeface="+mj-lt"/>
-              </a:rPr>
-              <a:t>A better classifier of </a:t>
-            </a:r>
-            <a:r>
-              <a:rPr lang="en-US" i="1" dirty="0">
-                <a:latin typeface="+mj-lt"/>
-              </a:rPr>
-              <a:t>most</a:t>
-            </a:r>
-            <a:r>
-              <a:rPr lang="en-US" dirty="0">
-                <a:latin typeface="+mj-lt"/>
-              </a:rPr>
-              <a:t> </a:t>
-            </a:r>
-          </a:p>
-          <a:p>
-            <a:r>
-              <a:rPr lang="en-US" dirty="0">
-                <a:latin typeface="+mj-lt"/>
-              </a:rPr>
-              <a:t>of the </a:t>
-            </a:r>
-            <a:r>
-              <a:rPr lang="en-US" dirty="0" err="1">
-                <a:latin typeface="+mj-lt"/>
-              </a:rPr>
-              <a:t>obs</a:t>
-            </a:r>
-            <a:endParaRPr lang="en-US" dirty="0">
-              <a:latin typeface="+mj-lt"/>
-            </a:endParaRPr>
-          </a:p>
-          <a:p>
-            <a:pPr marL="285750" indent="-285750">
-              <a:buFont typeface="Wingdings" panose="05000000000000000000" pitchFamily="2" charset="2"/>
-              <a:buChar char="§"/>
-            </a:pPr>
-            <a:r>
-              <a:rPr lang="en-US" dirty="0">
-                <a:latin typeface="+mj-lt"/>
-              </a:rPr>
-              <a:t>More robust to individual </a:t>
-            </a:r>
-            <a:r>
-              <a:rPr lang="en-US" dirty="0" err="1">
-                <a:latin typeface="+mj-lt"/>
-              </a:rPr>
-              <a:t>obs</a:t>
-            </a:r>
-            <a:endParaRPr lang="en-US" dirty="0">
-              <a:latin typeface="+mj-lt"/>
-            </a:endParaRPr>
-          </a:p>
-          <a:p>
-            <a:pPr marL="285750" indent="-285750">
-              <a:buFont typeface="Wingdings" panose="05000000000000000000" pitchFamily="2" charset="2"/>
-              <a:buChar char="§"/>
-            </a:pPr>
-            <a:endParaRPr lang="en-US" dirty="0">
-              <a:latin typeface="+mj-lt"/>
-            </a:endParaRPr>
-          </a:p>
-          <a:p>
-            <a:r>
-              <a:rPr lang="en-US" dirty="0">
-                <a:latin typeface="+mj-lt"/>
-              </a:rPr>
-              <a:t>But it imposes additional restrictions</a:t>
-            </a:r>
-          </a:p>
-          <a:p>
-            <a:r>
-              <a:rPr lang="en-US" dirty="0">
-                <a:latin typeface="+mj-lt"/>
-              </a:rPr>
-              <a:t>In the optimization problem to solve</a:t>
-            </a:r>
-          </a:p>
-        </p:txBody>
-      </p:sp>
     </p:spTree>
     <p:extLst>
       <p:ext uri="{BB962C8B-B14F-4D97-AF65-F5344CB8AC3E}">
-        <p14:creationId xmlns:p14="http://schemas.microsoft.com/office/powerpoint/2010/main" val="2946059860"/>
+        <p14:creationId xmlns:p14="http://schemas.microsoft.com/office/powerpoint/2010/main" val="59019250"/>
       </p:ext>
     </p:extLst>
   </p:cSld>
